--- a/Presentation/Poster Presentation.pptx
+++ b/Presentation/Poster Presentation.pptx
@@ -194,6 +194,515 @@
 </p:cmAuthorLst>
 </file>
 
+<file path=ppt/revisionInfo.xml><?xml version="1.0" encoding="utf-8"?>
+<p1510:revInfo xmlns:a="http://schemas.openxmlformats.org/drawingml/2006/main" xmlns:r="http://schemas.openxmlformats.org/officeDocument/2006/relationships" xmlns:p1510="http://schemas.microsoft.com/office/powerpoint/2015/10/main">
+  <p1510:revLst>
+    <p1510:client id="{B3142576-DF6E-43BF-9F98-FA5F95B40661}" v="40" dt="2026-05-26T14:00:53.894"/>
+  </p1510:revLst>
+</p1510:revInfo>
+</file>
+
+<file path=ppt/changesInfos/changesInfo1.xml><?xml version="1.0" encoding="utf-8"?>
+<pc:chgInfo xmlns:a="http://schemas.openxmlformats.org/drawingml/2006/main" xmlns:r="http://schemas.openxmlformats.org/officeDocument/2006/relationships" xmlns:ac="http://schemas.microsoft.com/office/drawing/2013/main/command" xmlns:pc="http://schemas.microsoft.com/office/powerpoint/2013/main/command">
+  <pc:docChgLst>
+    <pc:chgData name="Sander Soares" userId="670adff8fbebcc24" providerId="LiveId" clId="{E0F74DC6-1A43-432B-BC72-B2CD7B95C7BA}"/>
+    <pc:docChg chg="undo custSel modSld">
+      <pc:chgData name="Sander Soares" userId="670adff8fbebcc24" providerId="LiveId" clId="{E0F74DC6-1A43-432B-BC72-B2CD7B95C7BA}" dt="2026-05-26T14:04:13.329" v="1937" actId="20577"/>
+      <pc:docMkLst>
+        <pc:docMk/>
+      </pc:docMkLst>
+      <pc:sldChg chg="addSp delSp modSp mod">
+        <pc:chgData name="Sander Soares" userId="670adff8fbebcc24" providerId="LiveId" clId="{E0F74DC6-1A43-432B-BC72-B2CD7B95C7BA}" dt="2026-05-26T14:04:13.329" v="1937" actId="20577"/>
+        <pc:sldMkLst>
+          <pc:docMk/>
+          <pc:sldMk cId="3160527046" sldId="258"/>
+        </pc:sldMkLst>
+        <pc:spChg chg="mod">
+          <ac:chgData name="Sander Soares" userId="670adff8fbebcc24" providerId="LiveId" clId="{E0F74DC6-1A43-432B-BC72-B2CD7B95C7BA}" dt="2026-05-26T11:55:23.053" v="164" actId="1076"/>
+          <ac:spMkLst>
+            <pc:docMk/>
+            <pc:sldMk cId="3160527046" sldId="258"/>
+            <ac:spMk id="2" creationId="{00000000-0000-0000-0000-000000000000}"/>
+          </ac:spMkLst>
+        </pc:spChg>
+        <pc:spChg chg="mod">
+          <ac:chgData name="Sander Soares" userId="670adff8fbebcc24" providerId="LiveId" clId="{E0F74DC6-1A43-432B-BC72-B2CD7B95C7BA}" dt="2026-05-26T13:33:53.622" v="1483" actId="1076"/>
+          <ac:spMkLst>
+            <pc:docMk/>
+            <pc:sldMk cId="3160527046" sldId="258"/>
+            <ac:spMk id="4" creationId="{00000000-0000-0000-0000-000000000000}"/>
+          </ac:spMkLst>
+        </pc:spChg>
+        <pc:spChg chg="del mod">
+          <ac:chgData name="Sander Soares" userId="670adff8fbebcc24" providerId="LiveId" clId="{E0F74DC6-1A43-432B-BC72-B2CD7B95C7BA}" dt="2026-05-26T13:31:14.184" v="1337" actId="478"/>
+          <ac:spMkLst>
+            <pc:docMk/>
+            <pc:sldMk cId="3160527046" sldId="258"/>
+            <ac:spMk id="5" creationId="{00000000-0000-0000-0000-000000000000}"/>
+          </ac:spMkLst>
+        </pc:spChg>
+        <pc:spChg chg="mod">
+          <ac:chgData name="Sander Soares" userId="670adff8fbebcc24" providerId="LiveId" clId="{E0F74DC6-1A43-432B-BC72-B2CD7B95C7BA}" dt="2026-05-26T13:39:04.082" v="1733" actId="1076"/>
+          <ac:spMkLst>
+            <pc:docMk/>
+            <pc:sldMk cId="3160527046" sldId="258"/>
+            <ac:spMk id="6" creationId="{00000000-0000-0000-0000-000000000000}"/>
+          </ac:spMkLst>
+        </pc:spChg>
+        <pc:spChg chg="del mod">
+          <ac:chgData name="Sander Soares" userId="670adff8fbebcc24" providerId="LiveId" clId="{E0F74DC6-1A43-432B-BC72-B2CD7B95C7BA}" dt="2026-05-26T13:17:57.697" v="1273" actId="478"/>
+          <ac:spMkLst>
+            <pc:docMk/>
+            <pc:sldMk cId="3160527046" sldId="258"/>
+            <ac:spMk id="8" creationId="{00000000-0000-0000-0000-000000000000}"/>
+          </ac:spMkLst>
+        </pc:spChg>
+        <pc:spChg chg="add del mod">
+          <ac:chgData name="Sander Soares" userId="670adff8fbebcc24" providerId="LiveId" clId="{E0F74DC6-1A43-432B-BC72-B2CD7B95C7BA}" dt="2026-05-26T12:34:27.390" v="634" actId="478"/>
+          <ac:spMkLst>
+            <pc:docMk/>
+            <pc:sldMk cId="3160527046" sldId="258"/>
+            <ac:spMk id="14" creationId="{2F400EC5-3077-2202-FAC6-DBBC3619530D}"/>
+          </ac:spMkLst>
+        </pc:spChg>
+        <pc:spChg chg="mod">
+          <ac:chgData name="Sander Soares" userId="670adff8fbebcc24" providerId="LiveId" clId="{E0F74DC6-1A43-432B-BC72-B2CD7B95C7BA}" dt="2026-05-26T14:01:35.124" v="1919" actId="113"/>
+          <ac:spMkLst>
+            <pc:docMk/>
+            <pc:sldMk cId="3160527046" sldId="258"/>
+            <ac:spMk id="16" creationId="{00000000-0000-0000-0000-000000000000}"/>
+          </ac:spMkLst>
+        </pc:spChg>
+        <pc:spChg chg="add del mod">
+          <ac:chgData name="Sander Soares" userId="670adff8fbebcc24" providerId="LiveId" clId="{E0F74DC6-1A43-432B-BC72-B2CD7B95C7BA}" dt="2026-05-26T12:34:22.510" v="633" actId="478"/>
+          <ac:spMkLst>
+            <pc:docMk/>
+            <pc:sldMk cId="3160527046" sldId="258"/>
+            <ac:spMk id="17" creationId="{5FC8D096-2EBE-8B63-AA60-7C56D6925730}"/>
+          </ac:spMkLst>
+        </pc:spChg>
+        <pc:spChg chg="mod">
+          <ac:chgData name="Sander Soares" userId="670adff8fbebcc24" providerId="LiveId" clId="{E0F74DC6-1A43-432B-BC72-B2CD7B95C7BA}" dt="2026-05-26T14:04:13.329" v="1937" actId="20577"/>
+          <ac:spMkLst>
+            <pc:docMk/>
+            <pc:sldMk cId="3160527046" sldId="258"/>
+            <ac:spMk id="18" creationId="{00000000-0000-0000-0000-000000000000}"/>
+          </ac:spMkLst>
+        </pc:spChg>
+        <pc:spChg chg="add mod">
+          <ac:chgData name="Sander Soares" userId="670adff8fbebcc24" providerId="LiveId" clId="{E0F74DC6-1A43-432B-BC72-B2CD7B95C7BA}" dt="2026-05-26T13:19:22.836" v="1315" actId="1076"/>
+          <ac:spMkLst>
+            <pc:docMk/>
+            <pc:sldMk cId="3160527046" sldId="258"/>
+            <ac:spMk id="21" creationId="{348892E9-080F-B06A-105A-7860166FB512}"/>
+          </ac:spMkLst>
+        </pc:spChg>
+        <pc:spChg chg="del">
+          <ac:chgData name="Sander Soares" userId="670adff8fbebcc24" providerId="LiveId" clId="{E0F74DC6-1A43-432B-BC72-B2CD7B95C7BA}" dt="2026-05-26T13:17:49.331" v="1267" actId="478"/>
+          <ac:spMkLst>
+            <pc:docMk/>
+            <pc:sldMk cId="3160527046" sldId="258"/>
+            <ac:spMk id="27" creationId="{00000000-0000-0000-0000-000000000000}"/>
+          </ac:spMkLst>
+        </pc:spChg>
+        <pc:spChg chg="del">
+          <ac:chgData name="Sander Soares" userId="670adff8fbebcc24" providerId="LiveId" clId="{E0F74DC6-1A43-432B-BC72-B2CD7B95C7BA}" dt="2026-05-26T13:17:55.186" v="1271" actId="478"/>
+          <ac:spMkLst>
+            <pc:docMk/>
+            <pc:sldMk cId="3160527046" sldId="258"/>
+            <ac:spMk id="28" creationId="{00000000-0000-0000-0000-000000000000}"/>
+          </ac:spMkLst>
+        </pc:spChg>
+        <pc:spChg chg="del mod">
+          <ac:chgData name="Sander Soares" userId="670adff8fbebcc24" providerId="LiveId" clId="{E0F74DC6-1A43-432B-BC72-B2CD7B95C7BA}" dt="2026-05-26T14:00:35.030" v="1838" actId="478"/>
+          <ac:spMkLst>
+            <pc:docMk/>
+            <pc:sldMk cId="3160527046" sldId="258"/>
+            <ac:spMk id="29" creationId="{00000000-0000-0000-0000-000000000000}"/>
+          </ac:spMkLst>
+        </pc:spChg>
+        <pc:spChg chg="mod">
+          <ac:chgData name="Sander Soares" userId="670adff8fbebcc24" providerId="LiveId" clId="{E0F74DC6-1A43-432B-BC72-B2CD7B95C7BA}" dt="2026-05-26T13:33:55.571" v="1484" actId="1076"/>
+          <ac:spMkLst>
+            <pc:docMk/>
+            <pc:sldMk cId="3160527046" sldId="258"/>
+            <ac:spMk id="32" creationId="{00000000-0000-0000-0000-000000000000}"/>
+          </ac:spMkLst>
+        </pc:spChg>
+        <pc:spChg chg="del">
+          <ac:chgData name="Sander Soares" userId="670adff8fbebcc24" providerId="LiveId" clId="{E0F74DC6-1A43-432B-BC72-B2CD7B95C7BA}" dt="2026-05-26T12:34:10.509" v="627" actId="478"/>
+          <ac:spMkLst>
+            <pc:docMk/>
+            <pc:sldMk cId="3160527046" sldId="258"/>
+            <ac:spMk id="34" creationId="{00000000-0000-0000-0000-000000000000}"/>
+          </ac:spMkLst>
+        </pc:spChg>
+        <pc:spChg chg="del">
+          <ac:chgData name="Sander Soares" userId="670adff8fbebcc24" providerId="LiveId" clId="{E0F74DC6-1A43-432B-BC72-B2CD7B95C7BA}" dt="2026-05-26T12:34:11.543" v="628" actId="478"/>
+          <ac:spMkLst>
+            <pc:docMk/>
+            <pc:sldMk cId="3160527046" sldId="258"/>
+            <ac:spMk id="35" creationId="{9000B3FD-55D3-45AB-92CB-10A741BAA0B3}"/>
+          </ac:spMkLst>
+        </pc:spChg>
+        <pc:spChg chg="del">
+          <ac:chgData name="Sander Soares" userId="670adff8fbebcc24" providerId="LiveId" clId="{E0F74DC6-1A43-432B-BC72-B2CD7B95C7BA}" dt="2026-05-26T13:17:50.964" v="1268" actId="478"/>
+          <ac:spMkLst>
+            <pc:docMk/>
+            <pc:sldMk cId="3160527046" sldId="258"/>
+            <ac:spMk id="36" creationId="{00000000-0000-0000-0000-000000000000}"/>
+          </ac:spMkLst>
+        </pc:spChg>
+        <pc:spChg chg="del mod">
+          <ac:chgData name="Sander Soares" userId="670adff8fbebcc24" providerId="LiveId" clId="{E0F74DC6-1A43-432B-BC72-B2CD7B95C7BA}" dt="2026-05-26T14:00:31.454" v="1836" actId="478"/>
+          <ac:spMkLst>
+            <pc:docMk/>
+            <pc:sldMk cId="3160527046" sldId="258"/>
+            <ac:spMk id="38" creationId="{00000000-0000-0000-0000-000000000000}"/>
+          </ac:spMkLst>
+        </pc:spChg>
+        <pc:spChg chg="mod">
+          <ac:chgData name="Sander Soares" userId="670adff8fbebcc24" providerId="LiveId" clId="{E0F74DC6-1A43-432B-BC72-B2CD7B95C7BA}" dt="2026-05-26T13:33:48.566" v="1481" actId="1076"/>
+          <ac:spMkLst>
+            <pc:docMk/>
+            <pc:sldMk cId="3160527046" sldId="258"/>
+            <ac:spMk id="40" creationId="{00000000-0000-0000-0000-000000000000}"/>
+          </ac:spMkLst>
+        </pc:spChg>
+        <pc:spChg chg="mod">
+          <ac:chgData name="Sander Soares" userId="670adff8fbebcc24" providerId="LiveId" clId="{E0F74DC6-1A43-432B-BC72-B2CD7B95C7BA}" dt="2026-05-26T13:33:51.286" v="1482" actId="1076"/>
+          <ac:spMkLst>
+            <pc:docMk/>
+            <pc:sldMk cId="3160527046" sldId="258"/>
+            <ac:spMk id="41" creationId="{00000000-0000-0000-0000-000000000000}"/>
+          </ac:spMkLst>
+        </pc:spChg>
+        <pc:spChg chg="del">
+          <ac:chgData name="Sander Soares" userId="670adff8fbebcc24" providerId="LiveId" clId="{E0F74DC6-1A43-432B-BC72-B2CD7B95C7BA}" dt="2026-05-26T12:34:15.700" v="631" actId="478"/>
+          <ac:spMkLst>
+            <pc:docMk/>
+            <pc:sldMk cId="3160527046" sldId="258"/>
+            <ac:spMk id="43" creationId="{D01E89C6-0794-4157-9DEF-383030D60FAB}"/>
+          </ac:spMkLst>
+        </pc:spChg>
+        <pc:spChg chg="del">
+          <ac:chgData name="Sander Soares" userId="670adff8fbebcc24" providerId="LiveId" clId="{E0F74DC6-1A43-432B-BC72-B2CD7B95C7BA}" dt="2026-05-26T12:34:13.959" v="630" actId="478"/>
+          <ac:spMkLst>
+            <pc:docMk/>
+            <pc:sldMk cId="3160527046" sldId="258"/>
+            <ac:spMk id="45" creationId="{00000000-0000-0000-0000-000000000000}"/>
+          </ac:spMkLst>
+        </pc:spChg>
+        <pc:spChg chg="del">
+          <ac:chgData name="Sander Soares" userId="670adff8fbebcc24" providerId="LiveId" clId="{E0F74DC6-1A43-432B-BC72-B2CD7B95C7BA}" dt="2026-05-26T13:17:48.485" v="1266" actId="478"/>
+          <ac:spMkLst>
+            <pc:docMk/>
+            <pc:sldMk cId="3160527046" sldId="258"/>
+            <ac:spMk id="46" creationId="{BA7BC14E-5C68-4BFC-B8B8-A1CD9BF3BFC9}"/>
+          </ac:spMkLst>
+        </pc:spChg>
+        <pc:spChg chg="add mod">
+          <ac:chgData name="Sander Soares" userId="670adff8fbebcc24" providerId="LiveId" clId="{E0F74DC6-1A43-432B-BC72-B2CD7B95C7BA}" dt="2026-05-26T13:50:38.209" v="1816" actId="20577"/>
+          <ac:spMkLst>
+            <pc:docMk/>
+            <pc:sldMk cId="3160527046" sldId="258"/>
+            <ac:spMk id="50" creationId="{4D0FFE05-CCA1-CB00-4EC8-B1F783EEA1FC}"/>
+          </ac:spMkLst>
+        </pc:spChg>
+        <pc:spChg chg="add del mod">
+          <ac:chgData name="Sander Soares" userId="670adff8fbebcc24" providerId="LiveId" clId="{E0F74DC6-1A43-432B-BC72-B2CD7B95C7BA}" dt="2026-05-26T13:17:53.817" v="1270" actId="478"/>
+          <ac:spMkLst>
+            <pc:docMk/>
+            <pc:sldMk cId="3160527046" sldId="258"/>
+            <ac:spMk id="58" creationId="{BF12D4DE-A7EA-7507-2221-E74458B1926B}"/>
+          </ac:spMkLst>
+        </pc:spChg>
+        <pc:spChg chg="add del mod">
+          <ac:chgData name="Sander Soares" userId="670adff8fbebcc24" providerId="LiveId" clId="{E0F74DC6-1A43-432B-BC72-B2CD7B95C7BA}" dt="2026-05-26T13:17:56.434" v="1272" actId="478"/>
+          <ac:spMkLst>
+            <pc:docMk/>
+            <pc:sldMk cId="3160527046" sldId="258"/>
+            <ac:spMk id="60" creationId="{1E13CF56-4E30-EFA9-F770-1B522B9CD0FD}"/>
+          </ac:spMkLst>
+        </pc:spChg>
+        <pc:spChg chg="add del mod">
+          <ac:chgData name="Sander Soares" userId="670adff8fbebcc24" providerId="LiveId" clId="{E0F74DC6-1A43-432B-BC72-B2CD7B95C7BA}" dt="2026-05-26T13:18:25.955" v="1280" actId="478"/>
+          <ac:spMkLst>
+            <pc:docMk/>
+            <pc:sldMk cId="3160527046" sldId="258"/>
+            <ac:spMk id="62" creationId="{57BFDAC8-DDCB-565E-BA57-EA50A1CF02B1}"/>
+          </ac:spMkLst>
+        </pc:spChg>
+        <pc:spChg chg="add mod">
+          <ac:chgData name="Sander Soares" userId="670adff8fbebcc24" providerId="LiveId" clId="{E0F74DC6-1A43-432B-BC72-B2CD7B95C7BA}" dt="2026-05-26T13:31:21.431" v="1339" actId="1076"/>
+          <ac:spMkLst>
+            <pc:docMk/>
+            <pc:sldMk cId="3160527046" sldId="258"/>
+            <ac:spMk id="63" creationId="{40E268E3-721A-232C-8012-F93EDC4562D5}"/>
+          </ac:spMkLst>
+        </pc:spChg>
+        <pc:spChg chg="add mod">
+          <ac:chgData name="Sander Soares" userId="670adff8fbebcc24" providerId="LiveId" clId="{E0F74DC6-1A43-432B-BC72-B2CD7B95C7BA}" dt="2026-05-26T13:39:06.384" v="1734" actId="1076"/>
+          <ac:spMkLst>
+            <pc:docMk/>
+            <pc:sldMk cId="3160527046" sldId="258"/>
+            <ac:spMk id="4096" creationId="{03EAC74A-226B-6D49-669C-28C272905BB7}"/>
+          </ac:spMkLst>
+        </pc:spChg>
+        <pc:spChg chg="add del mod">
+          <ac:chgData name="Sander Soares" userId="670adff8fbebcc24" providerId="LiveId" clId="{E0F74DC6-1A43-432B-BC72-B2CD7B95C7BA}" dt="2026-05-26T13:31:16.221" v="1338" actId="478"/>
+          <ac:spMkLst>
+            <pc:docMk/>
+            <pc:sldMk cId="3160527046" sldId="258"/>
+            <ac:spMk id="4101" creationId="{94EA0E46-3651-454C-AFBF-AB31663C04A4}"/>
+          </ac:spMkLst>
+        </pc:spChg>
+        <pc:spChg chg="add del mod">
+          <ac:chgData name="Sander Soares" userId="670adff8fbebcc24" providerId="LiveId" clId="{E0F74DC6-1A43-432B-BC72-B2CD7B95C7BA}" dt="2026-05-26T13:38:54.260" v="1728" actId="478"/>
+          <ac:spMkLst>
+            <pc:docMk/>
+            <pc:sldMk cId="3160527046" sldId="258"/>
+            <ac:spMk id="4103" creationId="{2476BC79-DC96-F257-D0D2-40D09BD46534}"/>
+          </ac:spMkLst>
+        </pc:spChg>
+        <pc:spChg chg="add del mod">
+          <ac:chgData name="Sander Soares" userId="670adff8fbebcc24" providerId="LiveId" clId="{E0F74DC6-1A43-432B-BC72-B2CD7B95C7BA}" dt="2026-05-26T13:38:56.500" v="1729" actId="478"/>
+          <ac:spMkLst>
+            <pc:docMk/>
+            <pc:sldMk cId="3160527046" sldId="258"/>
+            <ac:spMk id="4104" creationId="{7DC28FDA-5744-E38A-88C8-AE806DFC7053}"/>
+          </ac:spMkLst>
+        </pc:spChg>
+        <pc:spChg chg="add del mod">
+          <ac:chgData name="Sander Soares" userId="670adff8fbebcc24" providerId="LiveId" clId="{E0F74DC6-1A43-432B-BC72-B2CD7B95C7BA}" dt="2026-05-26T13:45:39.434" v="1753" actId="478"/>
+          <ac:spMkLst>
+            <pc:docMk/>
+            <pc:sldMk cId="3160527046" sldId="258"/>
+            <ac:spMk id="4105" creationId="{9388F1CC-3CC7-B9E5-F65D-72EEEAFE0F78}"/>
+          </ac:spMkLst>
+        </pc:spChg>
+        <pc:spChg chg="add del mod">
+          <ac:chgData name="Sander Soares" userId="670adff8fbebcc24" providerId="LiveId" clId="{E0F74DC6-1A43-432B-BC72-B2CD7B95C7BA}" dt="2026-05-26T13:39:01.931" v="1732" actId="478"/>
+          <ac:spMkLst>
+            <pc:docMk/>
+            <pc:sldMk cId="3160527046" sldId="258"/>
+            <ac:spMk id="4107" creationId="{CE881DAB-F6C6-529F-77BA-24D435236867}"/>
+          </ac:spMkLst>
+        </pc:spChg>
+        <pc:spChg chg="add mod">
+          <ac:chgData name="Sander Soares" userId="670adff8fbebcc24" providerId="LiveId" clId="{E0F74DC6-1A43-432B-BC72-B2CD7B95C7BA}" dt="2026-05-26T13:50:46.403" v="1818" actId="1076"/>
+          <ac:spMkLst>
+            <pc:docMk/>
+            <pc:sldMk cId="3160527046" sldId="258"/>
+            <ac:spMk id="4108" creationId="{D016A331-906B-1081-14A0-79F2EA8644B6}"/>
+          </ac:spMkLst>
+        </pc:spChg>
+        <pc:spChg chg="add mod">
+          <ac:chgData name="Sander Soares" userId="670adff8fbebcc24" providerId="LiveId" clId="{E0F74DC6-1A43-432B-BC72-B2CD7B95C7BA}" dt="2026-05-26T13:56:54.030" v="1823"/>
+          <ac:spMkLst>
+            <pc:docMk/>
+            <pc:sldMk cId="3160527046" sldId="258"/>
+            <ac:spMk id="4109" creationId="{AE35C184-D179-575B-3E66-83C93DF91809}"/>
+          </ac:spMkLst>
+        </pc:spChg>
+        <pc:spChg chg="add mod">
+          <ac:chgData name="Sander Soares" userId="670adff8fbebcc24" providerId="LiveId" clId="{E0F74DC6-1A43-432B-BC72-B2CD7B95C7BA}" dt="2026-05-26T14:00:31.454" v="1836" actId="478"/>
+          <ac:spMkLst>
+            <pc:docMk/>
+            <pc:sldMk cId="3160527046" sldId="258"/>
+            <ac:spMk id="4113" creationId="{C3E8964B-EB47-3109-E00C-B3251A6A5F96}"/>
+          </ac:spMkLst>
+        </pc:spChg>
+        <pc:spChg chg="add del mod">
+          <ac:chgData name="Sander Soares" userId="670adff8fbebcc24" providerId="LiveId" clId="{E0F74DC6-1A43-432B-BC72-B2CD7B95C7BA}" dt="2026-05-26T14:00:37.124" v="1839" actId="478"/>
+          <ac:spMkLst>
+            <pc:docMk/>
+            <pc:sldMk cId="3160527046" sldId="258"/>
+            <ac:spMk id="4115" creationId="{1F8CE6F1-7E1C-94A4-A130-B805D4A95164}"/>
+          </ac:spMkLst>
+        </pc:spChg>
+        <pc:spChg chg="add mod">
+          <ac:chgData name="Sander Soares" userId="670adff8fbebcc24" providerId="LiveId" clId="{E0F74DC6-1A43-432B-BC72-B2CD7B95C7BA}" dt="2026-05-26T14:01:18.765" v="1918" actId="1076"/>
+          <ac:spMkLst>
+            <pc:docMk/>
+            <pc:sldMk cId="3160527046" sldId="258"/>
+            <ac:spMk id="4116" creationId="{C31B5985-E191-5737-D2C8-DBB16C148A9F}"/>
+          </ac:spMkLst>
+        </pc:spChg>
+        <pc:spChg chg="add mod">
+          <ac:chgData name="Sander Soares" userId="670adff8fbebcc24" providerId="LiveId" clId="{E0F74DC6-1A43-432B-BC72-B2CD7B95C7BA}" dt="2026-05-26T14:01:07.304" v="1875" actId="20577"/>
+          <ac:spMkLst>
+            <pc:docMk/>
+            <pc:sldMk cId="3160527046" sldId="258"/>
+            <ac:spMk id="4117" creationId="{BDC9C4BD-36DF-2030-36EF-646D925E6A7E}"/>
+          </ac:spMkLst>
+        </pc:spChg>
+        <pc:graphicFrameChg chg="del">
+          <ac:chgData name="Sander Soares" userId="670adff8fbebcc24" providerId="LiveId" clId="{E0F74DC6-1A43-432B-BC72-B2CD7B95C7BA}" dt="2026-05-26T12:34:17.030" v="632" actId="478"/>
+          <ac:graphicFrameMkLst>
+            <pc:docMk/>
+            <pc:sldMk cId="3160527046" sldId="258"/>
+            <ac:graphicFrameMk id="37" creationId="{00000000-0000-0000-0000-000000000000}"/>
+          </ac:graphicFrameMkLst>
+        </pc:graphicFrameChg>
+        <pc:graphicFrameChg chg="add del mod modGraphic">
+          <ac:chgData name="Sander Soares" userId="670adff8fbebcc24" providerId="LiveId" clId="{E0F74DC6-1A43-432B-BC72-B2CD7B95C7BA}" dt="2026-05-26T13:10:33.491" v="1216" actId="478"/>
+          <ac:graphicFrameMkLst>
+            <pc:docMk/>
+            <pc:sldMk cId="3160527046" sldId="258"/>
+            <ac:graphicFrameMk id="51" creationId="{5A106467-1A0E-C3E8-F406-DCD606F38CEA}"/>
+          </ac:graphicFrameMkLst>
+        </pc:graphicFrameChg>
+        <pc:picChg chg="add mod">
+          <ac:chgData name="Sander Soares" userId="670adff8fbebcc24" providerId="LiveId" clId="{E0F74DC6-1A43-432B-BC72-B2CD7B95C7BA}" dt="2026-05-26T13:34:04.836" v="1489" actId="1076"/>
+          <ac:picMkLst>
+            <pc:docMk/>
+            <pc:sldMk cId="3160527046" sldId="258"/>
+            <ac:picMk id="7" creationId="{86F2D775-B43E-2D1B-5ECE-DD93EC61B794}"/>
+          </ac:picMkLst>
+        </pc:picChg>
+        <pc:picChg chg="add del mod">
+          <ac:chgData name="Sander Soares" userId="670adff8fbebcc24" providerId="LiveId" clId="{E0F74DC6-1A43-432B-BC72-B2CD7B95C7BA}" dt="2026-05-26T12:33:59" v="626" actId="478"/>
+          <ac:picMkLst>
+            <pc:docMk/>
+            <pc:sldMk cId="3160527046" sldId="258"/>
+            <ac:picMk id="12" creationId="{9306B931-D8AD-4F86-2746-E4A7606207BF}"/>
+          </ac:picMkLst>
+        </pc:picChg>
+        <pc:picChg chg="del mod">
+          <ac:chgData name="Sander Soares" userId="670adff8fbebcc24" providerId="LiveId" clId="{E0F74DC6-1A43-432B-BC72-B2CD7B95C7BA}" dt="2026-05-26T12:34:12.100" v="629" actId="478"/>
+          <ac:picMkLst>
+            <pc:docMk/>
+            <pc:sldMk cId="3160527046" sldId="258"/>
+            <ac:picMk id="20" creationId="{00000000-0000-0000-0000-000000000000}"/>
+          </ac:picMkLst>
+        </pc:picChg>
+        <pc:picChg chg="del mod">
+          <ac:chgData name="Sander Soares" userId="670adff8fbebcc24" providerId="LiveId" clId="{E0F74DC6-1A43-432B-BC72-B2CD7B95C7BA}" dt="2026-05-26T12:16:17.394" v="606" actId="478"/>
+          <ac:picMkLst>
+            <pc:docMk/>
+            <pc:sldMk cId="3160527046" sldId="258"/>
+            <ac:picMk id="22" creationId="{00000000-0000-0000-0000-000000000000}"/>
+          </ac:picMkLst>
+        </pc:picChg>
+        <pc:picChg chg="add del mod">
+          <ac:chgData name="Sander Soares" userId="670adff8fbebcc24" providerId="LiveId" clId="{E0F74DC6-1A43-432B-BC72-B2CD7B95C7BA}" dt="2026-05-26T12:51:15.363" v="673" actId="478"/>
+          <ac:picMkLst>
+            <pc:docMk/>
+            <pc:sldMk cId="3160527046" sldId="258"/>
+            <ac:picMk id="24" creationId="{A1FB5591-F3DC-241E-0473-9E27443D87BF}"/>
+          </ac:picMkLst>
+        </pc:picChg>
+        <pc:picChg chg="add del mod">
+          <ac:chgData name="Sander Soares" userId="670adff8fbebcc24" providerId="LiveId" clId="{E0F74DC6-1A43-432B-BC72-B2CD7B95C7BA}" dt="2026-05-26T13:20:25.395" v="1317" actId="478"/>
+          <ac:picMkLst>
+            <pc:docMk/>
+            <pc:sldMk cId="3160527046" sldId="258"/>
+            <ac:picMk id="33" creationId="{A3346020-0454-F93D-7F2E-4A5F4A62E76D}"/>
+          </ac:picMkLst>
+        </pc:picChg>
+        <pc:picChg chg="add del mod">
+          <ac:chgData name="Sander Soares" userId="670adff8fbebcc24" providerId="LiveId" clId="{E0F74DC6-1A43-432B-BC72-B2CD7B95C7BA}" dt="2026-05-26T12:57:56.175" v="749" actId="478"/>
+          <ac:picMkLst>
+            <pc:docMk/>
+            <pc:sldMk cId="3160527046" sldId="258"/>
+            <ac:picMk id="44" creationId="{8482AC49-B5EF-7400-D6BA-173B9FE9859E}"/>
+          </ac:picMkLst>
+        </pc:picChg>
+        <pc:picChg chg="add del mod">
+          <ac:chgData name="Sander Soares" userId="670adff8fbebcc24" providerId="LiveId" clId="{E0F74DC6-1A43-432B-BC72-B2CD7B95C7BA}" dt="2026-05-26T12:57:55.695" v="748" actId="478"/>
+          <ac:picMkLst>
+            <pc:docMk/>
+            <pc:sldMk cId="3160527046" sldId="258"/>
+            <ac:picMk id="48" creationId="{FC5B2CA9-40DD-00CB-1005-52E066991D28}"/>
+          </ac:picMkLst>
+        </pc:picChg>
+        <pc:picChg chg="add del mod">
+          <ac:chgData name="Sander Soares" userId="670adff8fbebcc24" providerId="LiveId" clId="{E0F74DC6-1A43-432B-BC72-B2CD7B95C7BA}" dt="2026-05-26T12:57:56.555" v="750" actId="478"/>
+          <ac:picMkLst>
+            <pc:docMk/>
+            <pc:sldMk cId="3160527046" sldId="258"/>
+            <ac:picMk id="49" creationId="{53CA52DA-7D90-A2A3-37F3-5E309F0A8AC7}"/>
+          </ac:picMkLst>
+        </pc:picChg>
+        <pc:picChg chg="add del mod">
+          <ac:chgData name="Sander Soares" userId="670adff8fbebcc24" providerId="LiveId" clId="{E0F74DC6-1A43-432B-BC72-B2CD7B95C7BA}" dt="2026-05-26T13:16:38.542" v="1250" actId="478"/>
+          <ac:picMkLst>
+            <pc:docMk/>
+            <pc:sldMk cId="3160527046" sldId="258"/>
+            <ac:picMk id="52" creationId="{FC46A41C-CA06-4FDB-1DB0-460287B1E43D}"/>
+          </ac:picMkLst>
+        </pc:picChg>
+        <pc:picChg chg="add del mod">
+          <ac:chgData name="Sander Soares" userId="670adff8fbebcc24" providerId="LiveId" clId="{E0F74DC6-1A43-432B-BC72-B2CD7B95C7BA}" dt="2026-05-26T13:15:52.747" v="1238" actId="478"/>
+          <ac:picMkLst>
+            <pc:docMk/>
+            <pc:sldMk cId="3160527046" sldId="258"/>
+            <ac:picMk id="53" creationId="{0D9FF5B2-35D9-0208-DF8A-8431265F396A}"/>
+          </ac:picMkLst>
+        </pc:picChg>
+        <pc:picChg chg="add del mod">
+          <ac:chgData name="Sander Soares" userId="670adff8fbebcc24" providerId="LiveId" clId="{E0F74DC6-1A43-432B-BC72-B2CD7B95C7BA}" dt="2026-05-26T13:17:09.992" v="1262" actId="478"/>
+          <ac:picMkLst>
+            <pc:docMk/>
+            <pc:sldMk cId="3160527046" sldId="258"/>
+            <ac:picMk id="54" creationId="{B6D38F41-501A-6060-7E20-31EB667D9F73}"/>
+          </ac:picMkLst>
+        </pc:picChg>
+        <pc:picChg chg="add mod">
+          <ac:chgData name="Sander Soares" userId="670adff8fbebcc24" providerId="LiveId" clId="{E0F74DC6-1A43-432B-BC72-B2CD7B95C7BA}" dt="2026-05-26T13:50:41.881" v="1817" actId="1076"/>
+          <ac:picMkLst>
+            <pc:docMk/>
+            <pc:sldMk cId="3160527046" sldId="258"/>
+            <ac:picMk id="56" creationId="{F061BFD2-4BA2-5E5B-C1D2-F9044DF3C43E}"/>
+          </ac:picMkLst>
+        </pc:picChg>
+        <pc:picChg chg="del mod">
+          <ac:chgData name="Sander Soares" userId="670adff8fbebcc24" providerId="LiveId" clId="{E0F74DC6-1A43-432B-BC72-B2CD7B95C7BA}" dt="2026-05-26T12:02:20.801" v="452" actId="478"/>
+          <ac:picMkLst>
+            <pc:docMk/>
+            <pc:sldMk cId="3160527046" sldId="258"/>
+            <ac:picMk id="4099" creationId="{00000000-0000-0000-0000-000000000000}"/>
+          </ac:picMkLst>
+        </pc:picChg>
+        <pc:picChg chg="del">
+          <ac:chgData name="Sander Soares" userId="670adff8fbebcc24" providerId="LiveId" clId="{E0F74DC6-1A43-432B-BC72-B2CD7B95C7BA}" dt="2026-05-26T13:17:46.456" v="1265" actId="478"/>
+          <ac:picMkLst>
+            <pc:docMk/>
+            <pc:sldMk cId="3160527046" sldId="258"/>
+            <ac:picMk id="4100" creationId="{00000000-0000-0000-0000-000000000000}"/>
+          </ac:picMkLst>
+        </pc:picChg>
+        <pc:picChg chg="add del mod">
+          <ac:chgData name="Sander Soares" userId="670adff8fbebcc24" providerId="LiveId" clId="{E0F74DC6-1A43-432B-BC72-B2CD7B95C7BA}" dt="2026-05-26T13:45:38.201" v="1752" actId="478"/>
+          <ac:picMkLst>
+            <pc:docMk/>
+            <pc:sldMk cId="3160527046" sldId="258"/>
+            <ac:picMk id="4106" creationId="{E4B0B6F5-9042-7F71-2F78-55FF7BB648EC}"/>
+          </ac:picMkLst>
+        </pc:picChg>
+        <pc:picChg chg="add mod">
+          <ac:chgData name="Sander Soares" userId="670adff8fbebcc24" providerId="LiveId" clId="{E0F74DC6-1A43-432B-BC72-B2CD7B95C7BA}" dt="2026-05-26T14:03:38.071" v="1921" actId="1076"/>
+          <ac:picMkLst>
+            <pc:docMk/>
+            <pc:sldMk cId="3160527046" sldId="258"/>
+            <ac:picMk id="4111" creationId="{CFF2CB3B-095D-01C2-0072-F9F3186914F3}"/>
+          </ac:picMkLst>
+        </pc:picChg>
+        <pc:picChg chg="add mod">
+          <ac:chgData name="Sander Soares" userId="670adff8fbebcc24" providerId="LiveId" clId="{E0F74DC6-1A43-432B-BC72-B2CD7B95C7BA}" dt="2026-05-26T14:03:57.490" v="1931" actId="1076"/>
+          <ac:picMkLst>
+            <pc:docMk/>
+            <pc:sldMk cId="3160527046" sldId="258"/>
+            <ac:picMk id="4119" creationId="{FD2A59F4-C1E0-C700-274B-9209CEFCD814}"/>
+          </ac:picMkLst>
+        </pc:picChg>
+      </pc:sldChg>
+    </pc:docChg>
+  </pc:docChgLst>
+</pc:chgInfo>
+</file>
+
 <file path=ppt/handoutMasters/handoutMaster1.xml><?xml version="1.0" encoding="utf-8"?>
 <p:handoutMaster xmlns:a="http://schemas.openxmlformats.org/drawingml/2006/main" xmlns:r="http://schemas.openxmlformats.org/officeDocument/2006/relationships" xmlns:p="http://schemas.openxmlformats.org/presentationml/2006/main">
   <p:cSld>
@@ -277,7 +786,7 @@
             <a:fld id="{0158C5BC-9A70-462C-B28D-9600239EAC64}" type="datetimeFigureOut">
               <a:rPr lang="en-US" smtClean="0"/>
               <a:pPr/>
-              <a:t>3/31/2021</a:t>
+              <a:t>5/26/2026</a:t>
             </a:fld>
             <a:endParaRPr lang="en-US"/>
           </a:p>
@@ -444,7 +953,7 @@
             <a:fld id="{E6CC2317-6751-4CD4-9995-8782DD78E936}" type="datetimeFigureOut">
               <a:rPr lang="en-US" smtClean="0"/>
               <a:pPr/>
-              <a:t>3/31/2021</a:t>
+              <a:t>5/26/2026</a:t>
             </a:fld>
             <a:endParaRPr lang="en-US" dirty="0"/>
           </a:p>
@@ -742,6 +1251,13 @@
           </p:nvPr>
         </p:nvSpPr>
         <p:spPr/>
+        <p:txBody>
+          <a:bodyPr/>
+          <a:lstStyle/>
+          <a:p>
+            <a:endParaRPr lang="en-IE"/>
+          </a:p>
+        </p:txBody>
       </p:sp>
       <p:sp>
         <p:nvSpPr>
@@ -5352,7 +5868,7 @@
                       <p:embed/>
                       <p:pic>
                         <p:nvPicPr>
-                          <p:cNvPr id="0" name=""/>
+                          <p:cNvPr id="41" name="Object 40"/>
                           <p:cNvPicPr/>
                           <p:nvPr/>
                         </p:nvPicPr>
@@ -5409,7 +5925,7 @@
                       <p:embed/>
                       <p:pic>
                         <p:nvPicPr>
-                          <p:cNvPr id="0" name=""/>
+                          <p:cNvPr id="43" name="Object 42"/>
                           <p:cNvPicPr/>
                           <p:nvPr/>
                         </p:nvPicPr>
@@ -6532,7 +7048,7 @@
                     <p:embed/>
                     <p:pic>
                       <p:nvPicPr>
-                        <p:cNvPr id="0" name=""/>
+                        <p:cNvPr id="56" name="Object 55"/>
                         <p:cNvPicPr/>
                         <p:nvPr/>
                       </p:nvPicPr>
@@ -6616,7 +7132,7 @@
                     <p:embed/>
                     <p:pic>
                       <p:nvPicPr>
-                        <p:cNvPr id="0" name=""/>
+                        <p:cNvPr id="58" name="Object 57"/>
                         <p:cNvPicPr/>
                         <p:nvPr/>
                       </p:nvPicPr>
@@ -8598,7 +9114,7 @@
                     <p:embed/>
                     <p:pic>
                       <p:nvPicPr>
-                        <p:cNvPr id="0" name=""/>
+                        <p:cNvPr id="46" name="Object 45"/>
                         <p:cNvPicPr/>
                         <p:nvPr/>
                       </p:nvPicPr>
@@ -8682,7 +9198,7 @@
                     <p:embed/>
                     <p:pic>
                       <p:nvPicPr>
-                        <p:cNvPr id="0" name=""/>
+                        <p:cNvPr id="48" name="Object 47"/>
                         <p:cNvPicPr/>
                         <p:nvPr/>
                       </p:nvPicPr>
@@ -10191,7 +10707,7 @@
                       <p:embed/>
                       <p:pic>
                         <p:nvPicPr>
-                          <p:cNvPr id="0" name=""/>
+                          <p:cNvPr id="61" name="Object 60"/>
                           <p:cNvPicPr/>
                           <p:nvPr/>
                         </p:nvPicPr>
@@ -10248,7 +10764,7 @@
                       <p:embed/>
                       <p:pic>
                         <p:nvPicPr>
-                          <p:cNvPr id="0" name=""/>
+                          <p:cNvPr id="62" name="Object 61"/>
                           <p:cNvPicPr/>
                           <p:nvPr/>
                         </p:nvPicPr>
@@ -12034,7 +12550,7 @@
                     <p:embed/>
                     <p:pic>
                       <p:nvPicPr>
-                        <p:cNvPr id="0" name=""/>
+                        <p:cNvPr id="45" name="Object 44"/>
                         <p:cNvPicPr/>
                         <p:nvPr/>
                       </p:nvPicPr>
@@ -12118,7 +12634,7 @@
                     <p:embed/>
                     <p:pic>
                       <p:nvPicPr>
-                        <p:cNvPr id="0" name=""/>
+                        <p:cNvPr id="47" name="Object 46"/>
                         <p:cNvPicPr/>
                         <p:nvPr/>
                       </p:nvPicPr>
@@ -13627,7 +14143,7 @@
                       <p:embed/>
                       <p:pic>
                         <p:nvPicPr>
-                          <p:cNvPr id="0" name=""/>
+                          <p:cNvPr id="60" name="Object 59"/>
                           <p:cNvPicPr/>
                           <p:nvPr/>
                         </p:nvPicPr>
@@ -13684,7 +14200,7 @@
                       <p:embed/>
                       <p:pic>
                         <p:nvPicPr>
-                          <p:cNvPr id="0" name=""/>
+                          <p:cNvPr id="61" name="Object 60"/>
                           <p:cNvPicPr/>
                           <p:nvPr/>
                         </p:nvPicPr>
@@ -14173,73 +14689,33 @@
         </p:nvSpPr>
         <p:spPr>
           <a:xfrm>
-            <a:off x="491425" y="6378481"/>
-            <a:ext cx="10056813" cy="5724622"/>
+            <a:off x="374895" y="6264690"/>
+            <a:ext cx="10056813" cy="6001621"/>
           </a:xfrm>
         </p:spPr>
         <p:txBody>
           <a:bodyPr/>
           <a:lstStyle/>
           <a:p>
+            <a:pPr algn="just"/>
             <a:r>
-              <a:rPr lang="en-GB" sz="2400" dirty="0">
+              <a:rPr lang="en-IE" dirty="0">
                 <a:solidFill>
                   <a:schemeClr val="tx1"/>
                 </a:solidFill>
-                <a:latin typeface="Arial" panose="020B0604020202020204" pitchFamily="34" charset="0"/>
-                <a:cs typeface="Arial" panose="020B0604020202020204" pitchFamily="34" charset="0"/>
               </a:rPr>
-              <a:t>This research set out to enhance engagement in computer programming, a known difficult subject area for 1</a:t>
+              <a:t>This project focused on developing a lightweight Network Intrusion Detection System (IDS) using machine learning techniques to classify benign and malicious network traffic. It followed the CRISP-DM framework and used the CIC-IDS2017 dataset as the main source of network flow data. Multiple preprocessing techniques were applied to prepare this dataset for three different machine learning models: Random Forest, Decision Tree and Logistic Regression. Then, the models were evaluated using accuracy, precision, recall, macro F1-score, and confusion matrix analysis.</a:t>
             </a:r>
+          </a:p>
+          <a:p>
+            <a:pPr algn="just"/>
             <a:r>
-              <a:rPr lang="en-GB" sz="2400" baseline="30000" dirty="0">
+              <a:rPr lang="en-IE" dirty="0">
                 <a:solidFill>
                   <a:schemeClr val="tx1"/>
                 </a:solidFill>
-                <a:latin typeface="Arial" panose="020B0604020202020204" pitchFamily="34" charset="0"/>
-                <a:cs typeface="Arial" panose="020B0604020202020204" pitchFamily="34" charset="0"/>
               </a:rPr>
-              <a:t>st</a:t>
-            </a:r>
-            <a:r>
-              <a:rPr lang="en-GB" sz="2400" dirty="0">
-                <a:solidFill>
-                  <a:schemeClr val="tx1"/>
-                </a:solidFill>
-                <a:latin typeface="Arial" panose="020B0604020202020204" pitchFamily="34" charset="0"/>
-                <a:cs typeface="Arial" panose="020B0604020202020204" pitchFamily="34" charset="0"/>
-              </a:rPr>
-              <a:t> year BSc in IT students. Programming lecturing staff had strong reservations about introducing group work in their classes, </a:t>
-            </a:r>
-            <a:r>
-              <a:rPr lang="en-IE" sz="2400" dirty="0">
-                <a:solidFill>
-                  <a:schemeClr val="tx1"/>
-                </a:solidFill>
-                <a:latin typeface="Arial" panose="020B0604020202020204" pitchFamily="34" charset="0"/>
-                <a:cs typeface="Arial" panose="020B0604020202020204" pitchFamily="34" charset="0"/>
-              </a:rPr>
-              <a:t>claiming group work was a counter-productive learning approach.</a:t>
-            </a:r>
-            <a:r>
-              <a:rPr lang="en-GB" sz="2400" dirty="0">
-                <a:solidFill>
-                  <a:schemeClr val="tx1"/>
-                </a:solidFill>
-                <a:latin typeface="Arial" panose="020B0604020202020204" pitchFamily="34" charset="0"/>
-                <a:cs typeface="Arial" panose="020B0604020202020204" pitchFamily="34" charset="0"/>
-              </a:rPr>
-              <a:t>  The study was framed on a mixed methods action research approach, and a number of interventions, centred on reflective learning and social learning, were introduced. The findings indicate a strong preference by students to work in groups when tackling computer programming problems, but no strong evidence was found that reflective or social learning activities enhance programming skill level. </a:t>
-            </a:r>
-            <a:r>
-              <a:rPr lang="en-IE" sz="2400" dirty="0">
-                <a:solidFill>
-                  <a:schemeClr val="tx1"/>
-                </a:solidFill>
-                <a:latin typeface="Arial" panose="020B0604020202020204" pitchFamily="34" charset="0"/>
-                <a:cs typeface="Arial" panose="020B0604020202020204" pitchFamily="34" charset="0"/>
-              </a:rPr>
-              <a:t>A key contribution to practice was the introduction of a student mentoring academy within the institution, with programming as a central theme.</a:t>
+              <a:t>The Decision Tree Full Dataset Balanced Tuned 2 model was selected as the final lightweight IDS solution because it achieved the best balance between strong classification performance, attack coverage, interpretability and runtime efficiency.</a:t>
             </a:r>
           </a:p>
           <a:p>
@@ -14287,7 +14763,7 @@
         </p:nvSpPr>
         <p:spPr>
           <a:xfrm>
-            <a:off x="509578" y="18648837"/>
+            <a:off x="496930" y="16070149"/>
             <a:ext cx="10050462" cy="754045"/>
           </a:xfrm>
         </p:spPr>
@@ -14305,46 +14781,6 @@
               </a:rPr>
               <a:t>CONCEPTUAL FRAMEWORK</a:t>
             </a:r>
-          </a:p>
-        </p:txBody>
-      </p:sp>
-      <p:sp>
-        <p:nvSpPr>
-          <p:cNvPr id="5" name="Text Placeholder 4"/>
-          <p:cNvSpPr>
-            <a:spLocks noGrp="1"/>
-          </p:cNvSpPr>
-          <p:nvPr>
-            <p:ph type="body" sz="quarter" idx="21"/>
-          </p:nvPr>
-        </p:nvSpPr>
-        <p:spPr>
-          <a:xfrm>
-            <a:off x="11441111" y="6092185"/>
-            <a:ext cx="10048874" cy="3046966"/>
-          </a:xfrm>
-        </p:spPr>
-        <p:txBody>
-          <a:bodyPr/>
-          <a:lstStyle/>
-          <a:p>
-            <a:r>
-              <a:rPr lang="en-GB" sz="2400" dirty="0">
-                <a:solidFill>
-                  <a:schemeClr val="tx1"/>
-                </a:solidFill>
-                <a:latin typeface="Arial" panose="020B0604020202020204" pitchFamily="34" charset="0"/>
-                <a:cs typeface="Arial" panose="020B0604020202020204" pitchFamily="34" charset="0"/>
-              </a:rPr>
-              <a:t>The empirical research studies were based on an interpretative approach, which allowed for greater freedom to include personal views and interpretations, and to form knowledge inductively from views and experiences of participants. The diagram below characterises the research paradigm for this study, which can be described as a loose collection of logically related assumptions, concepts, or propositions that orient thinking and research (Bogdan and Biklen, 1998).</a:t>
-            </a:r>
-            <a:endParaRPr lang="en-US" sz="2400" dirty="0">
-              <a:solidFill>
-                <a:schemeClr val="tx1"/>
-              </a:solidFill>
-              <a:latin typeface="Arial" panose="020B0604020202020204" pitchFamily="34" charset="0"/>
-              <a:cs typeface="Arial" panose="020B0604020202020204" pitchFamily="34" charset="0"/>
-            </a:endParaRPr>
           </a:p>
         </p:txBody>
       </p:sp>
@@ -14358,7 +14794,12 @@
             <p:ph type="body" sz="quarter" idx="22"/>
           </p:nvPr>
         </p:nvSpPr>
-        <p:spPr/>
+        <p:spPr>
+          <a:xfrm>
+            <a:off x="498517" y="27536679"/>
+            <a:ext cx="10048875" cy="754045"/>
+          </a:xfrm>
+        </p:spPr>
         <p:txBody>
           <a:bodyPr/>
           <a:lstStyle/>
@@ -14371,35 +14812,7 @@
                 <a:latin typeface="Arial" panose="020B0604020202020204" pitchFamily="34" charset="0"/>
                 <a:cs typeface="Arial" panose="020B0604020202020204" pitchFamily="34" charset="0"/>
               </a:rPr>
-              <a:t>RESEARCH PARADIGM</a:t>
-            </a:r>
-          </a:p>
-        </p:txBody>
-      </p:sp>
-      <p:sp>
-        <p:nvSpPr>
-          <p:cNvPr id="8" name="Text Placeholder 7"/>
-          <p:cNvSpPr>
-            <a:spLocks noGrp="1"/>
-          </p:cNvSpPr>
-          <p:nvPr>
-            <p:ph type="body" sz="quarter" idx="24"/>
-          </p:nvPr>
-        </p:nvSpPr>
-        <p:spPr/>
-        <p:txBody>
-          <a:bodyPr/>
-          <a:lstStyle/>
-          <a:p>
-            <a:r>
-              <a:rPr lang="en-US" dirty="0">
-                <a:solidFill>
-                  <a:schemeClr val="tx2"/>
-                </a:solidFill>
-                <a:latin typeface="Arial" panose="020B0604020202020204" pitchFamily="34" charset="0"/>
-                <a:cs typeface="Arial" panose="020B0604020202020204" pitchFamily="34" charset="0"/>
-              </a:rPr>
-              <a:t>FINDINGS</a:t>
+              <a:t> BUSINESS UNDERSTANDING</a:t>
             </a:r>
           </a:p>
         </p:txBody>
@@ -14492,21 +14905,18 @@
                 <a:latin typeface="Arial" panose="020B0604020202020204" pitchFamily="34" charset="0"/>
                 <a:cs typeface="Arial" panose="020B0604020202020204" pitchFamily="34" charset="0"/>
               </a:rPr>
-              <a:t>Graham Glanville, CCT College Dublin / University of Hertfordshire (</a:t>
+              <a:t>Sander Soares &amp; Thiago Gon</a:t>
             </a:r>
             <a:r>
-              <a:rPr lang="en-US" sz="4800" b="1" dirty="0" err="1">
-                <a:latin typeface="Arial" panose="020B0604020202020204" pitchFamily="34" charset="0"/>
-                <a:cs typeface="Arial" panose="020B0604020202020204" pitchFamily="34" charset="0"/>
-              </a:rPr>
-              <a:t>EdD</a:t>
+              <a:rPr lang="en-IE" b="1" dirty="0"/>
+              <a:t>çalves</a:t>
             </a:r>
             <a:r>
               <a:rPr lang="en-US" sz="4800" b="1" dirty="0">
                 <a:latin typeface="Arial" panose="020B0604020202020204" pitchFamily="34" charset="0"/>
                 <a:cs typeface="Arial" panose="020B0604020202020204" pitchFamily="34" charset="0"/>
               </a:rPr>
-              <a:t> Cohort 9), May 2019</a:t>
+              <a:t>, CCT College Dublin, May 2026</a:t>
             </a:r>
           </a:p>
         </p:txBody>
@@ -14523,13 +14933,13 @@
         </p:nvSpPr>
         <p:spPr>
           <a:xfrm>
-            <a:off x="509578" y="817503"/>
+            <a:off x="58530" y="876749"/>
             <a:ext cx="42901013" cy="2277387"/>
           </a:xfrm>
         </p:spPr>
         <p:txBody>
           <a:bodyPr>
-            <a:normAutofit fontScale="55000" lnSpcReduction="20000"/>
+            <a:normAutofit fontScale="70000" lnSpcReduction="20000"/>
           </a:bodyPr>
           <a:lstStyle/>
           <a:p>
@@ -14538,137 +14948,14 @@
                 <a:latin typeface="Arial" panose="020B0604020202020204" pitchFamily="34" charset="0"/>
                 <a:cs typeface="Arial" panose="020B0604020202020204" pitchFamily="34" charset="0"/>
               </a:rPr>
-              <a:t>Cultivating Academic Self-Efficacy through supportive social and self-regulated learning strategies </a:t>
+              <a:t>LIGHTWEIGHT NETWORK INTRUSION DETECTION SYSTEM (IDS) USING MACHINE LEARNING FOR CYBERATTACK CLASSIFICATION</a:t>
             </a:r>
-          </a:p>
-          <a:p>
-            <a:r>
-              <a:rPr lang="en-US" b="1" cap="small" dirty="0">
-                <a:latin typeface="Arial" panose="020B0604020202020204" pitchFamily="34" charset="0"/>
-                <a:cs typeface="Arial" panose="020B0604020202020204" pitchFamily="34" charset="0"/>
-              </a:rPr>
-              <a:t>for students in higher education</a:t>
-            </a:r>
-            <a:endParaRPr lang="en-IE" b="1" cap="small" dirty="0">
-              <a:latin typeface="Arial" panose="020B0604020202020204" pitchFamily="34" charset="0"/>
-              <a:cs typeface="Arial" panose="020B0604020202020204" pitchFamily="34" charset="0"/>
-            </a:endParaRPr>
-          </a:p>
-          <a:p>
             <a:endParaRPr lang="en-US" dirty="0">
               <a:latin typeface="+mn-lt"/>
             </a:endParaRPr>
           </a:p>
         </p:txBody>
       </p:sp>
-      <p:pic>
-        <p:nvPicPr>
-          <p:cNvPr id="20" name="Picture 19"/>
-          <p:cNvPicPr/>
-          <p:nvPr/>
-        </p:nvPicPr>
-        <p:blipFill>
-          <a:blip r:embed="rId3"/>
-          <a:stretch>
-            <a:fillRect/>
-          </a:stretch>
-        </p:blipFill>
-        <p:spPr>
-          <a:xfrm>
-            <a:off x="11564480" y="19170327"/>
-            <a:ext cx="9795691" cy="6370877"/>
-          </a:xfrm>
-          <a:prstGeom prst="rect">
-            <a:avLst/>
-          </a:prstGeom>
-          <a:ln w="12700">
-            <a:solidFill>
-              <a:schemeClr val="tx1"/>
-            </a:solidFill>
-          </a:ln>
-        </p:spPr>
-      </p:pic>
-      <p:pic>
-        <p:nvPicPr>
-          <p:cNvPr id="22" name="Picture 21"/>
-          <p:cNvPicPr/>
-          <p:nvPr/>
-        </p:nvPicPr>
-        <p:blipFill>
-          <a:blip r:embed="rId4"/>
-          <a:stretch>
-            <a:fillRect/>
-          </a:stretch>
-        </p:blipFill>
-        <p:spPr>
-          <a:xfrm>
-            <a:off x="11573593" y="9728372"/>
-            <a:ext cx="9795691" cy="7450859"/>
-          </a:xfrm>
-          <a:prstGeom prst="rect">
-            <a:avLst/>
-          </a:prstGeom>
-          <a:ln w="12700">
-            <a:solidFill>
-              <a:schemeClr val="tx1"/>
-            </a:solidFill>
-          </a:ln>
-        </p:spPr>
-      </p:pic>
-      <p:pic>
-        <p:nvPicPr>
-          <p:cNvPr id="4099" name="Picture 3"/>
-          <p:cNvPicPr>
-            <a:picLocks noChangeAspect="1" noChangeArrowheads="1"/>
-          </p:cNvPicPr>
-          <p:nvPr/>
-        </p:nvPicPr>
-        <p:blipFill>
-          <a:blip r:embed="rId5">
-            <a:extLst>
-              <a:ext uri="{28A0092B-C50C-407E-A947-70E740481C1C}">
-                <a14:useLocalDpi xmlns:a14="http://schemas.microsoft.com/office/drawing/2010/main" val="0"/>
-              </a:ext>
-            </a:extLst>
-          </a:blip>
-          <a:srcRect/>
-          <a:stretch>
-            <a:fillRect/>
-          </a:stretch>
-        </p:blipFill>
-        <p:spPr bwMode="auto">
-          <a:xfrm>
-            <a:off x="918274" y="23540279"/>
-            <a:ext cx="9197276" cy="8438364"/>
-          </a:xfrm>
-          <a:prstGeom prst="rect">
-            <a:avLst/>
-          </a:prstGeom>
-          <a:noFill/>
-          <a:ln>
-            <a:noFill/>
-          </a:ln>
-          <a:extLst>
-            <a:ext uri="{909E8E84-426E-40DD-AFC4-6F175D3DCCD1}">
-              <a14:hiddenFill xmlns:a14="http://schemas.microsoft.com/office/drawing/2010/main">
-                <a:solidFill>
-                  <a:schemeClr val="accent1"/>
-                </a:solidFill>
-              </a14:hiddenFill>
-            </a:ext>
-            <a:ext uri="{91240B29-F687-4F45-9708-019B960494DF}">
-              <a14:hiddenLine xmlns:a14="http://schemas.microsoft.com/office/drawing/2010/main" w="9525">
-                <a:solidFill>
-                  <a:schemeClr val="tx1"/>
-                </a:solidFill>
-                <a:miter lim="800000"/>
-                <a:headEnd/>
-                <a:tailEnd/>
-              </a14:hiddenLine>
-            </a:ext>
-          </a:extLst>
-        </p:spPr>
-      </p:pic>
       <p:pic>
         <p:nvPicPr>
           <p:cNvPr id="4098" name="Picture 2"/>
@@ -14678,7 +14965,7 @@
           <p:nvPr/>
         </p:nvPicPr>
         <p:blipFill>
-          <a:blip r:embed="rId6">
+          <a:blip r:embed="rId3">
             <a:extLst>
               <a:ext uri="{28A0092B-C50C-407E-A947-70E740481C1C}">
                 <a14:useLocalDpi xmlns:a14="http://schemas.microsoft.com/office/drawing/2010/main" val="0"/>
@@ -14732,7 +15019,7 @@
           <p:nvPr/>
         </p:nvPicPr>
         <p:blipFill>
-          <a:blip r:embed="rId7">
+          <a:blip r:embed="rId4">
             <a:extLst>
               <a:ext uri="{28A0092B-C50C-407E-A947-70E740481C1C}">
                 <a14:useLocalDpi xmlns:a14="http://schemas.microsoft.com/office/drawing/2010/main" val="0"/>
@@ -14777,150 +15064,6 @@
           </a:extLst>
         </p:spPr>
       </p:pic>
-      <p:pic>
-        <p:nvPicPr>
-          <p:cNvPr id="4100" name="Picture 4"/>
-          <p:cNvPicPr>
-            <a:picLocks noChangeAspect="1" noChangeArrowheads="1"/>
-          </p:cNvPicPr>
-          <p:nvPr/>
-        </p:nvPicPr>
-        <p:blipFill>
-          <a:blip r:embed="rId8">
-            <a:extLst>
-              <a:ext uri="{28A0092B-C50C-407E-A947-70E740481C1C}">
-                <a14:useLocalDpi xmlns:a14="http://schemas.microsoft.com/office/drawing/2010/main" val="0"/>
-              </a:ext>
-            </a:extLst>
-          </a:blip>
-          <a:srcRect/>
-          <a:stretch>
-            <a:fillRect/>
-          </a:stretch>
-        </p:blipFill>
-        <p:spPr bwMode="auto">
-          <a:xfrm>
-            <a:off x="22401443" y="17642446"/>
-            <a:ext cx="9965607" cy="7063141"/>
-          </a:xfrm>
-          <a:prstGeom prst="rect">
-            <a:avLst/>
-          </a:prstGeom>
-          <a:noFill/>
-          <a:ln>
-            <a:noFill/>
-          </a:ln>
-          <a:extLst>
-            <a:ext uri="{909E8E84-426E-40DD-AFC4-6F175D3DCCD1}">
-              <a14:hiddenFill xmlns:a14="http://schemas.microsoft.com/office/drawing/2010/main">
-                <a:solidFill>
-                  <a:schemeClr val="accent1"/>
-                </a:solidFill>
-              </a14:hiddenFill>
-            </a:ext>
-            <a:ext uri="{91240B29-F687-4F45-9708-019B960494DF}">
-              <a14:hiddenLine xmlns:a14="http://schemas.microsoft.com/office/drawing/2010/main" w="9525">
-                <a:solidFill>
-                  <a:schemeClr val="tx1"/>
-                </a:solidFill>
-                <a:miter lim="800000"/>
-                <a:headEnd/>
-                <a:tailEnd/>
-              </a14:hiddenLine>
-            </a:ext>
-          </a:extLst>
-        </p:spPr>
-      </p:pic>
-      <p:sp>
-        <p:nvSpPr>
-          <p:cNvPr id="27" name="Text Placeholder 6"/>
-          <p:cNvSpPr>
-            <a:spLocks noGrp="1"/>
-          </p:cNvSpPr>
-          <p:nvPr>
-            <p:ph type="body" sz="quarter" idx="23"/>
-          </p:nvPr>
-        </p:nvSpPr>
-        <p:spPr>
-          <a:xfrm>
-            <a:off x="22414720" y="11807392"/>
-            <a:ext cx="10048874" cy="846363"/>
-          </a:xfrm>
-        </p:spPr>
-        <p:txBody>
-          <a:bodyPr/>
-          <a:lstStyle/>
-          <a:p>
-            <a:r>
-              <a:rPr lang="en-US" i="1" u="sng" dirty="0">
-                <a:latin typeface="Arial" panose="020B0604020202020204" pitchFamily="34" charset="0"/>
-                <a:cs typeface="Arial" panose="020B0604020202020204" pitchFamily="34" charset="0"/>
-              </a:rPr>
-              <a:t>Student Engagement</a:t>
-            </a:r>
-          </a:p>
-        </p:txBody>
-      </p:sp>
-      <p:sp>
-        <p:nvSpPr>
-          <p:cNvPr id="28" name="Text Placeholder 6"/>
-          <p:cNvSpPr>
-            <a:spLocks noGrp="1"/>
-          </p:cNvSpPr>
-          <p:nvPr>
-            <p:ph type="body" sz="quarter" idx="23"/>
-          </p:nvPr>
-        </p:nvSpPr>
-        <p:spPr>
-          <a:xfrm>
-            <a:off x="22415504" y="6392906"/>
-            <a:ext cx="10048874" cy="846363"/>
-          </a:xfrm>
-        </p:spPr>
-        <p:txBody>
-          <a:bodyPr/>
-          <a:lstStyle/>
-          <a:p>
-            <a:r>
-              <a:rPr lang="en-US" i="1" u="sng" dirty="0">
-                <a:latin typeface="Arial" panose="020B0604020202020204" pitchFamily="34" charset="0"/>
-                <a:cs typeface="Arial" panose="020B0604020202020204" pitchFamily="34" charset="0"/>
-              </a:rPr>
-              <a:t>Reflective Learning</a:t>
-            </a:r>
-          </a:p>
-        </p:txBody>
-      </p:sp>
-      <p:sp>
-        <p:nvSpPr>
-          <p:cNvPr id="29" name="Text Placeholder 6"/>
-          <p:cNvSpPr>
-            <a:spLocks noGrp="1"/>
-          </p:cNvSpPr>
-          <p:nvPr>
-            <p:ph type="body" sz="quarter" idx="23"/>
-          </p:nvPr>
-        </p:nvSpPr>
-        <p:spPr>
-          <a:xfrm>
-            <a:off x="22401444" y="25388262"/>
-            <a:ext cx="10048874" cy="846363"/>
-          </a:xfrm>
-        </p:spPr>
-        <p:txBody>
-          <a:bodyPr/>
-          <a:lstStyle/>
-          <a:p>
-            <a:r>
-              <a:rPr lang="en-US" i="1" u="sng" dirty="0">
-                <a:latin typeface="Arial" panose="020B0604020202020204" pitchFamily="34" charset="0"/>
-                <a:cs typeface="Arial" panose="020B0604020202020204" pitchFamily="34" charset="0"/>
-              </a:rPr>
-              <a:t>Social Learning (PBL and PAL activities)</a:t>
-            </a:r>
-          </a:p>
-        </p:txBody>
-      </p:sp>
       <p:sp>
         <p:nvSpPr>
           <p:cNvPr id="30" name="Text Placeholder 6"/>
@@ -15004,8 +15147,8 @@
         </p:nvSpPr>
         <p:spPr>
           <a:xfrm>
-            <a:off x="718249" y="19594272"/>
-            <a:ext cx="9397301" cy="979718"/>
+            <a:off x="670763" y="16995258"/>
+            <a:ext cx="9726504" cy="4178457"/>
           </a:xfrm>
           <a:prstGeom prst="rect">
             <a:avLst/>
@@ -15153,19 +15296,19 @@
             </a:lvl9pPr>
           </a:lstStyle>
           <a:p>
-            <a:pPr marL="0" indent="0">
+            <a:pPr marL="0" indent="0" algn="just">
               <a:buNone/>
             </a:pPr>
             <a:r>
-              <a:rPr lang="en-GB" sz="2400" dirty="0">
-                <a:latin typeface="Arial" panose="020B0604020202020204" pitchFamily="34" charset="0"/>
-                <a:cs typeface="Arial" panose="020B0604020202020204" pitchFamily="34" charset="0"/>
+              <a:rPr lang="en-US" sz="2500" dirty="0">
+                <a:latin typeface="Times New Roman" panose="02020603050405020304" pitchFamily="18" charset="0"/>
+                <a:cs typeface="Times New Roman" panose="02020603050405020304" pitchFamily="18" charset="0"/>
               </a:rPr>
-              <a:t>The conceptual framework below, was developed from Bandura’s (1986) Reciprocal Determinism model, in which Behaviour, Environmental Factors and Personal Factors were replaced with Self-Efficacy, Social Learning and Reflection, which became the basis for developing implementation strategies to enhance student engagement.</a:t>
+              <a:t>This project used the Cross-Industry Standard Process for Data Mining (CRISP-DM) model as a method for creating an efficient and well-structured Lightweight Intrusion Detection System (LIDS). Using the CRISP-DM model allowed the project to follow a systematic approach throughout all six phases of the Data Mining process: Business Understanding, Data Understanding, Data Preparation, Modelling, Evaluation and Deployment. The CRISP-DM model also assisted in maintaining a logical sequence during dataset preprocessing, machine learning experimentation, model evaluation and deployment planning stages (Schröer, et al., 2020)</a:t>
             </a:r>
-            <a:endParaRPr lang="en-IE" sz="2400" dirty="0">
-              <a:latin typeface="Arial" panose="020B0604020202020204" pitchFamily="34" charset="0"/>
-              <a:cs typeface="Arial" panose="020B0604020202020204" pitchFamily="34" charset="0"/>
+            <a:endParaRPr lang="en-IE" sz="2500" dirty="0">
+              <a:latin typeface="Times New Roman" panose="02020603050405020304" pitchFamily="18" charset="0"/>
+              <a:cs typeface="Times New Roman" panose="02020603050405020304" pitchFamily="18" charset="0"/>
             </a:endParaRPr>
           </a:p>
         </p:txBody>
@@ -15220,310 +15363,6 @@
       </p:sp>
       <p:sp>
         <p:nvSpPr>
-          <p:cNvPr id="36" name="Content Placeholder 2"/>
-          <p:cNvSpPr txBox="1">
-            <a:spLocks/>
-          </p:cNvSpPr>
-          <p:nvPr/>
-        </p:nvSpPr>
-        <p:spPr>
-          <a:xfrm>
-            <a:off x="22534004" y="7077748"/>
-            <a:ext cx="9795691" cy="5522693"/>
-          </a:xfrm>
-          <a:prstGeom prst="rect">
-            <a:avLst/>
-          </a:prstGeom>
-        </p:spPr>
-        <p:txBody>
-          <a:bodyPr>
-            <a:noAutofit/>
-          </a:bodyPr>
-          <a:lstStyle>
-            <a:lvl1pPr marL="1645838" indent="-1645838" algn="l" defTabSz="4388900" rtl="0" eaLnBrk="1" latinLnBrk="0" hangingPunct="1">
-              <a:spcBef>
-                <a:spcPct val="20000"/>
-              </a:spcBef>
-              <a:buFont typeface="Arial" pitchFamily="34" charset="0"/>
-              <a:buChar char="•"/>
-              <a:defRPr sz="15400" kern="1200">
-                <a:solidFill>
-                  <a:schemeClr val="tx1"/>
-                </a:solidFill>
-                <a:latin typeface="+mn-lt"/>
-                <a:ea typeface="+mn-ea"/>
-                <a:cs typeface="+mn-cs"/>
-              </a:defRPr>
-            </a:lvl1pPr>
-            <a:lvl2pPr marL="3565982" indent="-1371531" algn="l" defTabSz="4388900" rtl="0" eaLnBrk="1" latinLnBrk="0" hangingPunct="1">
-              <a:spcBef>
-                <a:spcPct val="20000"/>
-              </a:spcBef>
-              <a:buFont typeface="Arial" pitchFamily="34" charset="0"/>
-              <a:buChar char="–"/>
-              <a:defRPr sz="13500" kern="1200">
-                <a:solidFill>
-                  <a:schemeClr val="tx1"/>
-                </a:solidFill>
-                <a:latin typeface="+mn-lt"/>
-                <a:ea typeface="+mn-ea"/>
-                <a:cs typeface="+mn-cs"/>
-              </a:defRPr>
-            </a:lvl2pPr>
-            <a:lvl3pPr marL="5486126" indent="-1097226" algn="l" defTabSz="4388900" rtl="0" eaLnBrk="1" latinLnBrk="0" hangingPunct="1">
-              <a:spcBef>
-                <a:spcPct val="20000"/>
-              </a:spcBef>
-              <a:buFont typeface="Arial" pitchFamily="34" charset="0"/>
-              <a:buChar char="•"/>
-              <a:defRPr sz="11600" kern="1200">
-                <a:solidFill>
-                  <a:schemeClr val="tx1"/>
-                </a:solidFill>
-                <a:latin typeface="+mn-lt"/>
-                <a:ea typeface="+mn-ea"/>
-                <a:cs typeface="+mn-cs"/>
-              </a:defRPr>
-            </a:lvl3pPr>
-            <a:lvl4pPr marL="7680577" indent="-1097226" algn="l" defTabSz="4388900" rtl="0" eaLnBrk="1" latinLnBrk="0" hangingPunct="1">
-              <a:spcBef>
-                <a:spcPct val="20000"/>
-              </a:spcBef>
-              <a:buFont typeface="Arial" pitchFamily="34" charset="0"/>
-              <a:buChar char="–"/>
-              <a:defRPr sz="9600" kern="1200">
-                <a:solidFill>
-                  <a:schemeClr val="tx1"/>
-                </a:solidFill>
-                <a:latin typeface="+mn-lt"/>
-                <a:ea typeface="+mn-ea"/>
-                <a:cs typeface="+mn-cs"/>
-              </a:defRPr>
-            </a:lvl4pPr>
-            <a:lvl5pPr marL="9875026" indent="-1097226" algn="l" defTabSz="4388900" rtl="0" eaLnBrk="1" latinLnBrk="0" hangingPunct="1">
-              <a:spcBef>
-                <a:spcPct val="20000"/>
-              </a:spcBef>
-              <a:buFont typeface="Arial" pitchFamily="34" charset="0"/>
-              <a:buChar char="»"/>
-              <a:defRPr sz="9600" kern="1200">
-                <a:solidFill>
-                  <a:schemeClr val="tx1"/>
-                </a:solidFill>
-                <a:latin typeface="+mn-lt"/>
-                <a:ea typeface="+mn-ea"/>
-                <a:cs typeface="+mn-cs"/>
-              </a:defRPr>
-            </a:lvl5pPr>
-            <a:lvl6pPr marL="12069477" indent="-1097226" algn="l" defTabSz="4388900" rtl="0" eaLnBrk="1" latinLnBrk="0" hangingPunct="1">
-              <a:spcBef>
-                <a:spcPct val="20000"/>
-              </a:spcBef>
-              <a:buFont typeface="Arial" pitchFamily="34" charset="0"/>
-              <a:buChar char="•"/>
-              <a:defRPr sz="9600" kern="1200">
-                <a:solidFill>
-                  <a:schemeClr val="tx1"/>
-                </a:solidFill>
-                <a:latin typeface="+mn-lt"/>
-                <a:ea typeface="+mn-ea"/>
-                <a:cs typeface="+mn-cs"/>
-              </a:defRPr>
-            </a:lvl6pPr>
-            <a:lvl7pPr marL="14263926" indent="-1097226" algn="l" defTabSz="4388900" rtl="0" eaLnBrk="1" latinLnBrk="0" hangingPunct="1">
-              <a:spcBef>
-                <a:spcPct val="20000"/>
-              </a:spcBef>
-              <a:buFont typeface="Arial" pitchFamily="34" charset="0"/>
-              <a:buChar char="•"/>
-              <a:defRPr sz="9600" kern="1200">
-                <a:solidFill>
-                  <a:schemeClr val="tx1"/>
-                </a:solidFill>
-                <a:latin typeface="+mn-lt"/>
-                <a:ea typeface="+mn-ea"/>
-                <a:cs typeface="+mn-cs"/>
-              </a:defRPr>
-            </a:lvl7pPr>
-            <a:lvl8pPr marL="16458377" indent="-1097226" algn="l" defTabSz="4388900" rtl="0" eaLnBrk="1" latinLnBrk="0" hangingPunct="1">
-              <a:spcBef>
-                <a:spcPct val="20000"/>
-              </a:spcBef>
-              <a:buFont typeface="Arial" pitchFamily="34" charset="0"/>
-              <a:buChar char="•"/>
-              <a:defRPr sz="9600" kern="1200">
-                <a:solidFill>
-                  <a:schemeClr val="tx1"/>
-                </a:solidFill>
-                <a:latin typeface="+mn-lt"/>
-                <a:ea typeface="+mn-ea"/>
-                <a:cs typeface="+mn-cs"/>
-              </a:defRPr>
-            </a:lvl8pPr>
-            <a:lvl9pPr marL="18652827" indent="-1097226" algn="l" defTabSz="4388900" rtl="0" eaLnBrk="1" latinLnBrk="0" hangingPunct="1">
-              <a:spcBef>
-                <a:spcPct val="20000"/>
-              </a:spcBef>
-              <a:buFont typeface="Arial" pitchFamily="34" charset="0"/>
-              <a:buChar char="•"/>
-              <a:defRPr sz="9600" kern="1200">
-                <a:solidFill>
-                  <a:schemeClr val="tx1"/>
-                </a:solidFill>
-                <a:latin typeface="+mn-lt"/>
-                <a:ea typeface="+mn-ea"/>
-                <a:cs typeface="+mn-cs"/>
-              </a:defRPr>
-            </a:lvl9pPr>
-          </a:lstStyle>
-          <a:p>
-            <a:pPr marL="0" indent="0">
-              <a:buNone/>
-            </a:pPr>
-            <a:r>
-              <a:rPr lang="en-IE" sz="2500" dirty="0"/>
-              <a:t>A reflective learning journal was provided to student participants in two of the action research studies, participants were asked to complete this journal on a weekly basis over the course of a semester.  There was mixed opinions on the use of the journal, with the majority questioning its usefulness.  Students were not convinced of the benefits of using the journal over a long period of time, and found the activity a burden in some cases.  Some viewed it as a piece of additional assessment that had no grade, furthering most to question the benefits.   While some positive benefits were noticed, careful consideration is required if using such a tool for a class cohort, some individuals seemed to adapt better to this type of journaling activity than others.   </a:t>
-            </a:r>
-          </a:p>
-        </p:txBody>
-      </p:sp>
-      <p:sp>
-        <p:nvSpPr>
-          <p:cNvPr id="38" name="Text Placeholder 11"/>
-          <p:cNvSpPr>
-            <a:spLocks noGrp="1"/>
-          </p:cNvSpPr>
-          <p:nvPr>
-            <p:ph type="body" sz="quarter" idx="28"/>
-          </p:nvPr>
-        </p:nvSpPr>
-        <p:spPr>
-          <a:xfrm>
-            <a:off x="22407466" y="25936012"/>
-            <a:ext cx="10052050" cy="6490985"/>
-          </a:xfrm>
-        </p:spPr>
-        <p:txBody>
-          <a:bodyPr/>
-          <a:lstStyle/>
-          <a:p>
-            <a:r>
-              <a:rPr lang="en-IE" dirty="0">
-                <a:solidFill>
-                  <a:schemeClr val="tx1"/>
-                </a:solidFill>
-                <a:latin typeface="Arial" panose="020B0604020202020204" pitchFamily="34" charset="0"/>
-                <a:cs typeface="Arial" panose="020B0604020202020204" pitchFamily="34" charset="0"/>
-              </a:rPr>
-              <a:t>Problem Based Learning (PBL) and Peer Assisted Learning (PAL) were introduced to a treatment group over the course of a semester.  The quotes below represent a small sample of the overall positive feedback the participants expressed in terms of their enjoyment in participating in groups when solving programming problems:</a:t>
-            </a:r>
-          </a:p>
-          <a:p>
-            <a:endParaRPr lang="en-IE" dirty="0">
-              <a:solidFill>
-                <a:schemeClr val="tx1"/>
-              </a:solidFill>
-              <a:latin typeface="Arial" panose="020B0604020202020204" pitchFamily="34" charset="0"/>
-              <a:cs typeface="Arial" panose="020B0604020202020204" pitchFamily="34" charset="0"/>
-            </a:endParaRPr>
-          </a:p>
-          <a:p>
-            <a:r>
-              <a:rPr lang="en-IE" sz="1600" i="1" dirty="0">
-                <a:solidFill>
-                  <a:schemeClr val="tx1"/>
-                </a:solidFill>
-                <a:latin typeface="Arial" panose="020B0604020202020204" pitchFamily="34" charset="0"/>
-                <a:cs typeface="Arial" panose="020B0604020202020204" pitchFamily="34" charset="0"/>
-              </a:rPr>
-              <a:t>“I learned I can work in a group. Although I most of the times would rather work alone, working in a group does make problem solving a lot easier”.</a:t>
-            </a:r>
-          </a:p>
-          <a:p>
-            <a:endParaRPr lang="en-IE" sz="1600" i="1" dirty="0">
-              <a:solidFill>
-                <a:schemeClr val="tx1"/>
-              </a:solidFill>
-              <a:latin typeface="Arial" panose="020B0604020202020204" pitchFamily="34" charset="0"/>
-              <a:cs typeface="Arial" panose="020B0604020202020204" pitchFamily="34" charset="0"/>
-            </a:endParaRPr>
-          </a:p>
-          <a:p>
-            <a:r>
-              <a:rPr lang="en-IE" sz="1600" i="1" dirty="0">
-                <a:solidFill>
-                  <a:schemeClr val="tx1"/>
-                </a:solidFill>
-                <a:latin typeface="Arial" panose="020B0604020202020204" pitchFamily="34" charset="0"/>
-                <a:cs typeface="Arial" panose="020B0604020202020204" pitchFamily="34" charset="0"/>
-              </a:rPr>
-              <a:t>“I enjoy programming but I’m 100% aware that my planning skills are way better than my programming skills. I wish we had more opportunities like this one to practice”.</a:t>
-            </a:r>
-          </a:p>
-          <a:p>
-            <a:endParaRPr lang="en-IE" sz="1600" i="1" dirty="0">
-              <a:solidFill>
-                <a:schemeClr val="tx1"/>
-              </a:solidFill>
-              <a:latin typeface="Arial" panose="020B0604020202020204" pitchFamily="34" charset="0"/>
-              <a:cs typeface="Arial" panose="020B0604020202020204" pitchFamily="34" charset="0"/>
-            </a:endParaRPr>
-          </a:p>
-          <a:p>
-            <a:r>
-              <a:rPr lang="en-IE" sz="1600" i="1" dirty="0">
-                <a:solidFill>
-                  <a:schemeClr val="tx1"/>
-                </a:solidFill>
-                <a:latin typeface="Arial" panose="020B0604020202020204" pitchFamily="34" charset="0"/>
-                <a:cs typeface="Arial" panose="020B0604020202020204" pitchFamily="34" charset="0"/>
-              </a:rPr>
-              <a:t>“Really enjoyable as I am better working with people.  (I’m a really nervous person and individual evaluations makes me so nervous that I cannot concentrate)”.</a:t>
-            </a:r>
-          </a:p>
-          <a:p>
-            <a:endParaRPr lang="en-IE" sz="1600" i="1" dirty="0">
-              <a:solidFill>
-                <a:schemeClr val="tx1"/>
-              </a:solidFill>
-              <a:latin typeface="Arial" panose="020B0604020202020204" pitchFamily="34" charset="0"/>
-              <a:cs typeface="Arial" panose="020B0604020202020204" pitchFamily="34" charset="0"/>
-            </a:endParaRPr>
-          </a:p>
-          <a:p>
-            <a:r>
-              <a:rPr lang="en-IE" sz="1600" i="1" dirty="0">
-                <a:solidFill>
-                  <a:schemeClr val="tx1"/>
-                </a:solidFill>
-                <a:latin typeface="Arial" panose="020B0604020202020204" pitchFamily="34" charset="0"/>
-                <a:cs typeface="Arial" panose="020B0604020202020204" pitchFamily="34" charset="0"/>
-              </a:rPr>
-              <a:t>“These activities really makes more interaction among friends and for a given problem, we can solve it with many the best ways.  And need to be continued in the coming weeks”.</a:t>
-            </a:r>
-          </a:p>
-          <a:p>
-            <a:endParaRPr lang="en-IE" sz="1600" i="1" dirty="0">
-              <a:solidFill>
-                <a:schemeClr val="tx1"/>
-              </a:solidFill>
-              <a:latin typeface="Arial" panose="020B0604020202020204" pitchFamily="34" charset="0"/>
-              <a:cs typeface="Arial" panose="020B0604020202020204" pitchFamily="34" charset="0"/>
-            </a:endParaRPr>
-          </a:p>
-          <a:p>
-            <a:endParaRPr lang="en-IE" sz="1600" i="1" dirty="0">
-              <a:solidFill>
-                <a:schemeClr val="tx1"/>
-              </a:solidFill>
-              <a:latin typeface="Arial" panose="020B0604020202020204" pitchFamily="34" charset="0"/>
-              <a:cs typeface="Arial" panose="020B0604020202020204" pitchFamily="34" charset="0"/>
-            </a:endParaRPr>
-          </a:p>
-        </p:txBody>
-      </p:sp>
-      <p:sp>
-        <p:nvSpPr>
           <p:cNvPr id="40" name="Text Placeholder 3"/>
           <p:cNvSpPr>
             <a:spLocks noGrp="1"/>
@@ -15534,7 +15373,7 @@
         </p:nvSpPr>
         <p:spPr>
           <a:xfrm>
-            <a:off x="521484" y="12794208"/>
+            <a:off x="550697" y="11725870"/>
             <a:ext cx="10026754" cy="754045"/>
           </a:xfrm>
         </p:spPr>
@@ -15565,8 +15404,8 @@
         </p:nvSpPr>
         <p:spPr>
           <a:xfrm>
-            <a:off x="578634" y="13812808"/>
-            <a:ext cx="9736942" cy="5276211"/>
+            <a:off x="534829" y="12492917"/>
+            <a:ext cx="9736942" cy="3792957"/>
           </a:xfrm>
           <a:prstGeom prst="rect">
             <a:avLst/>
@@ -15714,30 +15553,19 @@
             </a:lvl9pPr>
           </a:lstStyle>
           <a:p>
-            <a:pPr marL="0" indent="0" algn="just" defTabSz="895350">
-              <a:buFont typeface="Arial" pitchFamily="34" charset="0"/>
+            <a:pPr marL="0" indent="0" algn="just">
               <a:buNone/>
             </a:pPr>
             <a:r>
-              <a:rPr lang="en-IE" sz="2400" dirty="0">
-                <a:latin typeface="Arial" panose="020B0604020202020204" pitchFamily="34" charset="0"/>
-                <a:cs typeface="Arial" panose="020B0604020202020204" pitchFamily="34" charset="0"/>
+              <a:rPr lang="en-US" sz="2500" dirty="0">
+                <a:latin typeface="Times New Roman" panose="02020603050405020304" pitchFamily="18" charset="0"/>
+                <a:cs typeface="Times New Roman" pitchFamily="18" charset="0"/>
               </a:rPr>
-              <a:t>The four  questions below represent the core focus of the entire study:</a:t>
+              <a:t>The following four questions represent the main focus of this research study:</a:t>
             </a:r>
-            <a:endParaRPr lang="en-IE" sz="2400" b="1" dirty="0">
-              <a:latin typeface="Arial" panose="020B0604020202020204" pitchFamily="34" charset="0"/>
-              <a:cs typeface="Arial" panose="020B0604020202020204" pitchFamily="34" charset="0"/>
-            </a:endParaRPr>
-          </a:p>
-          <a:p>
-            <a:pPr marL="0" indent="0" algn="just" defTabSz="895350">
-              <a:buFont typeface="Arial" pitchFamily="34" charset="0"/>
-              <a:buNone/>
-            </a:pPr>
-            <a:endParaRPr lang="en-IE" sz="2400" b="1" dirty="0">
-              <a:latin typeface="Arial" panose="020B0604020202020204" pitchFamily="34" charset="0"/>
-              <a:cs typeface="Arial" panose="020B0604020202020204" pitchFamily="34" charset="0"/>
+            <a:endParaRPr lang="en-IE" sz="2500" dirty="0">
+              <a:latin typeface="Times New Roman" panose="02020603050405020304" pitchFamily="18" charset="0"/>
+              <a:cs typeface="Times New Roman" pitchFamily="18" charset="0"/>
             </a:endParaRPr>
           </a:p>
           <a:p>
@@ -15746,32 +15574,18 @@
               <a:buNone/>
             </a:pPr>
             <a:r>
-              <a:rPr lang="en-IE" sz="2400" b="1" dirty="0">
-                <a:latin typeface="Arial" panose="020B0604020202020204" pitchFamily="34" charset="0"/>
-                <a:cs typeface="Arial" panose="020B0604020202020204" pitchFamily="34" charset="0"/>
+              <a:rPr lang="en-IE" sz="2500" b="1" dirty="0">
+                <a:latin typeface="Times New Roman" panose="02020603050405020304" pitchFamily="18" charset="0"/>
+                <a:cs typeface="Times New Roman" panose="02020603050405020304" pitchFamily="18" charset="0"/>
               </a:rPr>
               <a:t>Q.1.</a:t>
             </a:r>
             <a:r>
-              <a:rPr lang="en-IE" sz="2400" dirty="0">
-                <a:latin typeface="Arial" panose="020B0604020202020204" pitchFamily="34" charset="0"/>
-                <a:cs typeface="Arial" panose="020B0604020202020204" pitchFamily="34" charset="0"/>
+              <a:rPr lang="en-IE" sz="2500" dirty="0">
+                <a:latin typeface="Times New Roman" panose="02020603050405020304" pitchFamily="18" charset="0"/>
+                <a:cs typeface="Times New Roman" panose="02020603050405020304" pitchFamily="18" charset="0"/>
               </a:rPr>
-              <a:t> 	Is a </a:t>
-            </a:r>
-            <a:r>
-              <a:rPr lang="en-IE" sz="2400" b="1" dirty="0">
-                <a:latin typeface="Arial" panose="020B0604020202020204" pitchFamily="34" charset="0"/>
-                <a:cs typeface="Arial" panose="020B0604020202020204" pitchFamily="34" charset="0"/>
-              </a:rPr>
-              <a:t>Reflective Learning Journal </a:t>
-            </a:r>
-            <a:r>
-              <a:rPr lang="en-IE" sz="2400" dirty="0">
-                <a:latin typeface="Arial" panose="020B0604020202020204" pitchFamily="34" charset="0"/>
-                <a:cs typeface="Arial" panose="020B0604020202020204" pitchFamily="34" charset="0"/>
-              </a:rPr>
-              <a:t>a useful and effective tool 	for engaging students in computer programming?</a:t>
+              <a:t> 	Which Machine Learning model perform best for multiclass intrusion detection?</a:t>
             </a:r>
           </a:p>
           <a:p>
@@ -15780,32 +15594,18 @@
               <a:buNone/>
             </a:pPr>
             <a:r>
-              <a:rPr lang="en-IE" sz="2400" b="1" dirty="0">
-                <a:latin typeface="Arial" panose="020B0604020202020204" pitchFamily="34" charset="0"/>
-                <a:cs typeface="Arial" panose="020B0604020202020204" pitchFamily="34" charset="0"/>
+              <a:rPr lang="en-IE" sz="2500" b="1" dirty="0">
+                <a:latin typeface="Times New Roman" panose="02020603050405020304" pitchFamily="18" charset="0"/>
+                <a:cs typeface="Times New Roman" panose="02020603050405020304" pitchFamily="18" charset="0"/>
               </a:rPr>
               <a:t>Q.2</a:t>
             </a:r>
             <a:r>
-              <a:rPr lang="en-IE" sz="2400" dirty="0">
-                <a:latin typeface="Arial" panose="020B0604020202020204" pitchFamily="34" charset="0"/>
-                <a:cs typeface="Arial" panose="020B0604020202020204" pitchFamily="34" charset="0"/>
+              <a:rPr lang="en-IE" sz="2500" dirty="0">
+                <a:latin typeface="Times New Roman" panose="02020603050405020304" pitchFamily="18" charset="0"/>
+                <a:cs typeface="Times New Roman" panose="02020603050405020304" pitchFamily="18" charset="0"/>
               </a:rPr>
-              <a:t>. 	Can the use of social learning strategies enhance </a:t>
-            </a:r>
-            <a:r>
-              <a:rPr lang="en-IE" sz="2400" b="1" dirty="0">
-                <a:latin typeface="Arial" panose="020B0604020202020204" pitchFamily="34" charset="0"/>
-                <a:cs typeface="Arial" panose="020B0604020202020204" pitchFamily="34" charset="0"/>
-              </a:rPr>
-              <a:t>student 	engagement</a:t>
-            </a:r>
-            <a:r>
-              <a:rPr lang="en-IE" sz="2400" dirty="0">
-                <a:latin typeface="Arial" panose="020B0604020202020204" pitchFamily="34" charset="0"/>
-                <a:cs typeface="Arial" panose="020B0604020202020204" pitchFamily="34" charset="0"/>
-              </a:rPr>
-              <a:t>?</a:t>
+              <a:t>. 	How does class imbalance affect attack classification performance?</a:t>
             </a:r>
           </a:p>
           <a:p>
@@ -15814,32 +15614,18 @@
               <a:buNone/>
             </a:pPr>
             <a:r>
-              <a:rPr lang="en-IE" sz="2400" b="1" dirty="0">
-                <a:latin typeface="Arial" panose="020B0604020202020204" pitchFamily="34" charset="0"/>
-                <a:cs typeface="Arial" panose="020B0604020202020204" pitchFamily="34" charset="0"/>
+              <a:rPr lang="en-IE" sz="2500" b="1" dirty="0">
+                <a:latin typeface="Times New Roman" panose="02020603050405020304" pitchFamily="18" charset="0"/>
+                <a:cs typeface="Times New Roman" panose="02020603050405020304" pitchFamily="18" charset="0"/>
               </a:rPr>
               <a:t>Q.3 	</a:t>
             </a:r>
             <a:r>
-              <a:rPr lang="en-IE" sz="2400" dirty="0">
-                <a:latin typeface="Arial" panose="020B0604020202020204" pitchFamily="34" charset="0"/>
-                <a:cs typeface="Arial" panose="020B0604020202020204" pitchFamily="34" charset="0"/>
+              <a:rPr lang="en-IE" sz="2500" dirty="0">
+                <a:latin typeface="Times New Roman" panose="02020603050405020304" pitchFamily="18" charset="0"/>
+                <a:cs typeface="Times New Roman" panose="02020603050405020304" pitchFamily="18" charset="0"/>
               </a:rPr>
-              <a:t>Are social learning strategies, such as </a:t>
-            </a:r>
-            <a:r>
-              <a:rPr lang="en-IE" sz="2400" b="1" dirty="0">
-                <a:latin typeface="Arial" panose="020B0604020202020204" pitchFamily="34" charset="0"/>
-                <a:cs typeface="Arial" panose="020B0604020202020204" pitchFamily="34" charset="0"/>
-              </a:rPr>
-              <a:t>Problem Based 	Learning and Peer Assisted Learning</a:t>
-            </a:r>
-            <a:r>
-              <a:rPr lang="en-IE" sz="2400" dirty="0">
-                <a:latin typeface="Arial" panose="020B0604020202020204" pitchFamily="34" charset="0"/>
-                <a:cs typeface="Arial" panose="020B0604020202020204" pitchFamily="34" charset="0"/>
-              </a:rPr>
-              <a:t>, effective tools in 	engaging students in computer 	programming?</a:t>
+              <a:t>Can a lightweight and interpretable model achieve strong IDS performance?</a:t>
             </a:r>
           </a:p>
           <a:p>
@@ -15848,32 +15634,18 @@
               <a:buNone/>
             </a:pPr>
             <a:r>
-              <a:rPr lang="en-IE" sz="2400" b="1" dirty="0">
-                <a:latin typeface="Arial" panose="020B0604020202020204" pitchFamily="34" charset="0"/>
-                <a:cs typeface="Arial" panose="020B0604020202020204" pitchFamily="34" charset="0"/>
+              <a:rPr lang="en-IE" sz="2500" b="1" dirty="0">
+                <a:latin typeface="Times New Roman" panose="02020603050405020304" pitchFamily="18" charset="0"/>
+                <a:cs typeface="Times New Roman" panose="02020603050405020304" pitchFamily="18" charset="0"/>
               </a:rPr>
               <a:t>Q.4</a:t>
             </a:r>
             <a:r>
-              <a:rPr lang="en-IE" sz="2400" dirty="0">
-                <a:latin typeface="Arial" panose="020B0604020202020204" pitchFamily="34" charset="0"/>
-                <a:cs typeface="Arial" panose="020B0604020202020204" pitchFamily="34" charset="0"/>
+              <a:rPr lang="en-IE" sz="2500" dirty="0">
+                <a:latin typeface="Times New Roman" panose="02020603050405020304" pitchFamily="18" charset="0"/>
+                <a:cs typeface="Times New Roman" panose="02020603050405020304" pitchFamily="18" charset="0"/>
               </a:rPr>
-              <a:t>	Can the use of social learning strategies enhance </a:t>
-            </a:r>
-            <a:r>
-              <a:rPr lang="en-IE" sz="2400" b="1" dirty="0">
-                <a:latin typeface="Arial" panose="020B0604020202020204" pitchFamily="34" charset="0"/>
-                <a:cs typeface="Arial" panose="020B0604020202020204" pitchFamily="34" charset="0"/>
-              </a:rPr>
-              <a:t>self-	efficacy </a:t>
-            </a:r>
-            <a:r>
-              <a:rPr lang="en-IE" sz="2400" dirty="0">
-                <a:latin typeface="Arial" panose="020B0604020202020204" pitchFamily="34" charset="0"/>
-                <a:cs typeface="Arial" panose="020B0604020202020204" pitchFamily="34" charset="0"/>
-              </a:rPr>
-              <a:t>in computer programming?</a:t>
+              <a:t>	What limitations remain in the selected model?</a:t>
             </a:r>
           </a:p>
         </p:txBody>
@@ -16173,1904 +15945,6 @@
           </a:p>
         </p:txBody>
       </p:sp>
-      <p:graphicFrame>
-        <p:nvGraphicFramePr>
-          <p:cNvPr id="37" name="Table 36"/>
-          <p:cNvGraphicFramePr>
-            <a:graphicFrameLocks noGrp="1"/>
-          </p:cNvGraphicFramePr>
-          <p:nvPr>
-            <p:extLst>
-              <p:ext uri="{D42A27DB-BD31-4B8C-83A1-F6EECF244321}">
-                <p14:modId xmlns:p14="http://schemas.microsoft.com/office/powerpoint/2010/main" val="3349645228"/>
-              </p:ext>
-            </p:extLst>
-          </p:nvPr>
-        </p:nvGraphicFramePr>
-        <p:xfrm>
-          <a:off x="11653912" y="26870112"/>
-          <a:ext cx="9742489" cy="5042448"/>
-        </p:xfrm>
-        <a:graphic>
-          <a:graphicData uri="http://schemas.openxmlformats.org/drawingml/2006/table">
-            <a:tbl>
-              <a:tblPr firstRow="1" firstCol="1" bandRow="1">
-                <a:tableStyleId>{5C22544A-7EE6-4342-B048-85BDC9FD1C3A}</a:tableStyleId>
-              </a:tblPr>
-              <a:tblGrid>
-                <a:gridCol w="7314070">
-                  <a:extLst>
-                    <a:ext uri="{9D8B030D-6E8A-4147-A177-3AD203B41FA5}">
-                      <a16:colId xmlns:a16="http://schemas.microsoft.com/office/drawing/2014/main" val="20000"/>
-                    </a:ext>
-                  </a:extLst>
-                </a:gridCol>
-                <a:gridCol w="1447800">
-                  <a:extLst>
-                    <a:ext uri="{9D8B030D-6E8A-4147-A177-3AD203B41FA5}">
-                      <a16:colId xmlns:a16="http://schemas.microsoft.com/office/drawing/2014/main" val="20001"/>
-                    </a:ext>
-                  </a:extLst>
-                </a:gridCol>
-                <a:gridCol w="980619">
-                  <a:extLst>
-                    <a:ext uri="{9D8B030D-6E8A-4147-A177-3AD203B41FA5}">
-                      <a16:colId xmlns:a16="http://schemas.microsoft.com/office/drawing/2014/main" val="20002"/>
-                    </a:ext>
-                  </a:extLst>
-                </a:gridCol>
-              </a:tblGrid>
-              <a:tr h="337853">
-                <a:tc gridSpan="3">
-                  <a:txBody>
-                    <a:bodyPr/>
-                    <a:lstStyle/>
-                    <a:p>
-                      <a:pPr>
-                        <a:spcAft>
-                          <a:spcPts val="0"/>
-                        </a:spcAft>
-                      </a:pPr>
-                      <a:endParaRPr lang="en-IE" sz="1000" dirty="0">
-                        <a:solidFill>
-                          <a:schemeClr val="tx1"/>
-                        </a:solidFill>
-                        <a:effectLst/>
-                        <a:latin typeface="Arial" panose="020B0604020202020204" pitchFamily="34" charset="0"/>
-                        <a:ea typeface="Times New Roman"/>
-                        <a:cs typeface="Arial" panose="020B0604020202020204" pitchFamily="34" charset="0"/>
-                      </a:endParaRPr>
-                    </a:p>
-                  </a:txBody>
-                  <a:tcPr marL="68580" marR="68580" marT="0" marB="0" anchor="ctr">
-                    <a:noFill/>
-                  </a:tcPr>
-                </a:tc>
-                <a:tc hMerge="1">
-                  <a:txBody>
-                    <a:bodyPr/>
-                    <a:lstStyle/>
-                    <a:p>
-                      <a:endParaRPr lang="en-IE"/>
-                    </a:p>
-                  </a:txBody>
-                  <a:tcPr/>
-                </a:tc>
-                <a:tc hMerge="1">
-                  <a:txBody>
-                    <a:bodyPr/>
-                    <a:lstStyle/>
-                    <a:p>
-                      <a:endParaRPr lang="en-IE"/>
-                    </a:p>
-                  </a:txBody>
-                  <a:tcPr/>
-                </a:tc>
-                <a:extLst>
-                  <a:ext uri="{0D108BD9-81ED-4DB2-BD59-A6C34878D82A}">
-                    <a16:rowId xmlns:a16="http://schemas.microsoft.com/office/drawing/2014/main" val="10000"/>
-                  </a:ext>
-                </a:extLst>
-              </a:tr>
-              <a:tr h="398339">
-                <a:tc>
-                  <a:txBody>
-                    <a:bodyPr/>
-                    <a:lstStyle/>
-                    <a:p>
-                      <a:pPr>
-                        <a:spcAft>
-                          <a:spcPts val="0"/>
-                        </a:spcAft>
-                      </a:pPr>
-                      <a:r>
-                        <a:rPr lang="en-IE" sz="1800" dirty="0">
-                          <a:solidFill>
-                            <a:schemeClr val="tx1"/>
-                          </a:solidFill>
-                          <a:effectLst/>
-                          <a:latin typeface="Arial" panose="020B0604020202020204" pitchFamily="34" charset="0"/>
-                          <a:ea typeface="Times New Roman"/>
-                          <a:cs typeface="Arial" panose="020B0604020202020204" pitchFamily="34" charset="0"/>
-                        </a:rPr>
-                        <a:t>Pilot Study -</a:t>
-                      </a:r>
-                      <a:r>
-                        <a:rPr lang="en-IE" sz="1800" baseline="0" dirty="0">
-                          <a:solidFill>
-                            <a:schemeClr val="tx1"/>
-                          </a:solidFill>
-                          <a:effectLst/>
-                          <a:latin typeface="Arial" panose="020B0604020202020204" pitchFamily="34" charset="0"/>
-                          <a:ea typeface="Times New Roman"/>
-                          <a:cs typeface="Arial" panose="020B0604020202020204" pitchFamily="34" charset="0"/>
-                        </a:rPr>
-                        <a:t> 2014</a:t>
-                      </a:r>
-                      <a:endParaRPr lang="en-IE" sz="1800" dirty="0">
-                        <a:solidFill>
-                          <a:schemeClr val="tx1"/>
-                        </a:solidFill>
-                        <a:effectLst/>
-                        <a:latin typeface="Arial" panose="020B0604020202020204" pitchFamily="34" charset="0"/>
-                        <a:ea typeface="Times New Roman"/>
-                        <a:cs typeface="Arial" panose="020B0604020202020204" pitchFamily="34" charset="0"/>
-                      </a:endParaRPr>
-                    </a:p>
-                  </a:txBody>
-                  <a:tcPr marL="68580" marR="68580" marT="0" marB="0" anchor="ctr">
-                    <a:solidFill>
-                      <a:schemeClr val="accent1"/>
-                    </a:solidFill>
-                  </a:tcPr>
-                </a:tc>
-                <a:tc>
-                  <a:txBody>
-                    <a:bodyPr/>
-                    <a:lstStyle/>
-                    <a:p>
-                      <a:pPr>
-                        <a:spcAft>
-                          <a:spcPts val="0"/>
-                        </a:spcAft>
-                      </a:pPr>
-                      <a:r>
-                        <a:rPr lang="en-GB" sz="1800" b="1" dirty="0">
-                          <a:solidFill>
-                            <a:schemeClr val="bg1"/>
-                          </a:solidFill>
-                          <a:effectLst/>
-                        </a:rPr>
-                        <a:t>Analysis</a:t>
-                      </a:r>
-                      <a:endParaRPr lang="en-IE" sz="1800" b="1" dirty="0">
-                        <a:solidFill>
-                          <a:schemeClr val="bg1"/>
-                        </a:solidFill>
-                        <a:effectLst/>
-                        <a:latin typeface="Times New Roman"/>
-                        <a:ea typeface="Times New Roman"/>
-                        <a:cs typeface="Times New Roman"/>
-                      </a:endParaRPr>
-                    </a:p>
-                  </a:txBody>
-                  <a:tcPr marL="68580" marR="68580" marT="0" marB="0" anchor="ctr">
-                    <a:solidFill>
-                      <a:schemeClr val="accent1"/>
-                    </a:solidFill>
-                  </a:tcPr>
-                </a:tc>
-                <a:tc>
-                  <a:txBody>
-                    <a:bodyPr/>
-                    <a:lstStyle/>
-                    <a:p>
-                      <a:pPr>
-                        <a:spcAft>
-                          <a:spcPts val="0"/>
-                        </a:spcAft>
-                      </a:pPr>
-                      <a:r>
-                        <a:rPr lang="en-GB" sz="1800" b="1" dirty="0">
-                          <a:solidFill>
-                            <a:schemeClr val="bg1"/>
-                          </a:solidFill>
-                          <a:effectLst/>
-                        </a:rPr>
-                        <a:t>Sample</a:t>
-                      </a:r>
-                      <a:endParaRPr lang="en-IE" sz="1800" b="1" dirty="0">
-                        <a:solidFill>
-                          <a:schemeClr val="bg1"/>
-                        </a:solidFill>
-                        <a:effectLst/>
-                        <a:latin typeface="Times New Roman"/>
-                        <a:ea typeface="Times New Roman"/>
-                        <a:cs typeface="Times New Roman"/>
-                      </a:endParaRPr>
-                    </a:p>
-                  </a:txBody>
-                  <a:tcPr marL="68580" marR="68580" marT="0" marB="0" anchor="ctr">
-                    <a:solidFill>
-                      <a:schemeClr val="accent1"/>
-                    </a:solidFill>
-                  </a:tcPr>
-                </a:tc>
-                <a:extLst>
-                  <a:ext uri="{0D108BD9-81ED-4DB2-BD59-A6C34878D82A}">
-                    <a16:rowId xmlns:a16="http://schemas.microsoft.com/office/drawing/2014/main" val="10001"/>
-                  </a:ext>
-                </a:extLst>
-              </a:tr>
-              <a:tr h="288187">
-                <a:tc>
-                  <a:txBody>
-                    <a:bodyPr/>
-                    <a:lstStyle/>
-                    <a:p>
-                      <a:pPr>
-                        <a:spcAft>
-                          <a:spcPts val="0"/>
-                        </a:spcAft>
-                      </a:pPr>
-                      <a:r>
-                        <a:rPr lang="en-GB" sz="1600" b="0" dirty="0">
-                          <a:solidFill>
-                            <a:schemeClr val="tx1"/>
-                          </a:solidFill>
-                          <a:effectLst/>
-                          <a:latin typeface="Arial" panose="020B0604020202020204" pitchFamily="34" charset="0"/>
-                          <a:cs typeface="Arial" panose="020B0604020202020204" pitchFamily="34" charset="0"/>
-                        </a:rPr>
-                        <a:t>Student study habits questionnaire</a:t>
-                      </a:r>
-                      <a:endParaRPr lang="en-IE" sz="1600" b="0" dirty="0">
-                        <a:solidFill>
-                          <a:schemeClr val="tx1"/>
-                        </a:solidFill>
-                        <a:effectLst/>
-                        <a:latin typeface="Arial" panose="020B0604020202020204" pitchFamily="34" charset="0"/>
-                        <a:ea typeface="Times New Roman"/>
-                        <a:cs typeface="Arial" panose="020B0604020202020204" pitchFamily="34" charset="0"/>
-                      </a:endParaRPr>
-                    </a:p>
-                  </a:txBody>
-                  <a:tcPr marL="68580" marR="68580" marT="0" marB="0" anchor="ctr">
-                    <a:solidFill>
-                      <a:schemeClr val="bg1">
-                        <a:lumMod val="85000"/>
-                      </a:schemeClr>
-                    </a:solidFill>
-                  </a:tcPr>
-                </a:tc>
-                <a:tc>
-                  <a:txBody>
-                    <a:bodyPr/>
-                    <a:lstStyle/>
-                    <a:p>
-                      <a:pPr>
-                        <a:spcAft>
-                          <a:spcPts val="0"/>
-                        </a:spcAft>
-                      </a:pPr>
-                      <a:r>
-                        <a:rPr lang="en-GB" sz="1600" b="0" dirty="0">
-                          <a:solidFill>
-                            <a:schemeClr val="tx1"/>
-                          </a:solidFill>
-                          <a:effectLst/>
-                          <a:latin typeface="Arial" panose="020B0604020202020204" pitchFamily="34" charset="0"/>
-                          <a:cs typeface="Arial" panose="020B0604020202020204" pitchFamily="34" charset="0"/>
-                        </a:rPr>
-                        <a:t>Quantitative</a:t>
-                      </a:r>
-                      <a:endParaRPr lang="en-IE" sz="1600" b="0" dirty="0">
-                        <a:solidFill>
-                          <a:schemeClr val="tx1"/>
-                        </a:solidFill>
-                        <a:effectLst/>
-                        <a:latin typeface="Arial" panose="020B0604020202020204" pitchFamily="34" charset="0"/>
-                        <a:ea typeface="Times New Roman"/>
-                        <a:cs typeface="Arial" panose="020B0604020202020204" pitchFamily="34" charset="0"/>
-                      </a:endParaRPr>
-                    </a:p>
-                  </a:txBody>
-                  <a:tcPr marL="68580" marR="68580" marT="0" marB="0" anchor="ctr">
-                    <a:solidFill>
-                      <a:schemeClr val="bg1">
-                        <a:lumMod val="85000"/>
-                      </a:schemeClr>
-                    </a:solidFill>
-                  </a:tcPr>
-                </a:tc>
-                <a:tc>
-                  <a:txBody>
-                    <a:bodyPr/>
-                    <a:lstStyle/>
-                    <a:p>
-                      <a:pPr algn="r">
-                        <a:spcAft>
-                          <a:spcPts val="0"/>
-                        </a:spcAft>
-                      </a:pPr>
-                      <a:r>
-                        <a:rPr lang="en-GB" sz="1600" b="0" dirty="0">
-                          <a:solidFill>
-                            <a:schemeClr val="tx1"/>
-                          </a:solidFill>
-                          <a:effectLst/>
-                          <a:latin typeface="Arial" panose="020B0604020202020204" pitchFamily="34" charset="0"/>
-                          <a:cs typeface="Arial" panose="020B0604020202020204" pitchFamily="34" charset="0"/>
-                        </a:rPr>
-                        <a:t>31</a:t>
-                      </a:r>
-                      <a:endParaRPr lang="en-IE" sz="1600" b="0" dirty="0">
-                        <a:solidFill>
-                          <a:schemeClr val="tx1"/>
-                        </a:solidFill>
-                        <a:effectLst/>
-                        <a:latin typeface="Arial" panose="020B0604020202020204" pitchFamily="34" charset="0"/>
-                        <a:ea typeface="Times New Roman"/>
-                        <a:cs typeface="Arial" panose="020B0604020202020204" pitchFamily="34" charset="0"/>
-                      </a:endParaRPr>
-                    </a:p>
-                  </a:txBody>
-                  <a:tcPr marL="68580" marR="68580" marT="0" marB="0">
-                    <a:solidFill>
-                      <a:schemeClr val="bg1">
-                        <a:lumMod val="85000"/>
-                      </a:schemeClr>
-                    </a:solidFill>
-                  </a:tcPr>
-                </a:tc>
-                <a:extLst>
-                  <a:ext uri="{0D108BD9-81ED-4DB2-BD59-A6C34878D82A}">
-                    <a16:rowId xmlns:a16="http://schemas.microsoft.com/office/drawing/2014/main" val="10002"/>
-                  </a:ext>
-                </a:extLst>
-              </a:tr>
-              <a:tr h="287383">
-                <a:tc>
-                  <a:txBody>
-                    <a:bodyPr/>
-                    <a:lstStyle/>
-                    <a:p>
-                      <a:pPr>
-                        <a:spcAft>
-                          <a:spcPts val="0"/>
-                        </a:spcAft>
-                      </a:pPr>
-                      <a:r>
-                        <a:rPr lang="en-GB" sz="1600" b="0" dirty="0">
-                          <a:solidFill>
-                            <a:schemeClr val="tx1"/>
-                          </a:solidFill>
-                          <a:effectLst/>
-                          <a:latin typeface="Arial" panose="020B0604020202020204" pitchFamily="34" charset="0"/>
-                          <a:cs typeface="Arial" panose="020B0604020202020204" pitchFamily="34" charset="0"/>
-                        </a:rPr>
-                        <a:t>Reflective Learning Journal</a:t>
-                      </a:r>
-                      <a:endParaRPr lang="en-IE" sz="1600" b="0" dirty="0">
-                        <a:solidFill>
-                          <a:schemeClr val="tx1"/>
-                        </a:solidFill>
-                        <a:effectLst/>
-                        <a:latin typeface="Arial" panose="020B0604020202020204" pitchFamily="34" charset="0"/>
-                        <a:ea typeface="Times New Roman"/>
-                        <a:cs typeface="Arial" panose="020B0604020202020204" pitchFamily="34" charset="0"/>
-                      </a:endParaRPr>
-                    </a:p>
-                  </a:txBody>
-                  <a:tcPr marL="68580" marR="68580" marT="0" marB="0" anchor="ctr">
-                    <a:solidFill>
-                      <a:schemeClr val="bg1">
-                        <a:lumMod val="85000"/>
-                      </a:schemeClr>
-                    </a:solidFill>
-                  </a:tcPr>
-                </a:tc>
-                <a:tc>
-                  <a:txBody>
-                    <a:bodyPr/>
-                    <a:lstStyle/>
-                    <a:p>
-                      <a:pPr>
-                        <a:spcAft>
-                          <a:spcPts val="0"/>
-                        </a:spcAft>
-                      </a:pPr>
-                      <a:r>
-                        <a:rPr lang="en-GB" sz="1600" b="0" dirty="0">
-                          <a:solidFill>
-                            <a:schemeClr val="tx1"/>
-                          </a:solidFill>
-                          <a:effectLst/>
-                          <a:latin typeface="Arial" panose="020B0604020202020204" pitchFamily="34" charset="0"/>
-                          <a:cs typeface="Arial" panose="020B0604020202020204" pitchFamily="34" charset="0"/>
-                        </a:rPr>
-                        <a:t>Qualitative</a:t>
-                      </a:r>
-                      <a:endParaRPr lang="en-IE" sz="1600" b="0" dirty="0">
-                        <a:solidFill>
-                          <a:schemeClr val="tx1"/>
-                        </a:solidFill>
-                        <a:effectLst/>
-                        <a:latin typeface="Arial" panose="020B0604020202020204" pitchFamily="34" charset="0"/>
-                        <a:ea typeface="Times New Roman"/>
-                        <a:cs typeface="Arial" panose="020B0604020202020204" pitchFamily="34" charset="0"/>
-                      </a:endParaRPr>
-                    </a:p>
-                  </a:txBody>
-                  <a:tcPr marL="68580" marR="68580" marT="0" marB="0" anchor="ctr">
-                    <a:solidFill>
-                      <a:schemeClr val="bg1">
-                        <a:lumMod val="85000"/>
-                      </a:schemeClr>
-                    </a:solidFill>
-                  </a:tcPr>
-                </a:tc>
-                <a:tc>
-                  <a:txBody>
-                    <a:bodyPr/>
-                    <a:lstStyle/>
-                    <a:p>
-                      <a:pPr algn="r">
-                        <a:spcAft>
-                          <a:spcPts val="0"/>
-                        </a:spcAft>
-                      </a:pPr>
-                      <a:r>
-                        <a:rPr lang="en-GB" sz="1600" b="0" dirty="0">
-                          <a:solidFill>
-                            <a:schemeClr val="tx1"/>
-                          </a:solidFill>
-                          <a:effectLst/>
-                          <a:latin typeface="Arial" panose="020B0604020202020204" pitchFamily="34" charset="0"/>
-                          <a:cs typeface="Arial" panose="020B0604020202020204" pitchFamily="34" charset="0"/>
-                        </a:rPr>
-                        <a:t>77</a:t>
-                      </a:r>
-                      <a:endParaRPr lang="en-IE" sz="1600" b="0" dirty="0">
-                        <a:solidFill>
-                          <a:schemeClr val="tx1"/>
-                        </a:solidFill>
-                        <a:effectLst/>
-                        <a:latin typeface="Arial" panose="020B0604020202020204" pitchFamily="34" charset="0"/>
-                        <a:ea typeface="Times New Roman"/>
-                        <a:cs typeface="Arial" panose="020B0604020202020204" pitchFamily="34" charset="0"/>
-                      </a:endParaRPr>
-                    </a:p>
-                  </a:txBody>
-                  <a:tcPr marL="68580" marR="68580" marT="0" marB="0">
-                    <a:solidFill>
-                      <a:schemeClr val="bg1">
-                        <a:lumMod val="85000"/>
-                      </a:schemeClr>
-                    </a:solidFill>
-                  </a:tcPr>
-                </a:tc>
-                <a:extLst>
-                  <a:ext uri="{0D108BD9-81ED-4DB2-BD59-A6C34878D82A}">
-                    <a16:rowId xmlns:a16="http://schemas.microsoft.com/office/drawing/2014/main" val="10003"/>
-                  </a:ext>
-                </a:extLst>
-              </a:tr>
-              <a:tr h="300446">
-                <a:tc>
-                  <a:txBody>
-                    <a:bodyPr/>
-                    <a:lstStyle/>
-                    <a:p>
-                      <a:pPr>
-                        <a:spcAft>
-                          <a:spcPts val="0"/>
-                        </a:spcAft>
-                      </a:pPr>
-                      <a:r>
-                        <a:rPr lang="en-GB" sz="1600" b="0" dirty="0">
-                          <a:solidFill>
-                            <a:schemeClr val="tx1"/>
-                          </a:solidFill>
-                          <a:effectLst/>
-                          <a:latin typeface="Arial" panose="020B0604020202020204" pitchFamily="34" charset="0"/>
-                          <a:cs typeface="Arial" panose="020B0604020202020204" pitchFamily="34" charset="0"/>
-                        </a:rPr>
-                        <a:t>Focus group (reflective journal evaluation)</a:t>
-                      </a:r>
-                      <a:endParaRPr lang="en-IE" sz="1600" b="0" dirty="0">
-                        <a:solidFill>
-                          <a:schemeClr val="tx1"/>
-                        </a:solidFill>
-                        <a:effectLst/>
-                        <a:latin typeface="Arial" panose="020B0604020202020204" pitchFamily="34" charset="0"/>
-                        <a:ea typeface="Times New Roman"/>
-                        <a:cs typeface="Arial" panose="020B0604020202020204" pitchFamily="34" charset="0"/>
-                      </a:endParaRPr>
-                    </a:p>
-                  </a:txBody>
-                  <a:tcPr marL="68580" marR="68580" marT="0" marB="0" anchor="ctr">
-                    <a:solidFill>
-                      <a:schemeClr val="bg1">
-                        <a:lumMod val="85000"/>
-                      </a:schemeClr>
-                    </a:solidFill>
-                  </a:tcPr>
-                </a:tc>
-                <a:tc>
-                  <a:txBody>
-                    <a:bodyPr/>
-                    <a:lstStyle/>
-                    <a:p>
-                      <a:pPr>
-                        <a:spcAft>
-                          <a:spcPts val="0"/>
-                        </a:spcAft>
-                      </a:pPr>
-                      <a:r>
-                        <a:rPr lang="en-GB" sz="1600" b="0" dirty="0">
-                          <a:solidFill>
-                            <a:schemeClr val="tx1"/>
-                          </a:solidFill>
-                          <a:effectLst/>
-                          <a:latin typeface="Arial" panose="020B0604020202020204" pitchFamily="34" charset="0"/>
-                          <a:cs typeface="Arial" panose="020B0604020202020204" pitchFamily="34" charset="0"/>
-                        </a:rPr>
-                        <a:t>Qualitative</a:t>
-                      </a:r>
-                      <a:endParaRPr lang="en-IE" sz="1600" b="0" dirty="0">
-                        <a:solidFill>
-                          <a:schemeClr val="tx1"/>
-                        </a:solidFill>
-                        <a:effectLst/>
-                        <a:latin typeface="Arial" panose="020B0604020202020204" pitchFamily="34" charset="0"/>
-                        <a:ea typeface="Times New Roman"/>
-                        <a:cs typeface="Arial" panose="020B0604020202020204" pitchFamily="34" charset="0"/>
-                      </a:endParaRPr>
-                    </a:p>
-                  </a:txBody>
-                  <a:tcPr marL="68580" marR="68580" marT="0" marB="0" anchor="ctr">
-                    <a:solidFill>
-                      <a:schemeClr val="bg1">
-                        <a:lumMod val="85000"/>
-                      </a:schemeClr>
-                    </a:solidFill>
-                  </a:tcPr>
-                </a:tc>
-                <a:tc>
-                  <a:txBody>
-                    <a:bodyPr/>
-                    <a:lstStyle/>
-                    <a:p>
-                      <a:pPr algn="r">
-                        <a:spcAft>
-                          <a:spcPts val="0"/>
-                        </a:spcAft>
-                      </a:pPr>
-                      <a:r>
-                        <a:rPr lang="en-GB" sz="1600" b="0" dirty="0">
-                          <a:solidFill>
-                            <a:schemeClr val="tx1"/>
-                          </a:solidFill>
-                          <a:effectLst/>
-                          <a:latin typeface="Arial" panose="020B0604020202020204" pitchFamily="34" charset="0"/>
-                          <a:cs typeface="Arial" panose="020B0604020202020204" pitchFamily="34" charset="0"/>
-                        </a:rPr>
-                        <a:t>7</a:t>
-                      </a:r>
-                      <a:endParaRPr lang="en-IE" sz="1600" b="0" dirty="0">
-                        <a:solidFill>
-                          <a:schemeClr val="tx1"/>
-                        </a:solidFill>
-                        <a:effectLst/>
-                        <a:latin typeface="Arial" panose="020B0604020202020204" pitchFamily="34" charset="0"/>
-                        <a:ea typeface="Times New Roman"/>
-                        <a:cs typeface="Arial" panose="020B0604020202020204" pitchFamily="34" charset="0"/>
-                      </a:endParaRPr>
-                    </a:p>
-                  </a:txBody>
-                  <a:tcPr marL="68580" marR="68580" marT="0" marB="0">
-                    <a:solidFill>
-                      <a:schemeClr val="bg1">
-                        <a:lumMod val="85000"/>
-                      </a:schemeClr>
-                    </a:solidFill>
-                  </a:tcPr>
-                </a:tc>
-                <a:extLst>
-                  <a:ext uri="{0D108BD9-81ED-4DB2-BD59-A6C34878D82A}">
-                    <a16:rowId xmlns:a16="http://schemas.microsoft.com/office/drawing/2014/main" val="10004"/>
-                  </a:ext>
-                </a:extLst>
-              </a:tr>
-              <a:tr h="0">
-                <a:tc gridSpan="3">
-                  <a:txBody>
-                    <a:bodyPr/>
-                    <a:lstStyle/>
-                    <a:p>
-                      <a:pPr>
-                        <a:spcAft>
-                          <a:spcPts val="0"/>
-                        </a:spcAft>
-                      </a:pPr>
-                      <a:endParaRPr lang="en-IE" sz="800" dirty="0">
-                        <a:solidFill>
-                          <a:schemeClr val="tx1"/>
-                        </a:solidFill>
-                        <a:effectLst/>
-                        <a:latin typeface="Arial" panose="020B0604020202020204" pitchFamily="34" charset="0"/>
-                        <a:ea typeface="Times New Roman"/>
-                        <a:cs typeface="Arial" panose="020B0604020202020204" pitchFamily="34" charset="0"/>
-                      </a:endParaRPr>
-                    </a:p>
-                  </a:txBody>
-                  <a:tcPr marL="68580" marR="68580" marT="0" marB="0" anchor="ctr">
-                    <a:noFill/>
-                  </a:tcPr>
-                </a:tc>
-                <a:tc hMerge="1">
-                  <a:txBody>
-                    <a:bodyPr/>
-                    <a:lstStyle/>
-                    <a:p>
-                      <a:endParaRPr lang="en-IE"/>
-                    </a:p>
-                  </a:txBody>
-                  <a:tcPr/>
-                </a:tc>
-                <a:tc hMerge="1">
-                  <a:txBody>
-                    <a:bodyPr/>
-                    <a:lstStyle/>
-                    <a:p>
-                      <a:endParaRPr lang="en-IE"/>
-                    </a:p>
-                  </a:txBody>
-                  <a:tcPr/>
-                </a:tc>
-                <a:extLst>
-                  <a:ext uri="{0D108BD9-81ED-4DB2-BD59-A6C34878D82A}">
-                    <a16:rowId xmlns:a16="http://schemas.microsoft.com/office/drawing/2014/main" val="10006"/>
-                  </a:ext>
-                </a:extLst>
-              </a:tr>
-              <a:tr h="398339">
-                <a:tc>
-                  <a:txBody>
-                    <a:bodyPr/>
-                    <a:lstStyle/>
-                    <a:p>
-                      <a:pPr>
-                        <a:spcAft>
-                          <a:spcPts val="0"/>
-                        </a:spcAft>
-                      </a:pPr>
-                      <a:r>
-                        <a:rPr lang="en-IE" sz="1800" dirty="0">
-                          <a:solidFill>
-                            <a:schemeClr val="tx1"/>
-                          </a:solidFill>
-                          <a:effectLst/>
-                          <a:latin typeface="Arial" panose="020B0604020202020204" pitchFamily="34" charset="0"/>
-                          <a:ea typeface="Times New Roman"/>
-                          <a:cs typeface="Arial" panose="020B0604020202020204" pitchFamily="34" charset="0"/>
-                        </a:rPr>
-                        <a:t>Secondary Study - 2015</a:t>
-                      </a:r>
-                    </a:p>
-                  </a:txBody>
-                  <a:tcPr marL="68580" marR="68580" marT="0" marB="0" anchor="ctr"/>
-                </a:tc>
-                <a:tc>
-                  <a:txBody>
-                    <a:bodyPr/>
-                    <a:lstStyle/>
-                    <a:p>
-                      <a:pPr marL="0" algn="l" defTabSz="4388900" rtl="0" eaLnBrk="1" latinLnBrk="0" hangingPunct="1">
-                        <a:spcAft>
-                          <a:spcPts val="0"/>
-                        </a:spcAft>
-                      </a:pPr>
-                      <a:r>
-                        <a:rPr lang="en-GB" sz="1800" b="1" kern="1200" dirty="0">
-                          <a:solidFill>
-                            <a:schemeClr val="lt1"/>
-                          </a:solidFill>
-                          <a:effectLst/>
-                          <a:latin typeface="+mn-lt"/>
-                          <a:ea typeface="+mn-ea"/>
-                          <a:cs typeface="+mn-cs"/>
-                        </a:rPr>
-                        <a:t>Analysis</a:t>
-                      </a:r>
-                      <a:endParaRPr lang="en-IE" sz="1800" b="1" kern="1200" dirty="0">
-                        <a:solidFill>
-                          <a:schemeClr val="lt1"/>
-                        </a:solidFill>
-                        <a:effectLst/>
-                        <a:latin typeface="+mn-lt"/>
-                        <a:ea typeface="+mn-ea"/>
-                        <a:cs typeface="+mn-cs"/>
-                      </a:endParaRPr>
-                    </a:p>
-                  </a:txBody>
-                  <a:tcPr marL="68580" marR="68580" marT="0" marB="0" anchor="ctr">
-                    <a:solidFill>
-                      <a:schemeClr val="accent1"/>
-                    </a:solidFill>
-                  </a:tcPr>
-                </a:tc>
-                <a:tc>
-                  <a:txBody>
-                    <a:bodyPr/>
-                    <a:lstStyle/>
-                    <a:p>
-                      <a:pPr marL="0" algn="l" defTabSz="4388900" rtl="0" eaLnBrk="1" latinLnBrk="0" hangingPunct="1">
-                        <a:spcAft>
-                          <a:spcPts val="0"/>
-                        </a:spcAft>
-                      </a:pPr>
-                      <a:r>
-                        <a:rPr lang="en-GB" sz="1800" b="1" kern="1200" dirty="0">
-                          <a:solidFill>
-                            <a:schemeClr val="lt1"/>
-                          </a:solidFill>
-                          <a:effectLst/>
-                          <a:latin typeface="+mn-lt"/>
-                          <a:ea typeface="+mn-ea"/>
-                          <a:cs typeface="+mn-cs"/>
-                        </a:rPr>
-                        <a:t>Sample</a:t>
-                      </a:r>
-                      <a:endParaRPr lang="en-IE" sz="1800" b="1" kern="1200" dirty="0">
-                        <a:solidFill>
-                          <a:schemeClr val="lt1"/>
-                        </a:solidFill>
-                        <a:effectLst/>
-                        <a:latin typeface="+mn-lt"/>
-                        <a:ea typeface="+mn-ea"/>
-                        <a:cs typeface="+mn-cs"/>
-                      </a:endParaRPr>
-                    </a:p>
-                  </a:txBody>
-                  <a:tcPr marL="68580" marR="68580" marT="0" marB="0" anchor="ctr">
-                    <a:solidFill>
-                      <a:schemeClr val="accent1"/>
-                    </a:solidFill>
-                  </a:tcPr>
-                </a:tc>
-                <a:extLst>
-                  <a:ext uri="{0D108BD9-81ED-4DB2-BD59-A6C34878D82A}">
-                    <a16:rowId xmlns:a16="http://schemas.microsoft.com/office/drawing/2014/main" val="10007"/>
-                  </a:ext>
-                </a:extLst>
-              </a:tr>
-              <a:tr h="289638">
-                <a:tc>
-                  <a:txBody>
-                    <a:bodyPr/>
-                    <a:lstStyle/>
-                    <a:p>
-                      <a:pPr>
-                        <a:spcAft>
-                          <a:spcPts val="0"/>
-                        </a:spcAft>
-                      </a:pPr>
-                      <a:r>
-                        <a:rPr lang="en-GB" sz="1600" b="0" dirty="0">
-                          <a:solidFill>
-                            <a:schemeClr val="tx1"/>
-                          </a:solidFill>
-                          <a:effectLst/>
-                          <a:latin typeface="Arial" panose="020B0604020202020204" pitchFamily="34" charset="0"/>
-                          <a:cs typeface="Arial" panose="020B0604020202020204" pitchFamily="34" charset="0"/>
-                        </a:rPr>
-                        <a:t>Student study habits questionnaire</a:t>
-                      </a:r>
-                      <a:endParaRPr lang="en-IE" sz="1600" b="0" dirty="0">
-                        <a:solidFill>
-                          <a:schemeClr val="tx1"/>
-                        </a:solidFill>
-                        <a:effectLst/>
-                        <a:latin typeface="Arial" panose="020B0604020202020204" pitchFamily="34" charset="0"/>
-                        <a:ea typeface="Times New Roman"/>
-                        <a:cs typeface="Arial" panose="020B0604020202020204" pitchFamily="34" charset="0"/>
-                      </a:endParaRPr>
-                    </a:p>
-                  </a:txBody>
-                  <a:tcPr marL="68580" marR="68580" marT="0" marB="0" anchor="ctr">
-                    <a:noFill/>
-                  </a:tcPr>
-                </a:tc>
-                <a:tc>
-                  <a:txBody>
-                    <a:bodyPr/>
-                    <a:lstStyle/>
-                    <a:p>
-                      <a:pPr>
-                        <a:spcAft>
-                          <a:spcPts val="0"/>
-                        </a:spcAft>
-                      </a:pPr>
-                      <a:r>
-                        <a:rPr lang="en-GB" sz="1600" b="0" dirty="0">
-                          <a:solidFill>
-                            <a:schemeClr val="tx1"/>
-                          </a:solidFill>
-                          <a:effectLst/>
-                          <a:latin typeface="Arial" panose="020B0604020202020204" pitchFamily="34" charset="0"/>
-                          <a:cs typeface="Arial" panose="020B0604020202020204" pitchFamily="34" charset="0"/>
-                        </a:rPr>
-                        <a:t>Quantitative</a:t>
-                      </a:r>
-                      <a:endParaRPr lang="en-IE" sz="1600" b="0" dirty="0">
-                        <a:solidFill>
-                          <a:schemeClr val="tx1"/>
-                        </a:solidFill>
-                        <a:effectLst/>
-                        <a:latin typeface="Arial" panose="020B0604020202020204" pitchFamily="34" charset="0"/>
-                        <a:ea typeface="Times New Roman"/>
-                        <a:cs typeface="Arial" panose="020B0604020202020204" pitchFamily="34" charset="0"/>
-                      </a:endParaRPr>
-                    </a:p>
-                  </a:txBody>
-                  <a:tcPr marL="68580" marR="68580" marT="0" marB="0" anchor="ctr">
-                    <a:noFill/>
-                  </a:tcPr>
-                </a:tc>
-                <a:tc>
-                  <a:txBody>
-                    <a:bodyPr/>
-                    <a:lstStyle/>
-                    <a:p>
-                      <a:pPr algn="r">
-                        <a:spcAft>
-                          <a:spcPts val="0"/>
-                        </a:spcAft>
-                      </a:pPr>
-                      <a:r>
-                        <a:rPr lang="en-GB" sz="1600" b="0" dirty="0">
-                          <a:solidFill>
-                            <a:schemeClr val="tx1"/>
-                          </a:solidFill>
-                          <a:effectLst/>
-                          <a:latin typeface="Arial" panose="020B0604020202020204" pitchFamily="34" charset="0"/>
-                          <a:cs typeface="Arial" panose="020B0604020202020204" pitchFamily="34" charset="0"/>
-                        </a:rPr>
-                        <a:t>53</a:t>
-                      </a:r>
-                      <a:endParaRPr lang="en-IE" sz="1600" b="0" dirty="0">
-                        <a:solidFill>
-                          <a:schemeClr val="tx1"/>
-                        </a:solidFill>
-                        <a:effectLst/>
-                        <a:latin typeface="Arial" panose="020B0604020202020204" pitchFamily="34" charset="0"/>
-                        <a:ea typeface="Times New Roman"/>
-                        <a:cs typeface="Arial" panose="020B0604020202020204" pitchFamily="34" charset="0"/>
-                      </a:endParaRPr>
-                    </a:p>
-                  </a:txBody>
-                  <a:tcPr marL="68580" marR="68580" marT="0" marB="0" anchor="ctr">
-                    <a:noFill/>
-                  </a:tcPr>
-                </a:tc>
-                <a:extLst>
-                  <a:ext uri="{0D108BD9-81ED-4DB2-BD59-A6C34878D82A}">
-                    <a16:rowId xmlns:a16="http://schemas.microsoft.com/office/drawing/2014/main" val="10008"/>
-                  </a:ext>
-                </a:extLst>
-              </a:tr>
-              <a:tr h="300445">
-                <a:tc>
-                  <a:txBody>
-                    <a:bodyPr/>
-                    <a:lstStyle/>
-                    <a:p>
-                      <a:pPr>
-                        <a:spcAft>
-                          <a:spcPts val="0"/>
-                        </a:spcAft>
-                      </a:pPr>
-                      <a:r>
-                        <a:rPr lang="en-GB" sz="1600" b="0" dirty="0">
-                          <a:solidFill>
-                            <a:schemeClr val="tx1"/>
-                          </a:solidFill>
-                          <a:effectLst/>
-                          <a:latin typeface="Arial" panose="020B0604020202020204" pitchFamily="34" charset="0"/>
-                          <a:cs typeface="Arial" panose="020B0604020202020204" pitchFamily="34" charset="0"/>
-                        </a:rPr>
-                        <a:t>Reflective Learning Journal</a:t>
-                      </a:r>
-                      <a:endParaRPr lang="en-IE" sz="1600" b="0" dirty="0">
-                        <a:solidFill>
-                          <a:schemeClr val="tx1"/>
-                        </a:solidFill>
-                        <a:effectLst/>
-                        <a:latin typeface="Arial" panose="020B0604020202020204" pitchFamily="34" charset="0"/>
-                        <a:ea typeface="Times New Roman"/>
-                        <a:cs typeface="Arial" panose="020B0604020202020204" pitchFamily="34" charset="0"/>
-                      </a:endParaRPr>
-                    </a:p>
-                  </a:txBody>
-                  <a:tcPr marL="68580" marR="68580" marT="0" marB="0" anchor="ctr">
-                    <a:noFill/>
-                  </a:tcPr>
-                </a:tc>
-                <a:tc>
-                  <a:txBody>
-                    <a:bodyPr/>
-                    <a:lstStyle/>
-                    <a:p>
-                      <a:pPr>
-                        <a:spcAft>
-                          <a:spcPts val="0"/>
-                        </a:spcAft>
-                      </a:pPr>
-                      <a:r>
-                        <a:rPr lang="en-GB" sz="1600" b="0" dirty="0">
-                          <a:solidFill>
-                            <a:schemeClr val="tx1"/>
-                          </a:solidFill>
-                          <a:effectLst/>
-                          <a:latin typeface="Arial" panose="020B0604020202020204" pitchFamily="34" charset="0"/>
-                          <a:cs typeface="Arial" panose="020B0604020202020204" pitchFamily="34" charset="0"/>
-                        </a:rPr>
-                        <a:t>Qualitative</a:t>
-                      </a:r>
-                      <a:endParaRPr lang="en-IE" sz="1600" b="0" dirty="0">
-                        <a:solidFill>
-                          <a:schemeClr val="tx1"/>
-                        </a:solidFill>
-                        <a:effectLst/>
-                        <a:latin typeface="Arial" panose="020B0604020202020204" pitchFamily="34" charset="0"/>
-                        <a:ea typeface="Times New Roman"/>
-                        <a:cs typeface="Arial" panose="020B0604020202020204" pitchFamily="34" charset="0"/>
-                      </a:endParaRPr>
-                    </a:p>
-                  </a:txBody>
-                  <a:tcPr marL="68580" marR="68580" marT="0" marB="0" anchor="ctr">
-                    <a:noFill/>
-                  </a:tcPr>
-                </a:tc>
-                <a:tc>
-                  <a:txBody>
-                    <a:bodyPr/>
-                    <a:lstStyle/>
-                    <a:p>
-                      <a:pPr algn="r">
-                        <a:spcAft>
-                          <a:spcPts val="0"/>
-                        </a:spcAft>
-                      </a:pPr>
-                      <a:r>
-                        <a:rPr lang="en-GB" sz="1600" b="0" dirty="0">
-                          <a:solidFill>
-                            <a:schemeClr val="tx1"/>
-                          </a:solidFill>
-                          <a:effectLst/>
-                          <a:latin typeface="Arial" panose="020B0604020202020204" pitchFamily="34" charset="0"/>
-                          <a:cs typeface="Arial" panose="020B0604020202020204" pitchFamily="34" charset="0"/>
-                        </a:rPr>
-                        <a:t>18</a:t>
-                      </a:r>
-                      <a:endParaRPr lang="en-IE" sz="1600" b="0" dirty="0">
-                        <a:solidFill>
-                          <a:schemeClr val="tx1"/>
-                        </a:solidFill>
-                        <a:effectLst/>
-                        <a:latin typeface="Arial" panose="020B0604020202020204" pitchFamily="34" charset="0"/>
-                        <a:ea typeface="Times New Roman"/>
-                        <a:cs typeface="Arial" panose="020B0604020202020204" pitchFamily="34" charset="0"/>
-                      </a:endParaRPr>
-                    </a:p>
-                  </a:txBody>
-                  <a:tcPr marL="68580" marR="68580" marT="0" marB="0" anchor="ctr">
-                    <a:noFill/>
-                  </a:tcPr>
-                </a:tc>
-                <a:extLst>
-                  <a:ext uri="{0D108BD9-81ED-4DB2-BD59-A6C34878D82A}">
-                    <a16:rowId xmlns:a16="http://schemas.microsoft.com/office/drawing/2014/main" val="10009"/>
-                  </a:ext>
-                </a:extLst>
-              </a:tr>
-              <a:tr h="274320">
-                <a:tc>
-                  <a:txBody>
-                    <a:bodyPr/>
-                    <a:lstStyle/>
-                    <a:p>
-                      <a:pPr>
-                        <a:spcAft>
-                          <a:spcPts val="0"/>
-                        </a:spcAft>
-                      </a:pPr>
-                      <a:r>
-                        <a:rPr lang="en-GB" sz="1600" b="0" dirty="0">
-                          <a:solidFill>
-                            <a:schemeClr val="tx1"/>
-                          </a:solidFill>
-                          <a:effectLst/>
-                          <a:latin typeface="Arial" panose="020B0604020202020204" pitchFamily="34" charset="0"/>
-                          <a:cs typeface="Arial" panose="020B0604020202020204" pitchFamily="34" charset="0"/>
-                        </a:rPr>
-                        <a:t>Interview (Journal evaluation and Study habits)</a:t>
-                      </a:r>
-                      <a:endParaRPr lang="en-IE" sz="1600" b="0" dirty="0">
-                        <a:solidFill>
-                          <a:schemeClr val="tx1"/>
-                        </a:solidFill>
-                        <a:effectLst/>
-                        <a:latin typeface="Arial" panose="020B0604020202020204" pitchFamily="34" charset="0"/>
-                        <a:ea typeface="Times New Roman"/>
-                        <a:cs typeface="Arial" panose="020B0604020202020204" pitchFamily="34" charset="0"/>
-                      </a:endParaRPr>
-                    </a:p>
-                  </a:txBody>
-                  <a:tcPr marL="68580" marR="68580" marT="0" marB="0" anchor="ctr">
-                    <a:noFill/>
-                  </a:tcPr>
-                </a:tc>
-                <a:tc>
-                  <a:txBody>
-                    <a:bodyPr/>
-                    <a:lstStyle/>
-                    <a:p>
-                      <a:pPr>
-                        <a:spcAft>
-                          <a:spcPts val="0"/>
-                        </a:spcAft>
-                      </a:pPr>
-                      <a:r>
-                        <a:rPr lang="en-GB" sz="1600" b="0" dirty="0">
-                          <a:solidFill>
-                            <a:schemeClr val="tx1"/>
-                          </a:solidFill>
-                          <a:effectLst/>
-                          <a:latin typeface="Arial" panose="020B0604020202020204" pitchFamily="34" charset="0"/>
-                          <a:cs typeface="Arial" panose="020B0604020202020204" pitchFamily="34" charset="0"/>
-                        </a:rPr>
-                        <a:t>Qualitative</a:t>
-                      </a:r>
-                      <a:endParaRPr lang="en-IE" sz="1600" b="0" dirty="0">
-                        <a:solidFill>
-                          <a:schemeClr val="tx1"/>
-                        </a:solidFill>
-                        <a:effectLst/>
-                        <a:latin typeface="Arial" panose="020B0604020202020204" pitchFamily="34" charset="0"/>
-                        <a:ea typeface="Times New Roman"/>
-                        <a:cs typeface="Arial" panose="020B0604020202020204" pitchFamily="34" charset="0"/>
-                      </a:endParaRPr>
-                    </a:p>
-                  </a:txBody>
-                  <a:tcPr marL="68580" marR="68580" marT="0" marB="0" anchor="ctr">
-                    <a:noFill/>
-                  </a:tcPr>
-                </a:tc>
-                <a:tc>
-                  <a:txBody>
-                    <a:bodyPr/>
-                    <a:lstStyle/>
-                    <a:p>
-                      <a:pPr algn="r">
-                        <a:spcAft>
-                          <a:spcPts val="0"/>
-                        </a:spcAft>
-                      </a:pPr>
-                      <a:r>
-                        <a:rPr lang="en-GB" sz="1600" b="0" dirty="0">
-                          <a:solidFill>
-                            <a:schemeClr val="tx1"/>
-                          </a:solidFill>
-                          <a:effectLst/>
-                          <a:latin typeface="Arial" panose="020B0604020202020204" pitchFamily="34" charset="0"/>
-                          <a:cs typeface="Arial" panose="020B0604020202020204" pitchFamily="34" charset="0"/>
-                        </a:rPr>
-                        <a:t>4</a:t>
-                      </a:r>
-                      <a:endParaRPr lang="en-IE" sz="1600" b="0" dirty="0">
-                        <a:solidFill>
-                          <a:schemeClr val="tx1"/>
-                        </a:solidFill>
-                        <a:effectLst/>
-                        <a:latin typeface="Arial" panose="020B0604020202020204" pitchFamily="34" charset="0"/>
-                        <a:ea typeface="Times New Roman"/>
-                        <a:cs typeface="Arial" panose="020B0604020202020204" pitchFamily="34" charset="0"/>
-                      </a:endParaRPr>
-                    </a:p>
-                  </a:txBody>
-                  <a:tcPr marL="68580" marR="68580" marT="0" marB="0" anchor="ctr">
-                    <a:noFill/>
-                  </a:tcPr>
-                </a:tc>
-                <a:extLst>
-                  <a:ext uri="{0D108BD9-81ED-4DB2-BD59-A6C34878D82A}">
-                    <a16:rowId xmlns:a16="http://schemas.microsoft.com/office/drawing/2014/main" val="10010"/>
-                  </a:ext>
-                </a:extLst>
-              </a:tr>
-              <a:tr h="0">
-                <a:tc gridSpan="3">
-                  <a:txBody>
-                    <a:bodyPr/>
-                    <a:lstStyle/>
-                    <a:p>
-                      <a:pPr>
-                        <a:spcAft>
-                          <a:spcPts val="0"/>
-                        </a:spcAft>
-                      </a:pPr>
-                      <a:endParaRPr lang="en-IE" sz="800" dirty="0">
-                        <a:solidFill>
-                          <a:schemeClr val="tx1"/>
-                        </a:solidFill>
-                        <a:effectLst/>
-                        <a:latin typeface="Arial" panose="020B0604020202020204" pitchFamily="34" charset="0"/>
-                        <a:ea typeface="Times New Roman"/>
-                        <a:cs typeface="Arial" panose="020B0604020202020204" pitchFamily="34" charset="0"/>
-                      </a:endParaRPr>
-                    </a:p>
-                  </a:txBody>
-                  <a:tcPr marL="68580" marR="68580" marT="0" marB="0" anchor="ctr">
-                    <a:noFill/>
-                  </a:tcPr>
-                </a:tc>
-                <a:tc hMerge="1">
-                  <a:txBody>
-                    <a:bodyPr/>
-                    <a:lstStyle/>
-                    <a:p>
-                      <a:endParaRPr lang="en-IE"/>
-                    </a:p>
-                  </a:txBody>
-                  <a:tcPr/>
-                </a:tc>
-                <a:tc hMerge="1">
-                  <a:txBody>
-                    <a:bodyPr/>
-                    <a:lstStyle/>
-                    <a:p>
-                      <a:endParaRPr lang="en-IE"/>
-                    </a:p>
-                  </a:txBody>
-                  <a:tcPr/>
-                </a:tc>
-                <a:extLst>
-                  <a:ext uri="{0D108BD9-81ED-4DB2-BD59-A6C34878D82A}">
-                    <a16:rowId xmlns:a16="http://schemas.microsoft.com/office/drawing/2014/main" val="10012"/>
-                  </a:ext>
-                </a:extLst>
-              </a:tr>
-              <a:tr h="398339">
-                <a:tc>
-                  <a:txBody>
-                    <a:bodyPr/>
-                    <a:lstStyle/>
-                    <a:p>
-                      <a:pPr>
-                        <a:spcAft>
-                          <a:spcPts val="0"/>
-                        </a:spcAft>
-                      </a:pPr>
-                      <a:r>
-                        <a:rPr lang="en-IE" sz="1800" dirty="0">
-                          <a:solidFill>
-                            <a:schemeClr val="tx1"/>
-                          </a:solidFill>
-                          <a:effectLst/>
-                          <a:latin typeface="Arial" panose="020B0604020202020204" pitchFamily="34" charset="0"/>
-                          <a:ea typeface="Times New Roman"/>
-                          <a:cs typeface="Arial" panose="020B0604020202020204" pitchFamily="34" charset="0"/>
-                        </a:rPr>
-                        <a:t>Principal Study - 2016</a:t>
-                      </a:r>
-                    </a:p>
-                  </a:txBody>
-                  <a:tcPr marL="68580" marR="68580" marT="0" marB="0" anchor="ctr"/>
-                </a:tc>
-                <a:tc>
-                  <a:txBody>
-                    <a:bodyPr/>
-                    <a:lstStyle/>
-                    <a:p>
-                      <a:pPr marL="0" algn="l" defTabSz="4388900" rtl="0" eaLnBrk="1" latinLnBrk="0" hangingPunct="1">
-                        <a:spcAft>
-                          <a:spcPts val="0"/>
-                        </a:spcAft>
-                      </a:pPr>
-                      <a:r>
-                        <a:rPr lang="en-GB" sz="2000" b="1" kern="1200" dirty="0">
-                          <a:solidFill>
-                            <a:schemeClr val="lt1"/>
-                          </a:solidFill>
-                          <a:effectLst/>
-                          <a:latin typeface="+mn-lt"/>
-                          <a:ea typeface="+mn-ea"/>
-                          <a:cs typeface="+mn-cs"/>
-                        </a:rPr>
-                        <a:t>Analysis</a:t>
-                      </a:r>
-                      <a:endParaRPr lang="en-IE" sz="2000" b="1" kern="1200" dirty="0">
-                        <a:solidFill>
-                          <a:schemeClr val="lt1"/>
-                        </a:solidFill>
-                        <a:effectLst/>
-                        <a:latin typeface="+mn-lt"/>
-                        <a:ea typeface="+mn-ea"/>
-                        <a:cs typeface="+mn-cs"/>
-                      </a:endParaRPr>
-                    </a:p>
-                  </a:txBody>
-                  <a:tcPr marL="68580" marR="68580" marT="0" marB="0" anchor="ctr">
-                    <a:solidFill>
-                      <a:schemeClr val="accent1"/>
-                    </a:solidFill>
-                  </a:tcPr>
-                </a:tc>
-                <a:tc>
-                  <a:txBody>
-                    <a:bodyPr/>
-                    <a:lstStyle/>
-                    <a:p>
-                      <a:pPr marL="0" algn="l" defTabSz="4388900" rtl="0" eaLnBrk="1" latinLnBrk="0" hangingPunct="1">
-                        <a:spcAft>
-                          <a:spcPts val="0"/>
-                        </a:spcAft>
-                      </a:pPr>
-                      <a:r>
-                        <a:rPr lang="en-GB" sz="2000" b="1" kern="1200" dirty="0">
-                          <a:solidFill>
-                            <a:schemeClr val="lt1"/>
-                          </a:solidFill>
-                          <a:effectLst/>
-                          <a:latin typeface="+mn-lt"/>
-                          <a:ea typeface="+mn-ea"/>
-                          <a:cs typeface="+mn-cs"/>
-                        </a:rPr>
-                        <a:t>Sample</a:t>
-                      </a:r>
-                      <a:endParaRPr lang="en-IE" sz="2000" b="1" kern="1200" dirty="0">
-                        <a:solidFill>
-                          <a:schemeClr val="lt1"/>
-                        </a:solidFill>
-                        <a:effectLst/>
-                        <a:latin typeface="+mn-lt"/>
-                        <a:ea typeface="+mn-ea"/>
-                        <a:cs typeface="+mn-cs"/>
-                      </a:endParaRPr>
-                    </a:p>
-                  </a:txBody>
-                  <a:tcPr marL="68580" marR="68580" marT="0" marB="0" anchor="ctr">
-                    <a:solidFill>
-                      <a:schemeClr val="accent1"/>
-                    </a:solidFill>
-                  </a:tcPr>
-                </a:tc>
-                <a:extLst>
-                  <a:ext uri="{0D108BD9-81ED-4DB2-BD59-A6C34878D82A}">
-                    <a16:rowId xmlns:a16="http://schemas.microsoft.com/office/drawing/2014/main" val="10013"/>
-                  </a:ext>
-                </a:extLst>
-              </a:tr>
-              <a:tr h="289639">
-                <a:tc>
-                  <a:txBody>
-                    <a:bodyPr/>
-                    <a:lstStyle/>
-                    <a:p>
-                      <a:pPr marL="0" algn="l" defTabSz="4388900" rtl="0" eaLnBrk="1" latinLnBrk="0" hangingPunct="1">
-                        <a:spcAft>
-                          <a:spcPts val="0"/>
-                        </a:spcAft>
-                      </a:pPr>
-                      <a:r>
-                        <a:rPr lang="en-IE" sz="1600" b="0" kern="1200" dirty="0">
-                          <a:solidFill>
-                            <a:schemeClr val="tx1"/>
-                          </a:solidFill>
-                          <a:effectLst/>
-                          <a:latin typeface="Arial" panose="020B0604020202020204" pitchFamily="34" charset="0"/>
-                          <a:ea typeface="+mn-ea"/>
-                          <a:cs typeface="Arial" panose="020B0604020202020204" pitchFamily="34" charset="0"/>
-                        </a:rPr>
-                        <a:t>Student Engagement &amp; Self-Efficacy Questionnaire – (Treatment</a:t>
-                      </a:r>
-                      <a:r>
-                        <a:rPr lang="en-IE" sz="1600" b="0" kern="1200" baseline="0" dirty="0">
-                          <a:solidFill>
-                            <a:schemeClr val="tx1"/>
-                          </a:solidFill>
-                          <a:effectLst/>
-                          <a:latin typeface="Arial" panose="020B0604020202020204" pitchFamily="34" charset="0"/>
-                          <a:ea typeface="+mn-ea"/>
-                          <a:cs typeface="Arial" panose="020B0604020202020204" pitchFamily="34" charset="0"/>
-                        </a:rPr>
-                        <a:t> Group)</a:t>
-                      </a:r>
-                      <a:endParaRPr lang="en-IE" sz="1600" b="0" kern="1200" dirty="0">
-                        <a:solidFill>
-                          <a:schemeClr val="tx1"/>
-                        </a:solidFill>
-                        <a:effectLst/>
-                        <a:latin typeface="Arial" panose="020B0604020202020204" pitchFamily="34" charset="0"/>
-                        <a:ea typeface="+mn-ea"/>
-                        <a:cs typeface="Arial" panose="020B0604020202020204" pitchFamily="34" charset="0"/>
-                      </a:endParaRPr>
-                    </a:p>
-                  </a:txBody>
-                  <a:tcPr marL="68580" marR="68580" marT="0" marB="0" anchor="ctr">
-                    <a:noFill/>
-                  </a:tcPr>
-                </a:tc>
-                <a:tc>
-                  <a:txBody>
-                    <a:bodyPr/>
-                    <a:lstStyle/>
-                    <a:p>
-                      <a:pPr>
-                        <a:spcAft>
-                          <a:spcPts val="0"/>
-                        </a:spcAft>
-                      </a:pPr>
-                      <a:r>
-                        <a:rPr lang="en-GB" sz="1600" b="0" dirty="0">
-                          <a:solidFill>
-                            <a:schemeClr val="tx1"/>
-                          </a:solidFill>
-                          <a:effectLst/>
-                          <a:latin typeface="Arial" panose="020B0604020202020204" pitchFamily="34" charset="0"/>
-                          <a:cs typeface="Arial" panose="020B0604020202020204" pitchFamily="34" charset="0"/>
-                        </a:rPr>
-                        <a:t>Quantitative</a:t>
-                      </a:r>
-                      <a:endParaRPr lang="en-IE" sz="1600" b="0" dirty="0">
-                        <a:solidFill>
-                          <a:schemeClr val="tx1"/>
-                        </a:solidFill>
-                        <a:effectLst/>
-                        <a:latin typeface="Arial" panose="020B0604020202020204" pitchFamily="34" charset="0"/>
-                        <a:ea typeface="Times New Roman"/>
-                        <a:cs typeface="Arial" panose="020B0604020202020204" pitchFamily="34" charset="0"/>
-                      </a:endParaRPr>
-                    </a:p>
-                  </a:txBody>
-                  <a:tcPr marL="68580" marR="68580" marT="0" marB="0" anchor="ctr">
-                    <a:noFill/>
-                  </a:tcPr>
-                </a:tc>
-                <a:tc>
-                  <a:txBody>
-                    <a:bodyPr/>
-                    <a:lstStyle/>
-                    <a:p>
-                      <a:pPr algn="r">
-                        <a:spcAft>
-                          <a:spcPts val="0"/>
-                        </a:spcAft>
-                      </a:pPr>
-                      <a:r>
-                        <a:rPr lang="en-GB" sz="1600" b="0" dirty="0">
-                          <a:solidFill>
-                            <a:schemeClr val="tx1"/>
-                          </a:solidFill>
-                          <a:effectLst/>
-                          <a:latin typeface="Arial" panose="020B0604020202020204" pitchFamily="34" charset="0"/>
-                          <a:cs typeface="Arial" panose="020B0604020202020204" pitchFamily="34" charset="0"/>
-                        </a:rPr>
-                        <a:t>44</a:t>
-                      </a:r>
-                      <a:endParaRPr lang="en-IE" sz="1600" b="0" dirty="0">
-                        <a:solidFill>
-                          <a:schemeClr val="tx1"/>
-                        </a:solidFill>
-                        <a:effectLst/>
-                        <a:latin typeface="Arial" panose="020B0604020202020204" pitchFamily="34" charset="0"/>
-                        <a:ea typeface="Times New Roman"/>
-                        <a:cs typeface="Arial" panose="020B0604020202020204" pitchFamily="34" charset="0"/>
-                      </a:endParaRPr>
-                    </a:p>
-                  </a:txBody>
-                  <a:tcPr marL="68580" marR="68580" marT="0" marB="0" anchor="ctr">
-                    <a:noFill/>
-                  </a:tcPr>
-                </a:tc>
-                <a:extLst>
-                  <a:ext uri="{0D108BD9-81ED-4DB2-BD59-A6C34878D82A}">
-                    <a16:rowId xmlns:a16="http://schemas.microsoft.com/office/drawing/2014/main" val="10014"/>
-                  </a:ext>
-                </a:extLst>
-              </a:tr>
-              <a:tr h="326571">
-                <a:tc>
-                  <a:txBody>
-                    <a:bodyPr/>
-                    <a:lstStyle/>
-                    <a:p>
-                      <a:pPr marL="0" algn="l" defTabSz="4388900" rtl="0" eaLnBrk="1" latinLnBrk="0" hangingPunct="1">
-                        <a:spcAft>
-                          <a:spcPts val="0"/>
-                        </a:spcAft>
-                      </a:pPr>
-                      <a:r>
-                        <a:rPr lang="en-IE" sz="1600" b="0" kern="1200" dirty="0">
-                          <a:solidFill>
-                            <a:schemeClr val="tx1"/>
-                          </a:solidFill>
-                          <a:effectLst/>
-                          <a:latin typeface="Arial" panose="020B0604020202020204" pitchFamily="34" charset="0"/>
-                          <a:ea typeface="+mn-ea"/>
-                          <a:cs typeface="Arial" panose="020B0604020202020204" pitchFamily="34" charset="0"/>
-                        </a:rPr>
-                        <a:t>Student Engagement &amp; Self-Efficacy Questionnaire –(Control)</a:t>
-                      </a:r>
-                    </a:p>
-                  </a:txBody>
-                  <a:tcPr marL="68580" marR="68580" marT="0" marB="0" anchor="ctr">
-                    <a:noFill/>
-                  </a:tcPr>
-                </a:tc>
-                <a:tc>
-                  <a:txBody>
-                    <a:bodyPr/>
-                    <a:lstStyle/>
-                    <a:p>
-                      <a:pPr>
-                        <a:spcAft>
-                          <a:spcPts val="0"/>
-                        </a:spcAft>
-                      </a:pPr>
-                      <a:r>
-                        <a:rPr lang="en-GB" sz="1600" b="0" dirty="0">
-                          <a:solidFill>
-                            <a:schemeClr val="tx1"/>
-                          </a:solidFill>
-                          <a:effectLst/>
-                          <a:latin typeface="Arial" panose="020B0604020202020204" pitchFamily="34" charset="0"/>
-                          <a:cs typeface="Arial" panose="020B0604020202020204" pitchFamily="34" charset="0"/>
-                        </a:rPr>
-                        <a:t>Quantitative</a:t>
-                      </a:r>
-                      <a:endParaRPr lang="en-IE" sz="1600" b="0" dirty="0">
-                        <a:solidFill>
-                          <a:schemeClr val="tx1"/>
-                        </a:solidFill>
-                        <a:effectLst/>
-                        <a:latin typeface="Arial" panose="020B0604020202020204" pitchFamily="34" charset="0"/>
-                        <a:ea typeface="Times New Roman"/>
-                        <a:cs typeface="Arial" panose="020B0604020202020204" pitchFamily="34" charset="0"/>
-                      </a:endParaRPr>
-                    </a:p>
-                  </a:txBody>
-                  <a:tcPr marL="68580" marR="68580" marT="0" marB="0" anchor="ctr">
-                    <a:noFill/>
-                  </a:tcPr>
-                </a:tc>
-                <a:tc>
-                  <a:txBody>
-                    <a:bodyPr/>
-                    <a:lstStyle/>
-                    <a:p>
-                      <a:pPr algn="r">
-                        <a:spcAft>
-                          <a:spcPts val="0"/>
-                        </a:spcAft>
-                      </a:pPr>
-                      <a:r>
-                        <a:rPr lang="en-GB" sz="1600" b="0" dirty="0">
-                          <a:solidFill>
-                            <a:schemeClr val="tx1"/>
-                          </a:solidFill>
-                          <a:effectLst/>
-                          <a:latin typeface="Arial" panose="020B0604020202020204" pitchFamily="34" charset="0"/>
-                          <a:cs typeface="Arial" panose="020B0604020202020204" pitchFamily="34" charset="0"/>
-                        </a:rPr>
-                        <a:t>31</a:t>
-                      </a:r>
-                      <a:endParaRPr lang="en-IE" sz="1600" b="0" dirty="0">
-                        <a:solidFill>
-                          <a:schemeClr val="tx1"/>
-                        </a:solidFill>
-                        <a:effectLst/>
-                        <a:latin typeface="Arial" panose="020B0604020202020204" pitchFamily="34" charset="0"/>
-                        <a:ea typeface="Times New Roman"/>
-                        <a:cs typeface="Arial" panose="020B0604020202020204" pitchFamily="34" charset="0"/>
-                      </a:endParaRPr>
-                    </a:p>
-                  </a:txBody>
-                  <a:tcPr marL="68580" marR="68580" marT="0" marB="0" anchor="ctr">
-                    <a:noFill/>
-                  </a:tcPr>
-                </a:tc>
-                <a:extLst>
-                  <a:ext uri="{0D108BD9-81ED-4DB2-BD59-A6C34878D82A}">
-                    <a16:rowId xmlns:a16="http://schemas.microsoft.com/office/drawing/2014/main" val="10015"/>
-                  </a:ext>
-                </a:extLst>
-              </a:tr>
-              <a:tr h="300446">
-                <a:tc>
-                  <a:txBody>
-                    <a:bodyPr/>
-                    <a:lstStyle/>
-                    <a:p>
-                      <a:pPr>
-                        <a:spcAft>
-                          <a:spcPts val="0"/>
-                        </a:spcAft>
-                      </a:pPr>
-                      <a:r>
-                        <a:rPr lang="en-IE" sz="1600" b="0" dirty="0">
-                          <a:solidFill>
-                            <a:schemeClr val="tx1"/>
-                          </a:solidFill>
-                          <a:effectLst/>
-                          <a:latin typeface="Arial" panose="020B0604020202020204" pitchFamily="34" charset="0"/>
-                          <a:cs typeface="Arial" panose="020B0604020202020204" pitchFamily="34" charset="0"/>
-                        </a:rPr>
-                        <a:t>Interview (start and end of semester with principal programming lecturer )</a:t>
-                      </a:r>
-                      <a:endParaRPr lang="en-IE" sz="1600" b="0" dirty="0">
-                        <a:solidFill>
-                          <a:schemeClr val="tx1"/>
-                        </a:solidFill>
-                        <a:effectLst/>
-                        <a:latin typeface="Arial" panose="020B0604020202020204" pitchFamily="34" charset="0"/>
-                        <a:ea typeface="Times New Roman"/>
-                        <a:cs typeface="Arial" panose="020B0604020202020204" pitchFamily="34" charset="0"/>
-                      </a:endParaRPr>
-                    </a:p>
-                  </a:txBody>
-                  <a:tcPr marL="68580" marR="68580" marT="0" marB="0" anchor="ctr">
-                    <a:noFill/>
-                  </a:tcPr>
-                </a:tc>
-                <a:tc>
-                  <a:txBody>
-                    <a:bodyPr/>
-                    <a:lstStyle/>
-                    <a:p>
-                      <a:pPr>
-                        <a:spcAft>
-                          <a:spcPts val="0"/>
-                        </a:spcAft>
-                      </a:pPr>
-                      <a:r>
-                        <a:rPr lang="en-GB" sz="1600" b="0" dirty="0">
-                          <a:solidFill>
-                            <a:schemeClr val="tx1"/>
-                          </a:solidFill>
-                          <a:effectLst/>
-                          <a:latin typeface="Arial" panose="020B0604020202020204" pitchFamily="34" charset="0"/>
-                          <a:cs typeface="Arial" panose="020B0604020202020204" pitchFamily="34" charset="0"/>
-                        </a:rPr>
-                        <a:t>Qualitative</a:t>
-                      </a:r>
-                      <a:endParaRPr lang="en-IE" sz="1600" b="0" dirty="0">
-                        <a:solidFill>
-                          <a:schemeClr val="tx1"/>
-                        </a:solidFill>
-                        <a:effectLst/>
-                        <a:latin typeface="Arial" panose="020B0604020202020204" pitchFamily="34" charset="0"/>
-                        <a:ea typeface="Times New Roman"/>
-                        <a:cs typeface="Arial" panose="020B0604020202020204" pitchFamily="34" charset="0"/>
-                      </a:endParaRPr>
-                    </a:p>
-                  </a:txBody>
-                  <a:tcPr marL="68580" marR="68580" marT="0" marB="0" anchor="ctr">
-                    <a:noFill/>
-                  </a:tcPr>
-                </a:tc>
-                <a:tc>
-                  <a:txBody>
-                    <a:bodyPr/>
-                    <a:lstStyle/>
-                    <a:p>
-                      <a:pPr algn="r">
-                        <a:spcAft>
-                          <a:spcPts val="0"/>
-                        </a:spcAft>
-                      </a:pPr>
-                      <a:r>
-                        <a:rPr lang="en-GB" sz="1600" b="0" dirty="0">
-                          <a:solidFill>
-                            <a:schemeClr val="tx1"/>
-                          </a:solidFill>
-                          <a:effectLst/>
-                          <a:latin typeface="Arial" panose="020B0604020202020204" pitchFamily="34" charset="0"/>
-                          <a:cs typeface="Arial" panose="020B0604020202020204" pitchFamily="34" charset="0"/>
-                        </a:rPr>
-                        <a:t>1</a:t>
-                      </a:r>
-                      <a:endParaRPr lang="en-IE" sz="1600" b="0" dirty="0">
-                        <a:solidFill>
-                          <a:schemeClr val="tx1"/>
-                        </a:solidFill>
-                        <a:effectLst/>
-                        <a:latin typeface="Arial" panose="020B0604020202020204" pitchFamily="34" charset="0"/>
-                        <a:ea typeface="Times New Roman"/>
-                        <a:cs typeface="Arial" panose="020B0604020202020204" pitchFamily="34" charset="0"/>
-                      </a:endParaRPr>
-                    </a:p>
-                  </a:txBody>
-                  <a:tcPr marL="68580" marR="68580" marT="0" marB="0" anchor="ctr">
-                    <a:noFill/>
-                  </a:tcPr>
-                </a:tc>
-                <a:extLst>
-                  <a:ext uri="{0D108BD9-81ED-4DB2-BD59-A6C34878D82A}">
-                    <a16:rowId xmlns:a16="http://schemas.microsoft.com/office/drawing/2014/main" val="10016"/>
-                  </a:ext>
-                </a:extLst>
-              </a:tr>
-              <a:tr h="300445">
-                <a:tc>
-                  <a:txBody>
-                    <a:bodyPr/>
-                    <a:lstStyle/>
-                    <a:p>
-                      <a:pPr>
-                        <a:spcAft>
-                          <a:spcPts val="0"/>
-                        </a:spcAft>
-                      </a:pPr>
-                      <a:r>
-                        <a:rPr lang="en-IE" sz="1600" b="0" dirty="0">
-                          <a:solidFill>
-                            <a:schemeClr val="tx1"/>
-                          </a:solidFill>
-                          <a:effectLst/>
-                          <a:latin typeface="Arial" panose="020B0604020202020204" pitchFamily="34" charset="0"/>
-                          <a:cs typeface="Arial" panose="020B0604020202020204" pitchFamily="34" charset="0"/>
-                        </a:rPr>
-                        <a:t>Interview (end of semester with treatment group participants)</a:t>
-                      </a:r>
-                      <a:endParaRPr lang="en-IE" sz="1600" b="0" dirty="0">
-                        <a:solidFill>
-                          <a:schemeClr val="tx1"/>
-                        </a:solidFill>
-                        <a:effectLst/>
-                        <a:latin typeface="Arial" panose="020B0604020202020204" pitchFamily="34" charset="0"/>
-                        <a:ea typeface="Times New Roman"/>
-                        <a:cs typeface="Arial" panose="020B0604020202020204" pitchFamily="34" charset="0"/>
-                      </a:endParaRPr>
-                    </a:p>
-                  </a:txBody>
-                  <a:tcPr marL="68580" marR="68580" marT="0" marB="0" anchor="ctr">
-                    <a:noFill/>
-                  </a:tcPr>
-                </a:tc>
-                <a:tc>
-                  <a:txBody>
-                    <a:bodyPr/>
-                    <a:lstStyle/>
-                    <a:p>
-                      <a:pPr>
-                        <a:spcAft>
-                          <a:spcPts val="0"/>
-                        </a:spcAft>
-                      </a:pPr>
-                      <a:r>
-                        <a:rPr lang="en-GB" sz="1600" b="0" dirty="0">
-                          <a:solidFill>
-                            <a:schemeClr val="tx1"/>
-                          </a:solidFill>
-                          <a:effectLst/>
-                          <a:latin typeface="Arial" panose="020B0604020202020204" pitchFamily="34" charset="0"/>
-                          <a:cs typeface="Arial" panose="020B0604020202020204" pitchFamily="34" charset="0"/>
-                        </a:rPr>
-                        <a:t>Qualitative</a:t>
-                      </a:r>
-                      <a:endParaRPr lang="en-IE" sz="1600" b="0" dirty="0">
-                        <a:solidFill>
-                          <a:schemeClr val="tx1"/>
-                        </a:solidFill>
-                        <a:effectLst/>
-                        <a:latin typeface="Arial" panose="020B0604020202020204" pitchFamily="34" charset="0"/>
-                        <a:ea typeface="Times New Roman"/>
-                        <a:cs typeface="Arial" panose="020B0604020202020204" pitchFamily="34" charset="0"/>
-                      </a:endParaRPr>
-                    </a:p>
-                  </a:txBody>
-                  <a:tcPr marL="68580" marR="68580" marT="0" marB="0" anchor="ctr">
-                    <a:noFill/>
-                  </a:tcPr>
-                </a:tc>
-                <a:tc>
-                  <a:txBody>
-                    <a:bodyPr/>
-                    <a:lstStyle/>
-                    <a:p>
-                      <a:pPr algn="r">
-                        <a:spcAft>
-                          <a:spcPts val="0"/>
-                        </a:spcAft>
-                      </a:pPr>
-                      <a:r>
-                        <a:rPr lang="en-GB" sz="1600" b="0" dirty="0">
-                          <a:solidFill>
-                            <a:schemeClr val="tx1"/>
-                          </a:solidFill>
-                          <a:effectLst/>
-                          <a:latin typeface="Arial" panose="020B0604020202020204" pitchFamily="34" charset="0"/>
-                          <a:cs typeface="Arial" panose="020B0604020202020204" pitchFamily="34" charset="0"/>
-                        </a:rPr>
-                        <a:t>4</a:t>
-                      </a:r>
-                      <a:endParaRPr lang="en-IE" sz="1600" b="0" dirty="0">
-                        <a:solidFill>
-                          <a:schemeClr val="tx1"/>
-                        </a:solidFill>
-                        <a:effectLst/>
-                        <a:latin typeface="Arial" panose="020B0604020202020204" pitchFamily="34" charset="0"/>
-                        <a:ea typeface="Times New Roman"/>
-                        <a:cs typeface="Arial" panose="020B0604020202020204" pitchFamily="34" charset="0"/>
-                      </a:endParaRPr>
-                    </a:p>
-                  </a:txBody>
-                  <a:tcPr marL="68580" marR="68580" marT="0" marB="0" anchor="ctr">
-                    <a:noFill/>
-                  </a:tcPr>
-                </a:tc>
-                <a:extLst>
-                  <a:ext uri="{0D108BD9-81ED-4DB2-BD59-A6C34878D82A}">
-                    <a16:rowId xmlns:a16="http://schemas.microsoft.com/office/drawing/2014/main" val="10017"/>
-                  </a:ext>
-                </a:extLst>
-              </a:tr>
-              <a:tr h="308218">
-                <a:tc>
-                  <a:txBody>
-                    <a:bodyPr/>
-                    <a:lstStyle/>
-                    <a:p>
-                      <a:pPr>
-                        <a:spcAft>
-                          <a:spcPts val="0"/>
-                        </a:spcAft>
-                      </a:pPr>
-                      <a:r>
-                        <a:rPr lang="en-IE" sz="1600" b="0" dirty="0">
-                          <a:solidFill>
-                            <a:schemeClr val="tx1"/>
-                          </a:solidFill>
-                          <a:effectLst/>
-                          <a:latin typeface="Arial" panose="020B0604020202020204" pitchFamily="34" charset="0"/>
-                          <a:cs typeface="Arial" panose="020B0604020202020204" pitchFamily="34" charset="0"/>
-                        </a:rPr>
-                        <a:t>PBL/PAL activity feedback forms (5x sessions)</a:t>
-                      </a:r>
-                      <a:endParaRPr lang="en-IE" sz="1600" b="0" dirty="0">
-                        <a:solidFill>
-                          <a:schemeClr val="tx1"/>
-                        </a:solidFill>
-                        <a:effectLst/>
-                        <a:latin typeface="Arial" panose="020B0604020202020204" pitchFamily="34" charset="0"/>
-                        <a:ea typeface="Times New Roman"/>
-                        <a:cs typeface="Arial" panose="020B0604020202020204" pitchFamily="34" charset="0"/>
-                      </a:endParaRPr>
-                    </a:p>
-                  </a:txBody>
-                  <a:tcPr marL="68580" marR="68580" marT="0" marB="0" anchor="ctr">
-                    <a:noFill/>
-                  </a:tcPr>
-                </a:tc>
-                <a:tc>
-                  <a:txBody>
-                    <a:bodyPr/>
-                    <a:lstStyle/>
-                    <a:p>
-                      <a:pPr>
-                        <a:spcAft>
-                          <a:spcPts val="0"/>
-                        </a:spcAft>
-                      </a:pPr>
-                      <a:r>
-                        <a:rPr lang="en-GB" sz="1600" b="0" dirty="0">
-                          <a:solidFill>
-                            <a:schemeClr val="tx1"/>
-                          </a:solidFill>
-                          <a:effectLst/>
-                          <a:latin typeface="Arial" panose="020B0604020202020204" pitchFamily="34" charset="0"/>
-                          <a:cs typeface="Arial" panose="020B0604020202020204" pitchFamily="34" charset="0"/>
-                        </a:rPr>
-                        <a:t>Qualitative</a:t>
-                      </a:r>
-                      <a:endParaRPr lang="en-IE" sz="1600" b="0" dirty="0">
-                        <a:solidFill>
-                          <a:schemeClr val="tx1"/>
-                        </a:solidFill>
-                        <a:effectLst/>
-                        <a:latin typeface="Arial" panose="020B0604020202020204" pitchFamily="34" charset="0"/>
-                        <a:ea typeface="Times New Roman"/>
-                        <a:cs typeface="Arial" panose="020B0604020202020204" pitchFamily="34" charset="0"/>
-                      </a:endParaRPr>
-                    </a:p>
-                  </a:txBody>
-                  <a:tcPr marL="68580" marR="68580" marT="0" marB="0" anchor="ctr">
-                    <a:noFill/>
-                  </a:tcPr>
-                </a:tc>
-                <a:tc>
-                  <a:txBody>
-                    <a:bodyPr/>
-                    <a:lstStyle/>
-                    <a:p>
-                      <a:pPr algn="r">
-                        <a:spcAft>
-                          <a:spcPts val="0"/>
-                        </a:spcAft>
-                      </a:pPr>
-                      <a:r>
-                        <a:rPr lang="en-GB" sz="1600" b="0" dirty="0">
-                          <a:solidFill>
-                            <a:schemeClr val="tx1"/>
-                          </a:solidFill>
-                          <a:effectLst/>
-                          <a:latin typeface="Arial" panose="020B0604020202020204" pitchFamily="34" charset="0"/>
-                          <a:cs typeface="Arial" panose="020B0604020202020204" pitchFamily="34" charset="0"/>
-                        </a:rPr>
-                        <a:t>46</a:t>
-                      </a:r>
-                      <a:endParaRPr lang="en-IE" sz="1600" b="0" dirty="0">
-                        <a:solidFill>
-                          <a:schemeClr val="tx1"/>
-                        </a:solidFill>
-                        <a:effectLst/>
-                        <a:latin typeface="Arial" panose="020B0604020202020204" pitchFamily="34" charset="0"/>
-                        <a:ea typeface="Times New Roman"/>
-                        <a:cs typeface="Arial" panose="020B0604020202020204" pitchFamily="34" charset="0"/>
-                      </a:endParaRPr>
-                    </a:p>
-                  </a:txBody>
-                  <a:tcPr marL="68580" marR="68580" marT="0" marB="0" anchor="ctr">
-                    <a:noFill/>
-                  </a:tcPr>
-                </a:tc>
-                <a:extLst>
-                  <a:ext uri="{0D108BD9-81ED-4DB2-BD59-A6C34878D82A}">
-                    <a16:rowId xmlns:a16="http://schemas.microsoft.com/office/drawing/2014/main" val="10018"/>
-                  </a:ext>
-                </a:extLst>
-              </a:tr>
-            </a:tbl>
-          </a:graphicData>
-        </a:graphic>
-      </p:graphicFrame>
-      <p:sp>
-        <p:nvSpPr>
-          <p:cNvPr id="45" name="Text Placeholder 4"/>
-          <p:cNvSpPr>
-            <a:spLocks noGrp="1"/>
-          </p:cNvSpPr>
-          <p:nvPr>
-            <p:ph type="body" sz="quarter" idx="21"/>
-          </p:nvPr>
-        </p:nvSpPr>
-        <p:spPr>
-          <a:xfrm>
-            <a:off x="11459293" y="25496880"/>
-            <a:ext cx="10048874" cy="846363"/>
-          </a:xfrm>
-        </p:spPr>
-        <p:txBody>
-          <a:bodyPr/>
-          <a:lstStyle/>
-          <a:p>
-            <a:r>
-              <a:rPr lang="en-US" b="1" i="1" u="sng" dirty="0">
-                <a:solidFill>
-                  <a:schemeClr val="tx2"/>
-                </a:solidFill>
-                <a:latin typeface="Arial" panose="020B0604020202020204" pitchFamily="34" charset="0"/>
-                <a:cs typeface="Arial" panose="020B0604020202020204" pitchFamily="34" charset="0"/>
-              </a:rPr>
-              <a:t>Data Collection</a:t>
-            </a:r>
-          </a:p>
-        </p:txBody>
-      </p:sp>
       <p:sp>
         <p:nvSpPr>
           <p:cNvPr id="39" name="Content Placeholder 2">
@@ -18243,588 +16117,6 @@
               <a:latin typeface="Arial" panose="020B0604020202020204" pitchFamily="34" charset="0"/>
               <a:cs typeface="Arial" panose="020B0604020202020204" pitchFamily="34" charset="0"/>
             </a:endParaRPr>
-          </a:p>
-        </p:txBody>
-      </p:sp>
-      <p:sp>
-        <p:nvSpPr>
-          <p:cNvPr id="34" name="Text Placeholder 4"/>
-          <p:cNvSpPr>
-            <a:spLocks noGrp="1"/>
-          </p:cNvSpPr>
-          <p:nvPr>
-            <p:ph type="body" sz="quarter" idx="21"/>
-          </p:nvPr>
-        </p:nvSpPr>
-        <p:spPr>
-          <a:xfrm>
-            <a:off x="11453400" y="17075571"/>
-            <a:ext cx="10048874" cy="846363"/>
-          </a:xfrm>
-        </p:spPr>
-        <p:txBody>
-          <a:bodyPr/>
-          <a:lstStyle/>
-          <a:p>
-            <a:r>
-              <a:rPr lang="en-US" b="1" i="1" u="sng" dirty="0">
-                <a:solidFill>
-                  <a:schemeClr val="tx2"/>
-                </a:solidFill>
-                <a:latin typeface="Arial" panose="020B0604020202020204" pitchFamily="34" charset="0"/>
-                <a:cs typeface="Arial" panose="020B0604020202020204" pitchFamily="34" charset="0"/>
-              </a:rPr>
-              <a:t>Research Methods</a:t>
-            </a:r>
-          </a:p>
-        </p:txBody>
-      </p:sp>
-      <p:sp>
-        <p:nvSpPr>
-          <p:cNvPr id="35" name="Text Placeholder 4">
-            <a:extLst>
-              <a:ext uri="{FF2B5EF4-FFF2-40B4-BE49-F238E27FC236}">
-                <a16:creationId xmlns:a16="http://schemas.microsoft.com/office/drawing/2014/main" id="{9000B3FD-55D3-45AB-92CB-10A741BAA0B3}"/>
-              </a:ext>
-            </a:extLst>
-          </p:cNvPr>
-          <p:cNvSpPr txBox="1">
-            <a:spLocks/>
-          </p:cNvSpPr>
-          <p:nvPr/>
-        </p:nvSpPr>
-        <p:spPr>
-          <a:xfrm>
-            <a:off x="11449319" y="17642446"/>
-            <a:ext cx="10048874" cy="1200306"/>
-          </a:xfrm>
-          <a:prstGeom prst="rect">
-            <a:avLst/>
-          </a:prstGeom>
-        </p:spPr>
-        <p:txBody>
-          <a:bodyPr wrap="square" lIns="228589" tIns="228589" rIns="228589" bIns="228589">
-            <a:spAutoFit/>
-          </a:bodyPr>
-          <a:lstStyle>
-            <a:lvl1pPr marL="0" indent="0" algn="l" defTabSz="4388900" rtl="0" eaLnBrk="1" latinLnBrk="0" hangingPunct="1">
-              <a:spcBef>
-                <a:spcPct val="20000"/>
-              </a:spcBef>
-              <a:buFont typeface="Arial" pitchFamily="34" charset="0"/>
-              <a:buNone/>
-              <a:defRPr sz="2500" kern="1200">
-                <a:solidFill>
-                  <a:schemeClr val="accent5">
-                    <a:lumMod val="50000"/>
-                  </a:schemeClr>
-                </a:solidFill>
-                <a:latin typeface="Times New Roman" pitchFamily="18" charset="0"/>
-                <a:ea typeface="+mn-ea"/>
-                <a:cs typeface="Times New Roman" pitchFamily="18" charset="0"/>
-              </a:defRPr>
-            </a:lvl1pPr>
-            <a:lvl2pPr marL="1485825" indent="-571471" algn="l" defTabSz="4388900" rtl="0" eaLnBrk="1" latinLnBrk="0" hangingPunct="1">
-              <a:spcBef>
-                <a:spcPct val="20000"/>
-              </a:spcBef>
-              <a:buFont typeface="Arial" pitchFamily="34" charset="0"/>
-              <a:buChar char="–"/>
-              <a:defRPr sz="2500" kern="1200">
-                <a:solidFill>
-                  <a:schemeClr val="tx1"/>
-                </a:solidFill>
-                <a:latin typeface="Trebuchet MS" pitchFamily="34" charset="0"/>
-                <a:ea typeface="+mn-ea"/>
-                <a:cs typeface="+mn-cs"/>
-              </a:defRPr>
-            </a:lvl2pPr>
-            <a:lvl3pPr marL="2057297" indent="-571471" algn="l" defTabSz="4388900" rtl="0" eaLnBrk="1" latinLnBrk="0" hangingPunct="1">
-              <a:spcBef>
-                <a:spcPct val="20000"/>
-              </a:spcBef>
-              <a:buFont typeface="Arial" pitchFamily="34" charset="0"/>
-              <a:buChar char="•"/>
-              <a:defRPr sz="2500" kern="1200">
-                <a:solidFill>
-                  <a:schemeClr val="tx1"/>
-                </a:solidFill>
-                <a:latin typeface="Trebuchet MS" pitchFamily="34" charset="0"/>
-                <a:ea typeface="+mn-ea"/>
-                <a:cs typeface="+mn-cs"/>
-              </a:defRPr>
-            </a:lvl3pPr>
-            <a:lvl4pPr marL="2685916" indent="-628619" algn="l" defTabSz="4388900" rtl="0" eaLnBrk="1" latinLnBrk="0" hangingPunct="1">
-              <a:spcBef>
-                <a:spcPct val="20000"/>
-              </a:spcBef>
-              <a:buFont typeface="Arial" pitchFamily="34" charset="0"/>
-              <a:buChar char="–"/>
-              <a:defRPr sz="2500" kern="1200">
-                <a:solidFill>
-                  <a:schemeClr val="tx1"/>
-                </a:solidFill>
-                <a:latin typeface="Trebuchet MS" pitchFamily="34" charset="0"/>
-                <a:ea typeface="+mn-ea"/>
-                <a:cs typeface="+mn-cs"/>
-              </a:defRPr>
-            </a:lvl4pPr>
-            <a:lvl5pPr marL="3143093" indent="-457177" algn="l" defTabSz="4388900" rtl="0" eaLnBrk="1" latinLnBrk="0" hangingPunct="1">
-              <a:spcBef>
-                <a:spcPct val="20000"/>
-              </a:spcBef>
-              <a:buFont typeface="Arial" pitchFamily="34" charset="0"/>
-              <a:buChar char="»"/>
-              <a:defRPr sz="2500" kern="1200">
-                <a:solidFill>
-                  <a:schemeClr val="tx1"/>
-                </a:solidFill>
-                <a:latin typeface="Trebuchet MS" pitchFamily="34" charset="0"/>
-                <a:ea typeface="+mn-ea"/>
-                <a:cs typeface="+mn-cs"/>
-              </a:defRPr>
-            </a:lvl5pPr>
-            <a:lvl6pPr marL="12069477" indent="-1097226" algn="l" defTabSz="4388900" rtl="0" eaLnBrk="1" latinLnBrk="0" hangingPunct="1">
-              <a:spcBef>
-                <a:spcPct val="20000"/>
-              </a:spcBef>
-              <a:buFont typeface="Arial" pitchFamily="34" charset="0"/>
-              <a:buChar char="•"/>
-              <a:defRPr sz="9600" kern="1200">
-                <a:solidFill>
-                  <a:schemeClr val="tx1"/>
-                </a:solidFill>
-                <a:latin typeface="+mn-lt"/>
-                <a:ea typeface="+mn-ea"/>
-                <a:cs typeface="+mn-cs"/>
-              </a:defRPr>
-            </a:lvl6pPr>
-            <a:lvl7pPr marL="14263926" indent="-1097226" algn="l" defTabSz="4388900" rtl="0" eaLnBrk="1" latinLnBrk="0" hangingPunct="1">
-              <a:spcBef>
-                <a:spcPct val="20000"/>
-              </a:spcBef>
-              <a:buFont typeface="Arial" pitchFamily="34" charset="0"/>
-              <a:buChar char="•"/>
-              <a:defRPr sz="9600" kern="1200">
-                <a:solidFill>
-                  <a:schemeClr val="tx1"/>
-                </a:solidFill>
-                <a:latin typeface="+mn-lt"/>
-                <a:ea typeface="+mn-ea"/>
-                <a:cs typeface="+mn-cs"/>
-              </a:defRPr>
-            </a:lvl7pPr>
-            <a:lvl8pPr marL="16458377" indent="-1097226" algn="l" defTabSz="4388900" rtl="0" eaLnBrk="1" latinLnBrk="0" hangingPunct="1">
-              <a:spcBef>
-                <a:spcPct val="20000"/>
-              </a:spcBef>
-              <a:buFont typeface="Arial" pitchFamily="34" charset="0"/>
-              <a:buChar char="•"/>
-              <a:defRPr sz="9600" kern="1200">
-                <a:solidFill>
-                  <a:schemeClr val="tx1"/>
-                </a:solidFill>
-                <a:latin typeface="+mn-lt"/>
-                <a:ea typeface="+mn-ea"/>
-                <a:cs typeface="+mn-cs"/>
-              </a:defRPr>
-            </a:lvl8pPr>
-            <a:lvl9pPr marL="18652827" indent="-1097226" algn="l" defTabSz="4388900" rtl="0" eaLnBrk="1" latinLnBrk="0" hangingPunct="1">
-              <a:spcBef>
-                <a:spcPct val="20000"/>
-              </a:spcBef>
-              <a:buFont typeface="Arial" pitchFamily="34" charset="0"/>
-              <a:buChar char="•"/>
-              <a:defRPr sz="9600" kern="1200">
-                <a:solidFill>
-                  <a:schemeClr val="tx1"/>
-                </a:solidFill>
-                <a:latin typeface="+mn-lt"/>
-                <a:ea typeface="+mn-ea"/>
-                <a:cs typeface="+mn-cs"/>
-              </a:defRPr>
-            </a:lvl9pPr>
-          </a:lstStyle>
-          <a:p>
-            <a:r>
-              <a:rPr lang="en-GB" sz="2400" dirty="0">
-                <a:solidFill>
-                  <a:schemeClr val="tx1"/>
-                </a:solidFill>
-                <a:latin typeface="Arial" panose="020B0604020202020204" pitchFamily="34" charset="0"/>
-                <a:cs typeface="Arial" panose="020B0604020202020204" pitchFamily="34" charset="0"/>
-              </a:rPr>
-              <a:t>The diagram below highlights the methods and tools used over the course of the action research study. </a:t>
-            </a:r>
-            <a:endParaRPr lang="en-US" sz="2400" dirty="0">
-              <a:solidFill>
-                <a:schemeClr val="tx1"/>
-              </a:solidFill>
-              <a:latin typeface="Arial" panose="020B0604020202020204" pitchFamily="34" charset="0"/>
-              <a:cs typeface="Arial" panose="020B0604020202020204" pitchFamily="34" charset="0"/>
-            </a:endParaRPr>
-          </a:p>
-        </p:txBody>
-      </p:sp>
-      <p:sp>
-        <p:nvSpPr>
-          <p:cNvPr id="43" name="Text Placeholder 4">
-            <a:extLst>
-              <a:ext uri="{FF2B5EF4-FFF2-40B4-BE49-F238E27FC236}">
-                <a16:creationId xmlns:a16="http://schemas.microsoft.com/office/drawing/2014/main" id="{D01E89C6-0794-4157-9DEF-383030D60FAB}"/>
-              </a:ext>
-            </a:extLst>
-          </p:cNvPr>
-          <p:cNvSpPr txBox="1">
-            <a:spLocks/>
-          </p:cNvSpPr>
-          <p:nvPr/>
-        </p:nvSpPr>
-        <p:spPr>
-          <a:xfrm>
-            <a:off x="11447321" y="26027104"/>
-            <a:ext cx="10048874" cy="830975"/>
-          </a:xfrm>
-          <a:prstGeom prst="rect">
-            <a:avLst/>
-          </a:prstGeom>
-        </p:spPr>
-        <p:txBody>
-          <a:bodyPr wrap="square" lIns="228589" tIns="228589" rIns="228589" bIns="228589">
-            <a:spAutoFit/>
-          </a:bodyPr>
-          <a:lstStyle>
-            <a:lvl1pPr marL="0" indent="0" algn="l" defTabSz="4388900" rtl="0" eaLnBrk="1" latinLnBrk="0" hangingPunct="1">
-              <a:spcBef>
-                <a:spcPct val="20000"/>
-              </a:spcBef>
-              <a:buFont typeface="Arial" pitchFamily="34" charset="0"/>
-              <a:buNone/>
-              <a:defRPr sz="2500" kern="1200">
-                <a:solidFill>
-                  <a:schemeClr val="accent5">
-                    <a:lumMod val="50000"/>
-                  </a:schemeClr>
-                </a:solidFill>
-                <a:latin typeface="Times New Roman" pitchFamily="18" charset="0"/>
-                <a:ea typeface="+mn-ea"/>
-                <a:cs typeface="Times New Roman" pitchFamily="18" charset="0"/>
-              </a:defRPr>
-            </a:lvl1pPr>
-            <a:lvl2pPr marL="1485825" indent="-571471" algn="l" defTabSz="4388900" rtl="0" eaLnBrk="1" latinLnBrk="0" hangingPunct="1">
-              <a:spcBef>
-                <a:spcPct val="20000"/>
-              </a:spcBef>
-              <a:buFont typeface="Arial" pitchFamily="34" charset="0"/>
-              <a:buChar char="–"/>
-              <a:defRPr sz="2500" kern="1200">
-                <a:solidFill>
-                  <a:schemeClr val="tx1"/>
-                </a:solidFill>
-                <a:latin typeface="Trebuchet MS" pitchFamily="34" charset="0"/>
-                <a:ea typeface="+mn-ea"/>
-                <a:cs typeface="+mn-cs"/>
-              </a:defRPr>
-            </a:lvl2pPr>
-            <a:lvl3pPr marL="2057297" indent="-571471" algn="l" defTabSz="4388900" rtl="0" eaLnBrk="1" latinLnBrk="0" hangingPunct="1">
-              <a:spcBef>
-                <a:spcPct val="20000"/>
-              </a:spcBef>
-              <a:buFont typeface="Arial" pitchFamily="34" charset="0"/>
-              <a:buChar char="•"/>
-              <a:defRPr sz="2500" kern="1200">
-                <a:solidFill>
-                  <a:schemeClr val="tx1"/>
-                </a:solidFill>
-                <a:latin typeface="Trebuchet MS" pitchFamily="34" charset="0"/>
-                <a:ea typeface="+mn-ea"/>
-                <a:cs typeface="+mn-cs"/>
-              </a:defRPr>
-            </a:lvl3pPr>
-            <a:lvl4pPr marL="2685916" indent="-628619" algn="l" defTabSz="4388900" rtl="0" eaLnBrk="1" latinLnBrk="0" hangingPunct="1">
-              <a:spcBef>
-                <a:spcPct val="20000"/>
-              </a:spcBef>
-              <a:buFont typeface="Arial" pitchFamily="34" charset="0"/>
-              <a:buChar char="–"/>
-              <a:defRPr sz="2500" kern="1200">
-                <a:solidFill>
-                  <a:schemeClr val="tx1"/>
-                </a:solidFill>
-                <a:latin typeface="Trebuchet MS" pitchFamily="34" charset="0"/>
-                <a:ea typeface="+mn-ea"/>
-                <a:cs typeface="+mn-cs"/>
-              </a:defRPr>
-            </a:lvl4pPr>
-            <a:lvl5pPr marL="3143093" indent="-457177" algn="l" defTabSz="4388900" rtl="0" eaLnBrk="1" latinLnBrk="0" hangingPunct="1">
-              <a:spcBef>
-                <a:spcPct val="20000"/>
-              </a:spcBef>
-              <a:buFont typeface="Arial" pitchFamily="34" charset="0"/>
-              <a:buChar char="»"/>
-              <a:defRPr sz="2500" kern="1200">
-                <a:solidFill>
-                  <a:schemeClr val="tx1"/>
-                </a:solidFill>
-                <a:latin typeface="Trebuchet MS" pitchFamily="34" charset="0"/>
-                <a:ea typeface="+mn-ea"/>
-                <a:cs typeface="+mn-cs"/>
-              </a:defRPr>
-            </a:lvl5pPr>
-            <a:lvl6pPr marL="12069477" indent="-1097226" algn="l" defTabSz="4388900" rtl="0" eaLnBrk="1" latinLnBrk="0" hangingPunct="1">
-              <a:spcBef>
-                <a:spcPct val="20000"/>
-              </a:spcBef>
-              <a:buFont typeface="Arial" pitchFamily="34" charset="0"/>
-              <a:buChar char="•"/>
-              <a:defRPr sz="9600" kern="1200">
-                <a:solidFill>
-                  <a:schemeClr val="tx1"/>
-                </a:solidFill>
-                <a:latin typeface="+mn-lt"/>
-                <a:ea typeface="+mn-ea"/>
-                <a:cs typeface="+mn-cs"/>
-              </a:defRPr>
-            </a:lvl6pPr>
-            <a:lvl7pPr marL="14263926" indent="-1097226" algn="l" defTabSz="4388900" rtl="0" eaLnBrk="1" latinLnBrk="0" hangingPunct="1">
-              <a:spcBef>
-                <a:spcPct val="20000"/>
-              </a:spcBef>
-              <a:buFont typeface="Arial" pitchFamily="34" charset="0"/>
-              <a:buChar char="•"/>
-              <a:defRPr sz="9600" kern="1200">
-                <a:solidFill>
-                  <a:schemeClr val="tx1"/>
-                </a:solidFill>
-                <a:latin typeface="+mn-lt"/>
-                <a:ea typeface="+mn-ea"/>
-                <a:cs typeface="+mn-cs"/>
-              </a:defRPr>
-            </a:lvl7pPr>
-            <a:lvl8pPr marL="16458377" indent="-1097226" algn="l" defTabSz="4388900" rtl="0" eaLnBrk="1" latinLnBrk="0" hangingPunct="1">
-              <a:spcBef>
-                <a:spcPct val="20000"/>
-              </a:spcBef>
-              <a:buFont typeface="Arial" pitchFamily="34" charset="0"/>
-              <a:buChar char="•"/>
-              <a:defRPr sz="9600" kern="1200">
-                <a:solidFill>
-                  <a:schemeClr val="tx1"/>
-                </a:solidFill>
-                <a:latin typeface="+mn-lt"/>
-                <a:ea typeface="+mn-ea"/>
-                <a:cs typeface="+mn-cs"/>
-              </a:defRPr>
-            </a:lvl8pPr>
-            <a:lvl9pPr marL="18652827" indent="-1097226" algn="l" defTabSz="4388900" rtl="0" eaLnBrk="1" latinLnBrk="0" hangingPunct="1">
-              <a:spcBef>
-                <a:spcPct val="20000"/>
-              </a:spcBef>
-              <a:buFont typeface="Arial" pitchFamily="34" charset="0"/>
-              <a:buChar char="•"/>
-              <a:defRPr sz="9600" kern="1200">
-                <a:solidFill>
-                  <a:schemeClr val="tx1"/>
-                </a:solidFill>
-                <a:latin typeface="+mn-lt"/>
-                <a:ea typeface="+mn-ea"/>
-                <a:cs typeface="+mn-cs"/>
-              </a:defRPr>
-            </a:lvl9pPr>
-          </a:lstStyle>
-          <a:p>
-            <a:r>
-              <a:rPr lang="en-GB" sz="2400" dirty="0">
-                <a:solidFill>
-                  <a:schemeClr val="tx1"/>
-                </a:solidFill>
-                <a:latin typeface="Arial" panose="020B0604020202020204" pitchFamily="34" charset="0"/>
-                <a:cs typeface="Arial" panose="020B0604020202020204" pitchFamily="34" charset="0"/>
-              </a:rPr>
-              <a:t>The table below is a summary of the data collected for the study.</a:t>
-            </a:r>
-            <a:endParaRPr lang="en-US" sz="2400" dirty="0">
-              <a:solidFill>
-                <a:schemeClr val="tx1"/>
-              </a:solidFill>
-              <a:latin typeface="Arial" panose="020B0604020202020204" pitchFamily="34" charset="0"/>
-              <a:cs typeface="Arial" panose="020B0604020202020204" pitchFamily="34" charset="0"/>
-            </a:endParaRPr>
-          </a:p>
-        </p:txBody>
-      </p:sp>
-      <p:sp>
-        <p:nvSpPr>
-          <p:cNvPr id="46" name="Content Placeholder 2">
-            <a:extLst>
-              <a:ext uri="{FF2B5EF4-FFF2-40B4-BE49-F238E27FC236}">
-                <a16:creationId xmlns:a16="http://schemas.microsoft.com/office/drawing/2014/main" id="{BA7BC14E-5C68-4BFC-B8B8-A1CD9BF3BFC9}"/>
-              </a:ext>
-            </a:extLst>
-          </p:cNvPr>
-          <p:cNvSpPr txBox="1">
-            <a:spLocks/>
-          </p:cNvSpPr>
-          <p:nvPr/>
-        </p:nvSpPr>
-        <p:spPr>
-          <a:xfrm>
-            <a:off x="22531031" y="12554206"/>
-            <a:ext cx="9795691" cy="5522693"/>
-          </a:xfrm>
-          <a:prstGeom prst="rect">
-            <a:avLst/>
-          </a:prstGeom>
-        </p:spPr>
-        <p:txBody>
-          <a:bodyPr>
-            <a:noAutofit/>
-          </a:bodyPr>
-          <a:lstStyle>
-            <a:lvl1pPr marL="1645838" indent="-1645838" algn="l" defTabSz="4388900" rtl="0" eaLnBrk="1" latinLnBrk="0" hangingPunct="1">
-              <a:spcBef>
-                <a:spcPct val="20000"/>
-              </a:spcBef>
-              <a:buFont typeface="Arial" pitchFamily="34" charset="0"/>
-              <a:buChar char="•"/>
-              <a:defRPr sz="15400" kern="1200">
-                <a:solidFill>
-                  <a:schemeClr val="tx1"/>
-                </a:solidFill>
-                <a:latin typeface="+mn-lt"/>
-                <a:ea typeface="+mn-ea"/>
-                <a:cs typeface="+mn-cs"/>
-              </a:defRPr>
-            </a:lvl1pPr>
-            <a:lvl2pPr marL="3565982" indent="-1371531" algn="l" defTabSz="4388900" rtl="0" eaLnBrk="1" latinLnBrk="0" hangingPunct="1">
-              <a:spcBef>
-                <a:spcPct val="20000"/>
-              </a:spcBef>
-              <a:buFont typeface="Arial" pitchFamily="34" charset="0"/>
-              <a:buChar char="–"/>
-              <a:defRPr sz="13500" kern="1200">
-                <a:solidFill>
-                  <a:schemeClr val="tx1"/>
-                </a:solidFill>
-                <a:latin typeface="+mn-lt"/>
-                <a:ea typeface="+mn-ea"/>
-                <a:cs typeface="+mn-cs"/>
-              </a:defRPr>
-            </a:lvl2pPr>
-            <a:lvl3pPr marL="5486126" indent="-1097226" algn="l" defTabSz="4388900" rtl="0" eaLnBrk="1" latinLnBrk="0" hangingPunct="1">
-              <a:spcBef>
-                <a:spcPct val="20000"/>
-              </a:spcBef>
-              <a:buFont typeface="Arial" pitchFamily="34" charset="0"/>
-              <a:buChar char="•"/>
-              <a:defRPr sz="11600" kern="1200">
-                <a:solidFill>
-                  <a:schemeClr val="tx1"/>
-                </a:solidFill>
-                <a:latin typeface="+mn-lt"/>
-                <a:ea typeface="+mn-ea"/>
-                <a:cs typeface="+mn-cs"/>
-              </a:defRPr>
-            </a:lvl3pPr>
-            <a:lvl4pPr marL="7680577" indent="-1097226" algn="l" defTabSz="4388900" rtl="0" eaLnBrk="1" latinLnBrk="0" hangingPunct="1">
-              <a:spcBef>
-                <a:spcPct val="20000"/>
-              </a:spcBef>
-              <a:buFont typeface="Arial" pitchFamily="34" charset="0"/>
-              <a:buChar char="–"/>
-              <a:defRPr sz="9600" kern="1200">
-                <a:solidFill>
-                  <a:schemeClr val="tx1"/>
-                </a:solidFill>
-                <a:latin typeface="+mn-lt"/>
-                <a:ea typeface="+mn-ea"/>
-                <a:cs typeface="+mn-cs"/>
-              </a:defRPr>
-            </a:lvl4pPr>
-            <a:lvl5pPr marL="9875026" indent="-1097226" algn="l" defTabSz="4388900" rtl="0" eaLnBrk="1" latinLnBrk="0" hangingPunct="1">
-              <a:spcBef>
-                <a:spcPct val="20000"/>
-              </a:spcBef>
-              <a:buFont typeface="Arial" pitchFamily="34" charset="0"/>
-              <a:buChar char="»"/>
-              <a:defRPr sz="9600" kern="1200">
-                <a:solidFill>
-                  <a:schemeClr val="tx1"/>
-                </a:solidFill>
-                <a:latin typeface="+mn-lt"/>
-                <a:ea typeface="+mn-ea"/>
-                <a:cs typeface="+mn-cs"/>
-              </a:defRPr>
-            </a:lvl5pPr>
-            <a:lvl6pPr marL="12069477" indent="-1097226" algn="l" defTabSz="4388900" rtl="0" eaLnBrk="1" latinLnBrk="0" hangingPunct="1">
-              <a:spcBef>
-                <a:spcPct val="20000"/>
-              </a:spcBef>
-              <a:buFont typeface="Arial" pitchFamily="34" charset="0"/>
-              <a:buChar char="•"/>
-              <a:defRPr sz="9600" kern="1200">
-                <a:solidFill>
-                  <a:schemeClr val="tx1"/>
-                </a:solidFill>
-                <a:latin typeface="+mn-lt"/>
-                <a:ea typeface="+mn-ea"/>
-                <a:cs typeface="+mn-cs"/>
-              </a:defRPr>
-            </a:lvl6pPr>
-            <a:lvl7pPr marL="14263926" indent="-1097226" algn="l" defTabSz="4388900" rtl="0" eaLnBrk="1" latinLnBrk="0" hangingPunct="1">
-              <a:spcBef>
-                <a:spcPct val="20000"/>
-              </a:spcBef>
-              <a:buFont typeface="Arial" pitchFamily="34" charset="0"/>
-              <a:buChar char="•"/>
-              <a:defRPr sz="9600" kern="1200">
-                <a:solidFill>
-                  <a:schemeClr val="tx1"/>
-                </a:solidFill>
-                <a:latin typeface="+mn-lt"/>
-                <a:ea typeface="+mn-ea"/>
-                <a:cs typeface="+mn-cs"/>
-              </a:defRPr>
-            </a:lvl7pPr>
-            <a:lvl8pPr marL="16458377" indent="-1097226" algn="l" defTabSz="4388900" rtl="0" eaLnBrk="1" latinLnBrk="0" hangingPunct="1">
-              <a:spcBef>
-                <a:spcPct val="20000"/>
-              </a:spcBef>
-              <a:buFont typeface="Arial" pitchFamily="34" charset="0"/>
-              <a:buChar char="•"/>
-              <a:defRPr sz="9600" kern="1200">
-                <a:solidFill>
-                  <a:schemeClr val="tx1"/>
-                </a:solidFill>
-                <a:latin typeface="+mn-lt"/>
-                <a:ea typeface="+mn-ea"/>
-                <a:cs typeface="+mn-cs"/>
-              </a:defRPr>
-            </a:lvl8pPr>
-            <a:lvl9pPr marL="18652827" indent="-1097226" algn="l" defTabSz="4388900" rtl="0" eaLnBrk="1" latinLnBrk="0" hangingPunct="1">
-              <a:spcBef>
-                <a:spcPct val="20000"/>
-              </a:spcBef>
-              <a:buFont typeface="Arial" pitchFamily="34" charset="0"/>
-              <a:buChar char="•"/>
-              <a:defRPr sz="9600" kern="1200">
-                <a:solidFill>
-                  <a:schemeClr val="tx1"/>
-                </a:solidFill>
-                <a:latin typeface="+mn-lt"/>
-                <a:ea typeface="+mn-ea"/>
-                <a:cs typeface="+mn-cs"/>
-              </a:defRPr>
-            </a:lvl9pPr>
-          </a:lstStyle>
-          <a:p>
-            <a:pPr marL="0" indent="0">
-              <a:buNone/>
-            </a:pPr>
-            <a:r>
-              <a:rPr lang="en-IE" sz="2500" dirty="0"/>
-              <a:t>A student engagement measurement tool was provided to student participants at the start and end of a semester.  A social learning intervention was applied to a treatment group, and the engagement scores across both the control and treatment groups were measured.  The results revealed a small increase in total student engagement group score for the treatment group, but nothing significant. However, interesting findings were found in some of the individual questions, the figure below represents one an example of this, in which the treatment group had scored considerably higher than the control group in a question relating to understanding people dissimilar to themselves, which would have been influenced through the social learning activities that the treatment group participated in.  This, in itself, was an encouraging finding. </a:t>
-            </a:r>
           </a:p>
         </p:txBody>
       </p:sp>
@@ -19214,6 +16506,1673 @@
           </a:p>
         </p:txBody>
       </p:sp>
+      <p:pic>
+        <p:nvPicPr>
+          <p:cNvPr id="7" name="Picture 6">
+            <a:extLst>
+              <a:ext uri="{FF2B5EF4-FFF2-40B4-BE49-F238E27FC236}">
+                <a16:creationId xmlns:a16="http://schemas.microsoft.com/office/drawing/2014/main" id="{86F2D775-B43E-2D1B-5ECE-DD93EC61B794}"/>
+              </a:ext>
+            </a:extLst>
+          </p:cNvPr>
+          <p:cNvPicPr>
+            <a:picLocks noChangeAspect="1"/>
+          </p:cNvPicPr>
+          <p:nvPr/>
+        </p:nvPicPr>
+        <p:blipFill>
+          <a:blip r:embed="rId5">
+            <a:extLst>
+              <a:ext uri="{28A0092B-C50C-407E-A947-70E740481C1C}">
+                <a14:useLocalDpi xmlns:a14="http://schemas.microsoft.com/office/drawing/2010/main" val="0"/>
+              </a:ext>
+            </a:extLst>
+          </a:blip>
+          <a:stretch>
+            <a:fillRect/>
+          </a:stretch>
+        </p:blipFill>
+        <p:spPr>
+          <a:xfrm>
+            <a:off x="2233763" y="20921667"/>
+            <a:ext cx="6339073" cy="6339073"/>
+          </a:xfrm>
+          <a:prstGeom prst="rect">
+            <a:avLst/>
+          </a:prstGeom>
+        </p:spPr>
+      </p:pic>
+      <p:sp>
+        <p:nvSpPr>
+          <p:cNvPr id="21" name="Text Placeholder 5">
+            <a:extLst>
+              <a:ext uri="{FF2B5EF4-FFF2-40B4-BE49-F238E27FC236}">
+                <a16:creationId xmlns:a16="http://schemas.microsoft.com/office/drawing/2014/main" id="{348892E9-080F-B06A-105A-7860166FB512}"/>
+              </a:ext>
+            </a:extLst>
+          </p:cNvPr>
+          <p:cNvSpPr txBox="1">
+            <a:spLocks/>
+          </p:cNvSpPr>
+          <p:nvPr/>
+        </p:nvSpPr>
+        <p:spPr>
+          <a:xfrm>
+            <a:off x="22225422" y="5815303"/>
+            <a:ext cx="10048875" cy="754045"/>
+          </a:xfrm>
+          <a:prstGeom prst="rect">
+            <a:avLst/>
+          </a:prstGeom>
+          <a:noFill/>
+        </p:spPr>
+        <p:txBody>
+          <a:bodyPr lIns="91436" tIns="91436" rIns="91436" bIns="91436" anchor="ctr" anchorCtr="0">
+            <a:spAutoFit/>
+          </a:bodyPr>
+          <a:lstStyle>
+            <a:lvl1pPr marL="0" indent="0" algn="ctr" defTabSz="4388900" rtl="0" eaLnBrk="1" latinLnBrk="0" hangingPunct="1">
+              <a:spcBef>
+                <a:spcPct val="20000"/>
+              </a:spcBef>
+              <a:buFont typeface="Arial" pitchFamily="34" charset="0"/>
+              <a:buNone/>
+              <a:defRPr sz="3700" b="1" u="sng" kern="1200" baseline="0">
+                <a:solidFill>
+                  <a:schemeClr val="accent5">
+                    <a:lumMod val="50000"/>
+                  </a:schemeClr>
+                </a:solidFill>
+                <a:latin typeface="+mn-lt"/>
+                <a:ea typeface="+mn-ea"/>
+                <a:cs typeface="+mn-cs"/>
+              </a:defRPr>
+            </a:lvl1pPr>
+            <a:lvl2pPr marL="3565982" indent="-1371531" algn="l" defTabSz="4388900" rtl="0" eaLnBrk="1" latinLnBrk="0" hangingPunct="1">
+              <a:spcBef>
+                <a:spcPct val="20000"/>
+              </a:spcBef>
+              <a:buFont typeface="Arial" pitchFamily="34" charset="0"/>
+              <a:buChar char="–"/>
+              <a:defRPr sz="13500" kern="1200">
+                <a:solidFill>
+                  <a:schemeClr val="tx1"/>
+                </a:solidFill>
+                <a:latin typeface="+mn-lt"/>
+                <a:ea typeface="+mn-ea"/>
+                <a:cs typeface="+mn-cs"/>
+              </a:defRPr>
+            </a:lvl2pPr>
+            <a:lvl3pPr marL="5486126" indent="-1097226" algn="l" defTabSz="4388900" rtl="0" eaLnBrk="1" latinLnBrk="0" hangingPunct="1">
+              <a:spcBef>
+                <a:spcPct val="20000"/>
+              </a:spcBef>
+              <a:buFont typeface="Arial" pitchFamily="34" charset="0"/>
+              <a:buChar char="•"/>
+              <a:defRPr sz="11600" kern="1200">
+                <a:solidFill>
+                  <a:schemeClr val="tx1"/>
+                </a:solidFill>
+                <a:latin typeface="+mn-lt"/>
+                <a:ea typeface="+mn-ea"/>
+                <a:cs typeface="+mn-cs"/>
+              </a:defRPr>
+            </a:lvl3pPr>
+            <a:lvl4pPr marL="7680577" indent="-1097226" algn="l" defTabSz="4388900" rtl="0" eaLnBrk="1" latinLnBrk="0" hangingPunct="1">
+              <a:spcBef>
+                <a:spcPct val="20000"/>
+              </a:spcBef>
+              <a:buFont typeface="Arial" pitchFamily="34" charset="0"/>
+              <a:buChar char="–"/>
+              <a:defRPr sz="9600" kern="1200">
+                <a:solidFill>
+                  <a:schemeClr val="tx1"/>
+                </a:solidFill>
+                <a:latin typeface="+mn-lt"/>
+                <a:ea typeface="+mn-ea"/>
+                <a:cs typeface="+mn-cs"/>
+              </a:defRPr>
+            </a:lvl4pPr>
+            <a:lvl5pPr marL="9875026" indent="-1097226" algn="l" defTabSz="4388900" rtl="0" eaLnBrk="1" latinLnBrk="0" hangingPunct="1">
+              <a:spcBef>
+                <a:spcPct val="20000"/>
+              </a:spcBef>
+              <a:buFont typeface="Arial" pitchFamily="34" charset="0"/>
+              <a:buChar char="»"/>
+              <a:defRPr sz="9600" kern="1200">
+                <a:solidFill>
+                  <a:schemeClr val="tx1"/>
+                </a:solidFill>
+                <a:latin typeface="+mn-lt"/>
+                <a:ea typeface="+mn-ea"/>
+                <a:cs typeface="+mn-cs"/>
+              </a:defRPr>
+            </a:lvl5pPr>
+            <a:lvl6pPr marL="12069477" indent="-1097226" algn="l" defTabSz="4388900" rtl="0" eaLnBrk="1" latinLnBrk="0" hangingPunct="1">
+              <a:spcBef>
+                <a:spcPct val="20000"/>
+              </a:spcBef>
+              <a:buFont typeface="Arial" pitchFamily="34" charset="0"/>
+              <a:buChar char="•"/>
+              <a:defRPr sz="9600" kern="1200">
+                <a:solidFill>
+                  <a:schemeClr val="tx1"/>
+                </a:solidFill>
+                <a:latin typeface="+mn-lt"/>
+                <a:ea typeface="+mn-ea"/>
+                <a:cs typeface="+mn-cs"/>
+              </a:defRPr>
+            </a:lvl6pPr>
+            <a:lvl7pPr marL="14263926" indent="-1097226" algn="l" defTabSz="4388900" rtl="0" eaLnBrk="1" latinLnBrk="0" hangingPunct="1">
+              <a:spcBef>
+                <a:spcPct val="20000"/>
+              </a:spcBef>
+              <a:buFont typeface="Arial" pitchFamily="34" charset="0"/>
+              <a:buChar char="•"/>
+              <a:defRPr sz="9600" kern="1200">
+                <a:solidFill>
+                  <a:schemeClr val="tx1"/>
+                </a:solidFill>
+                <a:latin typeface="+mn-lt"/>
+                <a:ea typeface="+mn-ea"/>
+                <a:cs typeface="+mn-cs"/>
+              </a:defRPr>
+            </a:lvl7pPr>
+            <a:lvl8pPr marL="16458377" indent="-1097226" algn="l" defTabSz="4388900" rtl="0" eaLnBrk="1" latinLnBrk="0" hangingPunct="1">
+              <a:spcBef>
+                <a:spcPct val="20000"/>
+              </a:spcBef>
+              <a:buFont typeface="Arial" pitchFamily="34" charset="0"/>
+              <a:buChar char="•"/>
+              <a:defRPr sz="9600" kern="1200">
+                <a:solidFill>
+                  <a:schemeClr val="tx1"/>
+                </a:solidFill>
+                <a:latin typeface="+mn-lt"/>
+                <a:ea typeface="+mn-ea"/>
+                <a:cs typeface="+mn-cs"/>
+              </a:defRPr>
+            </a:lvl8pPr>
+            <a:lvl9pPr marL="18652827" indent="-1097226" algn="l" defTabSz="4388900" rtl="0" eaLnBrk="1" latinLnBrk="0" hangingPunct="1">
+              <a:spcBef>
+                <a:spcPct val="20000"/>
+              </a:spcBef>
+              <a:buFont typeface="Arial" pitchFamily="34" charset="0"/>
+              <a:buChar char="•"/>
+              <a:defRPr sz="9600" kern="1200">
+                <a:solidFill>
+                  <a:schemeClr val="tx1"/>
+                </a:solidFill>
+                <a:latin typeface="+mn-lt"/>
+                <a:ea typeface="+mn-ea"/>
+                <a:cs typeface="+mn-cs"/>
+              </a:defRPr>
+            </a:lvl9pPr>
+          </a:lstStyle>
+          <a:p>
+            <a:r>
+              <a:rPr lang="en-US" dirty="0">
+                <a:solidFill>
+                  <a:schemeClr val="tx2"/>
+                </a:solidFill>
+                <a:latin typeface="Arial" panose="020B0604020202020204" pitchFamily="34" charset="0"/>
+                <a:cs typeface="Arial" panose="020B0604020202020204" pitchFamily="34" charset="0"/>
+              </a:rPr>
+              <a:t>MODELLING</a:t>
+            </a:r>
+          </a:p>
+        </p:txBody>
+      </p:sp>
+      <p:sp>
+        <p:nvSpPr>
+          <p:cNvPr id="50" name="Text Placeholder 4">
+            <a:extLst>
+              <a:ext uri="{FF2B5EF4-FFF2-40B4-BE49-F238E27FC236}">
+                <a16:creationId xmlns:a16="http://schemas.microsoft.com/office/drawing/2014/main" id="{4D0FFE05-CCA1-CB00-4EC8-B1F783EEA1FC}"/>
+              </a:ext>
+            </a:extLst>
+          </p:cNvPr>
+          <p:cNvSpPr txBox="1">
+            <a:spLocks/>
+          </p:cNvSpPr>
+          <p:nvPr/>
+        </p:nvSpPr>
+        <p:spPr>
+          <a:xfrm>
+            <a:off x="11427502" y="6240358"/>
+            <a:ext cx="10048874" cy="5924677"/>
+          </a:xfrm>
+          <a:prstGeom prst="rect">
+            <a:avLst/>
+          </a:prstGeom>
+        </p:spPr>
+        <p:txBody>
+          <a:bodyPr wrap="square" lIns="228589" tIns="228589" rIns="228589" bIns="228589">
+            <a:spAutoFit/>
+          </a:bodyPr>
+          <a:lstStyle>
+            <a:lvl1pPr marL="0" indent="0" algn="l" defTabSz="4388900" rtl="0" eaLnBrk="1" latinLnBrk="0" hangingPunct="1">
+              <a:spcBef>
+                <a:spcPct val="20000"/>
+              </a:spcBef>
+              <a:buFont typeface="Arial" pitchFamily="34" charset="0"/>
+              <a:buNone/>
+              <a:defRPr sz="2500" kern="1200">
+                <a:solidFill>
+                  <a:schemeClr val="accent5">
+                    <a:lumMod val="50000"/>
+                  </a:schemeClr>
+                </a:solidFill>
+                <a:latin typeface="Times New Roman" pitchFamily="18" charset="0"/>
+                <a:ea typeface="+mn-ea"/>
+                <a:cs typeface="Times New Roman" pitchFamily="18" charset="0"/>
+              </a:defRPr>
+            </a:lvl1pPr>
+            <a:lvl2pPr marL="1485825" indent="-571471" algn="l" defTabSz="4388900" rtl="0" eaLnBrk="1" latinLnBrk="0" hangingPunct="1">
+              <a:spcBef>
+                <a:spcPct val="20000"/>
+              </a:spcBef>
+              <a:buFont typeface="Arial" pitchFamily="34" charset="0"/>
+              <a:buChar char="–"/>
+              <a:defRPr sz="2500" kern="1200">
+                <a:solidFill>
+                  <a:schemeClr val="tx1"/>
+                </a:solidFill>
+                <a:latin typeface="Trebuchet MS" pitchFamily="34" charset="0"/>
+                <a:ea typeface="+mn-ea"/>
+                <a:cs typeface="+mn-cs"/>
+              </a:defRPr>
+            </a:lvl2pPr>
+            <a:lvl3pPr marL="2057297" indent="-571471" algn="l" defTabSz="4388900" rtl="0" eaLnBrk="1" latinLnBrk="0" hangingPunct="1">
+              <a:spcBef>
+                <a:spcPct val="20000"/>
+              </a:spcBef>
+              <a:buFont typeface="Arial" pitchFamily="34" charset="0"/>
+              <a:buChar char="•"/>
+              <a:defRPr sz="2500" kern="1200">
+                <a:solidFill>
+                  <a:schemeClr val="tx1"/>
+                </a:solidFill>
+                <a:latin typeface="Trebuchet MS" pitchFamily="34" charset="0"/>
+                <a:ea typeface="+mn-ea"/>
+                <a:cs typeface="+mn-cs"/>
+              </a:defRPr>
+            </a:lvl3pPr>
+            <a:lvl4pPr marL="2685916" indent="-628619" algn="l" defTabSz="4388900" rtl="0" eaLnBrk="1" latinLnBrk="0" hangingPunct="1">
+              <a:spcBef>
+                <a:spcPct val="20000"/>
+              </a:spcBef>
+              <a:buFont typeface="Arial" pitchFamily="34" charset="0"/>
+              <a:buChar char="–"/>
+              <a:defRPr sz="2500" kern="1200">
+                <a:solidFill>
+                  <a:schemeClr val="tx1"/>
+                </a:solidFill>
+                <a:latin typeface="Trebuchet MS" pitchFamily="34" charset="0"/>
+                <a:ea typeface="+mn-ea"/>
+                <a:cs typeface="+mn-cs"/>
+              </a:defRPr>
+            </a:lvl4pPr>
+            <a:lvl5pPr marL="3143093" indent="-457177" algn="l" defTabSz="4388900" rtl="0" eaLnBrk="1" latinLnBrk="0" hangingPunct="1">
+              <a:spcBef>
+                <a:spcPct val="20000"/>
+              </a:spcBef>
+              <a:buFont typeface="Arial" pitchFamily="34" charset="0"/>
+              <a:buChar char="»"/>
+              <a:defRPr sz="2500" kern="1200">
+                <a:solidFill>
+                  <a:schemeClr val="tx1"/>
+                </a:solidFill>
+                <a:latin typeface="Trebuchet MS" pitchFamily="34" charset="0"/>
+                <a:ea typeface="+mn-ea"/>
+                <a:cs typeface="+mn-cs"/>
+              </a:defRPr>
+            </a:lvl5pPr>
+            <a:lvl6pPr marL="12069477" indent="-1097226" algn="l" defTabSz="4388900" rtl="0" eaLnBrk="1" latinLnBrk="0" hangingPunct="1">
+              <a:spcBef>
+                <a:spcPct val="20000"/>
+              </a:spcBef>
+              <a:buFont typeface="Arial" pitchFamily="34" charset="0"/>
+              <a:buChar char="•"/>
+              <a:defRPr sz="9600" kern="1200">
+                <a:solidFill>
+                  <a:schemeClr val="tx1"/>
+                </a:solidFill>
+                <a:latin typeface="+mn-lt"/>
+                <a:ea typeface="+mn-ea"/>
+                <a:cs typeface="+mn-cs"/>
+              </a:defRPr>
+            </a:lvl6pPr>
+            <a:lvl7pPr marL="14263926" indent="-1097226" algn="l" defTabSz="4388900" rtl="0" eaLnBrk="1" latinLnBrk="0" hangingPunct="1">
+              <a:spcBef>
+                <a:spcPct val="20000"/>
+              </a:spcBef>
+              <a:buFont typeface="Arial" pitchFamily="34" charset="0"/>
+              <a:buChar char="•"/>
+              <a:defRPr sz="9600" kern="1200">
+                <a:solidFill>
+                  <a:schemeClr val="tx1"/>
+                </a:solidFill>
+                <a:latin typeface="+mn-lt"/>
+                <a:ea typeface="+mn-ea"/>
+                <a:cs typeface="+mn-cs"/>
+              </a:defRPr>
+            </a:lvl7pPr>
+            <a:lvl8pPr marL="16458377" indent="-1097226" algn="l" defTabSz="4388900" rtl="0" eaLnBrk="1" latinLnBrk="0" hangingPunct="1">
+              <a:spcBef>
+                <a:spcPct val="20000"/>
+              </a:spcBef>
+              <a:buFont typeface="Arial" pitchFamily="34" charset="0"/>
+              <a:buChar char="•"/>
+              <a:defRPr sz="9600" kern="1200">
+                <a:solidFill>
+                  <a:schemeClr val="tx1"/>
+                </a:solidFill>
+                <a:latin typeface="+mn-lt"/>
+                <a:ea typeface="+mn-ea"/>
+                <a:cs typeface="+mn-cs"/>
+              </a:defRPr>
+            </a:lvl8pPr>
+            <a:lvl9pPr marL="18652827" indent="-1097226" algn="l" defTabSz="4388900" rtl="0" eaLnBrk="1" latinLnBrk="0" hangingPunct="1">
+              <a:spcBef>
+                <a:spcPct val="20000"/>
+              </a:spcBef>
+              <a:buFont typeface="Arial" pitchFamily="34" charset="0"/>
+              <a:buChar char="•"/>
+              <a:defRPr sz="9600" kern="1200">
+                <a:solidFill>
+                  <a:schemeClr val="tx1"/>
+                </a:solidFill>
+                <a:latin typeface="+mn-lt"/>
+                <a:ea typeface="+mn-ea"/>
+                <a:cs typeface="+mn-cs"/>
+              </a:defRPr>
+            </a:lvl9pPr>
+          </a:lstStyle>
+          <a:p>
+            <a:pPr algn="just"/>
+            <a:r>
+              <a:rPr lang="en-US" dirty="0">
+                <a:solidFill>
+                  <a:schemeClr val="tx1"/>
+                </a:solidFill>
+              </a:rPr>
+              <a:t>The Data Understanding phase focused on analyzing the CICIDS2017 dataset before preprocessing and modelling. The dataset was developed and publicly released by the Canadian Institute for Cybersecurity (CIC) at the University of New Brunswick, Canada, and contains benign and the most up-to-date common attacks, which resembles the true real-world data (PCAPs). It also includes the results of network traffics using </a:t>
+            </a:r>
+            <a:r>
+              <a:rPr lang="en-US" dirty="0" err="1">
+                <a:solidFill>
+                  <a:schemeClr val="tx1"/>
+                </a:solidFill>
+              </a:rPr>
+              <a:t>CICFlowMeter</a:t>
+            </a:r>
+            <a:r>
+              <a:rPr lang="en-US" dirty="0">
+                <a:solidFill>
+                  <a:schemeClr val="tx1"/>
+                </a:solidFill>
+              </a:rPr>
+              <a:t> with labeled flows based on the time stamp, source, and destination IPs, source and destination ports, protocols and attack </a:t>
+            </a:r>
+            <a:r>
+              <a:rPr lang="en-IE" dirty="0">
+                <a:solidFill>
+                  <a:schemeClr val="tx1"/>
+                </a:solidFill>
+              </a:rPr>
+              <a:t>(</a:t>
+            </a:r>
+            <a:r>
+              <a:rPr lang="en-IE" dirty="0" err="1">
+                <a:solidFill>
+                  <a:schemeClr val="tx1"/>
+                </a:solidFill>
+              </a:rPr>
+              <a:t>Sharafaldin</a:t>
+            </a:r>
+            <a:r>
+              <a:rPr lang="en-IE" dirty="0">
+                <a:solidFill>
+                  <a:schemeClr val="tx1"/>
+                </a:solidFill>
+              </a:rPr>
+              <a:t> et al., 2018).</a:t>
+            </a:r>
+            <a:endParaRPr lang="en-US" dirty="0">
+              <a:solidFill>
+                <a:schemeClr val="tx1"/>
+              </a:solidFill>
+            </a:endParaRPr>
+          </a:p>
+          <a:p>
+            <a:pPr algn="just"/>
+            <a:r>
+              <a:rPr lang="en-US" dirty="0">
+                <a:solidFill>
+                  <a:schemeClr val="tx1"/>
+                </a:solidFill>
+              </a:rPr>
+              <a:t>The dataset was presented in 8 different CSV files, with different traffic’s period and attacks scenario. The dataset after merging had 2,830,743 rows and 79 columns. A total of 1,358 missing values were removed, and we constate that the dataset was very unbalanced, having 80.3% of benign traffic.</a:t>
+            </a:r>
+          </a:p>
+        </p:txBody>
+      </p:sp>
+      <p:pic>
+        <p:nvPicPr>
+          <p:cNvPr id="56" name="Picture 55">
+            <a:extLst>
+              <a:ext uri="{FF2B5EF4-FFF2-40B4-BE49-F238E27FC236}">
+                <a16:creationId xmlns:a16="http://schemas.microsoft.com/office/drawing/2014/main" id="{F061BFD2-4BA2-5E5B-C1D2-F9044DF3C43E}"/>
+              </a:ext>
+            </a:extLst>
+          </p:cNvPr>
+          <p:cNvPicPr>
+            <a:picLocks noChangeAspect="1"/>
+          </p:cNvPicPr>
+          <p:nvPr/>
+        </p:nvPicPr>
+        <p:blipFill>
+          <a:blip r:embed="rId6">
+            <a:extLst>
+              <a:ext uri="{28A0092B-C50C-407E-A947-70E740481C1C}">
+                <a14:useLocalDpi xmlns:a14="http://schemas.microsoft.com/office/drawing/2010/main" val="0"/>
+              </a:ext>
+            </a:extLst>
+          </a:blip>
+          <a:stretch>
+            <a:fillRect/>
+          </a:stretch>
+        </p:blipFill>
+        <p:spPr>
+          <a:xfrm>
+            <a:off x="11560599" y="11948369"/>
+            <a:ext cx="9782680" cy="5559941"/>
+          </a:xfrm>
+          <a:prstGeom prst="rect">
+            <a:avLst/>
+          </a:prstGeom>
+        </p:spPr>
+      </p:pic>
+      <p:sp>
+        <p:nvSpPr>
+          <p:cNvPr id="63" name="Text Placeholder 5">
+            <a:extLst>
+              <a:ext uri="{FF2B5EF4-FFF2-40B4-BE49-F238E27FC236}">
+                <a16:creationId xmlns:a16="http://schemas.microsoft.com/office/drawing/2014/main" id="{40E268E3-721A-232C-8012-F93EDC4562D5}"/>
+              </a:ext>
+            </a:extLst>
+          </p:cNvPr>
+          <p:cNvSpPr txBox="1">
+            <a:spLocks/>
+          </p:cNvSpPr>
+          <p:nvPr/>
+        </p:nvSpPr>
+        <p:spPr>
+          <a:xfrm>
+            <a:off x="11307498" y="5679573"/>
+            <a:ext cx="10048875" cy="754045"/>
+          </a:xfrm>
+          <a:prstGeom prst="rect">
+            <a:avLst/>
+          </a:prstGeom>
+          <a:noFill/>
+        </p:spPr>
+        <p:txBody>
+          <a:bodyPr lIns="91436" tIns="91436" rIns="91436" bIns="91436" anchor="ctr" anchorCtr="0">
+            <a:spAutoFit/>
+          </a:bodyPr>
+          <a:lstStyle>
+            <a:lvl1pPr marL="0" indent="0" algn="ctr" defTabSz="4388900" rtl="0" eaLnBrk="1" latinLnBrk="0" hangingPunct="1">
+              <a:spcBef>
+                <a:spcPct val="20000"/>
+              </a:spcBef>
+              <a:buFont typeface="Arial" pitchFamily="34" charset="0"/>
+              <a:buNone/>
+              <a:defRPr sz="3700" b="1" u="sng" kern="1200" baseline="0">
+                <a:solidFill>
+                  <a:schemeClr val="accent5">
+                    <a:lumMod val="50000"/>
+                  </a:schemeClr>
+                </a:solidFill>
+                <a:latin typeface="+mn-lt"/>
+                <a:ea typeface="+mn-ea"/>
+                <a:cs typeface="+mn-cs"/>
+              </a:defRPr>
+            </a:lvl1pPr>
+            <a:lvl2pPr marL="3565982" indent="-1371531" algn="l" defTabSz="4388900" rtl="0" eaLnBrk="1" latinLnBrk="0" hangingPunct="1">
+              <a:spcBef>
+                <a:spcPct val="20000"/>
+              </a:spcBef>
+              <a:buFont typeface="Arial" pitchFamily="34" charset="0"/>
+              <a:buChar char="–"/>
+              <a:defRPr sz="13500" kern="1200">
+                <a:solidFill>
+                  <a:schemeClr val="tx1"/>
+                </a:solidFill>
+                <a:latin typeface="+mn-lt"/>
+                <a:ea typeface="+mn-ea"/>
+                <a:cs typeface="+mn-cs"/>
+              </a:defRPr>
+            </a:lvl2pPr>
+            <a:lvl3pPr marL="5486126" indent="-1097226" algn="l" defTabSz="4388900" rtl="0" eaLnBrk="1" latinLnBrk="0" hangingPunct="1">
+              <a:spcBef>
+                <a:spcPct val="20000"/>
+              </a:spcBef>
+              <a:buFont typeface="Arial" pitchFamily="34" charset="0"/>
+              <a:buChar char="•"/>
+              <a:defRPr sz="11600" kern="1200">
+                <a:solidFill>
+                  <a:schemeClr val="tx1"/>
+                </a:solidFill>
+                <a:latin typeface="+mn-lt"/>
+                <a:ea typeface="+mn-ea"/>
+                <a:cs typeface="+mn-cs"/>
+              </a:defRPr>
+            </a:lvl3pPr>
+            <a:lvl4pPr marL="7680577" indent="-1097226" algn="l" defTabSz="4388900" rtl="0" eaLnBrk="1" latinLnBrk="0" hangingPunct="1">
+              <a:spcBef>
+                <a:spcPct val="20000"/>
+              </a:spcBef>
+              <a:buFont typeface="Arial" pitchFamily="34" charset="0"/>
+              <a:buChar char="–"/>
+              <a:defRPr sz="9600" kern="1200">
+                <a:solidFill>
+                  <a:schemeClr val="tx1"/>
+                </a:solidFill>
+                <a:latin typeface="+mn-lt"/>
+                <a:ea typeface="+mn-ea"/>
+                <a:cs typeface="+mn-cs"/>
+              </a:defRPr>
+            </a:lvl4pPr>
+            <a:lvl5pPr marL="9875026" indent="-1097226" algn="l" defTabSz="4388900" rtl="0" eaLnBrk="1" latinLnBrk="0" hangingPunct="1">
+              <a:spcBef>
+                <a:spcPct val="20000"/>
+              </a:spcBef>
+              <a:buFont typeface="Arial" pitchFamily="34" charset="0"/>
+              <a:buChar char="»"/>
+              <a:defRPr sz="9600" kern="1200">
+                <a:solidFill>
+                  <a:schemeClr val="tx1"/>
+                </a:solidFill>
+                <a:latin typeface="+mn-lt"/>
+                <a:ea typeface="+mn-ea"/>
+                <a:cs typeface="+mn-cs"/>
+              </a:defRPr>
+            </a:lvl5pPr>
+            <a:lvl6pPr marL="12069477" indent="-1097226" algn="l" defTabSz="4388900" rtl="0" eaLnBrk="1" latinLnBrk="0" hangingPunct="1">
+              <a:spcBef>
+                <a:spcPct val="20000"/>
+              </a:spcBef>
+              <a:buFont typeface="Arial" pitchFamily="34" charset="0"/>
+              <a:buChar char="•"/>
+              <a:defRPr sz="9600" kern="1200">
+                <a:solidFill>
+                  <a:schemeClr val="tx1"/>
+                </a:solidFill>
+                <a:latin typeface="+mn-lt"/>
+                <a:ea typeface="+mn-ea"/>
+                <a:cs typeface="+mn-cs"/>
+              </a:defRPr>
+            </a:lvl6pPr>
+            <a:lvl7pPr marL="14263926" indent="-1097226" algn="l" defTabSz="4388900" rtl="0" eaLnBrk="1" latinLnBrk="0" hangingPunct="1">
+              <a:spcBef>
+                <a:spcPct val="20000"/>
+              </a:spcBef>
+              <a:buFont typeface="Arial" pitchFamily="34" charset="0"/>
+              <a:buChar char="•"/>
+              <a:defRPr sz="9600" kern="1200">
+                <a:solidFill>
+                  <a:schemeClr val="tx1"/>
+                </a:solidFill>
+                <a:latin typeface="+mn-lt"/>
+                <a:ea typeface="+mn-ea"/>
+                <a:cs typeface="+mn-cs"/>
+              </a:defRPr>
+            </a:lvl7pPr>
+            <a:lvl8pPr marL="16458377" indent="-1097226" algn="l" defTabSz="4388900" rtl="0" eaLnBrk="1" latinLnBrk="0" hangingPunct="1">
+              <a:spcBef>
+                <a:spcPct val="20000"/>
+              </a:spcBef>
+              <a:buFont typeface="Arial" pitchFamily="34" charset="0"/>
+              <a:buChar char="•"/>
+              <a:defRPr sz="9600" kern="1200">
+                <a:solidFill>
+                  <a:schemeClr val="tx1"/>
+                </a:solidFill>
+                <a:latin typeface="+mn-lt"/>
+                <a:ea typeface="+mn-ea"/>
+                <a:cs typeface="+mn-cs"/>
+              </a:defRPr>
+            </a:lvl8pPr>
+            <a:lvl9pPr marL="18652827" indent="-1097226" algn="l" defTabSz="4388900" rtl="0" eaLnBrk="1" latinLnBrk="0" hangingPunct="1">
+              <a:spcBef>
+                <a:spcPct val="20000"/>
+              </a:spcBef>
+              <a:buFont typeface="Arial" pitchFamily="34" charset="0"/>
+              <a:buChar char="•"/>
+              <a:defRPr sz="9600" kern="1200">
+                <a:solidFill>
+                  <a:schemeClr val="tx1"/>
+                </a:solidFill>
+                <a:latin typeface="+mn-lt"/>
+                <a:ea typeface="+mn-ea"/>
+                <a:cs typeface="+mn-cs"/>
+              </a:defRPr>
+            </a:lvl9pPr>
+          </a:lstStyle>
+          <a:p>
+            <a:r>
+              <a:rPr lang="en-US" dirty="0">
+                <a:solidFill>
+                  <a:schemeClr val="tx2"/>
+                </a:solidFill>
+                <a:latin typeface="Arial" panose="020B0604020202020204" pitchFamily="34" charset="0"/>
+                <a:cs typeface="Arial" panose="020B0604020202020204" pitchFamily="34" charset="0"/>
+              </a:rPr>
+              <a:t> DATA UNDERSTANDING</a:t>
+            </a:r>
+          </a:p>
+        </p:txBody>
+      </p:sp>
+      <p:sp>
+        <p:nvSpPr>
+          <p:cNvPr id="4096" name="Text Placeholder 4">
+            <a:extLst>
+              <a:ext uri="{FF2B5EF4-FFF2-40B4-BE49-F238E27FC236}">
+                <a16:creationId xmlns:a16="http://schemas.microsoft.com/office/drawing/2014/main" id="{03EAC74A-226B-6D49-669C-28C272905BB7}"/>
+              </a:ext>
+            </a:extLst>
+          </p:cNvPr>
+          <p:cNvSpPr txBox="1">
+            <a:spLocks/>
+          </p:cNvSpPr>
+          <p:nvPr/>
+        </p:nvSpPr>
+        <p:spPr>
+          <a:xfrm>
+            <a:off x="539637" y="28368017"/>
+            <a:ext cx="10048874" cy="3924129"/>
+          </a:xfrm>
+          <a:prstGeom prst="rect">
+            <a:avLst/>
+          </a:prstGeom>
+        </p:spPr>
+        <p:txBody>
+          <a:bodyPr wrap="square" lIns="228589" tIns="228589" rIns="228589" bIns="228589">
+            <a:spAutoFit/>
+          </a:bodyPr>
+          <a:lstStyle>
+            <a:lvl1pPr marL="0" indent="0" algn="l" defTabSz="4388900" rtl="0" eaLnBrk="1" latinLnBrk="0" hangingPunct="1">
+              <a:spcBef>
+                <a:spcPct val="20000"/>
+              </a:spcBef>
+              <a:buFont typeface="Arial" pitchFamily="34" charset="0"/>
+              <a:buNone/>
+              <a:defRPr sz="2500" kern="1200">
+                <a:solidFill>
+                  <a:schemeClr val="accent5">
+                    <a:lumMod val="50000"/>
+                  </a:schemeClr>
+                </a:solidFill>
+                <a:latin typeface="Times New Roman" pitchFamily="18" charset="0"/>
+                <a:ea typeface="+mn-ea"/>
+                <a:cs typeface="Times New Roman" pitchFamily="18" charset="0"/>
+              </a:defRPr>
+            </a:lvl1pPr>
+            <a:lvl2pPr marL="1485825" indent="-571471" algn="l" defTabSz="4388900" rtl="0" eaLnBrk="1" latinLnBrk="0" hangingPunct="1">
+              <a:spcBef>
+                <a:spcPct val="20000"/>
+              </a:spcBef>
+              <a:buFont typeface="Arial" pitchFamily="34" charset="0"/>
+              <a:buChar char="–"/>
+              <a:defRPr sz="2500" kern="1200">
+                <a:solidFill>
+                  <a:schemeClr val="tx1"/>
+                </a:solidFill>
+                <a:latin typeface="Trebuchet MS" pitchFamily="34" charset="0"/>
+                <a:ea typeface="+mn-ea"/>
+                <a:cs typeface="+mn-cs"/>
+              </a:defRPr>
+            </a:lvl2pPr>
+            <a:lvl3pPr marL="2057297" indent="-571471" algn="l" defTabSz="4388900" rtl="0" eaLnBrk="1" latinLnBrk="0" hangingPunct="1">
+              <a:spcBef>
+                <a:spcPct val="20000"/>
+              </a:spcBef>
+              <a:buFont typeface="Arial" pitchFamily="34" charset="0"/>
+              <a:buChar char="•"/>
+              <a:defRPr sz="2500" kern="1200">
+                <a:solidFill>
+                  <a:schemeClr val="tx1"/>
+                </a:solidFill>
+                <a:latin typeface="Trebuchet MS" pitchFamily="34" charset="0"/>
+                <a:ea typeface="+mn-ea"/>
+                <a:cs typeface="+mn-cs"/>
+              </a:defRPr>
+            </a:lvl3pPr>
+            <a:lvl4pPr marL="2685916" indent="-628619" algn="l" defTabSz="4388900" rtl="0" eaLnBrk="1" latinLnBrk="0" hangingPunct="1">
+              <a:spcBef>
+                <a:spcPct val="20000"/>
+              </a:spcBef>
+              <a:buFont typeface="Arial" pitchFamily="34" charset="0"/>
+              <a:buChar char="–"/>
+              <a:defRPr sz="2500" kern="1200">
+                <a:solidFill>
+                  <a:schemeClr val="tx1"/>
+                </a:solidFill>
+                <a:latin typeface="Trebuchet MS" pitchFamily="34" charset="0"/>
+                <a:ea typeface="+mn-ea"/>
+                <a:cs typeface="+mn-cs"/>
+              </a:defRPr>
+            </a:lvl4pPr>
+            <a:lvl5pPr marL="3143093" indent="-457177" algn="l" defTabSz="4388900" rtl="0" eaLnBrk="1" latinLnBrk="0" hangingPunct="1">
+              <a:spcBef>
+                <a:spcPct val="20000"/>
+              </a:spcBef>
+              <a:buFont typeface="Arial" pitchFamily="34" charset="0"/>
+              <a:buChar char="»"/>
+              <a:defRPr sz="2500" kern="1200">
+                <a:solidFill>
+                  <a:schemeClr val="tx1"/>
+                </a:solidFill>
+                <a:latin typeface="Trebuchet MS" pitchFamily="34" charset="0"/>
+                <a:ea typeface="+mn-ea"/>
+                <a:cs typeface="+mn-cs"/>
+              </a:defRPr>
+            </a:lvl5pPr>
+            <a:lvl6pPr marL="12069477" indent="-1097226" algn="l" defTabSz="4388900" rtl="0" eaLnBrk="1" latinLnBrk="0" hangingPunct="1">
+              <a:spcBef>
+                <a:spcPct val="20000"/>
+              </a:spcBef>
+              <a:buFont typeface="Arial" pitchFamily="34" charset="0"/>
+              <a:buChar char="•"/>
+              <a:defRPr sz="9600" kern="1200">
+                <a:solidFill>
+                  <a:schemeClr val="tx1"/>
+                </a:solidFill>
+                <a:latin typeface="+mn-lt"/>
+                <a:ea typeface="+mn-ea"/>
+                <a:cs typeface="+mn-cs"/>
+              </a:defRPr>
+            </a:lvl6pPr>
+            <a:lvl7pPr marL="14263926" indent="-1097226" algn="l" defTabSz="4388900" rtl="0" eaLnBrk="1" latinLnBrk="0" hangingPunct="1">
+              <a:spcBef>
+                <a:spcPct val="20000"/>
+              </a:spcBef>
+              <a:buFont typeface="Arial" pitchFamily="34" charset="0"/>
+              <a:buChar char="•"/>
+              <a:defRPr sz="9600" kern="1200">
+                <a:solidFill>
+                  <a:schemeClr val="tx1"/>
+                </a:solidFill>
+                <a:latin typeface="+mn-lt"/>
+                <a:ea typeface="+mn-ea"/>
+                <a:cs typeface="+mn-cs"/>
+              </a:defRPr>
+            </a:lvl7pPr>
+            <a:lvl8pPr marL="16458377" indent="-1097226" algn="l" defTabSz="4388900" rtl="0" eaLnBrk="1" latinLnBrk="0" hangingPunct="1">
+              <a:spcBef>
+                <a:spcPct val="20000"/>
+              </a:spcBef>
+              <a:buFont typeface="Arial" pitchFamily="34" charset="0"/>
+              <a:buChar char="•"/>
+              <a:defRPr sz="9600" kern="1200">
+                <a:solidFill>
+                  <a:schemeClr val="tx1"/>
+                </a:solidFill>
+                <a:latin typeface="+mn-lt"/>
+                <a:ea typeface="+mn-ea"/>
+                <a:cs typeface="+mn-cs"/>
+              </a:defRPr>
+            </a:lvl8pPr>
+            <a:lvl9pPr marL="18652827" indent="-1097226" algn="l" defTabSz="4388900" rtl="0" eaLnBrk="1" latinLnBrk="0" hangingPunct="1">
+              <a:spcBef>
+                <a:spcPct val="20000"/>
+              </a:spcBef>
+              <a:buFont typeface="Arial" pitchFamily="34" charset="0"/>
+              <a:buChar char="•"/>
+              <a:defRPr sz="9600" kern="1200">
+                <a:solidFill>
+                  <a:schemeClr val="tx1"/>
+                </a:solidFill>
+                <a:latin typeface="+mn-lt"/>
+                <a:ea typeface="+mn-ea"/>
+                <a:cs typeface="+mn-cs"/>
+              </a:defRPr>
+            </a:lvl9pPr>
+          </a:lstStyle>
+          <a:p>
+            <a:pPr algn="just"/>
+            <a:r>
+              <a:rPr lang="en-US" dirty="0">
+                <a:solidFill>
+                  <a:schemeClr val="tx1"/>
+                </a:solidFill>
+              </a:rPr>
+              <a:t>Modern organizations increasingly depend on networks, cloud systems, remote access, and online services to support their operations, which also increases their exposure to cyber threats capable of causing downtime, data exposure, financial loss, and reputational damage (O'Donovan, 2025). While larger organizations often have dedicated cybersecurity teams, advanced monitoring systems, and stronger financial resources, many SMEs and smaller organizations operate with limited IT infrastructure and without specialized cybersecurity personnel, making them more vulnerable to network attacks and delayed threat detection (Zamani, 2022).</a:t>
+            </a:r>
+          </a:p>
+        </p:txBody>
+      </p:sp>
+      <p:sp>
+        <p:nvSpPr>
+          <p:cNvPr id="4108" name="Text Placeholder 5">
+            <a:extLst>
+              <a:ext uri="{FF2B5EF4-FFF2-40B4-BE49-F238E27FC236}">
+                <a16:creationId xmlns:a16="http://schemas.microsoft.com/office/drawing/2014/main" id="{D016A331-906B-1081-14A0-79F2EA8644B6}"/>
+              </a:ext>
+            </a:extLst>
+          </p:cNvPr>
+          <p:cNvSpPr txBox="1">
+            <a:spLocks/>
+          </p:cNvSpPr>
+          <p:nvPr/>
+        </p:nvSpPr>
+        <p:spPr>
+          <a:xfrm>
+            <a:off x="11294404" y="17669901"/>
+            <a:ext cx="10048875" cy="754045"/>
+          </a:xfrm>
+          <a:prstGeom prst="rect">
+            <a:avLst/>
+          </a:prstGeom>
+          <a:noFill/>
+        </p:spPr>
+        <p:txBody>
+          <a:bodyPr lIns="91436" tIns="91436" rIns="91436" bIns="91436" anchor="ctr" anchorCtr="0">
+            <a:spAutoFit/>
+          </a:bodyPr>
+          <a:lstStyle>
+            <a:lvl1pPr marL="0" indent="0" algn="ctr" defTabSz="4388900" rtl="0" eaLnBrk="1" latinLnBrk="0" hangingPunct="1">
+              <a:spcBef>
+                <a:spcPct val="20000"/>
+              </a:spcBef>
+              <a:buFont typeface="Arial" pitchFamily="34" charset="0"/>
+              <a:buNone/>
+              <a:defRPr sz="3700" b="1" u="sng" kern="1200" baseline="0">
+                <a:solidFill>
+                  <a:schemeClr val="accent5">
+                    <a:lumMod val="50000"/>
+                  </a:schemeClr>
+                </a:solidFill>
+                <a:latin typeface="+mn-lt"/>
+                <a:ea typeface="+mn-ea"/>
+                <a:cs typeface="+mn-cs"/>
+              </a:defRPr>
+            </a:lvl1pPr>
+            <a:lvl2pPr marL="3565982" indent="-1371531" algn="l" defTabSz="4388900" rtl="0" eaLnBrk="1" latinLnBrk="0" hangingPunct="1">
+              <a:spcBef>
+                <a:spcPct val="20000"/>
+              </a:spcBef>
+              <a:buFont typeface="Arial" pitchFamily="34" charset="0"/>
+              <a:buChar char="–"/>
+              <a:defRPr sz="13500" kern="1200">
+                <a:solidFill>
+                  <a:schemeClr val="tx1"/>
+                </a:solidFill>
+                <a:latin typeface="+mn-lt"/>
+                <a:ea typeface="+mn-ea"/>
+                <a:cs typeface="+mn-cs"/>
+              </a:defRPr>
+            </a:lvl2pPr>
+            <a:lvl3pPr marL="5486126" indent="-1097226" algn="l" defTabSz="4388900" rtl="0" eaLnBrk="1" latinLnBrk="0" hangingPunct="1">
+              <a:spcBef>
+                <a:spcPct val="20000"/>
+              </a:spcBef>
+              <a:buFont typeface="Arial" pitchFamily="34" charset="0"/>
+              <a:buChar char="•"/>
+              <a:defRPr sz="11600" kern="1200">
+                <a:solidFill>
+                  <a:schemeClr val="tx1"/>
+                </a:solidFill>
+                <a:latin typeface="+mn-lt"/>
+                <a:ea typeface="+mn-ea"/>
+                <a:cs typeface="+mn-cs"/>
+              </a:defRPr>
+            </a:lvl3pPr>
+            <a:lvl4pPr marL="7680577" indent="-1097226" algn="l" defTabSz="4388900" rtl="0" eaLnBrk="1" latinLnBrk="0" hangingPunct="1">
+              <a:spcBef>
+                <a:spcPct val="20000"/>
+              </a:spcBef>
+              <a:buFont typeface="Arial" pitchFamily="34" charset="0"/>
+              <a:buChar char="–"/>
+              <a:defRPr sz="9600" kern="1200">
+                <a:solidFill>
+                  <a:schemeClr val="tx1"/>
+                </a:solidFill>
+                <a:latin typeface="+mn-lt"/>
+                <a:ea typeface="+mn-ea"/>
+                <a:cs typeface="+mn-cs"/>
+              </a:defRPr>
+            </a:lvl4pPr>
+            <a:lvl5pPr marL="9875026" indent="-1097226" algn="l" defTabSz="4388900" rtl="0" eaLnBrk="1" latinLnBrk="0" hangingPunct="1">
+              <a:spcBef>
+                <a:spcPct val="20000"/>
+              </a:spcBef>
+              <a:buFont typeface="Arial" pitchFamily="34" charset="0"/>
+              <a:buChar char="»"/>
+              <a:defRPr sz="9600" kern="1200">
+                <a:solidFill>
+                  <a:schemeClr val="tx1"/>
+                </a:solidFill>
+                <a:latin typeface="+mn-lt"/>
+                <a:ea typeface="+mn-ea"/>
+                <a:cs typeface="+mn-cs"/>
+              </a:defRPr>
+            </a:lvl5pPr>
+            <a:lvl6pPr marL="12069477" indent="-1097226" algn="l" defTabSz="4388900" rtl="0" eaLnBrk="1" latinLnBrk="0" hangingPunct="1">
+              <a:spcBef>
+                <a:spcPct val="20000"/>
+              </a:spcBef>
+              <a:buFont typeface="Arial" pitchFamily="34" charset="0"/>
+              <a:buChar char="•"/>
+              <a:defRPr sz="9600" kern="1200">
+                <a:solidFill>
+                  <a:schemeClr val="tx1"/>
+                </a:solidFill>
+                <a:latin typeface="+mn-lt"/>
+                <a:ea typeface="+mn-ea"/>
+                <a:cs typeface="+mn-cs"/>
+              </a:defRPr>
+            </a:lvl6pPr>
+            <a:lvl7pPr marL="14263926" indent="-1097226" algn="l" defTabSz="4388900" rtl="0" eaLnBrk="1" latinLnBrk="0" hangingPunct="1">
+              <a:spcBef>
+                <a:spcPct val="20000"/>
+              </a:spcBef>
+              <a:buFont typeface="Arial" pitchFamily="34" charset="0"/>
+              <a:buChar char="•"/>
+              <a:defRPr sz="9600" kern="1200">
+                <a:solidFill>
+                  <a:schemeClr val="tx1"/>
+                </a:solidFill>
+                <a:latin typeface="+mn-lt"/>
+                <a:ea typeface="+mn-ea"/>
+                <a:cs typeface="+mn-cs"/>
+              </a:defRPr>
+            </a:lvl7pPr>
+            <a:lvl8pPr marL="16458377" indent="-1097226" algn="l" defTabSz="4388900" rtl="0" eaLnBrk="1" latinLnBrk="0" hangingPunct="1">
+              <a:spcBef>
+                <a:spcPct val="20000"/>
+              </a:spcBef>
+              <a:buFont typeface="Arial" pitchFamily="34" charset="0"/>
+              <a:buChar char="•"/>
+              <a:defRPr sz="9600" kern="1200">
+                <a:solidFill>
+                  <a:schemeClr val="tx1"/>
+                </a:solidFill>
+                <a:latin typeface="+mn-lt"/>
+                <a:ea typeface="+mn-ea"/>
+                <a:cs typeface="+mn-cs"/>
+              </a:defRPr>
+            </a:lvl8pPr>
+            <a:lvl9pPr marL="18652827" indent="-1097226" algn="l" defTabSz="4388900" rtl="0" eaLnBrk="1" latinLnBrk="0" hangingPunct="1">
+              <a:spcBef>
+                <a:spcPct val="20000"/>
+              </a:spcBef>
+              <a:buFont typeface="Arial" pitchFamily="34" charset="0"/>
+              <a:buChar char="•"/>
+              <a:defRPr sz="9600" kern="1200">
+                <a:solidFill>
+                  <a:schemeClr val="tx1"/>
+                </a:solidFill>
+                <a:latin typeface="+mn-lt"/>
+                <a:ea typeface="+mn-ea"/>
+                <a:cs typeface="+mn-cs"/>
+              </a:defRPr>
+            </a:lvl9pPr>
+          </a:lstStyle>
+          <a:p>
+            <a:r>
+              <a:rPr lang="en-US" dirty="0">
+                <a:solidFill>
+                  <a:schemeClr val="tx2"/>
+                </a:solidFill>
+                <a:latin typeface="Arial" panose="020B0604020202020204" pitchFamily="34" charset="0"/>
+                <a:cs typeface="Arial" panose="020B0604020202020204" pitchFamily="34" charset="0"/>
+              </a:rPr>
+              <a:t> DATA PREPARATION</a:t>
+            </a:r>
+          </a:p>
+        </p:txBody>
+      </p:sp>
+      <p:sp>
+        <p:nvSpPr>
+          <p:cNvPr id="4109" name="Text Placeholder 4">
+            <a:extLst>
+              <a:ext uri="{FF2B5EF4-FFF2-40B4-BE49-F238E27FC236}">
+                <a16:creationId xmlns:a16="http://schemas.microsoft.com/office/drawing/2014/main" id="{AE35C184-D179-575B-3E66-83C93DF91809}"/>
+              </a:ext>
+            </a:extLst>
+          </p:cNvPr>
+          <p:cNvSpPr txBox="1">
+            <a:spLocks/>
+          </p:cNvSpPr>
+          <p:nvPr/>
+        </p:nvSpPr>
+        <p:spPr>
+          <a:xfrm>
+            <a:off x="11500720" y="18285473"/>
+            <a:ext cx="10048874" cy="5078291"/>
+          </a:xfrm>
+          <a:prstGeom prst="rect">
+            <a:avLst/>
+          </a:prstGeom>
+        </p:spPr>
+        <p:txBody>
+          <a:bodyPr wrap="square" lIns="228589" tIns="228589" rIns="228589" bIns="228589">
+            <a:spAutoFit/>
+          </a:bodyPr>
+          <a:lstStyle>
+            <a:lvl1pPr marL="0" indent="0" algn="l" defTabSz="4388900" rtl="0" eaLnBrk="1" latinLnBrk="0" hangingPunct="1">
+              <a:spcBef>
+                <a:spcPct val="20000"/>
+              </a:spcBef>
+              <a:buFont typeface="Arial" pitchFamily="34" charset="0"/>
+              <a:buNone/>
+              <a:defRPr sz="2500" kern="1200">
+                <a:solidFill>
+                  <a:schemeClr val="accent5">
+                    <a:lumMod val="50000"/>
+                  </a:schemeClr>
+                </a:solidFill>
+                <a:latin typeface="Times New Roman" pitchFamily="18" charset="0"/>
+                <a:ea typeface="+mn-ea"/>
+                <a:cs typeface="Times New Roman" pitchFamily="18" charset="0"/>
+              </a:defRPr>
+            </a:lvl1pPr>
+            <a:lvl2pPr marL="1485825" indent="-571471" algn="l" defTabSz="4388900" rtl="0" eaLnBrk="1" latinLnBrk="0" hangingPunct="1">
+              <a:spcBef>
+                <a:spcPct val="20000"/>
+              </a:spcBef>
+              <a:buFont typeface="Arial" pitchFamily="34" charset="0"/>
+              <a:buChar char="–"/>
+              <a:defRPr sz="2500" kern="1200">
+                <a:solidFill>
+                  <a:schemeClr val="tx1"/>
+                </a:solidFill>
+                <a:latin typeface="Trebuchet MS" pitchFamily="34" charset="0"/>
+                <a:ea typeface="+mn-ea"/>
+                <a:cs typeface="+mn-cs"/>
+              </a:defRPr>
+            </a:lvl2pPr>
+            <a:lvl3pPr marL="2057297" indent="-571471" algn="l" defTabSz="4388900" rtl="0" eaLnBrk="1" latinLnBrk="0" hangingPunct="1">
+              <a:spcBef>
+                <a:spcPct val="20000"/>
+              </a:spcBef>
+              <a:buFont typeface="Arial" pitchFamily="34" charset="0"/>
+              <a:buChar char="•"/>
+              <a:defRPr sz="2500" kern="1200">
+                <a:solidFill>
+                  <a:schemeClr val="tx1"/>
+                </a:solidFill>
+                <a:latin typeface="Trebuchet MS" pitchFamily="34" charset="0"/>
+                <a:ea typeface="+mn-ea"/>
+                <a:cs typeface="+mn-cs"/>
+              </a:defRPr>
+            </a:lvl3pPr>
+            <a:lvl4pPr marL="2685916" indent="-628619" algn="l" defTabSz="4388900" rtl="0" eaLnBrk="1" latinLnBrk="0" hangingPunct="1">
+              <a:spcBef>
+                <a:spcPct val="20000"/>
+              </a:spcBef>
+              <a:buFont typeface="Arial" pitchFamily="34" charset="0"/>
+              <a:buChar char="–"/>
+              <a:defRPr sz="2500" kern="1200">
+                <a:solidFill>
+                  <a:schemeClr val="tx1"/>
+                </a:solidFill>
+                <a:latin typeface="Trebuchet MS" pitchFamily="34" charset="0"/>
+                <a:ea typeface="+mn-ea"/>
+                <a:cs typeface="+mn-cs"/>
+              </a:defRPr>
+            </a:lvl4pPr>
+            <a:lvl5pPr marL="3143093" indent="-457177" algn="l" defTabSz="4388900" rtl="0" eaLnBrk="1" latinLnBrk="0" hangingPunct="1">
+              <a:spcBef>
+                <a:spcPct val="20000"/>
+              </a:spcBef>
+              <a:buFont typeface="Arial" pitchFamily="34" charset="0"/>
+              <a:buChar char="»"/>
+              <a:defRPr sz="2500" kern="1200">
+                <a:solidFill>
+                  <a:schemeClr val="tx1"/>
+                </a:solidFill>
+                <a:latin typeface="Trebuchet MS" pitchFamily="34" charset="0"/>
+                <a:ea typeface="+mn-ea"/>
+                <a:cs typeface="+mn-cs"/>
+              </a:defRPr>
+            </a:lvl5pPr>
+            <a:lvl6pPr marL="12069477" indent="-1097226" algn="l" defTabSz="4388900" rtl="0" eaLnBrk="1" latinLnBrk="0" hangingPunct="1">
+              <a:spcBef>
+                <a:spcPct val="20000"/>
+              </a:spcBef>
+              <a:buFont typeface="Arial" pitchFamily="34" charset="0"/>
+              <a:buChar char="•"/>
+              <a:defRPr sz="9600" kern="1200">
+                <a:solidFill>
+                  <a:schemeClr val="tx1"/>
+                </a:solidFill>
+                <a:latin typeface="+mn-lt"/>
+                <a:ea typeface="+mn-ea"/>
+                <a:cs typeface="+mn-cs"/>
+              </a:defRPr>
+            </a:lvl6pPr>
+            <a:lvl7pPr marL="14263926" indent="-1097226" algn="l" defTabSz="4388900" rtl="0" eaLnBrk="1" latinLnBrk="0" hangingPunct="1">
+              <a:spcBef>
+                <a:spcPct val="20000"/>
+              </a:spcBef>
+              <a:buFont typeface="Arial" pitchFamily="34" charset="0"/>
+              <a:buChar char="•"/>
+              <a:defRPr sz="9600" kern="1200">
+                <a:solidFill>
+                  <a:schemeClr val="tx1"/>
+                </a:solidFill>
+                <a:latin typeface="+mn-lt"/>
+                <a:ea typeface="+mn-ea"/>
+                <a:cs typeface="+mn-cs"/>
+              </a:defRPr>
+            </a:lvl7pPr>
+            <a:lvl8pPr marL="16458377" indent="-1097226" algn="l" defTabSz="4388900" rtl="0" eaLnBrk="1" latinLnBrk="0" hangingPunct="1">
+              <a:spcBef>
+                <a:spcPct val="20000"/>
+              </a:spcBef>
+              <a:buFont typeface="Arial" pitchFamily="34" charset="0"/>
+              <a:buChar char="•"/>
+              <a:defRPr sz="9600" kern="1200">
+                <a:solidFill>
+                  <a:schemeClr val="tx1"/>
+                </a:solidFill>
+                <a:latin typeface="+mn-lt"/>
+                <a:ea typeface="+mn-ea"/>
+                <a:cs typeface="+mn-cs"/>
+              </a:defRPr>
+            </a:lvl8pPr>
+            <a:lvl9pPr marL="18652827" indent="-1097226" algn="l" defTabSz="4388900" rtl="0" eaLnBrk="1" latinLnBrk="0" hangingPunct="1">
+              <a:spcBef>
+                <a:spcPct val="20000"/>
+              </a:spcBef>
+              <a:buFont typeface="Arial" pitchFamily="34" charset="0"/>
+              <a:buChar char="•"/>
+              <a:defRPr sz="9600" kern="1200">
+                <a:solidFill>
+                  <a:schemeClr val="tx1"/>
+                </a:solidFill>
+                <a:latin typeface="+mn-lt"/>
+                <a:ea typeface="+mn-ea"/>
+                <a:cs typeface="+mn-cs"/>
+              </a:defRPr>
+            </a:lvl9pPr>
+          </a:lstStyle>
+          <a:p>
+            <a:pPr algn="just"/>
+            <a:r>
+              <a:rPr lang="en-US" dirty="0">
+                <a:solidFill>
+                  <a:schemeClr val="tx1"/>
+                </a:solidFill>
+              </a:rPr>
+              <a:t>The Data Preparation Phase focused on transforming the CICIDS2017 dataset, the source data upon which the automated intelligent security technology will operate, from the cleaned format into a structured format that is suitable for the purposes of machine learning modelling. During this phase, multiple pre-processing techniques were applied including; defining a target, separating the features from the target, label encoding of the target variables, correlation-based feature selection (CFS), splitting the dataset into train/test datasets, scaling features and preparing the dataset to control for the multiple class types. These stages were valuable to the preparation of a reduced dataset, enhance data quality and create models that are compatible with the requirements of the proposed IDS solution while maintaining the lightweight objective.</a:t>
+            </a:r>
+          </a:p>
+        </p:txBody>
+      </p:sp>
+      <p:pic>
+        <p:nvPicPr>
+          <p:cNvPr id="4111" name="Picture 4110">
+            <a:extLst>
+              <a:ext uri="{FF2B5EF4-FFF2-40B4-BE49-F238E27FC236}">
+                <a16:creationId xmlns:a16="http://schemas.microsoft.com/office/drawing/2014/main" id="{CFF2CB3B-095D-01C2-0072-F9F3186914F3}"/>
+              </a:ext>
+            </a:extLst>
+          </p:cNvPr>
+          <p:cNvPicPr>
+            <a:picLocks noChangeAspect="1"/>
+          </p:cNvPicPr>
+          <p:nvPr/>
+        </p:nvPicPr>
+        <p:blipFill>
+          <a:blip r:embed="rId7">
+            <a:extLst>
+              <a:ext uri="{28A0092B-C50C-407E-A947-70E740481C1C}">
+                <a14:useLocalDpi xmlns:a14="http://schemas.microsoft.com/office/drawing/2010/main" val="0"/>
+              </a:ext>
+            </a:extLst>
+          </a:blip>
+          <a:stretch>
+            <a:fillRect/>
+          </a:stretch>
+        </p:blipFill>
+        <p:spPr>
+          <a:xfrm>
+            <a:off x="11491690" y="23322901"/>
+            <a:ext cx="9680489" cy="6710281"/>
+          </a:xfrm>
+          <a:prstGeom prst="rect">
+            <a:avLst/>
+          </a:prstGeom>
+        </p:spPr>
+      </p:pic>
+      <p:sp>
+        <p:nvSpPr>
+          <p:cNvPr id="4113" name="Text Placeholder 4112">
+            <a:extLst>
+              <a:ext uri="{FF2B5EF4-FFF2-40B4-BE49-F238E27FC236}">
+                <a16:creationId xmlns:a16="http://schemas.microsoft.com/office/drawing/2014/main" id="{C3E8964B-EB47-3109-E00C-B3251A6A5F96}"/>
+              </a:ext>
+            </a:extLst>
+          </p:cNvPr>
+          <p:cNvSpPr>
+            <a:spLocks noGrp="1"/>
+          </p:cNvSpPr>
+          <p:nvPr>
+            <p:ph type="body" sz="quarter" idx="28"/>
+          </p:nvPr>
+        </p:nvSpPr>
+        <p:spPr/>
+        <p:txBody>
+          <a:bodyPr/>
+          <a:lstStyle/>
+          <a:p>
+            <a:endParaRPr lang="en-IE"/>
+          </a:p>
+        </p:txBody>
+      </p:sp>
+      <p:sp>
+        <p:nvSpPr>
+          <p:cNvPr id="4116" name="Text Placeholder 5">
+            <a:extLst>
+              <a:ext uri="{FF2B5EF4-FFF2-40B4-BE49-F238E27FC236}">
+                <a16:creationId xmlns:a16="http://schemas.microsoft.com/office/drawing/2014/main" id="{C31B5985-E191-5737-D2C8-DBB16C148A9F}"/>
+              </a:ext>
+            </a:extLst>
+          </p:cNvPr>
+          <p:cNvSpPr txBox="1">
+            <a:spLocks/>
+          </p:cNvSpPr>
+          <p:nvPr/>
+        </p:nvSpPr>
+        <p:spPr>
+          <a:xfrm>
+            <a:off x="22653047" y="18707463"/>
+            <a:ext cx="10048875" cy="754045"/>
+          </a:xfrm>
+          <a:prstGeom prst="rect">
+            <a:avLst/>
+          </a:prstGeom>
+          <a:noFill/>
+        </p:spPr>
+        <p:txBody>
+          <a:bodyPr lIns="91436" tIns="91436" rIns="91436" bIns="91436" anchor="ctr" anchorCtr="0">
+            <a:spAutoFit/>
+          </a:bodyPr>
+          <a:lstStyle>
+            <a:lvl1pPr marL="0" indent="0" algn="ctr" defTabSz="4388900" rtl="0" eaLnBrk="1" latinLnBrk="0" hangingPunct="1">
+              <a:spcBef>
+                <a:spcPct val="20000"/>
+              </a:spcBef>
+              <a:buFont typeface="Arial" pitchFamily="34" charset="0"/>
+              <a:buNone/>
+              <a:defRPr sz="3700" b="1" u="sng" kern="1200" baseline="0">
+                <a:solidFill>
+                  <a:schemeClr val="accent5">
+                    <a:lumMod val="50000"/>
+                  </a:schemeClr>
+                </a:solidFill>
+                <a:latin typeface="+mn-lt"/>
+                <a:ea typeface="+mn-ea"/>
+                <a:cs typeface="+mn-cs"/>
+              </a:defRPr>
+            </a:lvl1pPr>
+            <a:lvl2pPr marL="3565982" indent="-1371531" algn="l" defTabSz="4388900" rtl="0" eaLnBrk="1" latinLnBrk="0" hangingPunct="1">
+              <a:spcBef>
+                <a:spcPct val="20000"/>
+              </a:spcBef>
+              <a:buFont typeface="Arial" pitchFamily="34" charset="0"/>
+              <a:buChar char="–"/>
+              <a:defRPr sz="13500" kern="1200">
+                <a:solidFill>
+                  <a:schemeClr val="tx1"/>
+                </a:solidFill>
+                <a:latin typeface="+mn-lt"/>
+                <a:ea typeface="+mn-ea"/>
+                <a:cs typeface="+mn-cs"/>
+              </a:defRPr>
+            </a:lvl2pPr>
+            <a:lvl3pPr marL="5486126" indent="-1097226" algn="l" defTabSz="4388900" rtl="0" eaLnBrk="1" latinLnBrk="0" hangingPunct="1">
+              <a:spcBef>
+                <a:spcPct val="20000"/>
+              </a:spcBef>
+              <a:buFont typeface="Arial" pitchFamily="34" charset="0"/>
+              <a:buChar char="•"/>
+              <a:defRPr sz="11600" kern="1200">
+                <a:solidFill>
+                  <a:schemeClr val="tx1"/>
+                </a:solidFill>
+                <a:latin typeface="+mn-lt"/>
+                <a:ea typeface="+mn-ea"/>
+                <a:cs typeface="+mn-cs"/>
+              </a:defRPr>
+            </a:lvl3pPr>
+            <a:lvl4pPr marL="7680577" indent="-1097226" algn="l" defTabSz="4388900" rtl="0" eaLnBrk="1" latinLnBrk="0" hangingPunct="1">
+              <a:spcBef>
+                <a:spcPct val="20000"/>
+              </a:spcBef>
+              <a:buFont typeface="Arial" pitchFamily="34" charset="0"/>
+              <a:buChar char="–"/>
+              <a:defRPr sz="9600" kern="1200">
+                <a:solidFill>
+                  <a:schemeClr val="tx1"/>
+                </a:solidFill>
+                <a:latin typeface="+mn-lt"/>
+                <a:ea typeface="+mn-ea"/>
+                <a:cs typeface="+mn-cs"/>
+              </a:defRPr>
+            </a:lvl4pPr>
+            <a:lvl5pPr marL="9875026" indent="-1097226" algn="l" defTabSz="4388900" rtl="0" eaLnBrk="1" latinLnBrk="0" hangingPunct="1">
+              <a:spcBef>
+                <a:spcPct val="20000"/>
+              </a:spcBef>
+              <a:buFont typeface="Arial" pitchFamily="34" charset="0"/>
+              <a:buChar char="»"/>
+              <a:defRPr sz="9600" kern="1200">
+                <a:solidFill>
+                  <a:schemeClr val="tx1"/>
+                </a:solidFill>
+                <a:latin typeface="+mn-lt"/>
+                <a:ea typeface="+mn-ea"/>
+                <a:cs typeface="+mn-cs"/>
+              </a:defRPr>
+            </a:lvl5pPr>
+            <a:lvl6pPr marL="12069477" indent="-1097226" algn="l" defTabSz="4388900" rtl="0" eaLnBrk="1" latinLnBrk="0" hangingPunct="1">
+              <a:spcBef>
+                <a:spcPct val="20000"/>
+              </a:spcBef>
+              <a:buFont typeface="Arial" pitchFamily="34" charset="0"/>
+              <a:buChar char="•"/>
+              <a:defRPr sz="9600" kern="1200">
+                <a:solidFill>
+                  <a:schemeClr val="tx1"/>
+                </a:solidFill>
+                <a:latin typeface="+mn-lt"/>
+                <a:ea typeface="+mn-ea"/>
+                <a:cs typeface="+mn-cs"/>
+              </a:defRPr>
+            </a:lvl6pPr>
+            <a:lvl7pPr marL="14263926" indent="-1097226" algn="l" defTabSz="4388900" rtl="0" eaLnBrk="1" latinLnBrk="0" hangingPunct="1">
+              <a:spcBef>
+                <a:spcPct val="20000"/>
+              </a:spcBef>
+              <a:buFont typeface="Arial" pitchFamily="34" charset="0"/>
+              <a:buChar char="•"/>
+              <a:defRPr sz="9600" kern="1200">
+                <a:solidFill>
+                  <a:schemeClr val="tx1"/>
+                </a:solidFill>
+                <a:latin typeface="+mn-lt"/>
+                <a:ea typeface="+mn-ea"/>
+                <a:cs typeface="+mn-cs"/>
+              </a:defRPr>
+            </a:lvl7pPr>
+            <a:lvl8pPr marL="16458377" indent="-1097226" algn="l" defTabSz="4388900" rtl="0" eaLnBrk="1" latinLnBrk="0" hangingPunct="1">
+              <a:spcBef>
+                <a:spcPct val="20000"/>
+              </a:spcBef>
+              <a:buFont typeface="Arial" pitchFamily="34" charset="0"/>
+              <a:buChar char="•"/>
+              <a:defRPr sz="9600" kern="1200">
+                <a:solidFill>
+                  <a:schemeClr val="tx1"/>
+                </a:solidFill>
+                <a:latin typeface="+mn-lt"/>
+                <a:ea typeface="+mn-ea"/>
+                <a:cs typeface="+mn-cs"/>
+              </a:defRPr>
+            </a:lvl8pPr>
+            <a:lvl9pPr marL="18652827" indent="-1097226" algn="l" defTabSz="4388900" rtl="0" eaLnBrk="1" latinLnBrk="0" hangingPunct="1">
+              <a:spcBef>
+                <a:spcPct val="20000"/>
+              </a:spcBef>
+              <a:buFont typeface="Arial" pitchFamily="34" charset="0"/>
+              <a:buChar char="•"/>
+              <a:defRPr sz="9600" kern="1200">
+                <a:solidFill>
+                  <a:schemeClr val="tx1"/>
+                </a:solidFill>
+                <a:latin typeface="+mn-lt"/>
+                <a:ea typeface="+mn-ea"/>
+                <a:cs typeface="+mn-cs"/>
+              </a:defRPr>
+            </a:lvl9pPr>
+          </a:lstStyle>
+          <a:p>
+            <a:r>
+              <a:rPr lang="en-US" dirty="0">
+                <a:solidFill>
+                  <a:schemeClr val="tx2"/>
+                </a:solidFill>
+                <a:latin typeface="Arial" panose="020B0604020202020204" pitchFamily="34" charset="0"/>
+                <a:cs typeface="Arial" panose="020B0604020202020204" pitchFamily="34" charset="0"/>
+              </a:rPr>
+              <a:t>EVALUATION</a:t>
+            </a:r>
+          </a:p>
+        </p:txBody>
+      </p:sp>
+      <p:sp>
+        <p:nvSpPr>
+          <p:cNvPr id="4117" name="Text Placeholder 8">
+            <a:extLst>
+              <a:ext uri="{FF2B5EF4-FFF2-40B4-BE49-F238E27FC236}">
+                <a16:creationId xmlns:a16="http://schemas.microsoft.com/office/drawing/2014/main" id="{BDC9C4BD-36DF-2030-36EF-646D925E6A7E}"/>
+              </a:ext>
+            </a:extLst>
+          </p:cNvPr>
+          <p:cNvSpPr txBox="1">
+            <a:spLocks/>
+          </p:cNvSpPr>
+          <p:nvPr/>
+        </p:nvSpPr>
+        <p:spPr>
+          <a:xfrm>
+            <a:off x="23207225" y="24690506"/>
+            <a:ext cx="10047018" cy="677100"/>
+          </a:xfrm>
+          <a:prstGeom prst="rect">
+            <a:avLst/>
+          </a:prstGeom>
+          <a:noFill/>
+        </p:spPr>
+        <p:txBody>
+          <a:bodyPr wrap="square" lIns="91436" tIns="91436" rIns="91436" bIns="91436" anchor="ctr" anchorCtr="0">
+            <a:spAutoFit/>
+          </a:bodyPr>
+          <a:lstStyle>
+            <a:lvl1pPr marL="0" indent="0" algn="ctr" defTabSz="4388900" rtl="0" eaLnBrk="1" latinLnBrk="0" hangingPunct="1">
+              <a:spcBef>
+                <a:spcPct val="20000"/>
+              </a:spcBef>
+              <a:buFont typeface="Arial" pitchFamily="34" charset="0"/>
+              <a:buNone/>
+              <a:defRPr sz="3700" b="1" u="sng" kern="1200" baseline="0">
+                <a:solidFill>
+                  <a:schemeClr val="accent5">
+                    <a:lumMod val="50000"/>
+                  </a:schemeClr>
+                </a:solidFill>
+                <a:latin typeface="+mn-lt"/>
+                <a:ea typeface="+mn-ea"/>
+                <a:cs typeface="+mn-cs"/>
+              </a:defRPr>
+            </a:lvl1pPr>
+            <a:lvl2pPr marL="3565982" indent="-1371531" algn="l" defTabSz="4388900" rtl="0" eaLnBrk="1" latinLnBrk="0" hangingPunct="1">
+              <a:spcBef>
+                <a:spcPct val="20000"/>
+              </a:spcBef>
+              <a:buFont typeface="Arial" pitchFamily="34" charset="0"/>
+              <a:buChar char="–"/>
+              <a:defRPr sz="13500" kern="1200">
+                <a:solidFill>
+                  <a:schemeClr val="tx1"/>
+                </a:solidFill>
+                <a:latin typeface="+mn-lt"/>
+                <a:ea typeface="+mn-ea"/>
+                <a:cs typeface="+mn-cs"/>
+              </a:defRPr>
+            </a:lvl2pPr>
+            <a:lvl3pPr marL="5486126" indent="-1097226" algn="l" defTabSz="4388900" rtl="0" eaLnBrk="1" latinLnBrk="0" hangingPunct="1">
+              <a:spcBef>
+                <a:spcPct val="20000"/>
+              </a:spcBef>
+              <a:buFont typeface="Arial" pitchFamily="34" charset="0"/>
+              <a:buChar char="•"/>
+              <a:defRPr sz="11600" kern="1200">
+                <a:solidFill>
+                  <a:schemeClr val="tx1"/>
+                </a:solidFill>
+                <a:latin typeface="+mn-lt"/>
+                <a:ea typeface="+mn-ea"/>
+                <a:cs typeface="+mn-cs"/>
+              </a:defRPr>
+            </a:lvl3pPr>
+            <a:lvl4pPr marL="7680577" indent="-1097226" algn="l" defTabSz="4388900" rtl="0" eaLnBrk="1" latinLnBrk="0" hangingPunct="1">
+              <a:spcBef>
+                <a:spcPct val="20000"/>
+              </a:spcBef>
+              <a:buFont typeface="Arial" pitchFamily="34" charset="0"/>
+              <a:buChar char="–"/>
+              <a:defRPr sz="9600" kern="1200">
+                <a:solidFill>
+                  <a:schemeClr val="tx1"/>
+                </a:solidFill>
+                <a:latin typeface="+mn-lt"/>
+                <a:ea typeface="+mn-ea"/>
+                <a:cs typeface="+mn-cs"/>
+              </a:defRPr>
+            </a:lvl4pPr>
+            <a:lvl5pPr marL="9875026" indent="-1097226" algn="l" defTabSz="4388900" rtl="0" eaLnBrk="1" latinLnBrk="0" hangingPunct="1">
+              <a:spcBef>
+                <a:spcPct val="20000"/>
+              </a:spcBef>
+              <a:buFont typeface="Arial" pitchFamily="34" charset="0"/>
+              <a:buChar char="»"/>
+              <a:defRPr sz="9600" kern="1200">
+                <a:solidFill>
+                  <a:schemeClr val="tx1"/>
+                </a:solidFill>
+                <a:latin typeface="+mn-lt"/>
+                <a:ea typeface="+mn-ea"/>
+                <a:cs typeface="+mn-cs"/>
+              </a:defRPr>
+            </a:lvl5pPr>
+            <a:lvl6pPr marL="12069477" indent="-1097226" algn="l" defTabSz="4388900" rtl="0" eaLnBrk="1" latinLnBrk="0" hangingPunct="1">
+              <a:spcBef>
+                <a:spcPct val="20000"/>
+              </a:spcBef>
+              <a:buFont typeface="Arial" pitchFamily="34" charset="0"/>
+              <a:buChar char="•"/>
+              <a:defRPr sz="9600" kern="1200">
+                <a:solidFill>
+                  <a:schemeClr val="tx1"/>
+                </a:solidFill>
+                <a:latin typeface="+mn-lt"/>
+                <a:ea typeface="+mn-ea"/>
+                <a:cs typeface="+mn-cs"/>
+              </a:defRPr>
+            </a:lvl6pPr>
+            <a:lvl7pPr marL="14263926" indent="-1097226" algn="l" defTabSz="4388900" rtl="0" eaLnBrk="1" latinLnBrk="0" hangingPunct="1">
+              <a:spcBef>
+                <a:spcPct val="20000"/>
+              </a:spcBef>
+              <a:buFont typeface="Arial" pitchFamily="34" charset="0"/>
+              <a:buChar char="•"/>
+              <a:defRPr sz="9600" kern="1200">
+                <a:solidFill>
+                  <a:schemeClr val="tx1"/>
+                </a:solidFill>
+                <a:latin typeface="+mn-lt"/>
+                <a:ea typeface="+mn-ea"/>
+                <a:cs typeface="+mn-cs"/>
+              </a:defRPr>
+            </a:lvl7pPr>
+            <a:lvl8pPr marL="16458377" indent="-1097226" algn="l" defTabSz="4388900" rtl="0" eaLnBrk="1" latinLnBrk="0" hangingPunct="1">
+              <a:spcBef>
+                <a:spcPct val="20000"/>
+              </a:spcBef>
+              <a:buFont typeface="Arial" pitchFamily="34" charset="0"/>
+              <a:buChar char="•"/>
+              <a:defRPr sz="9600" kern="1200">
+                <a:solidFill>
+                  <a:schemeClr val="tx1"/>
+                </a:solidFill>
+                <a:latin typeface="+mn-lt"/>
+                <a:ea typeface="+mn-ea"/>
+                <a:cs typeface="+mn-cs"/>
+              </a:defRPr>
+            </a:lvl8pPr>
+            <a:lvl9pPr marL="18652827" indent="-1097226" algn="l" defTabSz="4388900" rtl="0" eaLnBrk="1" latinLnBrk="0" hangingPunct="1">
+              <a:spcBef>
+                <a:spcPct val="20000"/>
+              </a:spcBef>
+              <a:buFont typeface="Arial" pitchFamily="34" charset="0"/>
+              <a:buChar char="•"/>
+              <a:defRPr sz="9600" kern="1200">
+                <a:solidFill>
+                  <a:schemeClr val="tx1"/>
+                </a:solidFill>
+                <a:latin typeface="+mn-lt"/>
+                <a:ea typeface="+mn-ea"/>
+                <a:cs typeface="+mn-cs"/>
+              </a:defRPr>
+            </a:lvl9pPr>
+          </a:lstStyle>
+          <a:p>
+            <a:r>
+              <a:rPr lang="en-US" sz="3200" dirty="0">
+                <a:solidFill>
+                  <a:schemeClr val="tx2"/>
+                </a:solidFill>
+                <a:latin typeface="Arial" panose="020B0604020202020204" pitchFamily="34" charset="0"/>
+                <a:cs typeface="Arial" panose="020B0604020202020204" pitchFamily="34" charset="0"/>
+              </a:rPr>
+              <a:t>DEPLOYMENT</a:t>
+            </a:r>
+          </a:p>
+        </p:txBody>
+      </p:sp>
+      <p:pic>
+        <p:nvPicPr>
+          <p:cNvPr id="4119" name="Picture 4118">
+            <a:extLst>
+              <a:ext uri="{FF2B5EF4-FFF2-40B4-BE49-F238E27FC236}">
+                <a16:creationId xmlns:a16="http://schemas.microsoft.com/office/drawing/2014/main" id="{FD2A59F4-C1E0-C700-274B-9209CEFCD814}"/>
+              </a:ext>
+            </a:extLst>
+          </p:cNvPr>
+          <p:cNvPicPr>
+            <a:picLocks noChangeAspect="1"/>
+          </p:cNvPicPr>
+          <p:nvPr/>
+        </p:nvPicPr>
+        <p:blipFill>
+          <a:blip r:embed="rId8">
+            <a:extLst>
+              <a:ext uri="{28A0092B-C50C-407E-A947-70E740481C1C}">
+                <a14:useLocalDpi xmlns:a14="http://schemas.microsoft.com/office/drawing/2010/main" val="0"/>
+              </a:ext>
+            </a:extLst>
+          </a:blip>
+          <a:stretch>
+            <a:fillRect/>
+          </a:stretch>
+        </p:blipFill>
+        <p:spPr>
+          <a:xfrm>
+            <a:off x="534829" y="2232751"/>
+            <a:ext cx="6406905" cy="2213942"/>
+          </a:xfrm>
+          <a:prstGeom prst="rect">
+            <a:avLst/>
+          </a:prstGeom>
+        </p:spPr>
+      </p:pic>
     </p:spTree>
     <p:extLst>
       <p:ext uri="{BB962C8B-B14F-4D97-AF65-F5344CB8AC3E}">

--- a/Presentation/Poster Presentation.pptx
+++ b/Presentation/Poster Presentation.pptx
@@ -197,510 +197,10 @@
 <file path=ppt/revisionInfo.xml><?xml version="1.0" encoding="utf-8"?>
 <p1510:revInfo xmlns:a="http://schemas.openxmlformats.org/drawingml/2006/main" xmlns:r="http://schemas.openxmlformats.org/officeDocument/2006/relationships" xmlns:p1510="http://schemas.microsoft.com/office/powerpoint/2015/10/main">
   <p1510:revLst>
-    <p1510:client id="{B3142576-DF6E-43BF-9F98-FA5F95B40661}" v="40" dt="2026-05-26T14:00:53.894"/>
+    <p1510:client id="{6ADB924E-6AE5-4C8B-92A2-E13E5F2C0196}" v="27" dt="2026-05-27T19:51:35.042"/>
+    <p1510:client id="{D6BF3BDA-612A-C84B-B48F-C5B667FBC9FE}" v="1" dt="2026-05-27T19:54:02.038"/>
   </p1510:revLst>
 </p1510:revInfo>
-</file>
-
-<file path=ppt/changesInfos/changesInfo1.xml><?xml version="1.0" encoding="utf-8"?>
-<pc:chgInfo xmlns:a="http://schemas.openxmlformats.org/drawingml/2006/main" xmlns:r="http://schemas.openxmlformats.org/officeDocument/2006/relationships" xmlns:ac="http://schemas.microsoft.com/office/drawing/2013/main/command" xmlns:pc="http://schemas.microsoft.com/office/powerpoint/2013/main/command">
-  <pc:docChgLst>
-    <pc:chgData name="Sander Soares" userId="670adff8fbebcc24" providerId="LiveId" clId="{E0F74DC6-1A43-432B-BC72-B2CD7B95C7BA}"/>
-    <pc:docChg chg="undo custSel modSld">
-      <pc:chgData name="Sander Soares" userId="670adff8fbebcc24" providerId="LiveId" clId="{E0F74DC6-1A43-432B-BC72-B2CD7B95C7BA}" dt="2026-05-26T14:04:13.329" v="1937" actId="20577"/>
-      <pc:docMkLst>
-        <pc:docMk/>
-      </pc:docMkLst>
-      <pc:sldChg chg="addSp delSp modSp mod">
-        <pc:chgData name="Sander Soares" userId="670adff8fbebcc24" providerId="LiveId" clId="{E0F74DC6-1A43-432B-BC72-B2CD7B95C7BA}" dt="2026-05-26T14:04:13.329" v="1937" actId="20577"/>
-        <pc:sldMkLst>
-          <pc:docMk/>
-          <pc:sldMk cId="3160527046" sldId="258"/>
-        </pc:sldMkLst>
-        <pc:spChg chg="mod">
-          <ac:chgData name="Sander Soares" userId="670adff8fbebcc24" providerId="LiveId" clId="{E0F74DC6-1A43-432B-BC72-B2CD7B95C7BA}" dt="2026-05-26T11:55:23.053" v="164" actId="1076"/>
-          <ac:spMkLst>
-            <pc:docMk/>
-            <pc:sldMk cId="3160527046" sldId="258"/>
-            <ac:spMk id="2" creationId="{00000000-0000-0000-0000-000000000000}"/>
-          </ac:spMkLst>
-        </pc:spChg>
-        <pc:spChg chg="mod">
-          <ac:chgData name="Sander Soares" userId="670adff8fbebcc24" providerId="LiveId" clId="{E0F74DC6-1A43-432B-BC72-B2CD7B95C7BA}" dt="2026-05-26T13:33:53.622" v="1483" actId="1076"/>
-          <ac:spMkLst>
-            <pc:docMk/>
-            <pc:sldMk cId="3160527046" sldId="258"/>
-            <ac:spMk id="4" creationId="{00000000-0000-0000-0000-000000000000}"/>
-          </ac:spMkLst>
-        </pc:spChg>
-        <pc:spChg chg="del mod">
-          <ac:chgData name="Sander Soares" userId="670adff8fbebcc24" providerId="LiveId" clId="{E0F74DC6-1A43-432B-BC72-B2CD7B95C7BA}" dt="2026-05-26T13:31:14.184" v="1337" actId="478"/>
-          <ac:spMkLst>
-            <pc:docMk/>
-            <pc:sldMk cId="3160527046" sldId="258"/>
-            <ac:spMk id="5" creationId="{00000000-0000-0000-0000-000000000000}"/>
-          </ac:spMkLst>
-        </pc:spChg>
-        <pc:spChg chg="mod">
-          <ac:chgData name="Sander Soares" userId="670adff8fbebcc24" providerId="LiveId" clId="{E0F74DC6-1A43-432B-BC72-B2CD7B95C7BA}" dt="2026-05-26T13:39:04.082" v="1733" actId="1076"/>
-          <ac:spMkLst>
-            <pc:docMk/>
-            <pc:sldMk cId="3160527046" sldId="258"/>
-            <ac:spMk id="6" creationId="{00000000-0000-0000-0000-000000000000}"/>
-          </ac:spMkLst>
-        </pc:spChg>
-        <pc:spChg chg="del mod">
-          <ac:chgData name="Sander Soares" userId="670adff8fbebcc24" providerId="LiveId" clId="{E0F74DC6-1A43-432B-BC72-B2CD7B95C7BA}" dt="2026-05-26T13:17:57.697" v="1273" actId="478"/>
-          <ac:spMkLst>
-            <pc:docMk/>
-            <pc:sldMk cId="3160527046" sldId="258"/>
-            <ac:spMk id="8" creationId="{00000000-0000-0000-0000-000000000000}"/>
-          </ac:spMkLst>
-        </pc:spChg>
-        <pc:spChg chg="add del mod">
-          <ac:chgData name="Sander Soares" userId="670adff8fbebcc24" providerId="LiveId" clId="{E0F74DC6-1A43-432B-BC72-B2CD7B95C7BA}" dt="2026-05-26T12:34:27.390" v="634" actId="478"/>
-          <ac:spMkLst>
-            <pc:docMk/>
-            <pc:sldMk cId="3160527046" sldId="258"/>
-            <ac:spMk id="14" creationId="{2F400EC5-3077-2202-FAC6-DBBC3619530D}"/>
-          </ac:spMkLst>
-        </pc:spChg>
-        <pc:spChg chg="mod">
-          <ac:chgData name="Sander Soares" userId="670adff8fbebcc24" providerId="LiveId" clId="{E0F74DC6-1A43-432B-BC72-B2CD7B95C7BA}" dt="2026-05-26T14:01:35.124" v="1919" actId="113"/>
-          <ac:spMkLst>
-            <pc:docMk/>
-            <pc:sldMk cId="3160527046" sldId="258"/>
-            <ac:spMk id="16" creationId="{00000000-0000-0000-0000-000000000000}"/>
-          </ac:spMkLst>
-        </pc:spChg>
-        <pc:spChg chg="add del mod">
-          <ac:chgData name="Sander Soares" userId="670adff8fbebcc24" providerId="LiveId" clId="{E0F74DC6-1A43-432B-BC72-B2CD7B95C7BA}" dt="2026-05-26T12:34:22.510" v="633" actId="478"/>
-          <ac:spMkLst>
-            <pc:docMk/>
-            <pc:sldMk cId="3160527046" sldId="258"/>
-            <ac:spMk id="17" creationId="{5FC8D096-2EBE-8B63-AA60-7C56D6925730}"/>
-          </ac:spMkLst>
-        </pc:spChg>
-        <pc:spChg chg="mod">
-          <ac:chgData name="Sander Soares" userId="670adff8fbebcc24" providerId="LiveId" clId="{E0F74DC6-1A43-432B-BC72-B2CD7B95C7BA}" dt="2026-05-26T14:04:13.329" v="1937" actId="20577"/>
-          <ac:spMkLst>
-            <pc:docMk/>
-            <pc:sldMk cId="3160527046" sldId="258"/>
-            <ac:spMk id="18" creationId="{00000000-0000-0000-0000-000000000000}"/>
-          </ac:spMkLst>
-        </pc:spChg>
-        <pc:spChg chg="add mod">
-          <ac:chgData name="Sander Soares" userId="670adff8fbebcc24" providerId="LiveId" clId="{E0F74DC6-1A43-432B-BC72-B2CD7B95C7BA}" dt="2026-05-26T13:19:22.836" v="1315" actId="1076"/>
-          <ac:spMkLst>
-            <pc:docMk/>
-            <pc:sldMk cId="3160527046" sldId="258"/>
-            <ac:spMk id="21" creationId="{348892E9-080F-B06A-105A-7860166FB512}"/>
-          </ac:spMkLst>
-        </pc:spChg>
-        <pc:spChg chg="del">
-          <ac:chgData name="Sander Soares" userId="670adff8fbebcc24" providerId="LiveId" clId="{E0F74DC6-1A43-432B-BC72-B2CD7B95C7BA}" dt="2026-05-26T13:17:49.331" v="1267" actId="478"/>
-          <ac:spMkLst>
-            <pc:docMk/>
-            <pc:sldMk cId="3160527046" sldId="258"/>
-            <ac:spMk id="27" creationId="{00000000-0000-0000-0000-000000000000}"/>
-          </ac:spMkLst>
-        </pc:spChg>
-        <pc:spChg chg="del">
-          <ac:chgData name="Sander Soares" userId="670adff8fbebcc24" providerId="LiveId" clId="{E0F74DC6-1A43-432B-BC72-B2CD7B95C7BA}" dt="2026-05-26T13:17:55.186" v="1271" actId="478"/>
-          <ac:spMkLst>
-            <pc:docMk/>
-            <pc:sldMk cId="3160527046" sldId="258"/>
-            <ac:spMk id="28" creationId="{00000000-0000-0000-0000-000000000000}"/>
-          </ac:spMkLst>
-        </pc:spChg>
-        <pc:spChg chg="del mod">
-          <ac:chgData name="Sander Soares" userId="670adff8fbebcc24" providerId="LiveId" clId="{E0F74DC6-1A43-432B-BC72-B2CD7B95C7BA}" dt="2026-05-26T14:00:35.030" v="1838" actId="478"/>
-          <ac:spMkLst>
-            <pc:docMk/>
-            <pc:sldMk cId="3160527046" sldId="258"/>
-            <ac:spMk id="29" creationId="{00000000-0000-0000-0000-000000000000}"/>
-          </ac:spMkLst>
-        </pc:spChg>
-        <pc:spChg chg="mod">
-          <ac:chgData name="Sander Soares" userId="670adff8fbebcc24" providerId="LiveId" clId="{E0F74DC6-1A43-432B-BC72-B2CD7B95C7BA}" dt="2026-05-26T13:33:55.571" v="1484" actId="1076"/>
-          <ac:spMkLst>
-            <pc:docMk/>
-            <pc:sldMk cId="3160527046" sldId="258"/>
-            <ac:spMk id="32" creationId="{00000000-0000-0000-0000-000000000000}"/>
-          </ac:spMkLst>
-        </pc:spChg>
-        <pc:spChg chg="del">
-          <ac:chgData name="Sander Soares" userId="670adff8fbebcc24" providerId="LiveId" clId="{E0F74DC6-1A43-432B-BC72-B2CD7B95C7BA}" dt="2026-05-26T12:34:10.509" v="627" actId="478"/>
-          <ac:spMkLst>
-            <pc:docMk/>
-            <pc:sldMk cId="3160527046" sldId="258"/>
-            <ac:spMk id="34" creationId="{00000000-0000-0000-0000-000000000000}"/>
-          </ac:spMkLst>
-        </pc:spChg>
-        <pc:spChg chg="del">
-          <ac:chgData name="Sander Soares" userId="670adff8fbebcc24" providerId="LiveId" clId="{E0F74DC6-1A43-432B-BC72-B2CD7B95C7BA}" dt="2026-05-26T12:34:11.543" v="628" actId="478"/>
-          <ac:spMkLst>
-            <pc:docMk/>
-            <pc:sldMk cId="3160527046" sldId="258"/>
-            <ac:spMk id="35" creationId="{9000B3FD-55D3-45AB-92CB-10A741BAA0B3}"/>
-          </ac:spMkLst>
-        </pc:spChg>
-        <pc:spChg chg="del">
-          <ac:chgData name="Sander Soares" userId="670adff8fbebcc24" providerId="LiveId" clId="{E0F74DC6-1A43-432B-BC72-B2CD7B95C7BA}" dt="2026-05-26T13:17:50.964" v="1268" actId="478"/>
-          <ac:spMkLst>
-            <pc:docMk/>
-            <pc:sldMk cId="3160527046" sldId="258"/>
-            <ac:spMk id="36" creationId="{00000000-0000-0000-0000-000000000000}"/>
-          </ac:spMkLst>
-        </pc:spChg>
-        <pc:spChg chg="del mod">
-          <ac:chgData name="Sander Soares" userId="670adff8fbebcc24" providerId="LiveId" clId="{E0F74DC6-1A43-432B-BC72-B2CD7B95C7BA}" dt="2026-05-26T14:00:31.454" v="1836" actId="478"/>
-          <ac:spMkLst>
-            <pc:docMk/>
-            <pc:sldMk cId="3160527046" sldId="258"/>
-            <ac:spMk id="38" creationId="{00000000-0000-0000-0000-000000000000}"/>
-          </ac:spMkLst>
-        </pc:spChg>
-        <pc:spChg chg="mod">
-          <ac:chgData name="Sander Soares" userId="670adff8fbebcc24" providerId="LiveId" clId="{E0F74DC6-1A43-432B-BC72-B2CD7B95C7BA}" dt="2026-05-26T13:33:48.566" v="1481" actId="1076"/>
-          <ac:spMkLst>
-            <pc:docMk/>
-            <pc:sldMk cId="3160527046" sldId="258"/>
-            <ac:spMk id="40" creationId="{00000000-0000-0000-0000-000000000000}"/>
-          </ac:spMkLst>
-        </pc:spChg>
-        <pc:spChg chg="mod">
-          <ac:chgData name="Sander Soares" userId="670adff8fbebcc24" providerId="LiveId" clId="{E0F74DC6-1A43-432B-BC72-B2CD7B95C7BA}" dt="2026-05-26T13:33:51.286" v="1482" actId="1076"/>
-          <ac:spMkLst>
-            <pc:docMk/>
-            <pc:sldMk cId="3160527046" sldId="258"/>
-            <ac:spMk id="41" creationId="{00000000-0000-0000-0000-000000000000}"/>
-          </ac:spMkLst>
-        </pc:spChg>
-        <pc:spChg chg="del">
-          <ac:chgData name="Sander Soares" userId="670adff8fbebcc24" providerId="LiveId" clId="{E0F74DC6-1A43-432B-BC72-B2CD7B95C7BA}" dt="2026-05-26T12:34:15.700" v="631" actId="478"/>
-          <ac:spMkLst>
-            <pc:docMk/>
-            <pc:sldMk cId="3160527046" sldId="258"/>
-            <ac:spMk id="43" creationId="{D01E89C6-0794-4157-9DEF-383030D60FAB}"/>
-          </ac:spMkLst>
-        </pc:spChg>
-        <pc:spChg chg="del">
-          <ac:chgData name="Sander Soares" userId="670adff8fbebcc24" providerId="LiveId" clId="{E0F74DC6-1A43-432B-BC72-B2CD7B95C7BA}" dt="2026-05-26T12:34:13.959" v="630" actId="478"/>
-          <ac:spMkLst>
-            <pc:docMk/>
-            <pc:sldMk cId="3160527046" sldId="258"/>
-            <ac:spMk id="45" creationId="{00000000-0000-0000-0000-000000000000}"/>
-          </ac:spMkLst>
-        </pc:spChg>
-        <pc:spChg chg="del">
-          <ac:chgData name="Sander Soares" userId="670adff8fbebcc24" providerId="LiveId" clId="{E0F74DC6-1A43-432B-BC72-B2CD7B95C7BA}" dt="2026-05-26T13:17:48.485" v="1266" actId="478"/>
-          <ac:spMkLst>
-            <pc:docMk/>
-            <pc:sldMk cId="3160527046" sldId="258"/>
-            <ac:spMk id="46" creationId="{BA7BC14E-5C68-4BFC-B8B8-A1CD9BF3BFC9}"/>
-          </ac:spMkLst>
-        </pc:spChg>
-        <pc:spChg chg="add mod">
-          <ac:chgData name="Sander Soares" userId="670adff8fbebcc24" providerId="LiveId" clId="{E0F74DC6-1A43-432B-BC72-B2CD7B95C7BA}" dt="2026-05-26T13:50:38.209" v="1816" actId="20577"/>
-          <ac:spMkLst>
-            <pc:docMk/>
-            <pc:sldMk cId="3160527046" sldId="258"/>
-            <ac:spMk id="50" creationId="{4D0FFE05-CCA1-CB00-4EC8-B1F783EEA1FC}"/>
-          </ac:spMkLst>
-        </pc:spChg>
-        <pc:spChg chg="add del mod">
-          <ac:chgData name="Sander Soares" userId="670adff8fbebcc24" providerId="LiveId" clId="{E0F74DC6-1A43-432B-BC72-B2CD7B95C7BA}" dt="2026-05-26T13:17:53.817" v="1270" actId="478"/>
-          <ac:spMkLst>
-            <pc:docMk/>
-            <pc:sldMk cId="3160527046" sldId="258"/>
-            <ac:spMk id="58" creationId="{BF12D4DE-A7EA-7507-2221-E74458B1926B}"/>
-          </ac:spMkLst>
-        </pc:spChg>
-        <pc:spChg chg="add del mod">
-          <ac:chgData name="Sander Soares" userId="670adff8fbebcc24" providerId="LiveId" clId="{E0F74DC6-1A43-432B-BC72-B2CD7B95C7BA}" dt="2026-05-26T13:17:56.434" v="1272" actId="478"/>
-          <ac:spMkLst>
-            <pc:docMk/>
-            <pc:sldMk cId="3160527046" sldId="258"/>
-            <ac:spMk id="60" creationId="{1E13CF56-4E30-EFA9-F770-1B522B9CD0FD}"/>
-          </ac:spMkLst>
-        </pc:spChg>
-        <pc:spChg chg="add del mod">
-          <ac:chgData name="Sander Soares" userId="670adff8fbebcc24" providerId="LiveId" clId="{E0F74DC6-1A43-432B-BC72-B2CD7B95C7BA}" dt="2026-05-26T13:18:25.955" v="1280" actId="478"/>
-          <ac:spMkLst>
-            <pc:docMk/>
-            <pc:sldMk cId="3160527046" sldId="258"/>
-            <ac:spMk id="62" creationId="{57BFDAC8-DDCB-565E-BA57-EA50A1CF02B1}"/>
-          </ac:spMkLst>
-        </pc:spChg>
-        <pc:spChg chg="add mod">
-          <ac:chgData name="Sander Soares" userId="670adff8fbebcc24" providerId="LiveId" clId="{E0F74DC6-1A43-432B-BC72-B2CD7B95C7BA}" dt="2026-05-26T13:31:21.431" v="1339" actId="1076"/>
-          <ac:spMkLst>
-            <pc:docMk/>
-            <pc:sldMk cId="3160527046" sldId="258"/>
-            <ac:spMk id="63" creationId="{40E268E3-721A-232C-8012-F93EDC4562D5}"/>
-          </ac:spMkLst>
-        </pc:spChg>
-        <pc:spChg chg="add mod">
-          <ac:chgData name="Sander Soares" userId="670adff8fbebcc24" providerId="LiveId" clId="{E0F74DC6-1A43-432B-BC72-B2CD7B95C7BA}" dt="2026-05-26T13:39:06.384" v="1734" actId="1076"/>
-          <ac:spMkLst>
-            <pc:docMk/>
-            <pc:sldMk cId="3160527046" sldId="258"/>
-            <ac:spMk id="4096" creationId="{03EAC74A-226B-6D49-669C-28C272905BB7}"/>
-          </ac:spMkLst>
-        </pc:spChg>
-        <pc:spChg chg="add del mod">
-          <ac:chgData name="Sander Soares" userId="670adff8fbebcc24" providerId="LiveId" clId="{E0F74DC6-1A43-432B-BC72-B2CD7B95C7BA}" dt="2026-05-26T13:31:16.221" v="1338" actId="478"/>
-          <ac:spMkLst>
-            <pc:docMk/>
-            <pc:sldMk cId="3160527046" sldId="258"/>
-            <ac:spMk id="4101" creationId="{94EA0E46-3651-454C-AFBF-AB31663C04A4}"/>
-          </ac:spMkLst>
-        </pc:spChg>
-        <pc:spChg chg="add del mod">
-          <ac:chgData name="Sander Soares" userId="670adff8fbebcc24" providerId="LiveId" clId="{E0F74DC6-1A43-432B-BC72-B2CD7B95C7BA}" dt="2026-05-26T13:38:54.260" v="1728" actId="478"/>
-          <ac:spMkLst>
-            <pc:docMk/>
-            <pc:sldMk cId="3160527046" sldId="258"/>
-            <ac:spMk id="4103" creationId="{2476BC79-DC96-F257-D0D2-40D09BD46534}"/>
-          </ac:spMkLst>
-        </pc:spChg>
-        <pc:spChg chg="add del mod">
-          <ac:chgData name="Sander Soares" userId="670adff8fbebcc24" providerId="LiveId" clId="{E0F74DC6-1A43-432B-BC72-B2CD7B95C7BA}" dt="2026-05-26T13:38:56.500" v="1729" actId="478"/>
-          <ac:spMkLst>
-            <pc:docMk/>
-            <pc:sldMk cId="3160527046" sldId="258"/>
-            <ac:spMk id="4104" creationId="{7DC28FDA-5744-E38A-88C8-AE806DFC7053}"/>
-          </ac:spMkLst>
-        </pc:spChg>
-        <pc:spChg chg="add del mod">
-          <ac:chgData name="Sander Soares" userId="670adff8fbebcc24" providerId="LiveId" clId="{E0F74DC6-1A43-432B-BC72-B2CD7B95C7BA}" dt="2026-05-26T13:45:39.434" v="1753" actId="478"/>
-          <ac:spMkLst>
-            <pc:docMk/>
-            <pc:sldMk cId="3160527046" sldId="258"/>
-            <ac:spMk id="4105" creationId="{9388F1CC-3CC7-B9E5-F65D-72EEEAFE0F78}"/>
-          </ac:spMkLst>
-        </pc:spChg>
-        <pc:spChg chg="add del mod">
-          <ac:chgData name="Sander Soares" userId="670adff8fbebcc24" providerId="LiveId" clId="{E0F74DC6-1A43-432B-BC72-B2CD7B95C7BA}" dt="2026-05-26T13:39:01.931" v="1732" actId="478"/>
-          <ac:spMkLst>
-            <pc:docMk/>
-            <pc:sldMk cId="3160527046" sldId="258"/>
-            <ac:spMk id="4107" creationId="{CE881DAB-F6C6-529F-77BA-24D435236867}"/>
-          </ac:spMkLst>
-        </pc:spChg>
-        <pc:spChg chg="add mod">
-          <ac:chgData name="Sander Soares" userId="670adff8fbebcc24" providerId="LiveId" clId="{E0F74DC6-1A43-432B-BC72-B2CD7B95C7BA}" dt="2026-05-26T13:50:46.403" v="1818" actId="1076"/>
-          <ac:spMkLst>
-            <pc:docMk/>
-            <pc:sldMk cId="3160527046" sldId="258"/>
-            <ac:spMk id="4108" creationId="{D016A331-906B-1081-14A0-79F2EA8644B6}"/>
-          </ac:spMkLst>
-        </pc:spChg>
-        <pc:spChg chg="add mod">
-          <ac:chgData name="Sander Soares" userId="670adff8fbebcc24" providerId="LiveId" clId="{E0F74DC6-1A43-432B-BC72-B2CD7B95C7BA}" dt="2026-05-26T13:56:54.030" v="1823"/>
-          <ac:spMkLst>
-            <pc:docMk/>
-            <pc:sldMk cId="3160527046" sldId="258"/>
-            <ac:spMk id="4109" creationId="{AE35C184-D179-575B-3E66-83C93DF91809}"/>
-          </ac:spMkLst>
-        </pc:spChg>
-        <pc:spChg chg="add mod">
-          <ac:chgData name="Sander Soares" userId="670adff8fbebcc24" providerId="LiveId" clId="{E0F74DC6-1A43-432B-BC72-B2CD7B95C7BA}" dt="2026-05-26T14:00:31.454" v="1836" actId="478"/>
-          <ac:spMkLst>
-            <pc:docMk/>
-            <pc:sldMk cId="3160527046" sldId="258"/>
-            <ac:spMk id="4113" creationId="{C3E8964B-EB47-3109-E00C-B3251A6A5F96}"/>
-          </ac:spMkLst>
-        </pc:spChg>
-        <pc:spChg chg="add del mod">
-          <ac:chgData name="Sander Soares" userId="670adff8fbebcc24" providerId="LiveId" clId="{E0F74DC6-1A43-432B-BC72-B2CD7B95C7BA}" dt="2026-05-26T14:00:37.124" v="1839" actId="478"/>
-          <ac:spMkLst>
-            <pc:docMk/>
-            <pc:sldMk cId="3160527046" sldId="258"/>
-            <ac:spMk id="4115" creationId="{1F8CE6F1-7E1C-94A4-A130-B805D4A95164}"/>
-          </ac:spMkLst>
-        </pc:spChg>
-        <pc:spChg chg="add mod">
-          <ac:chgData name="Sander Soares" userId="670adff8fbebcc24" providerId="LiveId" clId="{E0F74DC6-1A43-432B-BC72-B2CD7B95C7BA}" dt="2026-05-26T14:01:18.765" v="1918" actId="1076"/>
-          <ac:spMkLst>
-            <pc:docMk/>
-            <pc:sldMk cId="3160527046" sldId="258"/>
-            <ac:spMk id="4116" creationId="{C31B5985-E191-5737-D2C8-DBB16C148A9F}"/>
-          </ac:spMkLst>
-        </pc:spChg>
-        <pc:spChg chg="add mod">
-          <ac:chgData name="Sander Soares" userId="670adff8fbebcc24" providerId="LiveId" clId="{E0F74DC6-1A43-432B-BC72-B2CD7B95C7BA}" dt="2026-05-26T14:01:07.304" v="1875" actId="20577"/>
-          <ac:spMkLst>
-            <pc:docMk/>
-            <pc:sldMk cId="3160527046" sldId="258"/>
-            <ac:spMk id="4117" creationId="{BDC9C4BD-36DF-2030-36EF-646D925E6A7E}"/>
-          </ac:spMkLst>
-        </pc:spChg>
-        <pc:graphicFrameChg chg="del">
-          <ac:chgData name="Sander Soares" userId="670adff8fbebcc24" providerId="LiveId" clId="{E0F74DC6-1A43-432B-BC72-B2CD7B95C7BA}" dt="2026-05-26T12:34:17.030" v="632" actId="478"/>
-          <ac:graphicFrameMkLst>
-            <pc:docMk/>
-            <pc:sldMk cId="3160527046" sldId="258"/>
-            <ac:graphicFrameMk id="37" creationId="{00000000-0000-0000-0000-000000000000}"/>
-          </ac:graphicFrameMkLst>
-        </pc:graphicFrameChg>
-        <pc:graphicFrameChg chg="add del mod modGraphic">
-          <ac:chgData name="Sander Soares" userId="670adff8fbebcc24" providerId="LiveId" clId="{E0F74DC6-1A43-432B-BC72-B2CD7B95C7BA}" dt="2026-05-26T13:10:33.491" v="1216" actId="478"/>
-          <ac:graphicFrameMkLst>
-            <pc:docMk/>
-            <pc:sldMk cId="3160527046" sldId="258"/>
-            <ac:graphicFrameMk id="51" creationId="{5A106467-1A0E-C3E8-F406-DCD606F38CEA}"/>
-          </ac:graphicFrameMkLst>
-        </pc:graphicFrameChg>
-        <pc:picChg chg="add mod">
-          <ac:chgData name="Sander Soares" userId="670adff8fbebcc24" providerId="LiveId" clId="{E0F74DC6-1A43-432B-BC72-B2CD7B95C7BA}" dt="2026-05-26T13:34:04.836" v="1489" actId="1076"/>
-          <ac:picMkLst>
-            <pc:docMk/>
-            <pc:sldMk cId="3160527046" sldId="258"/>
-            <ac:picMk id="7" creationId="{86F2D775-B43E-2D1B-5ECE-DD93EC61B794}"/>
-          </ac:picMkLst>
-        </pc:picChg>
-        <pc:picChg chg="add del mod">
-          <ac:chgData name="Sander Soares" userId="670adff8fbebcc24" providerId="LiveId" clId="{E0F74DC6-1A43-432B-BC72-B2CD7B95C7BA}" dt="2026-05-26T12:33:59" v="626" actId="478"/>
-          <ac:picMkLst>
-            <pc:docMk/>
-            <pc:sldMk cId="3160527046" sldId="258"/>
-            <ac:picMk id="12" creationId="{9306B931-D8AD-4F86-2746-E4A7606207BF}"/>
-          </ac:picMkLst>
-        </pc:picChg>
-        <pc:picChg chg="del mod">
-          <ac:chgData name="Sander Soares" userId="670adff8fbebcc24" providerId="LiveId" clId="{E0F74DC6-1A43-432B-BC72-B2CD7B95C7BA}" dt="2026-05-26T12:34:12.100" v="629" actId="478"/>
-          <ac:picMkLst>
-            <pc:docMk/>
-            <pc:sldMk cId="3160527046" sldId="258"/>
-            <ac:picMk id="20" creationId="{00000000-0000-0000-0000-000000000000}"/>
-          </ac:picMkLst>
-        </pc:picChg>
-        <pc:picChg chg="del mod">
-          <ac:chgData name="Sander Soares" userId="670adff8fbebcc24" providerId="LiveId" clId="{E0F74DC6-1A43-432B-BC72-B2CD7B95C7BA}" dt="2026-05-26T12:16:17.394" v="606" actId="478"/>
-          <ac:picMkLst>
-            <pc:docMk/>
-            <pc:sldMk cId="3160527046" sldId="258"/>
-            <ac:picMk id="22" creationId="{00000000-0000-0000-0000-000000000000}"/>
-          </ac:picMkLst>
-        </pc:picChg>
-        <pc:picChg chg="add del mod">
-          <ac:chgData name="Sander Soares" userId="670adff8fbebcc24" providerId="LiveId" clId="{E0F74DC6-1A43-432B-BC72-B2CD7B95C7BA}" dt="2026-05-26T12:51:15.363" v="673" actId="478"/>
-          <ac:picMkLst>
-            <pc:docMk/>
-            <pc:sldMk cId="3160527046" sldId="258"/>
-            <ac:picMk id="24" creationId="{A1FB5591-F3DC-241E-0473-9E27443D87BF}"/>
-          </ac:picMkLst>
-        </pc:picChg>
-        <pc:picChg chg="add del mod">
-          <ac:chgData name="Sander Soares" userId="670adff8fbebcc24" providerId="LiveId" clId="{E0F74DC6-1A43-432B-BC72-B2CD7B95C7BA}" dt="2026-05-26T13:20:25.395" v="1317" actId="478"/>
-          <ac:picMkLst>
-            <pc:docMk/>
-            <pc:sldMk cId="3160527046" sldId="258"/>
-            <ac:picMk id="33" creationId="{A3346020-0454-F93D-7F2E-4A5F4A62E76D}"/>
-          </ac:picMkLst>
-        </pc:picChg>
-        <pc:picChg chg="add del mod">
-          <ac:chgData name="Sander Soares" userId="670adff8fbebcc24" providerId="LiveId" clId="{E0F74DC6-1A43-432B-BC72-B2CD7B95C7BA}" dt="2026-05-26T12:57:56.175" v="749" actId="478"/>
-          <ac:picMkLst>
-            <pc:docMk/>
-            <pc:sldMk cId="3160527046" sldId="258"/>
-            <ac:picMk id="44" creationId="{8482AC49-B5EF-7400-D6BA-173B9FE9859E}"/>
-          </ac:picMkLst>
-        </pc:picChg>
-        <pc:picChg chg="add del mod">
-          <ac:chgData name="Sander Soares" userId="670adff8fbebcc24" providerId="LiveId" clId="{E0F74DC6-1A43-432B-BC72-B2CD7B95C7BA}" dt="2026-05-26T12:57:55.695" v="748" actId="478"/>
-          <ac:picMkLst>
-            <pc:docMk/>
-            <pc:sldMk cId="3160527046" sldId="258"/>
-            <ac:picMk id="48" creationId="{FC5B2CA9-40DD-00CB-1005-52E066991D28}"/>
-          </ac:picMkLst>
-        </pc:picChg>
-        <pc:picChg chg="add del mod">
-          <ac:chgData name="Sander Soares" userId="670adff8fbebcc24" providerId="LiveId" clId="{E0F74DC6-1A43-432B-BC72-B2CD7B95C7BA}" dt="2026-05-26T12:57:56.555" v="750" actId="478"/>
-          <ac:picMkLst>
-            <pc:docMk/>
-            <pc:sldMk cId="3160527046" sldId="258"/>
-            <ac:picMk id="49" creationId="{53CA52DA-7D90-A2A3-37F3-5E309F0A8AC7}"/>
-          </ac:picMkLst>
-        </pc:picChg>
-        <pc:picChg chg="add del mod">
-          <ac:chgData name="Sander Soares" userId="670adff8fbebcc24" providerId="LiveId" clId="{E0F74DC6-1A43-432B-BC72-B2CD7B95C7BA}" dt="2026-05-26T13:16:38.542" v="1250" actId="478"/>
-          <ac:picMkLst>
-            <pc:docMk/>
-            <pc:sldMk cId="3160527046" sldId="258"/>
-            <ac:picMk id="52" creationId="{FC46A41C-CA06-4FDB-1DB0-460287B1E43D}"/>
-          </ac:picMkLst>
-        </pc:picChg>
-        <pc:picChg chg="add del mod">
-          <ac:chgData name="Sander Soares" userId="670adff8fbebcc24" providerId="LiveId" clId="{E0F74DC6-1A43-432B-BC72-B2CD7B95C7BA}" dt="2026-05-26T13:15:52.747" v="1238" actId="478"/>
-          <ac:picMkLst>
-            <pc:docMk/>
-            <pc:sldMk cId="3160527046" sldId="258"/>
-            <ac:picMk id="53" creationId="{0D9FF5B2-35D9-0208-DF8A-8431265F396A}"/>
-          </ac:picMkLst>
-        </pc:picChg>
-        <pc:picChg chg="add del mod">
-          <ac:chgData name="Sander Soares" userId="670adff8fbebcc24" providerId="LiveId" clId="{E0F74DC6-1A43-432B-BC72-B2CD7B95C7BA}" dt="2026-05-26T13:17:09.992" v="1262" actId="478"/>
-          <ac:picMkLst>
-            <pc:docMk/>
-            <pc:sldMk cId="3160527046" sldId="258"/>
-            <ac:picMk id="54" creationId="{B6D38F41-501A-6060-7E20-31EB667D9F73}"/>
-          </ac:picMkLst>
-        </pc:picChg>
-        <pc:picChg chg="add mod">
-          <ac:chgData name="Sander Soares" userId="670adff8fbebcc24" providerId="LiveId" clId="{E0F74DC6-1A43-432B-BC72-B2CD7B95C7BA}" dt="2026-05-26T13:50:41.881" v="1817" actId="1076"/>
-          <ac:picMkLst>
-            <pc:docMk/>
-            <pc:sldMk cId="3160527046" sldId="258"/>
-            <ac:picMk id="56" creationId="{F061BFD2-4BA2-5E5B-C1D2-F9044DF3C43E}"/>
-          </ac:picMkLst>
-        </pc:picChg>
-        <pc:picChg chg="del mod">
-          <ac:chgData name="Sander Soares" userId="670adff8fbebcc24" providerId="LiveId" clId="{E0F74DC6-1A43-432B-BC72-B2CD7B95C7BA}" dt="2026-05-26T12:02:20.801" v="452" actId="478"/>
-          <ac:picMkLst>
-            <pc:docMk/>
-            <pc:sldMk cId="3160527046" sldId="258"/>
-            <ac:picMk id="4099" creationId="{00000000-0000-0000-0000-000000000000}"/>
-          </ac:picMkLst>
-        </pc:picChg>
-        <pc:picChg chg="del">
-          <ac:chgData name="Sander Soares" userId="670adff8fbebcc24" providerId="LiveId" clId="{E0F74DC6-1A43-432B-BC72-B2CD7B95C7BA}" dt="2026-05-26T13:17:46.456" v="1265" actId="478"/>
-          <ac:picMkLst>
-            <pc:docMk/>
-            <pc:sldMk cId="3160527046" sldId="258"/>
-            <ac:picMk id="4100" creationId="{00000000-0000-0000-0000-000000000000}"/>
-          </ac:picMkLst>
-        </pc:picChg>
-        <pc:picChg chg="add del mod">
-          <ac:chgData name="Sander Soares" userId="670adff8fbebcc24" providerId="LiveId" clId="{E0F74DC6-1A43-432B-BC72-B2CD7B95C7BA}" dt="2026-05-26T13:45:38.201" v="1752" actId="478"/>
-          <ac:picMkLst>
-            <pc:docMk/>
-            <pc:sldMk cId="3160527046" sldId="258"/>
-            <ac:picMk id="4106" creationId="{E4B0B6F5-9042-7F71-2F78-55FF7BB648EC}"/>
-          </ac:picMkLst>
-        </pc:picChg>
-        <pc:picChg chg="add mod">
-          <ac:chgData name="Sander Soares" userId="670adff8fbebcc24" providerId="LiveId" clId="{E0F74DC6-1A43-432B-BC72-B2CD7B95C7BA}" dt="2026-05-26T14:03:38.071" v="1921" actId="1076"/>
-          <ac:picMkLst>
-            <pc:docMk/>
-            <pc:sldMk cId="3160527046" sldId="258"/>
-            <ac:picMk id="4111" creationId="{CFF2CB3B-095D-01C2-0072-F9F3186914F3}"/>
-          </ac:picMkLst>
-        </pc:picChg>
-        <pc:picChg chg="add mod">
-          <ac:chgData name="Sander Soares" userId="670adff8fbebcc24" providerId="LiveId" clId="{E0F74DC6-1A43-432B-BC72-B2CD7B95C7BA}" dt="2026-05-26T14:03:57.490" v="1931" actId="1076"/>
-          <ac:picMkLst>
-            <pc:docMk/>
-            <pc:sldMk cId="3160527046" sldId="258"/>
-            <ac:picMk id="4119" creationId="{FD2A59F4-C1E0-C700-274B-9209CEFCD814}"/>
-          </ac:picMkLst>
-        </pc:picChg>
-      </pc:sldChg>
-    </pc:docChg>
-  </pc:docChgLst>
-</pc:chgInfo>
 </file>
 
 <file path=ppt/handoutMasters/handoutMaster1.xml><?xml version="1.0" encoding="utf-8"?>
@@ -752,7 +252,7 @@
             </a:lvl1pPr>
           </a:lstStyle>
           <a:p>
-            <a:endParaRPr lang="en-US"/>
+            <a:endParaRPr lang="en-US" dirty="0"/>
           </a:p>
         </p:txBody>
       </p:sp>
@@ -786,9 +286,9 @@
             <a:fld id="{0158C5BC-9A70-462C-B28D-9600239EAC64}" type="datetimeFigureOut">
               <a:rPr lang="en-US" smtClean="0"/>
               <a:pPr/>
-              <a:t>5/26/2026</a:t>
+              <a:t>5/28/2026</a:t>
             </a:fld>
-            <a:endParaRPr lang="en-US"/>
+            <a:endParaRPr lang="en-US" dirty="0"/>
           </a:p>
         </p:txBody>
       </p:sp>
@@ -819,7 +319,7 @@
             </a:lvl1pPr>
           </a:lstStyle>
           <a:p>
-            <a:endParaRPr lang="en-US"/>
+            <a:endParaRPr lang="en-US" dirty="0"/>
           </a:p>
         </p:txBody>
       </p:sp>
@@ -855,7 +355,7 @@
               <a:pPr/>
               <a:t>‹#›</a:t>
             </a:fld>
-            <a:endParaRPr lang="en-US"/>
+            <a:endParaRPr lang="en-US" dirty="0"/>
           </a:p>
         </p:txBody>
       </p:sp>
@@ -953,7 +453,7 @@
             <a:fld id="{E6CC2317-6751-4CD4-9995-8782DD78E936}" type="datetimeFigureOut">
               <a:rPr lang="en-US" smtClean="0"/>
               <a:pPr/>
-              <a:t>5/26/2026</a:t>
+              <a:t>5/28/2026</a:t>
             </a:fld>
             <a:endParaRPr lang="en-US" dirty="0"/>
           </a:p>
@@ -1255,7 +755,7 @@
           <a:bodyPr/>
           <a:lstStyle/>
           <a:p>
-            <a:endParaRPr lang="en-IE"/>
+            <a:endParaRPr lang="en-IE" dirty="0"/>
           </a:p>
         </p:txBody>
       </p:sp>
@@ -4523,7 +4023,7 @@
           <a:lstStyle/>
           <a:p>
             <a:pPr algn="ctr"/>
-            <a:endParaRPr lang="en-US"/>
+            <a:endParaRPr lang="en-US" dirty="0"/>
           </a:p>
         </p:txBody>
       </p:sp>
@@ -4587,7 +4087,7 @@
           <a:lstStyle/>
           <a:p>
             <a:pPr algn="ctr"/>
-            <a:endParaRPr lang="en-US"/>
+            <a:endParaRPr lang="en-US" dirty="0"/>
           </a:p>
         </p:txBody>
       </p:sp>
@@ -4651,7 +4151,7 @@
           <a:lstStyle/>
           <a:p>
             <a:pPr algn="ctr"/>
-            <a:endParaRPr lang="en-US"/>
+            <a:endParaRPr lang="en-US" dirty="0"/>
           </a:p>
         </p:txBody>
       </p:sp>
@@ -4715,7 +4215,7 @@
           <a:lstStyle/>
           <a:p>
             <a:pPr algn="ctr"/>
-            <a:endParaRPr lang="en-US"/>
+            <a:endParaRPr lang="en-US" dirty="0"/>
           </a:p>
         </p:txBody>
       </p:sp>
@@ -7214,7 +6714,7 @@
               <a:lstStyle/>
               <a:p>
                 <a:pPr algn="ctr"/>
-                <a:endParaRPr lang="en-US"/>
+                <a:endParaRPr lang="en-US" dirty="0"/>
               </a:p>
             </p:txBody>
           </p:sp>
@@ -7290,25 +6790,7 @@
                     </a:solidFill>
                     <a:latin typeface="Trebuchet MS" pitchFamily="34" charset="0"/>
                   </a:rPr>
-                  <a:t> discounts are available on our </a:t>
-                </a:r>
-                <a:r>
-                  <a:rPr lang="en-US" sz="2400" baseline="0" dirty="0" err="1">
-                    <a:solidFill>
-                      <a:schemeClr val="tx2"/>
-                    </a:solidFill>
-                    <a:latin typeface="Trebuchet MS" pitchFamily="34" charset="0"/>
-                  </a:rPr>
-                  <a:t>Facebook</a:t>
-                </a:r>
-                <a:r>
-                  <a:rPr lang="en-US" sz="2400" baseline="0" dirty="0">
-                    <a:solidFill>
-                      <a:schemeClr val="tx2"/>
-                    </a:solidFill>
-                    <a:latin typeface="Trebuchet MS" pitchFamily="34" charset="0"/>
-                  </a:rPr>
-                  <a:t> page.</a:t>
+                  <a:t> discounts are available on our Facebook page.</a:t>
                 </a:r>
                 <a:br>
                   <a:rPr lang="en-US" sz="2400" baseline="0" dirty="0">
@@ -7978,7 +7460,7 @@
           <a:lstStyle/>
           <a:p>
             <a:pPr algn="ctr"/>
-            <a:endParaRPr lang="en-US"/>
+            <a:endParaRPr lang="en-US" dirty="0"/>
           </a:p>
         </p:txBody>
       </p:sp>
@@ -8045,7 +7527,7 @@
           <a:lstStyle/>
           <a:p>
             <a:pPr algn="ctr"/>
-            <a:endParaRPr lang="en-US"/>
+            <a:endParaRPr lang="en-US" dirty="0"/>
           </a:p>
         </p:txBody>
       </p:sp>
@@ -8112,7 +7594,7 @@
           <a:lstStyle/>
           <a:p>
             <a:pPr algn="ctr"/>
-            <a:endParaRPr lang="en-US"/>
+            <a:endParaRPr lang="en-US" dirty="0"/>
           </a:p>
         </p:txBody>
       </p:sp>
@@ -9280,7 +8762,7 @@
               <a:lstStyle/>
               <a:p>
                 <a:pPr algn="ctr"/>
-                <a:endParaRPr lang="en-US"/>
+                <a:endParaRPr lang="en-US" dirty="0"/>
               </a:p>
             </p:txBody>
           </p:sp>
@@ -9356,25 +8838,7 @@
                     </a:solidFill>
                     <a:latin typeface="Trebuchet MS" pitchFamily="34" charset="0"/>
                   </a:rPr>
-                  <a:t> discounts are available on our </a:t>
-                </a:r>
-                <a:r>
-                  <a:rPr lang="en-US" sz="2400" baseline="0" dirty="0" err="1">
-                    <a:solidFill>
-                      <a:schemeClr val="tx2"/>
-                    </a:solidFill>
-                    <a:latin typeface="Trebuchet MS" pitchFamily="34" charset="0"/>
-                  </a:rPr>
-                  <a:t>Facebook</a:t>
-                </a:r>
-                <a:r>
-                  <a:rPr lang="en-US" sz="2400" baseline="0" dirty="0">
-                    <a:solidFill>
-                      <a:schemeClr val="tx2"/>
-                    </a:solidFill>
-                    <a:latin typeface="Trebuchet MS" pitchFamily="34" charset="0"/>
-                  </a:rPr>
-                  <a:t> page.</a:t>
+                  <a:t> discounts are available on our Facebook page.</a:t>
                 </a:r>
                 <a:br>
                   <a:rPr lang="en-US" sz="2400" baseline="0" dirty="0">
@@ -11414,7 +10878,7 @@
           <a:lstStyle/>
           <a:p>
             <a:pPr algn="ctr"/>
-            <a:endParaRPr lang="en-US"/>
+            <a:endParaRPr lang="en-US" dirty="0"/>
           </a:p>
         </p:txBody>
       </p:sp>
@@ -11481,7 +10945,7 @@
           <a:lstStyle/>
           <a:p>
             <a:pPr algn="ctr"/>
-            <a:endParaRPr lang="en-US"/>
+            <a:endParaRPr lang="en-US" dirty="0"/>
           </a:p>
         </p:txBody>
       </p:sp>
@@ -11548,7 +11012,7 @@
           <a:lstStyle/>
           <a:p>
             <a:pPr algn="ctr"/>
-            <a:endParaRPr lang="en-US"/>
+            <a:endParaRPr lang="en-US" dirty="0"/>
           </a:p>
         </p:txBody>
       </p:sp>
@@ -12716,7 +12180,7 @@
               <a:lstStyle/>
               <a:p>
                 <a:pPr algn="ctr"/>
-                <a:endParaRPr lang="en-US"/>
+                <a:endParaRPr lang="en-US" dirty="0"/>
               </a:p>
             </p:txBody>
           </p:sp>
@@ -12792,25 +12256,7 @@
                     </a:solidFill>
                     <a:latin typeface="Trebuchet MS" pitchFamily="34" charset="0"/>
                   </a:rPr>
-                  <a:t> discounts are available on our </a:t>
-                </a:r>
-                <a:r>
-                  <a:rPr lang="en-US" sz="2400" baseline="0" dirty="0" err="1">
-                    <a:solidFill>
-                      <a:schemeClr val="tx2"/>
-                    </a:solidFill>
-                    <a:latin typeface="Trebuchet MS" pitchFamily="34" charset="0"/>
-                  </a:rPr>
-                  <a:t>Facebook</a:t>
-                </a:r>
-                <a:r>
-                  <a:rPr lang="en-US" sz="2400" baseline="0" dirty="0">
-                    <a:solidFill>
-                      <a:schemeClr val="tx2"/>
-                    </a:solidFill>
-                    <a:latin typeface="Trebuchet MS" pitchFamily="34" charset="0"/>
-                  </a:rPr>
-                  <a:t> page.</a:t>
+                  <a:t> discounts are available on our Facebook page.</a:t>
                 </a:r>
                 <a:br>
                   <a:rPr lang="en-US" sz="2400" baseline="0" dirty="0">
@@ -14796,7 +14242,7 @@
         </p:nvSpPr>
         <p:spPr>
           <a:xfrm>
-            <a:off x="498517" y="27536679"/>
+            <a:off x="498517" y="27746547"/>
             <a:ext cx="10048875" cy="754045"/>
           </a:xfrm>
         </p:spPr>
@@ -14829,7 +14275,7 @@
         </p:nvSpPr>
         <p:spPr>
           <a:xfrm>
-            <a:off x="33346443" y="21931197"/>
+            <a:off x="33346443" y="24270292"/>
             <a:ext cx="10047018" cy="677100"/>
           </a:xfrm>
         </p:spPr>
@@ -14862,8 +14308,8 @@
         </p:nvSpPr>
         <p:spPr>
           <a:xfrm>
-            <a:off x="33392567" y="28504101"/>
-            <a:ext cx="10047018" cy="754045"/>
+            <a:off x="33612021" y="29814608"/>
+            <a:ext cx="9639169" cy="738656"/>
           </a:xfrm>
         </p:spPr>
         <p:txBody>
@@ -14871,7 +14317,7 @@
           <a:lstStyle/>
           <a:p>
             <a:r>
-              <a:rPr lang="en-US" dirty="0">
+              <a:rPr lang="en-US" sz="3600" dirty="0">
                 <a:solidFill>
                   <a:schemeClr val="tx2"/>
                 </a:solidFill>
@@ -14956,187 +14402,6 @@
           </a:p>
         </p:txBody>
       </p:sp>
-      <p:pic>
-        <p:nvPicPr>
-          <p:cNvPr id="4098" name="Picture 2"/>
-          <p:cNvPicPr>
-            <a:picLocks noChangeAspect="1" noChangeArrowheads="1"/>
-          </p:cNvPicPr>
-          <p:nvPr/>
-        </p:nvPicPr>
-        <p:blipFill>
-          <a:blip r:embed="rId3">
-            <a:extLst>
-              <a:ext uri="{28A0092B-C50C-407E-A947-70E740481C1C}">
-                <a14:useLocalDpi xmlns:a14="http://schemas.microsoft.com/office/drawing/2010/main" val="0"/>
-              </a:ext>
-            </a:extLst>
-          </a:blip>
-          <a:srcRect/>
-          <a:stretch>
-            <a:fillRect/>
-          </a:stretch>
-        </p:blipFill>
-        <p:spPr bwMode="auto">
-          <a:xfrm>
-            <a:off x="33408415" y="10820362"/>
-            <a:ext cx="9841664" cy="5223653"/>
-          </a:xfrm>
-          <a:prstGeom prst="rect">
-            <a:avLst/>
-          </a:prstGeom>
-          <a:noFill/>
-          <a:ln>
-            <a:noFill/>
-          </a:ln>
-          <a:extLst>
-            <a:ext uri="{909E8E84-426E-40DD-AFC4-6F175D3DCCD1}">
-              <a14:hiddenFill xmlns:a14="http://schemas.microsoft.com/office/drawing/2010/main">
-                <a:solidFill>
-                  <a:schemeClr val="accent1"/>
-                </a:solidFill>
-              </a14:hiddenFill>
-            </a:ext>
-            <a:ext uri="{91240B29-F687-4F45-9708-019B960494DF}">
-              <a14:hiddenLine xmlns:a14="http://schemas.microsoft.com/office/drawing/2010/main" w="9525">
-                <a:solidFill>
-                  <a:schemeClr val="tx1"/>
-                </a:solidFill>
-                <a:miter lim="800000"/>
-                <a:headEnd/>
-                <a:tailEnd/>
-              </a14:hiddenLine>
-            </a:ext>
-          </a:extLst>
-        </p:spPr>
-      </p:pic>
-      <p:pic>
-        <p:nvPicPr>
-          <p:cNvPr id="19" name="Picture 3"/>
-          <p:cNvPicPr>
-            <a:picLocks noChangeAspect="1" noChangeArrowheads="1"/>
-          </p:cNvPicPr>
-          <p:nvPr/>
-        </p:nvPicPr>
-        <p:blipFill>
-          <a:blip r:embed="rId4">
-            <a:extLst>
-              <a:ext uri="{28A0092B-C50C-407E-A947-70E740481C1C}">
-                <a14:useLocalDpi xmlns:a14="http://schemas.microsoft.com/office/drawing/2010/main" val="0"/>
-              </a:ext>
-            </a:extLst>
-          </a:blip>
-          <a:srcRect/>
-          <a:stretch>
-            <a:fillRect/>
-          </a:stretch>
-        </p:blipFill>
-        <p:spPr bwMode="auto">
-          <a:xfrm>
-            <a:off x="33392567" y="16426199"/>
-            <a:ext cx="9857512" cy="5248213"/>
-          </a:xfrm>
-          <a:prstGeom prst="rect">
-            <a:avLst/>
-          </a:prstGeom>
-          <a:noFill/>
-          <a:ln>
-            <a:noFill/>
-          </a:ln>
-          <a:extLst>
-            <a:ext uri="{909E8E84-426E-40DD-AFC4-6F175D3DCCD1}">
-              <a14:hiddenFill xmlns:a14="http://schemas.microsoft.com/office/drawing/2010/main">
-                <a:solidFill>
-                  <a:schemeClr val="accent1"/>
-                </a:solidFill>
-              </a14:hiddenFill>
-            </a:ext>
-            <a:ext uri="{91240B29-F687-4F45-9708-019B960494DF}">
-              <a14:hiddenLine xmlns:a14="http://schemas.microsoft.com/office/drawing/2010/main" w="9525">
-                <a:solidFill>
-                  <a:schemeClr val="tx1"/>
-                </a:solidFill>
-                <a:miter lim="800000"/>
-                <a:headEnd/>
-                <a:tailEnd/>
-              </a14:hiddenLine>
-            </a:ext>
-          </a:extLst>
-        </p:spPr>
-      </p:pic>
-      <p:sp>
-        <p:nvSpPr>
-          <p:cNvPr id="30" name="Text Placeholder 6"/>
-          <p:cNvSpPr>
-            <a:spLocks noGrp="1"/>
-          </p:cNvSpPr>
-          <p:nvPr>
-            <p:ph type="body" sz="quarter" idx="23"/>
-          </p:nvPr>
-        </p:nvSpPr>
-        <p:spPr>
-          <a:xfrm>
-            <a:off x="33371596" y="5536712"/>
-            <a:ext cx="10048874" cy="846363"/>
-          </a:xfrm>
-        </p:spPr>
-        <p:txBody>
-          <a:bodyPr/>
-          <a:lstStyle/>
-          <a:p>
-            <a:r>
-              <a:rPr lang="en-US" i="1" u="sng" dirty="0">
-                <a:solidFill>
-                  <a:schemeClr val="tx2"/>
-                </a:solidFill>
-                <a:latin typeface="Arial" panose="020B0604020202020204" pitchFamily="34" charset="0"/>
-                <a:cs typeface="Arial" panose="020B0604020202020204" pitchFamily="34" charset="0"/>
-              </a:rPr>
-              <a:t>Self Efficacy</a:t>
-            </a:r>
-          </a:p>
-        </p:txBody>
-      </p:sp>
-      <p:sp>
-        <p:nvSpPr>
-          <p:cNvPr id="31" name="Text Placeholder 11"/>
-          <p:cNvSpPr>
-            <a:spLocks noGrp="1"/>
-          </p:cNvSpPr>
-          <p:nvPr>
-            <p:ph type="body" sz="quarter" idx="28"/>
-          </p:nvPr>
-        </p:nvSpPr>
-        <p:spPr>
-          <a:xfrm>
-            <a:off x="33382622" y="6056596"/>
-            <a:ext cx="10052050" cy="4693570"/>
-          </a:xfrm>
-        </p:spPr>
-        <p:txBody>
-          <a:bodyPr/>
-          <a:lstStyle/>
-          <a:p>
-            <a:r>
-              <a:rPr lang="en-IE" dirty="0">
-                <a:solidFill>
-                  <a:schemeClr val="tx1"/>
-                </a:solidFill>
-                <a:latin typeface="Arial" panose="020B0604020202020204" pitchFamily="34" charset="0"/>
-                <a:cs typeface="Arial" panose="020B0604020202020204" pitchFamily="34" charset="0"/>
-              </a:rPr>
-              <a:t>Participants were provided a self-efficacy questionnaire, based on a approach suggested by Bandura (2006), to complete at the start and end of a semester. A social learning intervention was introduced to a treatment group, and the overall self-efficacy group score comparison revealed very little, other than a slight increase in the treatment group score.  However, a significant finding was found when comparing the final four questions measuring the perceived ability to work within a group. To illustrate this, the first figure below represents the start of semester self-efficacy group score for both groups, followed by the second figure representing the end of semester self-efficacy score reversal.</a:t>
-            </a:r>
-            <a:endParaRPr lang="en-US" dirty="0">
-              <a:solidFill>
-                <a:schemeClr val="tx1"/>
-              </a:solidFill>
-              <a:latin typeface="Arial" panose="020B0604020202020204" pitchFamily="34" charset="0"/>
-              <a:cs typeface="Arial" panose="020B0604020202020204" pitchFamily="34" charset="0"/>
-            </a:endParaRPr>
-          </a:p>
-        </p:txBody>
-      </p:sp>
       <p:sp>
         <p:nvSpPr>
           <p:cNvPr id="32" name="Content Placeholder 2"/>
@@ -15357,7 +14622,7 @@
           <a:lstStyle/>
           <a:p>
             <a:pPr algn="ctr"/>
-            <a:endParaRPr lang="en-IE"/>
+            <a:endParaRPr lang="en-IE" dirty="0"/>
           </a:p>
         </p:txBody>
       </p:sp>
@@ -15652,301 +14917,6 @@
       </p:sp>
       <p:sp>
         <p:nvSpPr>
-          <p:cNvPr id="42" name="Content Placeholder 2"/>
-          <p:cNvSpPr txBox="1">
-            <a:spLocks/>
-          </p:cNvSpPr>
-          <p:nvPr/>
-        </p:nvSpPr>
-        <p:spPr>
-          <a:xfrm>
-            <a:off x="33513137" y="22823005"/>
-            <a:ext cx="9736942" cy="5408649"/>
-          </a:xfrm>
-          <a:prstGeom prst="rect">
-            <a:avLst/>
-          </a:prstGeom>
-        </p:spPr>
-        <p:txBody>
-          <a:bodyPr>
-            <a:noAutofit/>
-          </a:bodyPr>
-          <a:lstStyle>
-            <a:lvl1pPr marL="1645838" indent="-1645838" algn="l" defTabSz="4388900" rtl="0" eaLnBrk="1" latinLnBrk="0" hangingPunct="1">
-              <a:spcBef>
-                <a:spcPct val="20000"/>
-              </a:spcBef>
-              <a:buFont typeface="Arial" pitchFamily="34" charset="0"/>
-              <a:buChar char="•"/>
-              <a:defRPr sz="15400" kern="1200">
-                <a:solidFill>
-                  <a:schemeClr val="tx1"/>
-                </a:solidFill>
-                <a:latin typeface="+mn-lt"/>
-                <a:ea typeface="+mn-ea"/>
-                <a:cs typeface="+mn-cs"/>
-              </a:defRPr>
-            </a:lvl1pPr>
-            <a:lvl2pPr marL="3565982" indent="-1371531" algn="l" defTabSz="4388900" rtl="0" eaLnBrk="1" latinLnBrk="0" hangingPunct="1">
-              <a:spcBef>
-                <a:spcPct val="20000"/>
-              </a:spcBef>
-              <a:buFont typeface="Arial" pitchFamily="34" charset="0"/>
-              <a:buChar char="–"/>
-              <a:defRPr sz="13500" kern="1200">
-                <a:solidFill>
-                  <a:schemeClr val="tx1"/>
-                </a:solidFill>
-                <a:latin typeface="+mn-lt"/>
-                <a:ea typeface="+mn-ea"/>
-                <a:cs typeface="+mn-cs"/>
-              </a:defRPr>
-            </a:lvl2pPr>
-            <a:lvl3pPr marL="5486126" indent="-1097226" algn="l" defTabSz="4388900" rtl="0" eaLnBrk="1" latinLnBrk="0" hangingPunct="1">
-              <a:spcBef>
-                <a:spcPct val="20000"/>
-              </a:spcBef>
-              <a:buFont typeface="Arial" pitchFamily="34" charset="0"/>
-              <a:buChar char="•"/>
-              <a:defRPr sz="11600" kern="1200">
-                <a:solidFill>
-                  <a:schemeClr val="tx1"/>
-                </a:solidFill>
-                <a:latin typeface="+mn-lt"/>
-                <a:ea typeface="+mn-ea"/>
-                <a:cs typeface="+mn-cs"/>
-              </a:defRPr>
-            </a:lvl3pPr>
-            <a:lvl4pPr marL="7680577" indent="-1097226" algn="l" defTabSz="4388900" rtl="0" eaLnBrk="1" latinLnBrk="0" hangingPunct="1">
-              <a:spcBef>
-                <a:spcPct val="20000"/>
-              </a:spcBef>
-              <a:buFont typeface="Arial" pitchFamily="34" charset="0"/>
-              <a:buChar char="–"/>
-              <a:defRPr sz="9600" kern="1200">
-                <a:solidFill>
-                  <a:schemeClr val="tx1"/>
-                </a:solidFill>
-                <a:latin typeface="+mn-lt"/>
-                <a:ea typeface="+mn-ea"/>
-                <a:cs typeface="+mn-cs"/>
-              </a:defRPr>
-            </a:lvl4pPr>
-            <a:lvl5pPr marL="9875026" indent="-1097226" algn="l" defTabSz="4388900" rtl="0" eaLnBrk="1" latinLnBrk="0" hangingPunct="1">
-              <a:spcBef>
-                <a:spcPct val="20000"/>
-              </a:spcBef>
-              <a:buFont typeface="Arial" pitchFamily="34" charset="0"/>
-              <a:buChar char="»"/>
-              <a:defRPr sz="9600" kern="1200">
-                <a:solidFill>
-                  <a:schemeClr val="tx1"/>
-                </a:solidFill>
-                <a:latin typeface="+mn-lt"/>
-                <a:ea typeface="+mn-ea"/>
-                <a:cs typeface="+mn-cs"/>
-              </a:defRPr>
-            </a:lvl5pPr>
-            <a:lvl6pPr marL="12069477" indent="-1097226" algn="l" defTabSz="4388900" rtl="0" eaLnBrk="1" latinLnBrk="0" hangingPunct="1">
-              <a:spcBef>
-                <a:spcPct val="20000"/>
-              </a:spcBef>
-              <a:buFont typeface="Arial" pitchFamily="34" charset="0"/>
-              <a:buChar char="•"/>
-              <a:defRPr sz="9600" kern="1200">
-                <a:solidFill>
-                  <a:schemeClr val="tx1"/>
-                </a:solidFill>
-                <a:latin typeface="+mn-lt"/>
-                <a:ea typeface="+mn-ea"/>
-                <a:cs typeface="+mn-cs"/>
-              </a:defRPr>
-            </a:lvl6pPr>
-            <a:lvl7pPr marL="14263926" indent="-1097226" algn="l" defTabSz="4388900" rtl="0" eaLnBrk="1" latinLnBrk="0" hangingPunct="1">
-              <a:spcBef>
-                <a:spcPct val="20000"/>
-              </a:spcBef>
-              <a:buFont typeface="Arial" pitchFamily="34" charset="0"/>
-              <a:buChar char="•"/>
-              <a:defRPr sz="9600" kern="1200">
-                <a:solidFill>
-                  <a:schemeClr val="tx1"/>
-                </a:solidFill>
-                <a:latin typeface="+mn-lt"/>
-                <a:ea typeface="+mn-ea"/>
-                <a:cs typeface="+mn-cs"/>
-              </a:defRPr>
-            </a:lvl7pPr>
-            <a:lvl8pPr marL="16458377" indent="-1097226" algn="l" defTabSz="4388900" rtl="0" eaLnBrk="1" latinLnBrk="0" hangingPunct="1">
-              <a:spcBef>
-                <a:spcPct val="20000"/>
-              </a:spcBef>
-              <a:buFont typeface="Arial" pitchFamily="34" charset="0"/>
-              <a:buChar char="•"/>
-              <a:defRPr sz="9600" kern="1200">
-                <a:solidFill>
-                  <a:schemeClr val="tx1"/>
-                </a:solidFill>
-                <a:latin typeface="+mn-lt"/>
-                <a:ea typeface="+mn-ea"/>
-                <a:cs typeface="+mn-cs"/>
-              </a:defRPr>
-            </a:lvl8pPr>
-            <a:lvl9pPr marL="18652827" indent="-1097226" algn="l" defTabSz="4388900" rtl="0" eaLnBrk="1" latinLnBrk="0" hangingPunct="1">
-              <a:spcBef>
-                <a:spcPct val="20000"/>
-              </a:spcBef>
-              <a:buFont typeface="Arial" pitchFamily="34" charset="0"/>
-              <a:buChar char="•"/>
-              <a:defRPr sz="9600" kern="1200">
-                <a:solidFill>
-                  <a:schemeClr val="tx1"/>
-                </a:solidFill>
-                <a:latin typeface="+mn-lt"/>
-                <a:ea typeface="+mn-ea"/>
-                <a:cs typeface="+mn-cs"/>
-              </a:defRPr>
-            </a:lvl9pPr>
-          </a:lstStyle>
-          <a:p>
-            <a:pPr marL="0" indent="0" algn="just" defTabSz="895350">
-              <a:buFont typeface="Arial" pitchFamily="34" charset="0"/>
-              <a:buNone/>
-            </a:pPr>
-            <a:r>
-              <a:rPr lang="en-IE" sz="2400" dirty="0">
-                <a:latin typeface="Arial" panose="020B0604020202020204" pitchFamily="34" charset="0"/>
-                <a:cs typeface="Arial" panose="020B0604020202020204" pitchFamily="34" charset="0"/>
-              </a:rPr>
-              <a:t>A summarised answer to the research questions are presented below:</a:t>
-            </a:r>
-          </a:p>
-          <a:p>
-            <a:pPr marL="0" indent="0" algn="just" defTabSz="895350">
-              <a:buFont typeface="Arial" pitchFamily="34" charset="0"/>
-              <a:buNone/>
-            </a:pPr>
-            <a:endParaRPr lang="en-IE" sz="1000" dirty="0">
-              <a:latin typeface="Arial" panose="020B0604020202020204" pitchFamily="34" charset="0"/>
-              <a:cs typeface="Arial" panose="020B0604020202020204" pitchFamily="34" charset="0"/>
-            </a:endParaRPr>
-          </a:p>
-          <a:p>
-            <a:pPr marL="0" indent="0" defTabSz="895350">
-              <a:buFont typeface="Arial" pitchFamily="34" charset="0"/>
-              <a:buNone/>
-            </a:pPr>
-            <a:r>
-              <a:rPr lang="en-IE" sz="2200" b="1" dirty="0">
-                <a:latin typeface="Arial" panose="020B0604020202020204" pitchFamily="34" charset="0"/>
-                <a:cs typeface="Arial" panose="020B0604020202020204" pitchFamily="34" charset="0"/>
-              </a:rPr>
-              <a:t>Q.1.</a:t>
-            </a:r>
-            <a:r>
-              <a:rPr lang="en-IE" sz="2200" dirty="0">
-                <a:latin typeface="Arial" panose="020B0604020202020204" pitchFamily="34" charset="0"/>
-                <a:cs typeface="Arial" panose="020B0604020202020204" pitchFamily="34" charset="0"/>
-              </a:rPr>
-              <a:t> 	</a:t>
-            </a:r>
-            <a:r>
-              <a:rPr lang="en-IE" sz="2200" i="1" dirty="0">
-                <a:latin typeface="Arial" panose="020B0604020202020204" pitchFamily="34" charset="0"/>
-                <a:cs typeface="Arial" panose="020B0604020202020204" pitchFamily="34" charset="0"/>
-              </a:rPr>
-              <a:t>Both of the studies on the use of a reflective learning journal were 	mostly negative, in that students did not find it beneficial, and in some 	cases, saw it as an additional ungraded piece of assessment .</a:t>
-            </a:r>
-          </a:p>
-          <a:p>
-            <a:pPr marL="0" indent="0" defTabSz="895350">
-              <a:buFont typeface="Arial" pitchFamily="34" charset="0"/>
-              <a:buNone/>
-            </a:pPr>
-            <a:r>
-              <a:rPr lang="en-IE" sz="2200" b="1" dirty="0">
-                <a:latin typeface="Arial" panose="020B0604020202020204" pitchFamily="34" charset="0"/>
-                <a:cs typeface="Arial" panose="020B0604020202020204" pitchFamily="34" charset="0"/>
-              </a:rPr>
-              <a:t>Q.2. </a:t>
-            </a:r>
-            <a:r>
-              <a:rPr lang="en-IE" sz="2200" dirty="0">
-                <a:latin typeface="Arial" panose="020B0604020202020204" pitchFamily="34" charset="0"/>
-                <a:cs typeface="Arial" panose="020B0604020202020204" pitchFamily="34" charset="0"/>
-              </a:rPr>
-              <a:t>	There was </a:t>
-            </a:r>
-            <a:r>
-              <a:rPr lang="en-IE" sz="2200" i="1" dirty="0">
-                <a:latin typeface="Arial" panose="020B0604020202020204" pitchFamily="34" charset="0"/>
-                <a:cs typeface="Arial" panose="020B0604020202020204" pitchFamily="34" charset="0"/>
-              </a:rPr>
-              <a:t>evidence to suggest it does, specifically relating to 	group based activities, and communicating with peers.  However, it is 	difficult to say positive findings were directly linked to the social 	learning activities introduced over the semester.</a:t>
-            </a:r>
-            <a:endParaRPr lang="en-IE" sz="2200" dirty="0">
-              <a:latin typeface="Arial" panose="020B0604020202020204" pitchFamily="34" charset="0"/>
-              <a:cs typeface="Arial" panose="020B0604020202020204" pitchFamily="34" charset="0"/>
-            </a:endParaRPr>
-          </a:p>
-          <a:p>
-            <a:pPr marL="0" indent="0" defTabSz="895350">
-              <a:buFont typeface="Arial" pitchFamily="34" charset="0"/>
-              <a:buNone/>
-            </a:pPr>
-            <a:r>
-              <a:rPr lang="en-IE" sz="2200" b="1" dirty="0">
-                <a:latin typeface="Arial" panose="020B0604020202020204" pitchFamily="34" charset="0"/>
-                <a:cs typeface="Arial" panose="020B0604020202020204" pitchFamily="34" charset="0"/>
-              </a:rPr>
-              <a:t>Q.3 </a:t>
-            </a:r>
-            <a:r>
-              <a:rPr lang="en-IE" sz="2200" dirty="0">
-                <a:latin typeface="Arial" panose="020B0604020202020204" pitchFamily="34" charset="0"/>
-                <a:cs typeface="Arial" panose="020B0604020202020204" pitchFamily="34" charset="0"/>
-              </a:rPr>
-              <a:t>	</a:t>
-            </a:r>
-            <a:r>
-              <a:rPr lang="en-IE" sz="2200" i="1" dirty="0">
-                <a:latin typeface="Arial" panose="020B0604020202020204" pitchFamily="34" charset="0"/>
-                <a:cs typeface="Arial" panose="020B0604020202020204" pitchFamily="34" charset="0"/>
-              </a:rPr>
-              <a:t>The use of PBL and PAL was very successful in engaging students in 	computer programming, the students engaged in the activities and 	requested more of these activities in the future.</a:t>
-            </a:r>
-          </a:p>
-          <a:p>
-            <a:pPr marL="0" indent="0" defTabSz="895350">
-              <a:buFont typeface="Arial" pitchFamily="34" charset="0"/>
-              <a:buNone/>
-            </a:pPr>
-            <a:r>
-              <a:rPr lang="en-IE" sz="2200" b="1" dirty="0">
-                <a:latin typeface="Arial" panose="020B0604020202020204" pitchFamily="34" charset="0"/>
-                <a:cs typeface="Arial" panose="020B0604020202020204" pitchFamily="34" charset="0"/>
-              </a:rPr>
-              <a:t>Q.4</a:t>
-            </a:r>
-            <a:r>
-              <a:rPr lang="en-IE" sz="2200" dirty="0">
-                <a:latin typeface="Arial" panose="020B0604020202020204" pitchFamily="34" charset="0"/>
-                <a:cs typeface="Arial" panose="020B0604020202020204" pitchFamily="34" charset="0"/>
-              </a:rPr>
-              <a:t>	</a:t>
-            </a:r>
-            <a:r>
-              <a:rPr lang="en-IE" sz="2200" i="1" dirty="0">
-                <a:latin typeface="Arial" panose="020B0604020202020204" pitchFamily="34" charset="0"/>
-                <a:cs typeface="Arial" panose="020B0604020202020204" pitchFamily="34" charset="0"/>
-              </a:rPr>
-              <a:t>There was no strong evidence to suggest social learning improved 	self-efficacy in computer programming, however, there was strong 	evidence found that participating in group work enhances self-efficacy 	in working with others in group activities.</a:t>
-            </a:r>
-          </a:p>
-        </p:txBody>
-      </p:sp>
-      <p:sp>
-        <p:nvSpPr>
           <p:cNvPr id="39" name="Content Placeholder 2">
             <a:extLst>
               <a:ext uri="{FF2B5EF4-FFF2-40B4-BE49-F238E27FC236}">
@@ -16136,8 +15106,8 @@
         </p:nvSpPr>
         <p:spPr>
           <a:xfrm>
-            <a:off x="33656519" y="29479722"/>
-            <a:ext cx="9736942" cy="2621175"/>
+            <a:off x="33591362" y="30475055"/>
+            <a:ext cx="9680488" cy="2012212"/>
           </a:xfrm>
           <a:prstGeom prst="rect">
             <a:avLst/>
@@ -16290,185 +15260,24 @@
             </a:pPr>
             <a:r>
               <a:rPr lang="en-IE" sz="900" dirty="0">
-                <a:latin typeface="Arial" panose="020B0604020202020204" pitchFamily="34" charset="0"/>
-                <a:cs typeface="Arial" panose="020B0604020202020204" pitchFamily="34" charset="0"/>
+                <a:latin typeface="Times New Roman" panose="02020603050405020304" pitchFamily="18" charset="0"/>
+                <a:cs typeface="Times New Roman" panose="02020603050405020304" pitchFamily="18" charset="0"/>
               </a:rPr>
-              <a:t>Bandura, A. (1986). Social Foundations of Thought and Action: Social Cognitive Theory. U.S.A: Pearson Education.</a:t>
-            </a:r>
-          </a:p>
-          <a:p>
-            <a:pPr marL="0" indent="0" algn="just" defTabSz="895350">
-              <a:buNone/>
-            </a:pPr>
-            <a:endParaRPr lang="en-IE" sz="900" dirty="0">
-              <a:latin typeface="Arial" panose="020B0604020202020204" pitchFamily="34" charset="0"/>
-              <a:cs typeface="Arial" panose="020B0604020202020204" pitchFamily="34" charset="0"/>
-            </a:endParaRPr>
-          </a:p>
-          <a:p>
-            <a:pPr marL="0" indent="0" algn="just" defTabSz="895350">
-              <a:buNone/>
-            </a:pPr>
-            <a:r>
-              <a:rPr lang="en-IE" sz="900" dirty="0">
-                <a:latin typeface="Arial" panose="020B0604020202020204" pitchFamily="34" charset="0"/>
-                <a:cs typeface="Arial" panose="020B0604020202020204" pitchFamily="34" charset="0"/>
-              </a:rPr>
-              <a:t>Bandura, A. (2006). Guide for constructing self-efficacy scales. In F. </a:t>
+              <a:t>McQuaid, D. (2026d) </a:t>
             </a:r>
             <a:r>
-              <a:rPr lang="en-IE" sz="900" dirty="0" err="1">
-                <a:latin typeface="Arial" panose="020B0604020202020204" pitchFamily="34" charset="0"/>
-                <a:cs typeface="Arial" panose="020B0604020202020204" pitchFamily="34" charset="0"/>
+              <a:rPr lang="en-IE" sz="900" i="1" dirty="0">
+                <a:latin typeface="Times New Roman" panose="02020603050405020304" pitchFamily="18" charset="0"/>
+                <a:cs typeface="Times New Roman" panose="02020603050405020304" pitchFamily="18" charset="0"/>
               </a:rPr>
-              <a:t>Pajares</a:t>
+              <a:t>How To Save Trained Machine Learning Models</a:t>
             </a:r>
             <a:r>
               <a:rPr lang="en-IE" sz="900" dirty="0">
-                <a:latin typeface="Arial" panose="020B0604020202020204" pitchFamily="34" charset="0"/>
-                <a:cs typeface="Arial" panose="020B0604020202020204" pitchFamily="34" charset="0"/>
+                <a:latin typeface="Times New Roman" panose="02020603050405020304" pitchFamily="18" charset="0"/>
+                <a:cs typeface="Times New Roman" panose="02020603050405020304" pitchFamily="18" charset="0"/>
               </a:rPr>
-              <a:t>, &amp; T. </a:t>
-            </a:r>
-            <a:r>
-              <a:rPr lang="en-IE" sz="900" dirty="0" err="1">
-                <a:latin typeface="Arial" panose="020B0604020202020204" pitchFamily="34" charset="0"/>
-                <a:cs typeface="Arial" panose="020B0604020202020204" pitchFamily="34" charset="0"/>
-              </a:rPr>
-              <a:t>Urdan</a:t>
-            </a:r>
-            <a:r>
-              <a:rPr lang="en-IE" sz="900" dirty="0">
-                <a:latin typeface="Arial" panose="020B0604020202020204" pitchFamily="34" charset="0"/>
-                <a:cs typeface="Arial" panose="020B0604020202020204" pitchFamily="34" charset="0"/>
-              </a:rPr>
-              <a:t> (Eds.), Adolescence and education: Vol. 5. Self efficacy and adolescence (pp. 307-337). Greenwich, CT: Information Age.</a:t>
-            </a:r>
-          </a:p>
-          <a:p>
-            <a:pPr marL="0" indent="0" algn="just" defTabSz="895350">
-              <a:buNone/>
-            </a:pPr>
-            <a:endParaRPr lang="en-IE" sz="900" dirty="0">
-              <a:latin typeface="Arial" panose="020B0604020202020204" pitchFamily="34" charset="0"/>
-              <a:cs typeface="Arial" panose="020B0604020202020204" pitchFamily="34" charset="0"/>
-            </a:endParaRPr>
-          </a:p>
-          <a:p>
-            <a:pPr marL="0" indent="0" algn="just" defTabSz="895350">
-              <a:buNone/>
-            </a:pPr>
-            <a:r>
-              <a:rPr lang="en-IE" sz="900" dirty="0">
-                <a:latin typeface="Arial" panose="020B0604020202020204" pitchFamily="34" charset="0"/>
-                <a:cs typeface="Arial" panose="020B0604020202020204" pitchFamily="34" charset="0"/>
-              </a:rPr>
-              <a:t>Bogdan, R.C., </a:t>
-            </a:r>
-            <a:r>
-              <a:rPr lang="en-IE" sz="900" dirty="0" err="1">
-                <a:latin typeface="Arial" panose="020B0604020202020204" pitchFamily="34" charset="0"/>
-                <a:cs typeface="Arial" panose="020B0604020202020204" pitchFamily="34" charset="0"/>
-              </a:rPr>
-              <a:t>Biklin</a:t>
-            </a:r>
-            <a:r>
-              <a:rPr lang="en-IE" sz="900" dirty="0">
-                <a:latin typeface="Arial" panose="020B0604020202020204" pitchFamily="34" charset="0"/>
-                <a:cs typeface="Arial" panose="020B0604020202020204" pitchFamily="34" charset="0"/>
-              </a:rPr>
-              <a:t>, S.K. (1998). Qualitative research for education: An introduction to theory and methods. (3rd edition).  Boston: </a:t>
-            </a:r>
-            <a:r>
-              <a:rPr lang="en-IE" sz="900" dirty="0" err="1">
-                <a:latin typeface="Arial" panose="020B0604020202020204" pitchFamily="34" charset="0"/>
-                <a:cs typeface="Arial" panose="020B0604020202020204" pitchFamily="34" charset="0"/>
-              </a:rPr>
-              <a:t>Allyn</a:t>
-            </a:r>
-            <a:r>
-              <a:rPr lang="en-IE" sz="900" dirty="0">
-                <a:latin typeface="Arial" panose="020B0604020202020204" pitchFamily="34" charset="0"/>
-                <a:cs typeface="Arial" panose="020B0604020202020204" pitchFamily="34" charset="0"/>
-              </a:rPr>
-              <a:t> and Bacon.</a:t>
-            </a:r>
-          </a:p>
-          <a:p>
-            <a:pPr marL="0" indent="0" algn="just" defTabSz="895350">
-              <a:buNone/>
-            </a:pPr>
-            <a:endParaRPr lang="en-IE" sz="900" dirty="0">
-              <a:latin typeface="Arial" panose="020B0604020202020204" pitchFamily="34" charset="0"/>
-              <a:cs typeface="Arial" panose="020B0604020202020204" pitchFamily="34" charset="0"/>
-            </a:endParaRPr>
-          </a:p>
-          <a:p>
-            <a:pPr marL="0" indent="0" algn="just" defTabSz="895350">
-              <a:buNone/>
-            </a:pPr>
-            <a:r>
-              <a:rPr lang="en-IE" sz="900" dirty="0">
-                <a:latin typeface="Arial" panose="020B0604020202020204" pitchFamily="34" charset="0"/>
-                <a:cs typeface="Arial" panose="020B0604020202020204" pitchFamily="34" charset="0"/>
-              </a:rPr>
-              <a:t>Bryman, A. (2004). Social Research Methods.  U.K.: Oxford University Press.</a:t>
-            </a:r>
-          </a:p>
-          <a:p>
-            <a:pPr marL="0" indent="0" algn="just" defTabSz="895350">
-              <a:buNone/>
-            </a:pPr>
-            <a:endParaRPr lang="en-IE" sz="900" dirty="0">
-              <a:latin typeface="Arial" panose="020B0604020202020204" pitchFamily="34" charset="0"/>
-              <a:cs typeface="Arial" panose="020B0604020202020204" pitchFamily="34" charset="0"/>
-            </a:endParaRPr>
-          </a:p>
-          <a:p>
-            <a:pPr marL="0" indent="0" algn="just" defTabSz="895350">
-              <a:buNone/>
-            </a:pPr>
-            <a:r>
-              <a:rPr lang="en-IE" sz="900" dirty="0">
-                <a:latin typeface="Arial" panose="020B0604020202020204" pitchFamily="34" charset="0"/>
-                <a:cs typeface="Arial" panose="020B0604020202020204" pitchFamily="34" charset="0"/>
-              </a:rPr>
-              <a:t>Creswell, J.W., Miller, G.A. (1997).  Research Methodologies and Doctoral Process.  New Directions for Higher Education, no.99.  U.S.A.: Wiley.</a:t>
-            </a:r>
-          </a:p>
-          <a:p>
-            <a:pPr marL="0" indent="0" algn="just" defTabSz="895350">
-              <a:buNone/>
-            </a:pPr>
-            <a:endParaRPr lang="en-IE" sz="900" dirty="0">
-              <a:latin typeface="Arial" panose="020B0604020202020204" pitchFamily="34" charset="0"/>
-              <a:cs typeface="Arial" panose="020B0604020202020204" pitchFamily="34" charset="0"/>
-            </a:endParaRPr>
-          </a:p>
-          <a:p>
-            <a:pPr marL="0" indent="0" algn="just" defTabSz="895350">
-              <a:buNone/>
-            </a:pPr>
-            <a:r>
-              <a:rPr lang="en-IE" sz="900" dirty="0">
-                <a:latin typeface="Arial" panose="020B0604020202020204" pitchFamily="34" charset="0"/>
-                <a:cs typeface="Arial" panose="020B0604020202020204" pitchFamily="34" charset="0"/>
-              </a:rPr>
-              <a:t>Hamir, S., </a:t>
-            </a:r>
-            <a:r>
-              <a:rPr lang="en-IE" sz="900" dirty="0" err="1">
-                <a:latin typeface="Arial" panose="020B0604020202020204" pitchFamily="34" charset="0"/>
-                <a:cs typeface="Arial" panose="020B0604020202020204" pitchFamily="34" charset="0"/>
-              </a:rPr>
-              <a:t>Maion</a:t>
-            </a:r>
-            <a:r>
-              <a:rPr lang="en-IE" sz="900" dirty="0">
-                <a:latin typeface="Arial" panose="020B0604020202020204" pitchFamily="34" charset="0"/>
-                <a:cs typeface="Arial" panose="020B0604020202020204" pitchFamily="34" charset="0"/>
-              </a:rPr>
-              <a:t>, S., Tice, S., &amp; Wideman, A. (2015) Constructivism in</a:t>
+              <a:t>. Machine Learning for AI lecture notes. CCT College Dublin. </a:t>
             </a:r>
           </a:p>
           <a:p>
@@ -16477,10 +15286,168 @@
             </a:pPr>
             <a:r>
               <a:rPr lang="en-IE" sz="900" dirty="0">
-                <a:latin typeface="Arial" panose="020B0604020202020204" pitchFamily="34" charset="0"/>
-                <a:cs typeface="Arial" panose="020B0604020202020204" pitchFamily="34" charset="0"/>
+                <a:latin typeface="Times New Roman" panose="02020603050405020304" pitchFamily="18" charset="0"/>
+                <a:cs typeface="Times New Roman" panose="02020603050405020304" pitchFamily="18" charset="0"/>
               </a:rPr>
-              <a:t>Education. Available at: http://constructivism512.weebly.com . Accessed 27th February 2018.</a:t>
+              <a:t>Müller, A.C. and Guido, S. (2017) </a:t>
+            </a:r>
+            <a:r>
+              <a:rPr lang="en-IE" sz="900" i="1" dirty="0">
+                <a:latin typeface="Times New Roman" panose="02020603050405020304" pitchFamily="18" charset="0"/>
+                <a:cs typeface="Times New Roman" panose="02020603050405020304" pitchFamily="18" charset="0"/>
+              </a:rPr>
+              <a:t>Introduction to Machine Learning with Python: A Guide for Data Scientists</a:t>
+            </a:r>
+            <a:r>
+              <a:rPr lang="en-IE" sz="900" dirty="0">
+                <a:latin typeface="Times New Roman" panose="02020603050405020304" pitchFamily="18" charset="0"/>
+                <a:cs typeface="Times New Roman" panose="02020603050405020304" pitchFamily="18" charset="0"/>
+              </a:rPr>
+              <a:t>. 1st end. Sebastopol, CA: O’Reilly Media.</a:t>
+            </a:r>
+          </a:p>
+          <a:p>
+            <a:pPr marL="0" indent="0" algn="just" defTabSz="895350">
+              <a:buNone/>
+            </a:pPr>
+            <a:r>
+              <a:rPr lang="en-IE" sz="900" dirty="0">
+                <a:latin typeface="Times New Roman" panose="02020603050405020304" pitchFamily="18" charset="0"/>
+                <a:cs typeface="Times New Roman" panose="02020603050405020304" pitchFamily="18" charset="0"/>
+              </a:rPr>
+              <a:t>Nugroho, W.H., Handovo, S. and Akri, Y.J. (2018) </a:t>
+            </a:r>
+            <a:r>
+              <a:rPr lang="en-IE" sz="900" i="1" dirty="0">
+                <a:latin typeface="Times New Roman" panose="02020603050405020304" pitchFamily="18" charset="0"/>
+                <a:cs typeface="Times New Roman" panose="02020603050405020304" pitchFamily="18" charset="0"/>
+              </a:rPr>
+              <a:t>An Influence of Measurement Scale of Predictor Variable on Logistic Regression Modeling and Learning Vector Quantization Modeling for Object Classification</a:t>
+            </a:r>
+            <a:r>
+              <a:rPr lang="en-IE" sz="900" dirty="0">
+                <a:latin typeface="Times New Roman" panose="02020603050405020304" pitchFamily="18" charset="0"/>
+                <a:cs typeface="Times New Roman" panose="02020603050405020304" pitchFamily="18" charset="0"/>
+              </a:rPr>
+              <a:t>. Available at: ResearchGate (Accessed: 11 May 2026). </a:t>
+            </a:r>
+          </a:p>
+          <a:p>
+            <a:pPr marL="0" indent="0" algn="just" defTabSz="895350">
+              <a:buNone/>
+            </a:pPr>
+            <a:r>
+              <a:rPr lang="en-IE" sz="900" dirty="0">
+                <a:latin typeface="Times New Roman" panose="02020603050405020304" pitchFamily="18" charset="0"/>
+                <a:cs typeface="Times New Roman" panose="02020603050405020304" pitchFamily="18" charset="0"/>
+              </a:rPr>
+              <a:t>O'Donovan, B. (2025) </a:t>
+            </a:r>
+            <a:r>
+              <a:rPr lang="en-IE" sz="900" i="1" dirty="0">
+                <a:latin typeface="Times New Roman" panose="02020603050405020304" pitchFamily="18" charset="0"/>
+                <a:cs typeface="Times New Roman" panose="02020603050405020304" pitchFamily="18" charset="0"/>
+              </a:rPr>
+              <a:t>Ireland at increased risk of cyber attacks - report</a:t>
+            </a:r>
+            <a:r>
+              <a:rPr lang="en-IE" sz="900" dirty="0">
+                <a:latin typeface="Times New Roman" panose="02020603050405020304" pitchFamily="18" charset="0"/>
+                <a:cs typeface="Times New Roman" panose="02020603050405020304" pitchFamily="18" charset="0"/>
+              </a:rPr>
+              <a:t>. Available at: RTÉ News (Accessed: 7 March 2026).</a:t>
+            </a:r>
+          </a:p>
+          <a:p>
+            <a:pPr marL="0" indent="0" algn="just" defTabSz="895350">
+              <a:buNone/>
+            </a:pPr>
+            <a:r>
+              <a:rPr lang="en-IE" sz="900" dirty="0">
+                <a:latin typeface="Times New Roman" panose="02020603050405020304" pitchFamily="18" charset="0"/>
+                <a:cs typeface="Times New Roman" panose="02020603050405020304" pitchFamily="18" charset="0"/>
+              </a:rPr>
+              <a:t>Schröer, C., Kruse, F. and Gómez, J.M. (2020) </a:t>
+            </a:r>
+            <a:r>
+              <a:rPr lang="en-IE" sz="900" i="1" dirty="0">
+                <a:latin typeface="Times New Roman" panose="02020603050405020304" pitchFamily="18" charset="0"/>
+                <a:cs typeface="Times New Roman" panose="02020603050405020304" pitchFamily="18" charset="0"/>
+              </a:rPr>
+              <a:t>A Systematic Literature Review on Applying CRISP-DM Process Model</a:t>
+            </a:r>
+            <a:r>
+              <a:rPr lang="en-IE" sz="900" dirty="0">
+                <a:latin typeface="Times New Roman" panose="02020603050405020304" pitchFamily="18" charset="0"/>
+                <a:cs typeface="Times New Roman" panose="02020603050405020304" pitchFamily="18" charset="0"/>
+              </a:rPr>
+              <a:t>. Available at: ScienceDirect (Accessed: 9 May 2026). Sharafaldin, I., Lashkari, A.H. and Ghorbani, A.A. (2018) </a:t>
+            </a:r>
+            <a:r>
+              <a:rPr lang="en-IE" sz="900" i="1" dirty="0">
+                <a:latin typeface="Times New Roman" panose="02020603050405020304" pitchFamily="18" charset="0"/>
+                <a:cs typeface="Times New Roman" panose="02020603050405020304" pitchFamily="18" charset="0"/>
+              </a:rPr>
+              <a:t>Intrusion detection evaluation dataset (CIC-IDS2017)</a:t>
+            </a:r>
+            <a:r>
+              <a:rPr lang="en-IE" sz="900" dirty="0">
+                <a:latin typeface="Times New Roman" panose="02020603050405020304" pitchFamily="18" charset="0"/>
+                <a:cs typeface="Times New Roman" panose="02020603050405020304" pitchFamily="18" charset="0"/>
+              </a:rPr>
+              <a:t>. Available at: UNB CIC Dataset.</a:t>
+            </a:r>
+          </a:p>
+          <a:p>
+            <a:pPr marL="0" indent="0" algn="just" defTabSz="895350">
+              <a:buNone/>
+            </a:pPr>
+            <a:r>
+              <a:rPr lang="en-IE" sz="900" dirty="0">
+                <a:latin typeface="Times New Roman" panose="02020603050405020304" pitchFamily="18" charset="0"/>
+                <a:cs typeface="Times New Roman" panose="02020603050405020304" pitchFamily="18" charset="0"/>
+              </a:rPr>
+              <a:t>Streamlit (2024) </a:t>
+            </a:r>
+            <a:r>
+              <a:rPr lang="en-IE" sz="900" i="1" dirty="0">
+                <a:latin typeface="Times New Roman" panose="02020603050405020304" pitchFamily="18" charset="0"/>
+                <a:cs typeface="Times New Roman" panose="02020603050405020304" pitchFamily="18" charset="0"/>
+              </a:rPr>
+              <a:t>Streamlit Docs</a:t>
+            </a:r>
+            <a:r>
+              <a:rPr lang="en-IE" sz="900" dirty="0">
+                <a:latin typeface="Times New Roman" panose="02020603050405020304" pitchFamily="18" charset="0"/>
+                <a:cs typeface="Times New Roman" panose="02020603050405020304" pitchFamily="18" charset="0"/>
+              </a:rPr>
+              <a:t>. Available at: Streamlit Documentation. </a:t>
+            </a:r>
+          </a:p>
+          <a:p>
+            <a:pPr marL="0" indent="0" algn="just" defTabSz="895350">
+              <a:buNone/>
+            </a:pPr>
+            <a:r>
+              <a:rPr lang="en-IE" sz="900" dirty="0">
+                <a:latin typeface="Times New Roman" panose="02020603050405020304" pitchFamily="18" charset="0"/>
+                <a:cs typeface="Times New Roman" panose="02020603050405020304" pitchFamily="18" charset="0"/>
+              </a:rPr>
+              <a:t>Zamani, S.Z. (2022) ‘Small and Medium Enterprises (SMEs) facing an evolving technological era: a systematic literature review on the adoption of technologies in SMEs’, </a:t>
+            </a:r>
+            <a:r>
+              <a:rPr lang="en-IE" sz="900" i="1" dirty="0">
+                <a:latin typeface="Times New Roman" panose="02020603050405020304" pitchFamily="18" charset="0"/>
+                <a:cs typeface="Times New Roman" panose="02020603050405020304" pitchFamily="18" charset="0"/>
+              </a:rPr>
+              <a:t>European Journal of Innovation Management</a:t>
+            </a:r>
+            <a:r>
+              <a:rPr lang="en-IE" sz="900" dirty="0">
+                <a:latin typeface="Times New Roman" panose="02020603050405020304" pitchFamily="18" charset="0"/>
+                <a:cs typeface="Times New Roman" panose="02020603050405020304" pitchFamily="18" charset="0"/>
+              </a:rPr>
+              <a:t>, 25(6). doi: DOI.</a:t>
             </a:r>
           </a:p>
           <a:p>
@@ -16488,21 +15455,63 @@
               <a:buNone/>
             </a:pPr>
             <a:endParaRPr lang="en-IE" sz="900" dirty="0">
-              <a:latin typeface="Arial" panose="020B0604020202020204" pitchFamily="34" charset="0"/>
-              <a:cs typeface="Arial" panose="020B0604020202020204" pitchFamily="34" charset="0"/>
+              <a:latin typeface="Times New Roman" panose="02020603050405020304" pitchFamily="18" charset="0"/>
+              <a:cs typeface="Times New Roman" panose="02020603050405020304" pitchFamily="18" charset="0"/>
             </a:endParaRPr>
           </a:p>
           <a:p>
             <a:pPr marL="0" indent="0" algn="just" defTabSz="895350">
               <a:buNone/>
             </a:pPr>
-            <a:r>
-              <a:rPr lang="en-IE" sz="900" dirty="0">
-                <a:latin typeface="Arial" panose="020B0604020202020204" pitchFamily="34" charset="0"/>
-                <a:cs typeface="Arial" panose="020B0604020202020204" pitchFamily="34" charset="0"/>
-              </a:rPr>
-              <a:t>Miles, M.B., &amp; Huberman, A.M. (1994). Qualitative data analysis: A sourcebook of new methods.  Thousand Oaks, CA: Sage.</a:t>
-            </a:r>
+            <a:endParaRPr lang="en-IE" sz="900" dirty="0">
+              <a:latin typeface="Times New Roman" panose="02020603050405020304" pitchFamily="18" charset="0"/>
+              <a:cs typeface="Times New Roman" panose="02020603050405020304" pitchFamily="18" charset="0"/>
+            </a:endParaRPr>
+          </a:p>
+          <a:p>
+            <a:pPr marL="0" indent="0" algn="just" defTabSz="895350">
+              <a:buNone/>
+            </a:pPr>
+            <a:endParaRPr lang="en-IE" sz="900" dirty="0">
+              <a:latin typeface="Times New Roman" panose="02020603050405020304" pitchFamily="18" charset="0"/>
+              <a:cs typeface="Times New Roman" panose="02020603050405020304" pitchFamily="18" charset="0"/>
+            </a:endParaRPr>
+          </a:p>
+          <a:p>
+            <a:pPr marL="0" indent="0" algn="just" defTabSz="895350">
+              <a:buNone/>
+            </a:pPr>
+            <a:endParaRPr lang="en-IE" sz="900" dirty="0">
+              <a:latin typeface="Times New Roman" panose="02020603050405020304" pitchFamily="18" charset="0"/>
+              <a:cs typeface="Times New Roman" panose="02020603050405020304" pitchFamily="18" charset="0"/>
+            </a:endParaRPr>
+          </a:p>
+          <a:p>
+            <a:pPr marL="0" indent="0" algn="just" defTabSz="895350">
+              <a:buNone/>
+            </a:pPr>
+            <a:endParaRPr lang="en-IE" sz="900" dirty="0">
+              <a:latin typeface="Times New Roman" panose="02020603050405020304" pitchFamily="18" charset="0"/>
+              <a:cs typeface="Times New Roman" panose="02020603050405020304" pitchFamily="18" charset="0"/>
+            </a:endParaRPr>
+          </a:p>
+          <a:p>
+            <a:pPr marL="0" indent="0" algn="just" defTabSz="895350">
+              <a:buNone/>
+            </a:pPr>
+            <a:endParaRPr lang="en-IE" sz="900" dirty="0">
+              <a:latin typeface="Times New Roman" panose="02020603050405020304" pitchFamily="18" charset="0"/>
+              <a:cs typeface="Times New Roman" panose="02020603050405020304" pitchFamily="18" charset="0"/>
+            </a:endParaRPr>
+          </a:p>
+          <a:p>
+            <a:pPr marL="0" indent="0" algn="just" defTabSz="895350">
+              <a:buNone/>
+            </a:pPr>
+            <a:endParaRPr lang="en-IE" sz="900" dirty="0">
+              <a:latin typeface="Times New Roman" panose="02020603050405020304" pitchFamily="18" charset="0"/>
+              <a:cs typeface="Times New Roman" panose="02020603050405020304" pitchFamily="18" charset="0"/>
+            </a:endParaRPr>
           </a:p>
         </p:txBody>
       </p:sp>
@@ -16521,7 +15530,7 @@
           <p:nvPr/>
         </p:nvPicPr>
         <p:blipFill>
-          <a:blip r:embed="rId5">
+          <a:blip r:embed="rId3">
             <a:extLst>
               <a:ext uri="{28A0092B-C50C-407E-A947-70E740481C1C}">
                 <a14:useLocalDpi xmlns:a14="http://schemas.microsoft.com/office/drawing/2010/main" val="0"/>
@@ -16534,7 +15543,7 @@
         </p:blipFill>
         <p:spPr>
           <a:xfrm>
-            <a:off x="2233763" y="20921667"/>
+            <a:off x="2128989" y="21120313"/>
             <a:ext cx="6339073" cy="6339073"/>
           </a:xfrm>
           <a:prstGeom prst="rect">
@@ -16897,23 +15906,7 @@
                   <a:schemeClr val="tx1"/>
                 </a:solidFill>
               </a:rPr>
-              <a:t>The Data Understanding phase focused on analyzing the CICIDS2017 dataset before preprocessing and modelling. The dataset was developed and publicly released by the Canadian Institute for Cybersecurity (CIC) at the University of New Brunswick, Canada, and contains benign and the most up-to-date common attacks, which resembles the true real-world data (PCAPs). It also includes the results of network traffics using </a:t>
-            </a:r>
-            <a:r>
-              <a:rPr lang="en-US" dirty="0" err="1">
-                <a:solidFill>
-                  <a:schemeClr val="tx1"/>
-                </a:solidFill>
-              </a:rPr>
-              <a:t>CICFlowMeter</a:t>
-            </a:r>
-            <a:r>
-              <a:rPr lang="en-US" dirty="0">
-                <a:solidFill>
-                  <a:schemeClr val="tx1"/>
-                </a:solidFill>
-              </a:rPr>
-              <a:t> with labeled flows based on the time stamp, source, and destination IPs, source and destination ports, protocols and attack </a:t>
+              <a:t>The Data Understanding phase focused on analyzing the CICIDS2017 dataset before preprocessing and modelling. The dataset was developed and publicly released by the Canadian Institute for Cybersecurity (CIC) at the University of New Brunswick, Canada, and contains benign and the most up-to-date common attacks, which resembles the true real-world data (PCAPs). It also includes the results of network traffics using CICFlowMeter with labeled flows based on the time stamp, source, and destination IPs, source and destination ports, protocols and attack </a:t>
             </a:r>
             <a:r>
               <a:rPr lang="en-IE" dirty="0">
@@ -16921,23 +15914,7 @@
                   <a:schemeClr val="tx1"/>
                 </a:solidFill>
               </a:rPr>
-              <a:t>(</a:t>
-            </a:r>
-            <a:r>
-              <a:rPr lang="en-IE" dirty="0" err="1">
-                <a:solidFill>
-                  <a:schemeClr val="tx1"/>
-                </a:solidFill>
-              </a:rPr>
-              <a:t>Sharafaldin</a:t>
-            </a:r>
-            <a:r>
-              <a:rPr lang="en-IE" dirty="0">
-                <a:solidFill>
-                  <a:schemeClr val="tx1"/>
-                </a:solidFill>
-              </a:rPr>
-              <a:t> et al., 2018).</a:t>
+              <a:t>(Sharafaldin et al., 2018).</a:t>
             </a:r>
             <a:endParaRPr lang="en-US" dirty="0">
               <a:solidFill>
@@ -16973,7 +15950,7 @@
           <p:nvPr/>
         </p:nvPicPr>
         <p:blipFill>
-          <a:blip r:embed="rId6">
+          <a:blip r:embed="rId4" cstate="print">
             <a:extLst>
               <a:ext uri="{28A0092B-C50C-407E-A947-70E740481C1C}">
                 <a14:useLocalDpi xmlns:a14="http://schemas.microsoft.com/office/drawing/2010/main" val="0"/>
@@ -17729,7 +16706,7 @@
           <p:nvPr/>
         </p:nvPicPr>
         <p:blipFill>
-          <a:blip r:embed="rId7">
+          <a:blip r:embed="rId5">
             <a:extLst>
               <a:ext uri="{28A0092B-C50C-407E-A947-70E740481C1C}">
                 <a14:useLocalDpi xmlns:a14="http://schemas.microsoft.com/office/drawing/2010/main" val="0"/>
@@ -17743,38 +16720,13 @@
         <p:spPr>
           <a:xfrm>
             <a:off x="11491690" y="23322901"/>
-            <a:ext cx="9680489" cy="6710281"/>
+            <a:ext cx="9897972" cy="7385699"/>
           </a:xfrm>
           <a:prstGeom prst="rect">
             <a:avLst/>
           </a:prstGeom>
         </p:spPr>
       </p:pic>
-      <p:sp>
-        <p:nvSpPr>
-          <p:cNvPr id="4113" name="Text Placeholder 4112">
-            <a:extLst>
-              <a:ext uri="{FF2B5EF4-FFF2-40B4-BE49-F238E27FC236}">
-                <a16:creationId xmlns:a16="http://schemas.microsoft.com/office/drawing/2014/main" id="{C3E8964B-EB47-3109-E00C-B3251A6A5F96}"/>
-              </a:ext>
-            </a:extLst>
-          </p:cNvPr>
-          <p:cNvSpPr>
-            <a:spLocks noGrp="1"/>
-          </p:cNvSpPr>
-          <p:nvPr>
-            <p:ph type="body" sz="quarter" idx="28"/>
-          </p:nvPr>
-        </p:nvSpPr>
-        <p:spPr/>
-        <p:txBody>
-          <a:bodyPr/>
-          <a:lstStyle/>
-          <a:p>
-            <a:endParaRPr lang="en-IE"/>
-          </a:p>
-        </p:txBody>
-      </p:sp>
       <p:sp>
         <p:nvSpPr>
           <p:cNvPr id="4116" name="Text Placeholder 5">
@@ -17791,7 +16743,7 @@
         </p:nvSpPr>
         <p:spPr>
           <a:xfrm>
-            <a:off x="22653047" y="18707463"/>
+            <a:off x="22351409" y="13862023"/>
             <a:ext cx="10048875" cy="754045"/>
           </a:xfrm>
           <a:prstGeom prst="rect">
@@ -17972,7 +16924,7 @@
         </p:nvSpPr>
         <p:spPr>
           <a:xfrm>
-            <a:off x="23207225" y="24690506"/>
+            <a:off x="33358099" y="5807125"/>
             <a:ext cx="10047018" cy="677100"/>
           </a:xfrm>
           <a:prstGeom prst="rect">
@@ -18152,7 +17104,7 @@
           <p:nvPr/>
         </p:nvPicPr>
         <p:blipFill>
-          <a:blip r:embed="rId8">
+          <a:blip r:embed="rId6">
             <a:extLst>
               <a:ext uri="{28A0092B-C50C-407E-A947-70E740481C1C}">
                 <a14:useLocalDpi xmlns:a14="http://schemas.microsoft.com/office/drawing/2010/main" val="0"/>
@@ -18173,6 +17125,1178 @@
           </a:prstGeom>
         </p:spPr>
       </p:pic>
+      <p:sp>
+        <p:nvSpPr>
+          <p:cNvPr id="5" name="Text Placeholder 4">
+            <a:extLst>
+              <a:ext uri="{FF2B5EF4-FFF2-40B4-BE49-F238E27FC236}">
+                <a16:creationId xmlns:a16="http://schemas.microsoft.com/office/drawing/2014/main" id="{DC026B65-4586-C30B-A59A-7943EB102EF1}"/>
+              </a:ext>
+            </a:extLst>
+          </p:cNvPr>
+          <p:cNvSpPr txBox="1">
+            <a:spLocks/>
+          </p:cNvSpPr>
+          <p:nvPr/>
+        </p:nvSpPr>
+        <p:spPr>
+          <a:xfrm>
+            <a:off x="22451604" y="6383075"/>
+            <a:ext cx="10048874" cy="7478948"/>
+          </a:xfrm>
+          <a:prstGeom prst="rect">
+            <a:avLst/>
+          </a:prstGeom>
+        </p:spPr>
+        <p:txBody>
+          <a:bodyPr wrap="square" lIns="228589" tIns="228589" rIns="228589" bIns="228589">
+            <a:spAutoFit/>
+          </a:bodyPr>
+          <a:lstStyle>
+            <a:lvl1pPr marL="0" indent="0" algn="l" defTabSz="4388900" rtl="0" eaLnBrk="1" latinLnBrk="0" hangingPunct="1">
+              <a:spcBef>
+                <a:spcPct val="20000"/>
+              </a:spcBef>
+              <a:buFont typeface="Arial" pitchFamily="34" charset="0"/>
+              <a:buNone/>
+              <a:defRPr sz="2500" kern="1200">
+                <a:solidFill>
+                  <a:schemeClr val="accent5">
+                    <a:lumMod val="50000"/>
+                  </a:schemeClr>
+                </a:solidFill>
+                <a:latin typeface="Times New Roman" pitchFamily="18" charset="0"/>
+                <a:ea typeface="+mn-ea"/>
+                <a:cs typeface="Times New Roman" pitchFamily="18" charset="0"/>
+              </a:defRPr>
+            </a:lvl1pPr>
+            <a:lvl2pPr marL="1485825" indent="-571471" algn="l" defTabSz="4388900" rtl="0" eaLnBrk="1" latinLnBrk="0" hangingPunct="1">
+              <a:spcBef>
+                <a:spcPct val="20000"/>
+              </a:spcBef>
+              <a:buFont typeface="Arial" pitchFamily="34" charset="0"/>
+              <a:buChar char="–"/>
+              <a:defRPr sz="2500" kern="1200">
+                <a:solidFill>
+                  <a:schemeClr val="tx1"/>
+                </a:solidFill>
+                <a:latin typeface="Trebuchet MS" pitchFamily="34" charset="0"/>
+                <a:ea typeface="+mn-ea"/>
+                <a:cs typeface="+mn-cs"/>
+              </a:defRPr>
+            </a:lvl2pPr>
+            <a:lvl3pPr marL="2057297" indent="-571471" algn="l" defTabSz="4388900" rtl="0" eaLnBrk="1" latinLnBrk="0" hangingPunct="1">
+              <a:spcBef>
+                <a:spcPct val="20000"/>
+              </a:spcBef>
+              <a:buFont typeface="Arial" pitchFamily="34" charset="0"/>
+              <a:buChar char="•"/>
+              <a:defRPr sz="2500" kern="1200">
+                <a:solidFill>
+                  <a:schemeClr val="tx1"/>
+                </a:solidFill>
+                <a:latin typeface="Trebuchet MS" pitchFamily="34" charset="0"/>
+                <a:ea typeface="+mn-ea"/>
+                <a:cs typeface="+mn-cs"/>
+              </a:defRPr>
+            </a:lvl3pPr>
+            <a:lvl4pPr marL="2685916" indent="-628619" algn="l" defTabSz="4388900" rtl="0" eaLnBrk="1" latinLnBrk="0" hangingPunct="1">
+              <a:spcBef>
+                <a:spcPct val="20000"/>
+              </a:spcBef>
+              <a:buFont typeface="Arial" pitchFamily="34" charset="0"/>
+              <a:buChar char="–"/>
+              <a:defRPr sz="2500" kern="1200">
+                <a:solidFill>
+                  <a:schemeClr val="tx1"/>
+                </a:solidFill>
+                <a:latin typeface="Trebuchet MS" pitchFamily="34" charset="0"/>
+                <a:ea typeface="+mn-ea"/>
+                <a:cs typeface="+mn-cs"/>
+              </a:defRPr>
+            </a:lvl4pPr>
+            <a:lvl5pPr marL="3143093" indent="-457177" algn="l" defTabSz="4388900" rtl="0" eaLnBrk="1" latinLnBrk="0" hangingPunct="1">
+              <a:spcBef>
+                <a:spcPct val="20000"/>
+              </a:spcBef>
+              <a:buFont typeface="Arial" pitchFamily="34" charset="0"/>
+              <a:buChar char="»"/>
+              <a:defRPr sz="2500" kern="1200">
+                <a:solidFill>
+                  <a:schemeClr val="tx1"/>
+                </a:solidFill>
+                <a:latin typeface="Trebuchet MS" pitchFamily="34" charset="0"/>
+                <a:ea typeface="+mn-ea"/>
+                <a:cs typeface="+mn-cs"/>
+              </a:defRPr>
+            </a:lvl5pPr>
+            <a:lvl6pPr marL="12069477" indent="-1097226" algn="l" defTabSz="4388900" rtl="0" eaLnBrk="1" latinLnBrk="0" hangingPunct="1">
+              <a:spcBef>
+                <a:spcPct val="20000"/>
+              </a:spcBef>
+              <a:buFont typeface="Arial" pitchFamily="34" charset="0"/>
+              <a:buChar char="•"/>
+              <a:defRPr sz="9600" kern="1200">
+                <a:solidFill>
+                  <a:schemeClr val="tx1"/>
+                </a:solidFill>
+                <a:latin typeface="+mn-lt"/>
+                <a:ea typeface="+mn-ea"/>
+                <a:cs typeface="+mn-cs"/>
+              </a:defRPr>
+            </a:lvl6pPr>
+            <a:lvl7pPr marL="14263926" indent="-1097226" algn="l" defTabSz="4388900" rtl="0" eaLnBrk="1" latinLnBrk="0" hangingPunct="1">
+              <a:spcBef>
+                <a:spcPct val="20000"/>
+              </a:spcBef>
+              <a:buFont typeface="Arial" pitchFamily="34" charset="0"/>
+              <a:buChar char="•"/>
+              <a:defRPr sz="9600" kern="1200">
+                <a:solidFill>
+                  <a:schemeClr val="tx1"/>
+                </a:solidFill>
+                <a:latin typeface="+mn-lt"/>
+                <a:ea typeface="+mn-ea"/>
+                <a:cs typeface="+mn-cs"/>
+              </a:defRPr>
+            </a:lvl7pPr>
+            <a:lvl8pPr marL="16458377" indent="-1097226" algn="l" defTabSz="4388900" rtl="0" eaLnBrk="1" latinLnBrk="0" hangingPunct="1">
+              <a:spcBef>
+                <a:spcPct val="20000"/>
+              </a:spcBef>
+              <a:buFont typeface="Arial" pitchFamily="34" charset="0"/>
+              <a:buChar char="•"/>
+              <a:defRPr sz="9600" kern="1200">
+                <a:solidFill>
+                  <a:schemeClr val="tx1"/>
+                </a:solidFill>
+                <a:latin typeface="+mn-lt"/>
+                <a:ea typeface="+mn-ea"/>
+                <a:cs typeface="+mn-cs"/>
+              </a:defRPr>
+            </a:lvl8pPr>
+            <a:lvl9pPr marL="18652827" indent="-1097226" algn="l" defTabSz="4388900" rtl="0" eaLnBrk="1" latinLnBrk="0" hangingPunct="1">
+              <a:spcBef>
+                <a:spcPct val="20000"/>
+              </a:spcBef>
+              <a:buFont typeface="Arial" pitchFamily="34" charset="0"/>
+              <a:buChar char="•"/>
+              <a:defRPr sz="9600" kern="1200">
+                <a:solidFill>
+                  <a:schemeClr val="tx1"/>
+                </a:solidFill>
+                <a:latin typeface="+mn-lt"/>
+                <a:ea typeface="+mn-ea"/>
+                <a:cs typeface="+mn-cs"/>
+              </a:defRPr>
+            </a:lvl9pPr>
+          </a:lstStyle>
+          <a:p>
+            <a:pPr algn="just"/>
+            <a:r>
+              <a:rPr lang="en-US" dirty="0">
+                <a:solidFill>
+                  <a:schemeClr val="tx1"/>
+                </a:solidFill>
+              </a:rPr>
+              <a:t>Three machine learning models were tested to classify network traffic: </a:t>
+            </a:r>
+            <a:r>
+              <a:rPr lang="en-US" b="1" dirty="0">
+                <a:solidFill>
+                  <a:schemeClr val="tx1"/>
+                </a:solidFill>
+              </a:rPr>
+              <a:t>Logistic Regression</a:t>
+            </a:r>
+            <a:r>
+              <a:rPr lang="en-US" dirty="0">
+                <a:solidFill>
+                  <a:schemeClr val="tx1"/>
+                </a:solidFill>
+              </a:rPr>
+              <a:t>, </a:t>
+            </a:r>
+            <a:r>
+              <a:rPr lang="en-US" b="1" dirty="0">
+                <a:solidFill>
+                  <a:schemeClr val="tx1"/>
+                </a:solidFill>
+              </a:rPr>
+              <a:t>Random Forest </a:t>
+            </a:r>
+            <a:r>
+              <a:rPr lang="en-US" dirty="0">
+                <a:solidFill>
+                  <a:schemeClr val="tx1"/>
+                </a:solidFill>
+              </a:rPr>
+              <a:t>and </a:t>
+            </a:r>
+            <a:r>
+              <a:rPr lang="en-US" b="1" dirty="0">
+                <a:solidFill>
+                  <a:schemeClr val="tx1"/>
+                </a:solidFill>
+              </a:rPr>
+              <a:t>Decision Tree</a:t>
+            </a:r>
+            <a:r>
+              <a:rPr lang="en-US" dirty="0">
+                <a:solidFill>
+                  <a:schemeClr val="tx1"/>
+                </a:solidFill>
+              </a:rPr>
+              <a:t>.</a:t>
+            </a:r>
+          </a:p>
+          <a:p>
+            <a:pPr algn="just"/>
+            <a:r>
+              <a:rPr lang="en-US" dirty="0">
+                <a:solidFill>
+                  <a:schemeClr val="tx1"/>
+                </a:solidFill>
+              </a:rPr>
+              <a:t>The models were tested using three dataset strategies: </a:t>
+            </a:r>
+          </a:p>
+          <a:p>
+            <a:pPr algn="just"/>
+            <a:r>
+              <a:rPr lang="en-US" b="1" dirty="0">
+                <a:solidFill>
+                  <a:schemeClr val="tx1"/>
+                </a:solidFill>
+              </a:rPr>
+              <a:t>Full Dataset: </a:t>
+            </a:r>
+            <a:r>
+              <a:rPr lang="en-US" dirty="0">
+                <a:solidFill>
+                  <a:schemeClr val="tx1"/>
+                </a:solidFill>
+              </a:rPr>
+              <a:t>Kept all 15 traffic classes.</a:t>
+            </a:r>
+          </a:p>
+          <a:p>
+            <a:pPr algn="just"/>
+            <a:r>
+              <a:rPr lang="en-US" b="1" dirty="0">
+                <a:solidFill>
+                  <a:schemeClr val="tx1"/>
+                </a:solidFill>
+              </a:rPr>
+              <a:t>Capped Dataset: </a:t>
+            </a:r>
+            <a:r>
+              <a:rPr lang="en-US" dirty="0">
+                <a:solidFill>
+                  <a:schemeClr val="tx1"/>
+                </a:solidFill>
+              </a:rPr>
+              <a:t>Limited large classes to 10,000 records.</a:t>
+            </a:r>
+          </a:p>
+          <a:p>
+            <a:pPr algn="just"/>
+            <a:r>
+              <a:rPr lang="en-US" b="1" dirty="0">
+                <a:solidFill>
+                  <a:schemeClr val="tx1"/>
+                </a:solidFill>
+              </a:rPr>
+              <a:t>Controlled Dataset: </a:t>
+            </a:r>
+            <a:r>
+              <a:rPr lang="en-US" dirty="0">
+                <a:solidFill>
+                  <a:schemeClr val="tx1"/>
+                </a:solidFill>
+              </a:rPr>
+              <a:t>Removed classes with fewer than 1,000 records.</a:t>
+            </a:r>
+          </a:p>
+          <a:p>
+            <a:pPr algn="just"/>
+            <a:r>
+              <a:rPr lang="en-US" dirty="0">
+                <a:solidFill>
+                  <a:schemeClr val="tx1"/>
+                </a:solidFill>
+              </a:rPr>
+              <a:t>Baseline and balanced versions were tested using </a:t>
+            </a:r>
+            <a:r>
+              <a:rPr lang="en-US" sz="2400" i="1" dirty="0">
+                <a:solidFill>
+                  <a:schemeClr val="tx1"/>
+                </a:solidFill>
+              </a:rPr>
+              <a:t>class_weight=“balanced”</a:t>
+            </a:r>
+            <a:r>
+              <a:rPr lang="en-US" sz="2400" dirty="0">
+                <a:solidFill>
+                  <a:schemeClr val="tx1"/>
+                </a:solidFill>
+              </a:rPr>
+              <a:t> </a:t>
+            </a:r>
+            <a:r>
+              <a:rPr lang="en-US" dirty="0">
+                <a:solidFill>
+                  <a:schemeClr val="tx1"/>
+                </a:solidFill>
+              </a:rPr>
+              <a:t>to improve minority-class detection.</a:t>
+            </a:r>
+          </a:p>
+          <a:p>
+            <a:pPr algn="just"/>
+            <a:r>
+              <a:rPr lang="en-US" dirty="0">
+                <a:solidFill>
+                  <a:schemeClr val="tx1"/>
+                </a:solidFill>
+              </a:rPr>
+              <a:t>Decision Tree and Random Forest were trained on the raw datasets, while Logistic Regression used scaled data because it is sensitive to feature magnitude (Nugroho et al., 2018).</a:t>
+            </a:r>
+          </a:p>
+          <a:p>
+            <a:pPr algn="just"/>
+            <a:r>
+              <a:rPr lang="en-US" dirty="0">
+                <a:solidFill>
+                  <a:schemeClr val="tx1"/>
+                </a:solidFill>
+              </a:rPr>
+              <a:t>After the first results, two tuned Decision Tree versions were also tested. The final tuned version used:</a:t>
+            </a:r>
+          </a:p>
+          <a:p>
+            <a:pPr algn="ctr"/>
+            <a:r>
+              <a:rPr lang="en-US" sz="2000" i="1" dirty="0">
+                <a:solidFill>
+                  <a:schemeClr val="tx1"/>
+                </a:solidFill>
+              </a:rPr>
+              <a:t>criterion = “log_loss”</a:t>
+            </a:r>
+          </a:p>
+          <a:p>
+            <a:pPr algn="ctr"/>
+            <a:r>
+              <a:rPr lang="en-US" sz="2000" i="1" dirty="0">
+                <a:solidFill>
+                  <a:schemeClr val="tx1"/>
+                </a:solidFill>
+              </a:rPr>
+              <a:t>class_weight = “balanced”</a:t>
+            </a:r>
+          </a:p>
+          <a:p>
+            <a:pPr algn="ctr"/>
+            <a:r>
+              <a:rPr lang="en-US" sz="2000" i="1" dirty="0">
+                <a:solidFill>
+                  <a:schemeClr val="tx1"/>
+                </a:solidFill>
+              </a:rPr>
+              <a:t>min_samples_split = 3</a:t>
+            </a:r>
+          </a:p>
+          <a:p>
+            <a:pPr algn="ctr"/>
+            <a:r>
+              <a:rPr lang="en-US" sz="2000" i="1" dirty="0">
+                <a:solidFill>
+                  <a:schemeClr val="tx1"/>
+                </a:solidFill>
+              </a:rPr>
+              <a:t>random_state = 42</a:t>
+            </a:r>
+          </a:p>
+        </p:txBody>
+      </p:sp>
+      <p:sp>
+        <p:nvSpPr>
+          <p:cNvPr id="8" name="Text Placeholder 4">
+            <a:extLst>
+              <a:ext uri="{FF2B5EF4-FFF2-40B4-BE49-F238E27FC236}">
+                <a16:creationId xmlns:a16="http://schemas.microsoft.com/office/drawing/2014/main" id="{9983B177-5CEB-A5A3-9EBD-A40E726C2D0D}"/>
+              </a:ext>
+            </a:extLst>
+          </p:cNvPr>
+          <p:cNvSpPr txBox="1">
+            <a:spLocks/>
+          </p:cNvSpPr>
+          <p:nvPr/>
+        </p:nvSpPr>
+        <p:spPr>
+          <a:xfrm>
+            <a:off x="22421124" y="14468658"/>
+            <a:ext cx="10048874" cy="7463559"/>
+          </a:xfrm>
+          <a:prstGeom prst="rect">
+            <a:avLst/>
+          </a:prstGeom>
+        </p:spPr>
+        <p:txBody>
+          <a:bodyPr wrap="square" lIns="228589" tIns="228589" rIns="228589" bIns="228589">
+            <a:spAutoFit/>
+          </a:bodyPr>
+          <a:lstStyle>
+            <a:lvl1pPr marL="0" indent="0" algn="l" defTabSz="4388900" rtl="0" eaLnBrk="1" latinLnBrk="0" hangingPunct="1">
+              <a:spcBef>
+                <a:spcPct val="20000"/>
+              </a:spcBef>
+              <a:buFont typeface="Arial" pitchFamily="34" charset="0"/>
+              <a:buNone/>
+              <a:defRPr sz="2500" kern="1200">
+                <a:solidFill>
+                  <a:schemeClr val="accent5">
+                    <a:lumMod val="50000"/>
+                  </a:schemeClr>
+                </a:solidFill>
+                <a:latin typeface="Times New Roman" pitchFamily="18" charset="0"/>
+                <a:ea typeface="+mn-ea"/>
+                <a:cs typeface="Times New Roman" pitchFamily="18" charset="0"/>
+              </a:defRPr>
+            </a:lvl1pPr>
+            <a:lvl2pPr marL="1485825" indent="-571471" algn="l" defTabSz="4388900" rtl="0" eaLnBrk="1" latinLnBrk="0" hangingPunct="1">
+              <a:spcBef>
+                <a:spcPct val="20000"/>
+              </a:spcBef>
+              <a:buFont typeface="Arial" pitchFamily="34" charset="0"/>
+              <a:buChar char="–"/>
+              <a:defRPr sz="2500" kern="1200">
+                <a:solidFill>
+                  <a:schemeClr val="tx1"/>
+                </a:solidFill>
+                <a:latin typeface="Trebuchet MS" pitchFamily="34" charset="0"/>
+                <a:ea typeface="+mn-ea"/>
+                <a:cs typeface="+mn-cs"/>
+              </a:defRPr>
+            </a:lvl2pPr>
+            <a:lvl3pPr marL="2057297" indent="-571471" algn="l" defTabSz="4388900" rtl="0" eaLnBrk="1" latinLnBrk="0" hangingPunct="1">
+              <a:spcBef>
+                <a:spcPct val="20000"/>
+              </a:spcBef>
+              <a:buFont typeface="Arial" pitchFamily="34" charset="0"/>
+              <a:buChar char="•"/>
+              <a:defRPr sz="2500" kern="1200">
+                <a:solidFill>
+                  <a:schemeClr val="tx1"/>
+                </a:solidFill>
+                <a:latin typeface="Trebuchet MS" pitchFamily="34" charset="0"/>
+                <a:ea typeface="+mn-ea"/>
+                <a:cs typeface="+mn-cs"/>
+              </a:defRPr>
+            </a:lvl3pPr>
+            <a:lvl4pPr marL="2685916" indent="-628619" algn="l" defTabSz="4388900" rtl="0" eaLnBrk="1" latinLnBrk="0" hangingPunct="1">
+              <a:spcBef>
+                <a:spcPct val="20000"/>
+              </a:spcBef>
+              <a:buFont typeface="Arial" pitchFamily="34" charset="0"/>
+              <a:buChar char="–"/>
+              <a:defRPr sz="2500" kern="1200">
+                <a:solidFill>
+                  <a:schemeClr val="tx1"/>
+                </a:solidFill>
+                <a:latin typeface="Trebuchet MS" pitchFamily="34" charset="0"/>
+                <a:ea typeface="+mn-ea"/>
+                <a:cs typeface="+mn-cs"/>
+              </a:defRPr>
+            </a:lvl4pPr>
+            <a:lvl5pPr marL="3143093" indent="-457177" algn="l" defTabSz="4388900" rtl="0" eaLnBrk="1" latinLnBrk="0" hangingPunct="1">
+              <a:spcBef>
+                <a:spcPct val="20000"/>
+              </a:spcBef>
+              <a:buFont typeface="Arial" pitchFamily="34" charset="0"/>
+              <a:buChar char="»"/>
+              <a:defRPr sz="2500" kern="1200">
+                <a:solidFill>
+                  <a:schemeClr val="tx1"/>
+                </a:solidFill>
+                <a:latin typeface="Trebuchet MS" pitchFamily="34" charset="0"/>
+                <a:ea typeface="+mn-ea"/>
+                <a:cs typeface="+mn-cs"/>
+              </a:defRPr>
+            </a:lvl5pPr>
+            <a:lvl6pPr marL="12069477" indent="-1097226" algn="l" defTabSz="4388900" rtl="0" eaLnBrk="1" latinLnBrk="0" hangingPunct="1">
+              <a:spcBef>
+                <a:spcPct val="20000"/>
+              </a:spcBef>
+              <a:buFont typeface="Arial" pitchFamily="34" charset="0"/>
+              <a:buChar char="•"/>
+              <a:defRPr sz="9600" kern="1200">
+                <a:solidFill>
+                  <a:schemeClr val="tx1"/>
+                </a:solidFill>
+                <a:latin typeface="+mn-lt"/>
+                <a:ea typeface="+mn-ea"/>
+                <a:cs typeface="+mn-cs"/>
+              </a:defRPr>
+            </a:lvl6pPr>
+            <a:lvl7pPr marL="14263926" indent="-1097226" algn="l" defTabSz="4388900" rtl="0" eaLnBrk="1" latinLnBrk="0" hangingPunct="1">
+              <a:spcBef>
+                <a:spcPct val="20000"/>
+              </a:spcBef>
+              <a:buFont typeface="Arial" pitchFamily="34" charset="0"/>
+              <a:buChar char="•"/>
+              <a:defRPr sz="9600" kern="1200">
+                <a:solidFill>
+                  <a:schemeClr val="tx1"/>
+                </a:solidFill>
+                <a:latin typeface="+mn-lt"/>
+                <a:ea typeface="+mn-ea"/>
+                <a:cs typeface="+mn-cs"/>
+              </a:defRPr>
+            </a:lvl7pPr>
+            <a:lvl8pPr marL="16458377" indent="-1097226" algn="l" defTabSz="4388900" rtl="0" eaLnBrk="1" latinLnBrk="0" hangingPunct="1">
+              <a:spcBef>
+                <a:spcPct val="20000"/>
+              </a:spcBef>
+              <a:buFont typeface="Arial" pitchFamily="34" charset="0"/>
+              <a:buChar char="•"/>
+              <a:defRPr sz="9600" kern="1200">
+                <a:solidFill>
+                  <a:schemeClr val="tx1"/>
+                </a:solidFill>
+                <a:latin typeface="+mn-lt"/>
+                <a:ea typeface="+mn-ea"/>
+                <a:cs typeface="+mn-cs"/>
+              </a:defRPr>
+            </a:lvl8pPr>
+            <a:lvl9pPr marL="18652827" indent="-1097226" algn="l" defTabSz="4388900" rtl="0" eaLnBrk="1" latinLnBrk="0" hangingPunct="1">
+              <a:spcBef>
+                <a:spcPct val="20000"/>
+              </a:spcBef>
+              <a:buFont typeface="Arial" pitchFamily="34" charset="0"/>
+              <a:buChar char="•"/>
+              <a:defRPr sz="9600" kern="1200">
+                <a:solidFill>
+                  <a:schemeClr val="tx1"/>
+                </a:solidFill>
+                <a:latin typeface="+mn-lt"/>
+                <a:ea typeface="+mn-ea"/>
+                <a:cs typeface="+mn-cs"/>
+              </a:defRPr>
+            </a:lvl9pPr>
+          </a:lstStyle>
+          <a:p>
+            <a:pPr algn="just"/>
+            <a:r>
+              <a:rPr lang="en-US" dirty="0">
+                <a:solidFill>
+                  <a:schemeClr val="tx1"/>
+                </a:solidFill>
+              </a:rPr>
+              <a:t>Models were evaluated using accuracy, precision, recall, macro F1-score, weighted F1-score, confusion matrix and training time (Müller and Guido, 2017).</a:t>
+            </a:r>
+          </a:p>
+          <a:p>
+            <a:pPr algn="just"/>
+            <a:r>
+              <a:rPr lang="en-US" dirty="0">
+                <a:solidFill>
+                  <a:schemeClr val="tx1"/>
+                </a:solidFill>
+              </a:rPr>
+              <a:t>Accuracy alone was not enough because the dataset was highly imbalanced. Macro F1-score was important because it gives equal weight to each class, including rare attacks.</a:t>
+            </a:r>
+          </a:p>
+          <a:p>
+            <a:pPr algn="just"/>
+            <a:r>
+              <a:rPr lang="en-US" dirty="0">
+                <a:solidFill>
+                  <a:schemeClr val="tx1"/>
+                </a:solidFill>
+              </a:rPr>
+              <a:t>Logistic Regression was the weakest model. It struggled with minority attack classes and had higher training time.</a:t>
+            </a:r>
+          </a:p>
+          <a:p>
+            <a:pPr algn="just"/>
+            <a:r>
+              <a:rPr lang="en-US" dirty="0">
+                <a:solidFill>
+                  <a:schemeClr val="tx1"/>
+                </a:solidFill>
+              </a:rPr>
+              <a:t>Random Forest achieved strong results, but it was heavier and less suitable for the lightweight objective.</a:t>
+            </a:r>
+          </a:p>
+          <a:p>
+            <a:pPr algn="just"/>
+            <a:r>
+              <a:rPr lang="en-US" dirty="0">
+                <a:solidFill>
+                  <a:schemeClr val="tx1"/>
+                </a:solidFill>
+              </a:rPr>
+              <a:t>Decision Tree gave the best balance between classification performance, runtime efficiency, interpretability and attack coverage. </a:t>
+            </a:r>
+          </a:p>
+          <a:p>
+            <a:pPr algn="just"/>
+            <a:r>
+              <a:rPr lang="en-US" dirty="0">
+                <a:solidFill>
+                  <a:schemeClr val="tx1"/>
+                </a:solidFill>
+              </a:rPr>
+              <a:t>The final selected model was </a:t>
+            </a:r>
+            <a:r>
+              <a:rPr lang="en-US" b="1" dirty="0">
+                <a:solidFill>
+                  <a:schemeClr val="tx1"/>
+                </a:solidFill>
+              </a:rPr>
+              <a:t>Decision Tree – Full Dataset Balanced Tuned 2.</a:t>
+            </a:r>
+          </a:p>
+          <a:p>
+            <a:pPr algn="just"/>
+            <a:r>
+              <a:rPr lang="en-US" dirty="0">
+                <a:solidFill>
+                  <a:schemeClr val="tx1"/>
+                </a:solidFill>
+              </a:rPr>
+              <a:t>This model kept all traffic classes and performed strongly on the main classes, while still detecting some rare attacks such as Heartbleed, Infiltration and SQL Injection.</a:t>
+            </a:r>
+          </a:p>
+        </p:txBody>
+      </p:sp>
+      <p:pic>
+        <p:nvPicPr>
+          <p:cNvPr id="14" name="Picture 13">
+            <a:extLst>
+              <a:ext uri="{FF2B5EF4-FFF2-40B4-BE49-F238E27FC236}">
+                <a16:creationId xmlns:a16="http://schemas.microsoft.com/office/drawing/2014/main" id="{0DA51407-45C4-3DA7-FA70-D31ABB284391}"/>
+              </a:ext>
+            </a:extLst>
+          </p:cNvPr>
+          <p:cNvPicPr>
+            <a:picLocks noChangeAspect="1"/>
+          </p:cNvPicPr>
+          <p:nvPr/>
+        </p:nvPicPr>
+        <p:blipFill>
+          <a:blip r:embed="rId7">
+            <a:extLst>
+              <a:ext uri="{28A0092B-C50C-407E-A947-70E740481C1C}">
+                <a14:useLocalDpi xmlns:a14="http://schemas.microsoft.com/office/drawing/2010/main" val="0"/>
+              </a:ext>
+            </a:extLst>
+          </a:blip>
+          <a:stretch>
+            <a:fillRect/>
+          </a:stretch>
+        </p:blipFill>
+        <p:spPr>
+          <a:xfrm>
+            <a:off x="22584329" y="22416988"/>
+            <a:ext cx="9600583" cy="7117465"/>
+          </a:xfrm>
+          <a:prstGeom prst="rect">
+            <a:avLst/>
+          </a:prstGeom>
+        </p:spPr>
+      </p:pic>
+      <p:sp>
+        <p:nvSpPr>
+          <p:cNvPr id="10" name="Text Placeholder 4">
+            <a:extLst>
+              <a:ext uri="{FF2B5EF4-FFF2-40B4-BE49-F238E27FC236}">
+                <a16:creationId xmlns:a16="http://schemas.microsoft.com/office/drawing/2014/main" id="{9C2CD7EE-7990-9502-DD2C-3B95F92DA7C0}"/>
+              </a:ext>
+            </a:extLst>
+          </p:cNvPr>
+          <p:cNvSpPr txBox="1">
+            <a:spLocks/>
+          </p:cNvSpPr>
+          <p:nvPr/>
+        </p:nvSpPr>
+        <p:spPr>
+          <a:xfrm>
+            <a:off x="33382622" y="6439621"/>
+            <a:ext cx="10048874" cy="4924403"/>
+          </a:xfrm>
+          <a:prstGeom prst="rect">
+            <a:avLst/>
+          </a:prstGeom>
+        </p:spPr>
+        <p:txBody>
+          <a:bodyPr wrap="square" lIns="228589" tIns="228589" rIns="228589" bIns="228589">
+            <a:spAutoFit/>
+          </a:bodyPr>
+          <a:lstStyle>
+            <a:lvl1pPr marL="0" indent="0" algn="l" defTabSz="4388900" rtl="0" eaLnBrk="1" latinLnBrk="0" hangingPunct="1">
+              <a:spcBef>
+                <a:spcPct val="20000"/>
+              </a:spcBef>
+              <a:buFont typeface="Arial" pitchFamily="34" charset="0"/>
+              <a:buNone/>
+              <a:defRPr sz="2500" kern="1200">
+                <a:solidFill>
+                  <a:schemeClr val="accent5">
+                    <a:lumMod val="50000"/>
+                  </a:schemeClr>
+                </a:solidFill>
+                <a:latin typeface="Times New Roman" pitchFamily="18" charset="0"/>
+                <a:ea typeface="+mn-ea"/>
+                <a:cs typeface="Times New Roman" pitchFamily="18" charset="0"/>
+              </a:defRPr>
+            </a:lvl1pPr>
+            <a:lvl2pPr marL="1485825" indent="-571471" algn="l" defTabSz="4388900" rtl="0" eaLnBrk="1" latinLnBrk="0" hangingPunct="1">
+              <a:spcBef>
+                <a:spcPct val="20000"/>
+              </a:spcBef>
+              <a:buFont typeface="Arial" pitchFamily="34" charset="0"/>
+              <a:buChar char="–"/>
+              <a:defRPr sz="2500" kern="1200">
+                <a:solidFill>
+                  <a:schemeClr val="tx1"/>
+                </a:solidFill>
+                <a:latin typeface="Trebuchet MS" pitchFamily="34" charset="0"/>
+                <a:ea typeface="+mn-ea"/>
+                <a:cs typeface="+mn-cs"/>
+              </a:defRPr>
+            </a:lvl2pPr>
+            <a:lvl3pPr marL="2057297" indent="-571471" algn="l" defTabSz="4388900" rtl="0" eaLnBrk="1" latinLnBrk="0" hangingPunct="1">
+              <a:spcBef>
+                <a:spcPct val="20000"/>
+              </a:spcBef>
+              <a:buFont typeface="Arial" pitchFamily="34" charset="0"/>
+              <a:buChar char="•"/>
+              <a:defRPr sz="2500" kern="1200">
+                <a:solidFill>
+                  <a:schemeClr val="tx1"/>
+                </a:solidFill>
+                <a:latin typeface="Trebuchet MS" pitchFamily="34" charset="0"/>
+                <a:ea typeface="+mn-ea"/>
+                <a:cs typeface="+mn-cs"/>
+              </a:defRPr>
+            </a:lvl3pPr>
+            <a:lvl4pPr marL="2685916" indent="-628619" algn="l" defTabSz="4388900" rtl="0" eaLnBrk="1" latinLnBrk="0" hangingPunct="1">
+              <a:spcBef>
+                <a:spcPct val="20000"/>
+              </a:spcBef>
+              <a:buFont typeface="Arial" pitchFamily="34" charset="0"/>
+              <a:buChar char="–"/>
+              <a:defRPr sz="2500" kern="1200">
+                <a:solidFill>
+                  <a:schemeClr val="tx1"/>
+                </a:solidFill>
+                <a:latin typeface="Trebuchet MS" pitchFamily="34" charset="0"/>
+                <a:ea typeface="+mn-ea"/>
+                <a:cs typeface="+mn-cs"/>
+              </a:defRPr>
+            </a:lvl4pPr>
+            <a:lvl5pPr marL="3143093" indent="-457177" algn="l" defTabSz="4388900" rtl="0" eaLnBrk="1" latinLnBrk="0" hangingPunct="1">
+              <a:spcBef>
+                <a:spcPct val="20000"/>
+              </a:spcBef>
+              <a:buFont typeface="Arial" pitchFamily="34" charset="0"/>
+              <a:buChar char="»"/>
+              <a:defRPr sz="2500" kern="1200">
+                <a:solidFill>
+                  <a:schemeClr val="tx1"/>
+                </a:solidFill>
+                <a:latin typeface="Trebuchet MS" pitchFamily="34" charset="0"/>
+                <a:ea typeface="+mn-ea"/>
+                <a:cs typeface="+mn-cs"/>
+              </a:defRPr>
+            </a:lvl5pPr>
+            <a:lvl6pPr marL="12069477" indent="-1097226" algn="l" defTabSz="4388900" rtl="0" eaLnBrk="1" latinLnBrk="0" hangingPunct="1">
+              <a:spcBef>
+                <a:spcPct val="20000"/>
+              </a:spcBef>
+              <a:buFont typeface="Arial" pitchFamily="34" charset="0"/>
+              <a:buChar char="•"/>
+              <a:defRPr sz="9600" kern="1200">
+                <a:solidFill>
+                  <a:schemeClr val="tx1"/>
+                </a:solidFill>
+                <a:latin typeface="+mn-lt"/>
+                <a:ea typeface="+mn-ea"/>
+                <a:cs typeface="+mn-cs"/>
+              </a:defRPr>
+            </a:lvl6pPr>
+            <a:lvl7pPr marL="14263926" indent="-1097226" algn="l" defTabSz="4388900" rtl="0" eaLnBrk="1" latinLnBrk="0" hangingPunct="1">
+              <a:spcBef>
+                <a:spcPct val="20000"/>
+              </a:spcBef>
+              <a:buFont typeface="Arial" pitchFamily="34" charset="0"/>
+              <a:buChar char="•"/>
+              <a:defRPr sz="9600" kern="1200">
+                <a:solidFill>
+                  <a:schemeClr val="tx1"/>
+                </a:solidFill>
+                <a:latin typeface="+mn-lt"/>
+                <a:ea typeface="+mn-ea"/>
+                <a:cs typeface="+mn-cs"/>
+              </a:defRPr>
+            </a:lvl7pPr>
+            <a:lvl8pPr marL="16458377" indent="-1097226" algn="l" defTabSz="4388900" rtl="0" eaLnBrk="1" latinLnBrk="0" hangingPunct="1">
+              <a:spcBef>
+                <a:spcPct val="20000"/>
+              </a:spcBef>
+              <a:buFont typeface="Arial" pitchFamily="34" charset="0"/>
+              <a:buChar char="•"/>
+              <a:defRPr sz="9600" kern="1200">
+                <a:solidFill>
+                  <a:schemeClr val="tx1"/>
+                </a:solidFill>
+                <a:latin typeface="+mn-lt"/>
+                <a:ea typeface="+mn-ea"/>
+                <a:cs typeface="+mn-cs"/>
+              </a:defRPr>
+            </a:lvl8pPr>
+            <a:lvl9pPr marL="18652827" indent="-1097226" algn="l" defTabSz="4388900" rtl="0" eaLnBrk="1" latinLnBrk="0" hangingPunct="1">
+              <a:spcBef>
+                <a:spcPct val="20000"/>
+              </a:spcBef>
+              <a:buFont typeface="Arial" pitchFamily="34" charset="0"/>
+              <a:buChar char="•"/>
+              <a:defRPr sz="9600" kern="1200">
+                <a:solidFill>
+                  <a:schemeClr val="tx1"/>
+                </a:solidFill>
+                <a:latin typeface="+mn-lt"/>
+                <a:ea typeface="+mn-ea"/>
+                <a:cs typeface="+mn-cs"/>
+              </a:defRPr>
+            </a:lvl9pPr>
+          </a:lstStyle>
+          <a:p>
+            <a:pPr algn="just"/>
+            <a:r>
+              <a:rPr lang="en-US" dirty="0">
+                <a:solidFill>
+                  <a:schemeClr val="tx1"/>
+                </a:solidFill>
+              </a:rPr>
+              <a:t>A Streamlit dashboard prototype was created to demonstrate how the final model could be reused outside the notebook (Streamlit, 2024).</a:t>
+            </a:r>
+          </a:p>
+          <a:p>
+            <a:pPr algn="just"/>
+            <a:r>
+              <a:rPr lang="en-US" dirty="0">
+                <a:solidFill>
+                  <a:schemeClr val="tx1"/>
+                </a:solidFill>
+              </a:rPr>
+              <a:t>The final Decision Tree model was saved using Joblib together with the selected 39 features, label encoder, and trained model file (McQuaid, 2026d).</a:t>
+            </a:r>
+          </a:p>
+          <a:p>
+            <a:pPr algn="just"/>
+            <a:r>
+              <a:rPr lang="en-US" dirty="0">
+                <a:solidFill>
+                  <a:schemeClr val="tx1"/>
+                </a:solidFill>
+              </a:rPr>
+              <a:t>The dashboard allows the user to upload a CSV file with network flow records, check if the required features are present, run traffic predictions, view benign and suspicious traffic summaries, download the prediction results and view feature importance.</a:t>
+            </a:r>
+          </a:p>
+          <a:p>
+            <a:pPr algn="just"/>
+            <a:r>
+              <a:rPr lang="en-US" dirty="0">
+                <a:solidFill>
+                  <a:schemeClr val="tx1"/>
+                </a:solidFill>
+              </a:rPr>
+              <a:t>This is still a prototype, not a full production IDS. It does not capture live network packets directly yet.</a:t>
+            </a:r>
+          </a:p>
+        </p:txBody>
+      </p:sp>
+      <p:pic>
+        <p:nvPicPr>
+          <p:cNvPr id="13" name="Picture 12">
+            <a:extLst>
+              <a:ext uri="{FF2B5EF4-FFF2-40B4-BE49-F238E27FC236}">
+                <a16:creationId xmlns:a16="http://schemas.microsoft.com/office/drawing/2014/main" id="{53FC90C0-12E5-1275-3202-CA513ACABFE2}"/>
+              </a:ext>
+            </a:extLst>
+          </p:cNvPr>
+          <p:cNvPicPr>
+            <a:picLocks noChangeAspect="1"/>
+          </p:cNvPicPr>
+          <p:nvPr/>
+        </p:nvPicPr>
+        <p:blipFill>
+          <a:blip r:embed="rId8">
+            <a:extLst>
+              <a:ext uri="{28A0092B-C50C-407E-A947-70E740481C1C}">
+                <a14:useLocalDpi xmlns:a14="http://schemas.microsoft.com/office/drawing/2010/main" val="0"/>
+              </a:ext>
+            </a:extLst>
+          </a:blip>
+          <a:stretch>
+            <a:fillRect/>
+          </a:stretch>
+        </p:blipFill>
+        <p:spPr>
+          <a:xfrm>
+            <a:off x="33723344" y="11344774"/>
+            <a:ext cx="9293216" cy="3713043"/>
+          </a:xfrm>
+          <a:prstGeom prst="rect">
+            <a:avLst/>
+          </a:prstGeom>
+        </p:spPr>
+      </p:pic>
+      <p:pic>
+        <p:nvPicPr>
+          <p:cNvPr id="17" name="Picture 16">
+            <a:extLst>
+              <a:ext uri="{FF2B5EF4-FFF2-40B4-BE49-F238E27FC236}">
+                <a16:creationId xmlns:a16="http://schemas.microsoft.com/office/drawing/2014/main" id="{E091D09D-3C67-B5A2-76AE-4CE2FE13DDD9}"/>
+              </a:ext>
+            </a:extLst>
+          </p:cNvPr>
+          <p:cNvPicPr>
+            <a:picLocks noChangeAspect="1"/>
+          </p:cNvPicPr>
+          <p:nvPr/>
+        </p:nvPicPr>
+        <p:blipFill>
+          <a:blip r:embed="rId9">
+            <a:extLst>
+              <a:ext uri="{28A0092B-C50C-407E-A947-70E740481C1C}">
+                <a14:useLocalDpi xmlns:a14="http://schemas.microsoft.com/office/drawing/2010/main" val="0"/>
+              </a:ext>
+            </a:extLst>
+          </a:blip>
+          <a:stretch>
+            <a:fillRect/>
+          </a:stretch>
+        </p:blipFill>
+        <p:spPr>
+          <a:xfrm>
+            <a:off x="33723344" y="15506196"/>
+            <a:ext cx="9293216" cy="3914331"/>
+          </a:xfrm>
+          <a:prstGeom prst="rect">
+            <a:avLst/>
+          </a:prstGeom>
+        </p:spPr>
+      </p:pic>
+      <p:sp>
+        <p:nvSpPr>
+          <p:cNvPr id="19" name="TextBox 18">
+            <a:extLst>
+              <a:ext uri="{FF2B5EF4-FFF2-40B4-BE49-F238E27FC236}">
+                <a16:creationId xmlns:a16="http://schemas.microsoft.com/office/drawing/2014/main" id="{1E19198E-4066-35E1-1945-951D3D7385D1}"/>
+              </a:ext>
+            </a:extLst>
+          </p:cNvPr>
+          <p:cNvSpPr txBox="1"/>
+          <p:nvPr/>
+        </p:nvSpPr>
+        <p:spPr>
+          <a:xfrm>
+            <a:off x="36629750" y="15135116"/>
+            <a:ext cx="3503716" cy="307777"/>
+          </a:xfrm>
+          <a:prstGeom prst="rect">
+            <a:avLst/>
+          </a:prstGeom>
+          <a:noFill/>
+        </p:spPr>
+        <p:txBody>
+          <a:bodyPr wrap="none" rtlCol="0">
+            <a:spAutoFit/>
+          </a:bodyPr>
+          <a:lstStyle/>
+          <a:p>
+            <a:r>
+              <a:rPr lang="en-IE" sz="1400" i="1" dirty="0">
+                <a:latin typeface="Times New Roman" panose="02020603050405020304" pitchFamily="18" charset="0"/>
+                <a:cs typeface="Times New Roman" panose="02020603050405020304" pitchFamily="18" charset="0"/>
+              </a:rPr>
+              <a:t>Initial Streamlit IDS dashboard upload screen</a:t>
+            </a:r>
+          </a:p>
+        </p:txBody>
+      </p:sp>
+      <p:sp>
+        <p:nvSpPr>
+          <p:cNvPr id="20" name="TextBox 19">
+            <a:extLst>
+              <a:ext uri="{FF2B5EF4-FFF2-40B4-BE49-F238E27FC236}">
+                <a16:creationId xmlns:a16="http://schemas.microsoft.com/office/drawing/2014/main" id="{D134E12D-9076-D003-5302-67A468C2934B}"/>
+              </a:ext>
+            </a:extLst>
+          </p:cNvPr>
+          <p:cNvSpPr txBox="1"/>
+          <p:nvPr/>
+        </p:nvSpPr>
+        <p:spPr>
+          <a:xfrm>
+            <a:off x="35515919" y="19486494"/>
+            <a:ext cx="5731377" cy="307777"/>
+          </a:xfrm>
+          <a:prstGeom prst="rect">
+            <a:avLst/>
+          </a:prstGeom>
+          <a:noFill/>
+        </p:spPr>
+        <p:txBody>
+          <a:bodyPr wrap="none" rtlCol="0">
+            <a:spAutoFit/>
+          </a:bodyPr>
+          <a:lstStyle/>
+          <a:p>
+            <a:r>
+              <a:rPr lang="en-US" sz="1400" dirty="0">
+                <a:latin typeface="Times New Roman" panose="02020603050405020304" pitchFamily="18" charset="0"/>
+                <a:cs typeface="Times New Roman" panose="02020603050405020304" pitchFamily="18" charset="0"/>
+              </a:rPr>
+              <a:t>Uploaded CSV preview, input preparation summary and prediction overview</a:t>
+            </a:r>
+          </a:p>
+        </p:txBody>
+      </p:sp>
+      <p:pic>
+        <p:nvPicPr>
+          <p:cNvPr id="23" name="Picture 22">
+            <a:extLst>
+              <a:ext uri="{FF2B5EF4-FFF2-40B4-BE49-F238E27FC236}">
+                <a16:creationId xmlns:a16="http://schemas.microsoft.com/office/drawing/2014/main" id="{C26A5C31-26FF-D3B0-E0A0-5FC88843E16A}"/>
+              </a:ext>
+            </a:extLst>
+          </p:cNvPr>
+          <p:cNvPicPr>
+            <a:picLocks noChangeAspect="1"/>
+          </p:cNvPicPr>
+          <p:nvPr/>
+        </p:nvPicPr>
+        <p:blipFill>
+          <a:blip r:embed="rId10">
+            <a:extLst>
+              <a:ext uri="{28A0092B-C50C-407E-A947-70E740481C1C}">
+                <a14:useLocalDpi xmlns:a14="http://schemas.microsoft.com/office/drawing/2010/main" val="0"/>
+              </a:ext>
+            </a:extLst>
+          </a:blip>
+          <a:stretch>
+            <a:fillRect/>
+          </a:stretch>
+        </p:blipFill>
+        <p:spPr>
+          <a:xfrm>
+            <a:off x="33754050" y="19801653"/>
+            <a:ext cx="9355112" cy="4234537"/>
+          </a:xfrm>
+          <a:prstGeom prst="rect">
+            <a:avLst/>
+          </a:prstGeom>
+        </p:spPr>
+      </p:pic>
+      <p:sp>
+        <p:nvSpPr>
+          <p:cNvPr id="24" name="TextBox 23">
+            <a:extLst>
+              <a:ext uri="{FF2B5EF4-FFF2-40B4-BE49-F238E27FC236}">
+                <a16:creationId xmlns:a16="http://schemas.microsoft.com/office/drawing/2014/main" id="{5D528063-B6C9-8D0A-AC8D-778F53D1AA31}"/>
+              </a:ext>
+            </a:extLst>
+          </p:cNvPr>
+          <p:cNvSpPr txBox="1"/>
+          <p:nvPr/>
+        </p:nvSpPr>
+        <p:spPr>
+          <a:xfrm>
+            <a:off x="36187584" y="24065683"/>
+            <a:ext cx="4426148" cy="307777"/>
+          </a:xfrm>
+          <a:prstGeom prst="rect">
+            <a:avLst/>
+          </a:prstGeom>
+          <a:noFill/>
+        </p:spPr>
+        <p:txBody>
+          <a:bodyPr wrap="none" rtlCol="0">
+            <a:spAutoFit/>
+          </a:bodyPr>
+          <a:lstStyle/>
+          <a:p>
+            <a:r>
+              <a:rPr lang="en-US" sz="1400" dirty="0">
+                <a:latin typeface="Times New Roman" panose="02020603050405020304" pitchFamily="18" charset="0"/>
+                <a:cs typeface="Times New Roman" panose="02020603050405020304" pitchFamily="18" charset="0"/>
+              </a:rPr>
+              <a:t>Prediction output table and predicted traffic class summary</a:t>
+            </a:r>
+          </a:p>
+        </p:txBody>
+      </p:sp>
+      <p:sp>
+        <p:nvSpPr>
+          <p:cNvPr id="26" name="TextBox 25">
+            <a:extLst>
+              <a:ext uri="{FF2B5EF4-FFF2-40B4-BE49-F238E27FC236}">
+                <a16:creationId xmlns:a16="http://schemas.microsoft.com/office/drawing/2014/main" id="{8C5AF9B8-6917-393D-C27C-9926F826EFF8}"/>
+              </a:ext>
+            </a:extLst>
+          </p:cNvPr>
+          <p:cNvSpPr txBox="1"/>
+          <p:nvPr/>
+        </p:nvSpPr>
+        <p:spPr>
+          <a:xfrm>
+            <a:off x="33560413" y="24894509"/>
+            <a:ext cx="9680489" cy="5262979"/>
+          </a:xfrm>
+          <a:prstGeom prst="rect">
+            <a:avLst/>
+          </a:prstGeom>
+          <a:noFill/>
+        </p:spPr>
+        <p:txBody>
+          <a:bodyPr wrap="square" rtlCol="0">
+            <a:spAutoFit/>
+          </a:bodyPr>
+          <a:lstStyle/>
+          <a:p>
+            <a:pPr algn="just"/>
+            <a:r>
+              <a:rPr lang="en-IE" sz="2400" dirty="0">
+                <a:latin typeface="Times New Roman" panose="02020603050405020304" pitchFamily="18" charset="0"/>
+                <a:cs typeface="Times New Roman" panose="02020603050405020304" pitchFamily="18" charset="0"/>
+              </a:rPr>
+              <a:t>The project shows that a lightweight machine learning IDS can support the detection of benign and malicious network traffic using CICIDS2017. Decision Tree – Full Dataset Balanced Tuned 2 was selected as the final model because it offered the best balance between performance, runtime, interpretability and attack coverage. The Streamlit prototype showed how the saved model could be reused for traffic prediction and suspicious traffic summaries. </a:t>
+            </a:r>
+          </a:p>
+          <a:p>
+            <a:pPr algn="just"/>
+            <a:r>
+              <a:rPr lang="en-US" sz="2400" dirty="0">
+                <a:latin typeface="Times New Roman" panose="02020603050405020304" pitchFamily="18" charset="0"/>
+                <a:cs typeface="Times New Roman" panose="02020603050405020304" pitchFamily="18" charset="0"/>
+              </a:rPr>
+              <a:t>Future improvements for this project could include integrating live network traffic capture for real-time IDS monitoring, retraining the models using newer cybersecurity datasets to improve attack detection, and expanding the Streamlit dashboard with automated alerts and advanced monitoring features. Future research could also compare lightweight machine learning models with deep learning approaches to analyze performance and computational trade-offs.</a:t>
+            </a:r>
+            <a:endParaRPr lang="en-IE" sz="2400" dirty="0">
+              <a:latin typeface="Times New Roman" panose="02020603050405020304" pitchFamily="18" charset="0"/>
+              <a:cs typeface="Times New Roman" panose="02020603050405020304" pitchFamily="18" charset="0"/>
+            </a:endParaRPr>
+          </a:p>
+        </p:txBody>
+      </p:sp>
     </p:spTree>
     <p:extLst>
       <p:ext uri="{BB962C8B-B14F-4D97-AF65-F5344CB8AC3E}">
